--- a/docs/presentations/v3/aside-setup.pptx
+++ b/docs/presentations/v3/aside-setup.pptx
@@ -1856,7 +1856,7 @@
       </p:grpSpPr>
       <p:pic>
         <p:nvPicPr>
-          <p:cNvPr id="2" name="Image 0" descr="/home/user/BasicRobotLessons/docs/presentations/v3/template/assets/logo/team5010-logo.png">    </p:cNvPr>
+          <p:cNvPr id="2" name="Image 0" descr="/home/user/BasicRobotLessons/docs/presentations/v3/template/assets/logo/team5010-logo-onnavy.png">    </p:cNvPr>
           <p:cNvPicPr>
             <a:picLocks noChangeAspect="1"/>
           </p:cNvPicPr>
@@ -2644,7 +2644,7 @@
             <a:r>
               <a:rPr lang="en-US" sz="2000" spc="100" kern="0" dirty="0">
                 <a:solidFill>
-                  <a:srgbClr val="5B6B84"/>
+                  <a:srgbClr val="7A93B8"/>
                 </a:solidFill>
                 <a:latin typeface="Calibri" pitchFamily="34" charset="0"/>
                 <a:ea typeface="Calibri" pitchFamily="34" charset="-122"/>
@@ -2683,7 +2683,7 @@
             <a:r>
               <a:rPr lang="en-US" sz="2000" dirty="0">
                 <a:solidFill>
-                  <a:srgbClr val="5B6B84"/>
+                  <a:srgbClr val="7A93B8"/>
                 </a:solidFill>
                 <a:latin typeface="Calibri" pitchFamily="34" charset="0"/>
                 <a:ea typeface="Calibri" pitchFamily="34" charset="-122"/>
@@ -2697,7 +2697,7 @@
       </p:sp>
       <p:pic>
         <p:nvPicPr>
-          <p:cNvPr id="18" name="Image 1" descr="/home/user/BasicRobotLessons/docs/presentations/v3/template/assets/logo/team5010-logo.png">    </p:cNvPr>
+          <p:cNvPr id="18" name="Image 1" descr="/home/user/BasicRobotLessons/docs/presentations/v3/template/assets/logo/team5010-logo-onnavy.png">    </p:cNvPr>
           <p:cNvPicPr>
             <a:picLocks noChangeAspect="1"/>
           </p:cNvPicPr>
@@ -3560,7 +3560,7 @@
             <a:r>
               <a:rPr lang="en-US" sz="2000" spc="100" kern="0" dirty="0">
                 <a:solidFill>
-                  <a:srgbClr val="5B6B84"/>
+                  <a:srgbClr val="7A93B8"/>
                 </a:solidFill>
                 <a:latin typeface="Calibri" pitchFamily="34" charset="0"/>
                 <a:ea typeface="Calibri" pitchFamily="34" charset="-122"/>
@@ -3599,7 +3599,7 @@
             <a:r>
               <a:rPr lang="en-US" sz="2000" dirty="0">
                 <a:solidFill>
-                  <a:srgbClr val="5B6B84"/>
+                  <a:srgbClr val="7A93B8"/>
                 </a:solidFill>
                 <a:latin typeface="Calibri" pitchFamily="34" charset="0"/>
                 <a:ea typeface="Calibri" pitchFamily="34" charset="-122"/>
@@ -3613,7 +3613,7 @@
       </p:sp>
       <p:pic>
         <p:nvPicPr>
-          <p:cNvPr id="28" name="Image 1" descr="/home/user/BasicRobotLessons/docs/presentations/v3/template/assets/logo/team5010-logo.png">    </p:cNvPr>
+          <p:cNvPr id="28" name="Image 1" descr="/home/user/BasicRobotLessons/docs/presentations/v3/template/assets/logo/team5010-logo-onnavy.png">    </p:cNvPr>
           <p:cNvPicPr>
             <a:picLocks noChangeAspect="1"/>
           </p:cNvPicPr>
@@ -4230,7 +4230,7 @@
       </p:sp>
       <p:pic>
         <p:nvPicPr>
-          <p:cNvPr id="17" name="Image 2" descr="/home/user/BasicRobotLessons/docs/presentations/v3/template/assets/logo/team5010-logo.png">    </p:cNvPr>
+          <p:cNvPr id="17" name="Image 2" descr="/home/user/BasicRobotLessons/docs/presentations/v3/template/assets/logo/team5010-logo-onwhite.png">    </p:cNvPr>
           <p:cNvPicPr>
             <a:picLocks noChangeAspect="1"/>
           </p:cNvPicPr>
@@ -4904,7 +4904,7 @@
       </p:sp>
       <p:pic>
         <p:nvPicPr>
-          <p:cNvPr id="18" name="Image 3" descr="/home/user/BasicRobotLessons/docs/presentations/v3/template/assets/logo/team5010-logo.png">    </p:cNvPr>
+          <p:cNvPr id="18" name="Image 3" descr="/home/user/BasicRobotLessons/docs/presentations/v3/template/assets/logo/team5010-logo-onwhite.png">    </p:cNvPr>
           <p:cNvPicPr>
             <a:picLocks noChangeAspect="1"/>
           </p:cNvPicPr>
@@ -5506,7 +5506,7 @@
       </p:sp>
       <p:pic>
         <p:nvPicPr>
-          <p:cNvPr id="20" name="Image 1" descr="/home/user/BasicRobotLessons/docs/presentations/v3/template/assets/logo/team5010-logo.png">    </p:cNvPr>
+          <p:cNvPr id="20" name="Image 1" descr="/home/user/BasicRobotLessons/docs/presentations/v3/template/assets/logo/team5010-logo-onwhite.png">    </p:cNvPr>
           <p:cNvPicPr>
             <a:picLocks noChangeAspect="1"/>
           </p:cNvPicPr>
@@ -6080,7 +6080,7 @@
       </p:sp>
       <p:pic>
         <p:nvPicPr>
-          <p:cNvPr id="18" name="Image 1" descr="/home/user/BasicRobotLessons/docs/presentations/v3/template/assets/logo/team5010-logo.png">    </p:cNvPr>
+          <p:cNvPr id="18" name="Image 1" descr="/home/user/BasicRobotLessons/docs/presentations/v3/template/assets/logo/team5010-logo-onwhite.png">    </p:cNvPr>
           <p:cNvPicPr>
             <a:picLocks noChangeAspect="1"/>
           </p:cNvPicPr>
@@ -6674,7 +6674,7 @@
       </p:sp>
       <p:pic>
         <p:nvPicPr>
-          <p:cNvPr id="18" name="Image 1" descr="/home/user/BasicRobotLessons/docs/presentations/v3/template/assets/logo/team5010-logo.png">    </p:cNvPr>
+          <p:cNvPr id="18" name="Image 1" descr="/home/user/BasicRobotLessons/docs/presentations/v3/template/assets/logo/team5010-logo-onwhite.png">    </p:cNvPr>
           <p:cNvPicPr>
             <a:picLocks noChangeAspect="1"/>
           </p:cNvPicPr>
@@ -7220,7 +7220,7 @@
       </p:sp>
       <p:pic>
         <p:nvPicPr>
-          <p:cNvPr id="16" name="Image 1" descr="/home/user/BasicRobotLessons/docs/presentations/v3/template/assets/logo/team5010-logo.png">    </p:cNvPr>
+          <p:cNvPr id="16" name="Image 1" descr="/home/user/BasicRobotLessons/docs/presentations/v3/template/assets/logo/team5010-logo-onwhite.png">    </p:cNvPr>
           <p:cNvPicPr>
             <a:picLocks noChangeAspect="1"/>
           </p:cNvPicPr>
@@ -7944,7 +7944,7 @@
       </p:sp>
       <p:pic>
         <p:nvPicPr>
-          <p:cNvPr id="21" name="Image 1" descr="/home/user/BasicRobotLessons/docs/presentations/v3/template/assets/logo/team5010-logo.png">    </p:cNvPr>
+          <p:cNvPr id="21" name="Image 1" descr="/home/user/BasicRobotLessons/docs/presentations/v3/template/assets/logo/team5010-logo-onwhite.png">    </p:cNvPr>
           <p:cNvPicPr>
             <a:picLocks noChangeAspect="1"/>
           </p:cNvPicPr>
@@ -8518,7 +8518,7 @@
       </p:sp>
       <p:pic>
         <p:nvPicPr>
-          <p:cNvPr id="18" name="Image 1" descr="/home/user/BasicRobotLessons/docs/presentations/v3/template/assets/logo/team5010-logo.png">    </p:cNvPr>
+          <p:cNvPr id="18" name="Image 1" descr="/home/user/BasicRobotLessons/docs/presentations/v3/template/assets/logo/team5010-logo-onwhite.png">    </p:cNvPr>
           <p:cNvPicPr>
             <a:picLocks noChangeAspect="1"/>
           </p:cNvPicPr>
@@ -9011,7 +9011,7 @@
       </p:sp>
       <p:pic>
         <p:nvPicPr>
-          <p:cNvPr id="16" name="Image 1" descr="/home/user/BasicRobotLessons/docs/presentations/v3/template/assets/logo/team5010-logo.png">    </p:cNvPr>
+          <p:cNvPr id="16" name="Image 1" descr="/home/user/BasicRobotLessons/docs/presentations/v3/template/assets/logo/team5010-logo-onwhite.png">    </p:cNvPr>
           <p:cNvPicPr>
             <a:picLocks noChangeAspect="1"/>
           </p:cNvPicPr>

--- a/docs/presentations/v3/aside-setup.pptx
+++ b/docs/presentations/v3/aside-setup.pptx
@@ -2478,7 +2478,7 @@
         <p:spPr>
           <a:xfrm>
             <a:off x="7223760" y="1828800"/>
-            <a:ext cx="4023360" cy="822960"/>
+            <a:ext cx="4023360" cy="914400"/>
           </a:xfrm>
           <a:prstGeom prst="rect">
             <a:avLst/>
@@ -2519,8 +2519,8 @@
         </p:nvSpPr>
         <p:spPr>
           <a:xfrm>
-            <a:off x="7223760" y="2697480"/>
-            <a:ext cx="4023360" cy="1600200"/>
+            <a:off x="7223760" y="2834640"/>
+            <a:ext cx="4023360" cy="1508760"/>
           </a:xfrm>
           <a:prstGeom prst="rect">
             <a:avLst/>
@@ -2881,12 +2881,12 @@
         </p:nvSpPr>
         <p:spPr>
           <a:xfrm>
-            <a:off x="640080" y="2240280"/>
-            <a:ext cx="5303520" cy="1828800"/>
+            <a:off x="640080" y="1463040"/>
+            <a:ext cx="5303520" cy="2286000"/>
           </a:xfrm>
           <a:prstGeom prst="roundRect">
             <a:avLst>
-              <a:gd name="adj" fmla="val 6000"/>
+              <a:gd name="adj" fmla="val 4800"/>
             </a:avLst>
           </a:prstGeom>
           <a:solidFill>
@@ -2903,8 +2903,8 @@
         </p:nvSpPr>
         <p:spPr>
           <a:xfrm>
-            <a:off x="960120" y="2514600"/>
-            <a:ext cx="502920" cy="502920"/>
+            <a:off x="960120" y="1691640"/>
+            <a:ext cx="457200" cy="457200"/>
           </a:xfrm>
           <a:prstGeom prst="ellipse">
             <a:avLst/>
@@ -2923,8 +2923,8 @@
         </p:nvSpPr>
         <p:spPr>
           <a:xfrm>
-            <a:off x="960120" y="2514600"/>
-            <a:ext cx="502920" cy="502920"/>
+            <a:off x="960120" y="1691640"/>
+            <a:ext cx="457200" cy="457200"/>
           </a:xfrm>
           <a:prstGeom prst="rect">
             <a:avLst/>
@@ -2962,17 +2962,17 @@
         </p:nvSpPr>
         <p:spPr>
           <a:xfrm>
-            <a:off x="960120" y="3200400"/>
-            <a:ext cx="4663440" cy="731520"/>
-          </a:xfrm>
-          <a:prstGeom prst="rect">
-            <a:avLst/>
-          </a:prstGeom>
-          <a:noFill/>
-          <a:ln/>
-        </p:spPr>
-        <p:txBody>
-          <a:bodyPr wrap="square" lIns="0" tIns="0" rIns="0" bIns="0" rtlCol="0" anchor="t"/>
+            <a:off x="1600200" y="1691640"/>
+            <a:ext cx="4023360" cy="457200"/>
+          </a:xfrm>
+          <a:prstGeom prst="rect">
+            <a:avLst/>
+          </a:prstGeom>
+          <a:noFill/>
+          <a:ln/>
+        </p:spPr>
+        <p:txBody>
+          <a:bodyPr wrap="square" lIns="0" tIns="0" rIns="0" bIns="0" rtlCol="0" anchor="ctr"/>
           <a:lstStyle/>
           <a:p>
             <a:pPr indent="0" marL="0">
@@ -2982,7 +2982,7 @@
               <a:buNone/>
             </a:pPr>
             <a:r>
-              <a:rPr lang="en-US" sz="2100" b="1" dirty="0">
+              <a:rPr lang="en-US" sz="2000" b="1" dirty="0">
                 <a:solidFill>
                   <a:srgbClr val="FFFFFF"/>
                 </a:solidFill>
@@ -2992,7 +2992,7 @@
               </a:rPr>
               <a:t>Prove the round trip</a:t>
             </a:r>
-            <a:endParaRPr lang="en-US" sz="2100" dirty="0"/>
+            <a:endParaRPr lang="en-US" sz="2000" dirty="0"/>
           </a:p>
         </p:txBody>
       </p:sp>
@@ -3004,8 +3004,8 @@
         </p:nvSpPr>
         <p:spPr>
           <a:xfrm>
-            <a:off x="960120" y="3840480"/>
-            <a:ext cx="4663440" cy="137160"/>
+            <a:off x="960120" y="2286000"/>
+            <a:ext cx="4663440" cy="1188720"/>
           </a:xfrm>
           <a:prstGeom prst="rect">
             <a:avLst/>
@@ -3019,12 +3019,12 @@
           <a:p>
             <a:pPr indent="0" marL="0">
               <a:lnSpc>
-                <a:spcPct val="120000"/>
+                <a:spcPct val="125000"/>
               </a:lnSpc>
               <a:buNone/>
             </a:pPr>
             <a:r>
-              <a:rPr lang="en-US" sz="1800" dirty="0">
+              <a:rPr lang="en-US" sz="2000" dirty="0">
                 <a:solidFill>
                   <a:srgbClr val="CADCE8"/>
                 </a:solidFill>
@@ -3034,7 +3034,7 @@
               </a:rPr>
               <a:t>Add a line to README.md, then add → commit → push. Confirm the change shows up on github.com.</a:t>
             </a:r>
-            <a:endParaRPr lang="en-US" sz="1800" dirty="0"/>
+            <a:endParaRPr lang="en-US" sz="2000" dirty="0"/>
           </a:p>
         </p:txBody>
       </p:sp>
@@ -3046,12 +3046,12 @@
         </p:nvSpPr>
         <p:spPr>
           <a:xfrm>
-            <a:off x="6217920" y="2240280"/>
-            <a:ext cx="5303520" cy="1828800"/>
+            <a:off x="6217920" y="1463040"/>
+            <a:ext cx="5303520" cy="2286000"/>
           </a:xfrm>
           <a:prstGeom prst="roundRect">
             <a:avLst>
-              <a:gd name="adj" fmla="val 6000"/>
+              <a:gd name="adj" fmla="val 4800"/>
             </a:avLst>
           </a:prstGeom>
           <a:solidFill>
@@ -3068,8 +3068,8 @@
         </p:nvSpPr>
         <p:spPr>
           <a:xfrm>
-            <a:off x="6537960" y="2514600"/>
-            <a:ext cx="502920" cy="502920"/>
+            <a:off x="6537960" y="1691640"/>
+            <a:ext cx="457200" cy="457200"/>
           </a:xfrm>
           <a:prstGeom prst="ellipse">
             <a:avLst/>
@@ -3088,8 +3088,8 @@
         </p:nvSpPr>
         <p:spPr>
           <a:xfrm>
-            <a:off x="6537960" y="2514600"/>
-            <a:ext cx="502920" cy="502920"/>
+            <a:off x="6537960" y="1691640"/>
+            <a:ext cx="457200" cy="457200"/>
           </a:xfrm>
           <a:prstGeom prst="rect">
             <a:avLst/>
@@ -3127,17 +3127,17 @@
         </p:nvSpPr>
         <p:spPr>
           <a:xfrm>
-            <a:off x="6537960" y="3200400"/>
-            <a:ext cx="4663440" cy="731520"/>
-          </a:xfrm>
-          <a:prstGeom prst="rect">
-            <a:avLst/>
-          </a:prstGeom>
-          <a:noFill/>
-          <a:ln/>
-        </p:spPr>
-        <p:txBody>
-          <a:bodyPr wrap="square" lIns="0" tIns="0" rIns="0" bIns="0" rtlCol="0" anchor="t"/>
+            <a:off x="7178040" y="1691640"/>
+            <a:ext cx="4023360" cy="457200"/>
+          </a:xfrm>
+          <a:prstGeom prst="rect">
+            <a:avLst/>
+          </a:prstGeom>
+          <a:noFill/>
+          <a:ln/>
+        </p:spPr>
+        <p:txBody>
+          <a:bodyPr wrap="square" lIns="0" tIns="0" rIns="0" bIns="0" rtlCol="0" anchor="ctr"/>
           <a:lstStyle/>
           <a:p>
             <a:pPr indent="0" marL="0">
@@ -3147,7 +3147,7 @@
               <a:buNone/>
             </a:pPr>
             <a:r>
-              <a:rPr lang="en-US" sz="2100" b="1" dirty="0">
+              <a:rPr lang="en-US" sz="2000" b="1" dirty="0">
                 <a:solidFill>
                   <a:srgbClr val="FFFFFF"/>
                 </a:solidFill>
@@ -3157,7 +3157,7 @@
               </a:rPr>
               <a:t>Simulate a dead laptop</a:t>
             </a:r>
-            <a:endParaRPr lang="en-US" sz="2100" dirty="0"/>
+            <a:endParaRPr lang="en-US" sz="2000" dirty="0"/>
           </a:p>
         </p:txBody>
       </p:sp>
@@ -3169,8 +3169,8 @@
         </p:nvSpPr>
         <p:spPr>
           <a:xfrm>
-            <a:off x="6537960" y="3840480"/>
-            <a:ext cx="4663440" cy="137160"/>
+            <a:off x="6537960" y="2286000"/>
+            <a:ext cx="4663440" cy="1188720"/>
           </a:xfrm>
           <a:prstGeom prst="rect">
             <a:avLst/>
@@ -3184,12 +3184,12 @@
           <a:p>
             <a:pPr indent="0" marL="0">
               <a:lnSpc>
-                <a:spcPct val="120000"/>
+                <a:spcPct val="125000"/>
               </a:lnSpc>
               <a:buNone/>
             </a:pPr>
             <a:r>
-              <a:rPr lang="en-US" sz="1800" dirty="0">
+              <a:rPr lang="en-US" sz="2000" dirty="0">
                 <a:solidFill>
                   <a:srgbClr val="CADCE8"/>
                 </a:solidFill>
@@ -3197,9 +3197,9 @@
                 <a:ea typeface="Calibri" pitchFamily="34" charset="-122"/>
                 <a:cs typeface="Calibri" pitchFamily="34" charset="-120"/>
               </a:rPr>
-              <a:t>From a different folder, clone your own repo fresh and run ./gradlew build. If it builds, your GitHub copy really is a full backup.</a:t>
-            </a:r>
-            <a:endParaRPr lang="en-US" sz="1800" dirty="0"/>
+              <a:t>Clone your own repo into a fresh folder and build it. If it builds, GitHub really is a full backup.</a:t>
+            </a:r>
+            <a:endParaRPr lang="en-US" sz="2000" dirty="0"/>
           </a:p>
         </p:txBody>
       </p:sp>
@@ -3211,12 +3211,12 @@
         </p:nvSpPr>
         <p:spPr>
           <a:xfrm>
-            <a:off x="640080" y="4343400"/>
-            <a:ext cx="5303520" cy="1828800"/>
+            <a:off x="640080" y="4023360"/>
+            <a:ext cx="5303520" cy="2286000"/>
           </a:xfrm>
           <a:prstGeom prst="roundRect">
             <a:avLst>
-              <a:gd name="adj" fmla="val 6000"/>
+              <a:gd name="adj" fmla="val 4800"/>
             </a:avLst>
           </a:prstGeom>
           <a:solidFill>
@@ -3233,8 +3233,8 @@
         </p:nvSpPr>
         <p:spPr>
           <a:xfrm>
-            <a:off x="960120" y="4617720"/>
-            <a:ext cx="502920" cy="502920"/>
+            <a:off x="960120" y="4251960"/>
+            <a:ext cx="457200" cy="457200"/>
           </a:xfrm>
           <a:prstGeom prst="ellipse">
             <a:avLst/>
@@ -3253,8 +3253,8 @@
         </p:nvSpPr>
         <p:spPr>
           <a:xfrm>
-            <a:off x="960120" y="4617720"/>
-            <a:ext cx="502920" cy="502920"/>
+            <a:off x="960120" y="4251960"/>
+            <a:ext cx="457200" cy="457200"/>
           </a:xfrm>
           <a:prstGeom prst="rect">
             <a:avLst/>
@@ -3292,17 +3292,17 @@
         </p:nvSpPr>
         <p:spPr>
           <a:xfrm>
-            <a:off x="960120" y="5303520"/>
-            <a:ext cx="4663440" cy="731520"/>
-          </a:xfrm>
-          <a:prstGeom prst="rect">
-            <a:avLst/>
-          </a:prstGeom>
-          <a:noFill/>
-          <a:ln/>
-        </p:spPr>
-        <p:txBody>
-          <a:bodyPr wrap="square" lIns="0" tIns="0" rIns="0" bIns="0" rtlCol="0" anchor="t"/>
+            <a:off x="1600200" y="4251960"/>
+            <a:ext cx="4023360" cy="457200"/>
+          </a:xfrm>
+          <a:prstGeom prst="rect">
+            <a:avLst/>
+          </a:prstGeom>
+          <a:noFill/>
+          <a:ln/>
+        </p:spPr>
+        <p:txBody>
+          <a:bodyPr wrap="square" lIns="0" tIns="0" rIns="0" bIns="0" rtlCol="0" anchor="ctr"/>
           <a:lstStyle/>
           <a:p>
             <a:pPr indent="0" marL="0">
@@ -3312,7 +3312,7 @@
               <a:buNone/>
             </a:pPr>
             <a:r>
-              <a:rPr lang="en-US" sz="2100" b="1" dirty="0">
+              <a:rPr lang="en-US" sz="2000" b="1" dirty="0">
                 <a:solidFill>
                   <a:srgbClr val="FFFFFF"/>
                 </a:solidFill>
@@ -3322,7 +3322,7 @@
               </a:rPr>
               <a:t>.gitignore sanity check</a:t>
             </a:r>
-            <a:endParaRPr lang="en-US" sz="2100" dirty="0"/>
+            <a:endParaRPr lang="en-US" sz="2000" dirty="0"/>
           </a:p>
         </p:txBody>
       </p:sp>
@@ -3334,8 +3334,8 @@
         </p:nvSpPr>
         <p:spPr>
           <a:xfrm>
-            <a:off x="960120" y="5943600"/>
-            <a:ext cx="4663440" cy="137160"/>
+            <a:off x="960120" y="4846320"/>
+            <a:ext cx="4663440" cy="1188720"/>
           </a:xfrm>
           <a:prstGeom prst="rect">
             <a:avLst/>
@@ -3349,12 +3349,12 @@
           <a:p>
             <a:pPr indent="0" marL="0">
               <a:lnSpc>
-                <a:spcPct val="120000"/>
+                <a:spcPct val="125000"/>
               </a:lnSpc>
               <a:buNone/>
             </a:pPr>
             <a:r>
-              <a:rPr lang="en-US" sz="1800" dirty="0">
+              <a:rPr lang="en-US" sz="2000" dirty="0">
                 <a:solidFill>
                   <a:srgbClr val="CADCE8"/>
                 </a:solidFill>
@@ -3362,9 +3362,9 @@
                 <a:ea typeface="Calibri" pitchFamily="34" charset="-122"/>
                 <a:cs typeface="Calibri" pitchFamily="34" charset="-120"/>
               </a:rPr>
-              <a:t>Run ./gradlew build, then git status. The build/ and .gradle/ folders it just created should not show up as untracked.</a:t>
-            </a:r>
-            <a:endParaRPr lang="en-US" sz="1800" dirty="0"/>
+              <a:t>Run a build, then git status. build/ and .gradle/ shouldn't show up as untracked.</a:t>
+            </a:r>
+            <a:endParaRPr lang="en-US" sz="2000" dirty="0"/>
           </a:p>
         </p:txBody>
       </p:sp>
@@ -3376,12 +3376,12 @@
         </p:nvSpPr>
         <p:spPr>
           <a:xfrm>
-            <a:off x="6217920" y="4343400"/>
-            <a:ext cx="5303520" cy="1828800"/>
+            <a:off x="6217920" y="4023360"/>
+            <a:ext cx="5303520" cy="2286000"/>
           </a:xfrm>
           <a:prstGeom prst="roundRect">
             <a:avLst>
-              <a:gd name="adj" fmla="val 6000"/>
+              <a:gd name="adj" fmla="val 4800"/>
             </a:avLst>
           </a:prstGeom>
           <a:solidFill>
@@ -3398,8 +3398,8 @@
         </p:nvSpPr>
         <p:spPr>
           <a:xfrm>
-            <a:off x="6537960" y="4617720"/>
-            <a:ext cx="502920" cy="502920"/>
+            <a:off x="6537960" y="4251960"/>
+            <a:ext cx="457200" cy="457200"/>
           </a:xfrm>
           <a:prstGeom prst="ellipse">
             <a:avLst/>
@@ -3418,8 +3418,8 @@
         </p:nvSpPr>
         <p:spPr>
           <a:xfrm>
-            <a:off x="6537960" y="4617720"/>
-            <a:ext cx="502920" cy="502920"/>
+            <a:off x="6537960" y="4251960"/>
+            <a:ext cx="457200" cy="457200"/>
           </a:xfrm>
           <a:prstGeom prst="rect">
             <a:avLst/>
@@ -3457,17 +3457,17 @@
         </p:nvSpPr>
         <p:spPr>
           <a:xfrm>
-            <a:off x="6537960" y="5303520"/>
-            <a:ext cx="4663440" cy="731520"/>
-          </a:xfrm>
-          <a:prstGeom prst="rect">
-            <a:avLst/>
-          </a:prstGeom>
-          <a:noFill/>
-          <a:ln/>
-        </p:spPr>
-        <p:txBody>
-          <a:bodyPr wrap="square" lIns="0" tIns="0" rIns="0" bIns="0" rtlCol="0" anchor="t"/>
+            <a:off x="7178040" y="4251960"/>
+            <a:ext cx="4023360" cy="457200"/>
+          </a:xfrm>
+          <a:prstGeom prst="rect">
+            <a:avLst/>
+          </a:prstGeom>
+          <a:noFill/>
+          <a:ln/>
+        </p:spPr>
+        <p:txBody>
+          <a:bodyPr wrap="square" lIns="0" tIns="0" rIns="0" bIns="0" rtlCol="0" anchor="ctr"/>
           <a:lstStyle/>
           <a:p>
             <a:pPr indent="0" marL="0">
@@ -3477,7 +3477,7 @@
               <a:buNone/>
             </a:pPr>
             <a:r>
-              <a:rPr lang="en-US" sz="2100" b="1" dirty="0">
+              <a:rPr lang="en-US" sz="2000" b="1" dirty="0">
                 <a:solidFill>
                   <a:srgbClr val="FFFFFF"/>
                 </a:solidFill>
@@ -3487,7 +3487,7 @@
               </a:rPr>
               <a:t>Regenerate and compare</a:t>
             </a:r>
-            <a:endParaRPr lang="en-US" sz="2100" dirty="0"/>
+            <a:endParaRPr lang="en-US" sz="2000" dirty="0"/>
           </a:p>
         </p:txBody>
       </p:sp>
@@ -3499,8 +3499,8 @@
         </p:nvSpPr>
         <p:spPr>
           <a:xfrm>
-            <a:off x="6537960" y="5943600"/>
-            <a:ext cx="4663440" cy="137160"/>
+            <a:off x="6537960" y="4846320"/>
+            <a:ext cx="4663440" cy="1188720"/>
           </a:xfrm>
           <a:prstGeom prst="rect">
             <a:avLst/>
@@ -3514,12 +3514,12 @@
           <a:p>
             <a:pPr indent="0" marL="0">
               <a:lnSpc>
-                <a:spcPct val="120000"/>
+                <a:spcPct val="125000"/>
               </a:lnSpc>
               <a:buNone/>
             </a:pPr>
             <a:r>
-              <a:rPr lang="en-US" sz="1800" dirty="0">
+              <a:rPr lang="en-US" sz="2000" dirty="0">
                 <a:solidFill>
                   <a:srgbClr val="CADCE8"/>
                 </a:solidFill>
@@ -3527,9 +3527,9 @@
                 <a:ea typeface="Calibri" pitchFamily="34" charset="-122"/>
                 <a:cs typeface="Calibri" pitchFamily="34" charset="-120"/>
               </a:rPr>
-              <a:t>Back in BasicRobotLessons, run the setup command again into a new --sandbox folder. It should match your real project exactly, except for what you've changed since.</a:t>
-            </a:r>
-            <a:endParaRPr lang="en-US" sz="1800" dirty="0"/>
+              <a:t>Run the setup command again into a new folder. It should match your real project exactly.</a:t>
+            </a:r>
+            <a:endParaRPr lang="en-US" sz="2000" dirty="0"/>
           </a:p>
         </p:txBody>
       </p:sp>
@@ -6500,11 +6500,11 @@
         <p:spPr>
           <a:xfrm>
             <a:off x="6172200" y="3749040"/>
-            <a:ext cx="5349240" cy="2103120"/>
+            <a:ext cx="5349240" cy="2286000"/>
           </a:xfrm>
           <a:prstGeom prst="roundRect">
             <a:avLst>
-              <a:gd name="adj" fmla="val 4348"/>
+              <a:gd name="adj" fmla="val 4000"/>
             </a:avLst>
           </a:prstGeom>
           <a:solidFill>
@@ -6522,19 +6522,22 @@
         <p:spPr>
           <a:xfrm>
             <a:off x="6446520" y="3931920"/>
-            <a:ext cx="4800600" cy="457200"/>
-          </a:xfrm>
-          <a:prstGeom prst="rect">
-            <a:avLst/>
-          </a:prstGeom>
-          <a:noFill/>
-          <a:ln/>
-        </p:spPr>
-        <p:txBody>
-          <a:bodyPr wrap="square" lIns="0" tIns="0" rIns="0" bIns="0" rtlCol="0" anchor="ctr"/>
-          <a:lstStyle/>
-          <a:p>
-            <a:pPr indent="0" marL="0">
+            <a:ext cx="4800600" cy="731520"/>
+          </a:xfrm>
+          <a:prstGeom prst="rect">
+            <a:avLst/>
+          </a:prstGeom>
+          <a:noFill/>
+          <a:ln/>
+        </p:spPr>
+        <p:txBody>
+          <a:bodyPr wrap="square" lIns="0" tIns="0" rIns="0" bIns="0" rtlCol="0" anchor="t"/>
+          <a:lstStyle/>
+          <a:p>
+            <a:pPr indent="0" marL="0">
+              <a:lnSpc>
+                <a:spcPct val="115000"/>
+              </a:lnSpc>
               <a:buNone/>
             </a:pPr>
             <a:r>
@@ -6560,8 +6563,8 @@
         </p:nvSpPr>
         <p:spPr>
           <a:xfrm>
-            <a:off x="6446520" y="4434840"/>
-            <a:ext cx="4800600" cy="1325880"/>
+            <a:off x="6446520" y="4709160"/>
+            <a:ext cx="4800600" cy="1234440"/>
           </a:xfrm>
           <a:prstGeom prst="rect">
             <a:avLst/>

--- a/docs/presentations/v3/aside-setup.pptx
+++ b/docs/presentations/v3/aside-setup.pptx
@@ -17,9 +17,10 @@
     <p:sldId id="265" r:id="rId11"/>
     <p:sldId id="266" r:id="rId12"/>
     <p:sldId id="267" r:id="rId13"/>
+    <p:sldId id="268" r:id="rId14"/>
   </p:sldIdLst>
   <p:notesMasterIdLst>
-    <p:notesMasterId r:id="rId14"/>
+    <p:notesMasterId r:id="rId15"/>
   </p:notesMasterIdLst>
   <p:sldSz cx="12191695" cy="6858000"/>
   <p:notesSz cx="6858000" cy="12191695"/>
@@ -801,6 +802,94 @@
             <a:fld id="{F7021451-1387-4CA6-816F-3879F97B5CBC}" type="slidenum">
               <a:rPr lang="en-US"/>
               <a:t>12</a:t>
+            </a:fld>
+            <a:endParaRPr lang="en-US"/>
+          </a:p>
+        </p:txBody>
+      </p:sp>
+    </p:spTree>
+    <p:extLst>
+      <p:ext uri="{BB962C8B-B14F-4D97-AF65-F5344CB8AC3E}">
+        <p14:creationId xmlns:p14="http://schemas.microsoft.com/office/powerpoint/2010/main" val="1024086991"/>
+      </p:ext>
+    </p:extLst>
+  </p:cSld>
+  <p:clrMapOvr>
+    <a:masterClrMapping/>
+  </p:clrMapOvr>
+</p:notes>
+</file>
+
+<file path=ppt/notesSlides/notesSlide13.xml><?xml version="1.0" encoding="utf-8"?>
+<p:notes xmlns:a="http://schemas.openxmlformats.org/drawingml/2006/main" xmlns:r="http://schemas.openxmlformats.org/officeDocument/2006/relationships" xmlns:p="http://schemas.openxmlformats.org/presentationml/2006/main">
+  <p:cSld>
+    <p:spTree>
+      <p:nvGrpSpPr>
+        <p:cNvPr id="1" name=""/>
+        <p:cNvGrpSpPr/>
+        <p:nvPr/>
+      </p:nvGrpSpPr>
+      <p:grpSpPr>
+        <a:xfrm>
+          <a:off x="0" y="0"/>
+          <a:ext cx="0" cy="0"/>
+          <a:chOff x="0" y="0"/>
+          <a:chExt cx="0" cy="0"/>
+        </a:xfrm>
+      </p:grpSpPr>
+      <p:sp>
+        <p:nvSpPr>
+          <p:cNvPr id="2" name="Slide Image Placeholder 1"/>
+          <p:cNvSpPr>
+            <a:spLocks noGrp="1" noRot="1" noChangeAspect="1"/>
+          </p:cNvSpPr>
+          <p:nvPr>
+            <p:ph type="sldImg"/>
+          </p:nvPr>
+        </p:nvSpPr>
+        <p:spPr/>
+      </p:sp>
+      <p:sp>
+        <p:nvSpPr>
+          <p:cNvPr id="3" name="Notes Placeholder 2"/>
+          <p:cNvSpPr>
+            <a:spLocks noGrp="1"/>
+          </p:cNvSpPr>
+          <p:nvPr>
+            <p:ph type="body" idx="1"/>
+          </p:nvPr>
+        </p:nvSpPr>
+        <p:spPr/>
+        <p:txBody>
+          <a:bodyPr/>
+          <a:lstStyle/>
+          <a:p>
+            <a:r>
+              <a:rPr lang="en-US" dirty="0"/>
+              <a:t/>
+            </a:r>
+            <a:endParaRPr lang="en-US" dirty="0"/>
+          </a:p>
+        </p:txBody>
+      </p:sp>
+      <p:sp>
+        <p:nvSpPr>
+          <p:cNvPr id="4" name="Slide Number Placeholder 3"/>
+          <p:cNvSpPr>
+            <a:spLocks noGrp="1"/>
+          </p:cNvSpPr>
+          <p:nvPr>
+            <p:ph type="sldNum" sz="quarter" idx="10"/>
+          </p:nvPr>
+        </p:nvSpPr>
+        <p:spPr/>
+        <p:txBody>
+          <a:bodyPr/>
+          <a:lstStyle/>
+          <a:p>
+            <a:fld id="{F7021451-1387-4CA6-816F-3879F97B5CBC}" type="slidenum">
+              <a:rPr lang="en-US"/>
+              <a:t>13</a:t>
             </a:fld>
             <a:endParaRPr lang="en-US"/>
           </a:p>
@@ -2087,7 +2176,7 @@
     <p:bg>
       <p:bgPr>
         <a:solidFill>
-          <a:srgbClr val="0B1F3A"/>
+          <a:srgbClr val="FFFFFF"/>
         </a:solidFill>
       </p:bgPr>
     </p:bg>
@@ -2120,14 +2209,14 @@
             <a:avLst/>
           </a:prstGeom>
           <a:solidFill>
-            <a:srgbClr val="FF5010"/>
+            <a:srgbClr val="0B1F3A"/>
           </a:solidFill>
           <a:ln/>
         </p:spPr>
       </p:sp>
       <p:pic>
         <p:nvPicPr>
-          <p:cNvPr id="3" name="Image 0" descr="/home/user/BasicRobotLessons/docs/presentations/v3/template/assets/icons/syncalt_white.png">    </p:cNvPr>
+          <p:cNvPr id="3" name="Image 0" descr="/home/user/BasicRobotLessons/docs/presentations/v3/template/assets/icons/clouduploadalt_white.png">    </p:cNvPr>
           <p:cNvPicPr>
             <a:picLocks noChangeAspect="1"/>
           </p:cNvPicPr>
@@ -2174,15 +2263,15 @@
               <a:buNone/>
             </a:pPr>
             <a:r>
-              <a:rPr lang="en-US" sz="2000" b="1" spc="100" kern="0" dirty="0">
-                <a:solidFill>
-                  <a:srgbClr val="1B9AAA"/>
+              <a:rPr lang="en-US" sz="2000" b="1" spc="150" kern="0" dirty="0">
+                <a:solidFill>
+                  <a:srgbClr val="FF5010"/>
                 </a:solidFill>
                 <a:latin typeface="Calibri" pitchFamily="34" charset="0"/>
                 <a:ea typeface="Calibri" pitchFamily="34" charset="-122"/>
                 <a:cs typeface="Calibri" pitchFamily="34" charset="-120"/>
               </a:rPr>
-              <a:t>SECTION 7 · THE EVERYDAY LOOP</a:t>
+              <a:t>SECTION 7 · PUSH IT</a:t>
             </a:r>
             <a:endParaRPr lang="en-US" sz="2000" dirty="0"/>
           </a:p>
@@ -2215,13 +2304,13 @@
             <a:r>
               <a:rPr lang="en-US" sz="3000" b="1" dirty="0">
                 <a:solidFill>
-                  <a:srgbClr val="FFFFFF"/>
+                  <a:srgbClr val="13294B"/>
                 </a:solidFill>
                 <a:latin typeface="Cambria" pitchFamily="34" charset="0"/>
                 <a:ea typeface="Cambria" pitchFamily="34" charset="-122"/>
                 <a:cs typeface="Cambria" pitchFamily="34" charset="-120"/>
               </a:rPr>
-              <a:t>The one cycle you'll run constantly</a:t>
+              <a:t>One command makes the remote and sends your code</a:t>
             </a:r>
             <a:endParaRPr lang="en-US" sz="3000" dirty="0"/>
           </a:p>
@@ -2236,11 +2325,11 @@
         <p:spPr>
           <a:xfrm>
             <a:off x="640080" y="1600200"/>
-            <a:ext cx="6126480" cy="2834640"/>
+            <a:ext cx="10881360" cy="1234440"/>
           </a:xfrm>
           <a:prstGeom prst="roundRect">
             <a:avLst>
-              <a:gd name="adj" fmla="val 3871"/>
+              <a:gd name="adj" fmla="val 8889"/>
             </a:avLst>
           </a:prstGeom>
           <a:solidFill>
@@ -2264,7 +2353,7 @@
         </p:nvSpPr>
         <p:spPr>
           <a:xfrm>
-            <a:off x="6455664" y="1746504"/>
+            <a:off x="11210544" y="1746504"/>
             <a:ext cx="128016" cy="128016"/>
           </a:xfrm>
           <a:prstGeom prst="ellipse">
@@ -2284,7 +2373,7 @@
         </p:nvSpPr>
         <p:spPr>
           <a:xfrm>
-            <a:off x="6455664" y="1947672"/>
+            <a:off x="11210544" y="1947672"/>
             <a:ext cx="128016" cy="128016"/>
           </a:xfrm>
           <a:prstGeom prst="ellipse">
@@ -2304,7 +2393,7 @@
         </p:nvSpPr>
         <p:spPr>
           <a:xfrm>
-            <a:off x="6455664" y="2148840"/>
+            <a:off x="11210544" y="2148840"/>
             <a:ext cx="128016" cy="128016"/>
           </a:xfrm>
           <a:prstGeom prst="ellipse">
@@ -2325,7 +2414,7 @@
         <p:spPr>
           <a:xfrm>
             <a:off x="914400" y="1801368"/>
-            <a:ext cx="5440680" cy="2468880"/>
+            <a:ext cx="10195560" cy="868680"/>
           </a:xfrm>
           <a:prstGeom prst="rect">
             <a:avLst/>
@@ -2344,18 +2433,62 @@
               <a:buNone/>
             </a:pPr>
             <a:r>
-              <a:rPr lang="en-US" sz="1800" dirty="0">
-                <a:solidFill>
-                  <a:srgbClr val="7FA8C9"/>
+              <a:rPr lang="en-US" sz="1600" dirty="0">
+                <a:solidFill>
+                  <a:srgbClr val="9EF01A"/>
                 </a:solidFill>
                 <a:latin typeface="Courier New" pitchFamily="34" charset="0"/>
                 <a:ea typeface="Courier New" pitchFamily="34" charset="-122"/>
                 <a:cs typeface="Courier New" pitchFamily="34" charset="-120"/>
               </a:rPr>
-              <a:t>git status</a:t>
-            </a:r>
-            <a:endParaRPr lang="en-US" sz="1800" dirty="0"/>
-          </a:p>
+              <a:t>gh repo create MyOpModeRobot --private --source=. --remote=origin --push</a:t>
+            </a:r>
+            <a:endParaRPr lang="en-US" sz="1600" dirty="0"/>
+          </a:p>
+        </p:txBody>
+      </p:sp>
+      <p:sp>
+        <p:nvSpPr>
+          <p:cNvPr id="11" name="Shape 8"/>
+          <p:cNvSpPr/>
+          <p:nvPr/>
+        </p:nvSpPr>
+        <p:spPr>
+          <a:xfrm>
+            <a:off x="640080" y="3063240"/>
+            <a:ext cx="10881360" cy="2788920"/>
+          </a:xfrm>
+          <a:prstGeom prst="roundRect">
+            <a:avLst>
+              <a:gd name="adj" fmla="val 3279"/>
+            </a:avLst>
+          </a:prstGeom>
+          <a:solidFill>
+            <a:srgbClr val="F3F6FA"/>
+          </a:solidFill>
+          <a:ln/>
+        </p:spPr>
+      </p:sp>
+      <p:sp>
+        <p:nvSpPr>
+          <p:cNvPr id="12" name="Text 9"/>
+          <p:cNvSpPr/>
+          <p:nvPr/>
+        </p:nvSpPr>
+        <p:spPr>
+          <a:xfrm>
+            <a:off x="914400" y="3337560"/>
+            <a:ext cx="10332720" cy="927100"/>
+          </a:xfrm>
+          <a:prstGeom prst="rect">
+            <a:avLst/>
+          </a:prstGeom>
+          <a:noFill/>
+          <a:ln/>
+        </p:spPr>
+        <p:txBody>
+          <a:bodyPr wrap="square" lIns="0" tIns="0" rIns="0" bIns="0" rtlCol="0" anchor="t"/>
+          <a:lstStyle/>
           <a:p>
             <a:pPr indent="0" marL="0">
               <a:lnSpc>
@@ -2364,148 +2497,15 @@
               <a:buNone/>
             </a:pPr>
             <a:r>
-              <a:rPr lang="en-US" sz="1800" dirty="0">
-                <a:solidFill>
-                  <a:srgbClr val="D7E3F4"/>
-                </a:solidFill>
-                <a:latin typeface="Courier New" pitchFamily="34" charset="0"/>
-                <a:ea typeface="Courier New" pitchFamily="34" charset="-122"/>
-                <a:cs typeface="Courier New" pitchFamily="34" charset="-120"/>
-              </a:rPr>
-              <a:t>git add .</a:t>
-            </a:r>
-            <a:endParaRPr lang="en-US" sz="1800" dirty="0"/>
-          </a:p>
-          <a:p>
-            <a:pPr indent="0" marL="0">
-              <a:lnSpc>
-                <a:spcPct val="120000"/>
-              </a:lnSpc>
-              <a:buNone/>
-            </a:pPr>
-            <a:r>
-              <a:rPr lang="en-US" sz="1800" dirty="0">
-                <a:solidFill>
-                  <a:srgbClr val="D7E3F4"/>
-                </a:solidFill>
-                <a:latin typeface="Courier New" pitchFamily="34" charset="0"/>
-                <a:ea typeface="Courier New" pitchFamily="34" charset="-122"/>
-                <a:cs typeface="Courier New" pitchFamily="34" charset="-120"/>
-              </a:rPr>
-              <a:t>git commit -m "Finish Lesson 3"</a:t>
-            </a:r>
-            <a:endParaRPr lang="en-US" sz="1800" dirty="0"/>
-          </a:p>
-          <a:p>
-            <a:pPr indent="0" marL="0">
-              <a:lnSpc>
-                <a:spcPct val="120000"/>
-              </a:lnSpc>
-              <a:buNone/>
-            </a:pPr>
-            <a:r>
-              <a:rPr lang="en-US" sz="1800" dirty="0">
-                <a:solidFill>
-                  <a:srgbClr val="9EF01A"/>
-                </a:solidFill>
-                <a:latin typeface="Courier New" pitchFamily="34" charset="0"/>
-                <a:ea typeface="Courier New" pitchFamily="34" charset="-122"/>
-                <a:cs typeface="Courier New" pitchFamily="34" charset="-120"/>
-              </a:rPr>
-              <a:t>git push</a:t>
-            </a:r>
-            <a:endParaRPr lang="en-US" sz="1800" dirty="0"/>
-          </a:p>
-          <a:p>
-            <a:pPr indent="0" marL="0">
-              <a:lnSpc>
-                <a:spcPct val="120000"/>
-              </a:lnSpc>
-              <a:buNone/>
-            </a:pPr>
-            <a:endParaRPr lang="en-US" sz="1800" dirty="0"/>
-          </a:p>
-          <a:p>
-            <a:pPr indent="0" marL="0">
-              <a:lnSpc>
-                <a:spcPct val="120000"/>
-              </a:lnSpc>
-              <a:buNone/>
-            </a:pPr>
-            <a:r>
-              <a:rPr lang="en-US" sz="1800" dirty="0">
-                <a:solidFill>
-                  <a:srgbClr val="9EF01A"/>
-                </a:solidFill>
-                <a:latin typeface="Courier New" pitchFamily="34" charset="0"/>
-                <a:ea typeface="Courier New" pitchFamily="34" charset="-122"/>
-                <a:cs typeface="Courier New" pitchFamily="34" charset="-120"/>
-              </a:rPr>
-              <a:t>git pull</a:t>
-            </a:r>
-            <a:endParaRPr lang="en-US" sz="1800" dirty="0"/>
-          </a:p>
-        </p:txBody>
-      </p:sp>
-      <p:sp>
-        <p:nvSpPr>
-          <p:cNvPr id="11" name="Shape 8"/>
-          <p:cNvSpPr/>
-          <p:nvPr/>
-        </p:nvSpPr>
-        <p:spPr>
-          <a:xfrm>
-            <a:off x="6949440" y="1600200"/>
-            <a:ext cx="4572000" cy="2834640"/>
-          </a:xfrm>
-          <a:prstGeom prst="roundRect">
-            <a:avLst>
-              <a:gd name="adj" fmla="val 3871"/>
-            </a:avLst>
-          </a:prstGeom>
-          <a:solidFill>
-            <a:srgbClr val="132A4C"/>
-          </a:solidFill>
-          <a:ln/>
-        </p:spPr>
-      </p:sp>
-      <p:sp>
-        <p:nvSpPr>
-          <p:cNvPr id="12" name="Text 9"/>
-          <p:cNvSpPr/>
-          <p:nvPr/>
-        </p:nvSpPr>
-        <p:spPr>
-          <a:xfrm>
-            <a:off x="7223760" y="1828800"/>
-            <a:ext cx="4023360" cy="914400"/>
-          </a:xfrm>
-          <a:prstGeom prst="rect">
-            <a:avLst/>
-          </a:prstGeom>
-          <a:noFill/>
-          <a:ln/>
-        </p:spPr>
-        <p:txBody>
-          <a:bodyPr wrap="square" lIns="0" tIns="0" rIns="0" bIns="0" rtlCol="0" anchor="t"/>
-          <a:lstStyle/>
-          <a:p>
-            <a:pPr indent="0" marL="0">
-              <a:lnSpc>
-                <a:spcPct val="115000"/>
-              </a:lnSpc>
-              <a:buNone/>
-            </a:pPr>
-            <a:r>
               <a:rPr lang="en-US" sz="2200" b="1" dirty="0">
                 <a:solidFill>
-                  <a:srgbClr val="FF5010"/>
+                  <a:srgbClr val="13294B"/>
                 </a:solidFill>
                 <a:latin typeface="Cambria" pitchFamily="34" charset="0"/>
                 <a:ea typeface="Cambria" pitchFamily="34" charset="-122"/>
                 <a:cs typeface="Cambria" pitchFamily="34" charset="-120"/>
               </a:rPr>
-              <a:t>PULL → EDIT → ADD → COMMIT → PUSH</a:t>
+              <a:t>That one line creates a private GitHub repo, wires it up as origin, and pushes your first commit.</a:t>
             </a:r>
             <a:endParaRPr lang="en-US" sz="2200" dirty="0"/>
           </a:p>
@@ -2519,8 +2519,8 @@
         </p:nvSpPr>
         <p:spPr>
           <a:xfrm>
-            <a:off x="7223760" y="2834640"/>
-            <a:ext cx="4023360" cy="1508760"/>
+            <a:off x="914400" y="4264660"/>
+            <a:ext cx="10332720" cy="1313180"/>
           </a:xfrm>
           <a:prstGeom prst="rect">
             <a:avLst/>
@@ -2541,13 +2541,13 @@
             <a:r>
               <a:rPr lang="en-US" sz="2000" dirty="0">
                 <a:solidFill>
-                  <a:srgbClr val="CADCE8"/>
+                  <a:srgbClr val="13294B"/>
                 </a:solidFill>
                 <a:latin typeface="Calibri" pitchFamily="34" charset="0"/>
                 <a:ea typeface="Calibri" pitchFamily="34" charset="-122"/>
                 <a:cs typeface="Calibri" pitchFamily="34" charset="-120"/>
               </a:rPr>
-              <a:t>Do it once a day, or every time something works that didn't before. Write commit messages that say what changed and why.</a:t>
+              <a:t>Check it landed right: gh repo view --web opens the repo in your browser. You should see every file from your project — and nothing from BasicRobotLessons. If the whole course shows up instead, you ran it from the wrong folder.</a:t>
             </a:r>
             <a:endParaRPr lang="en-US" sz="2000" dirty="0"/>
           </a:p>
@@ -2555,36 +2555,14 @@
       </p:sp>
       <p:sp>
         <p:nvSpPr>
-          <p:cNvPr id="14" name="Shape 11"/>
-          <p:cNvSpPr/>
-          <p:nvPr/>
-        </p:nvSpPr>
-        <p:spPr>
-          <a:xfrm>
-            <a:off x="640080" y="4709160"/>
-            <a:ext cx="10881360" cy="1371600"/>
-          </a:xfrm>
-          <a:prstGeom prst="roundRect">
-            <a:avLst>
-              <a:gd name="adj" fmla="val 8000"/>
-            </a:avLst>
-          </a:prstGeom>
-          <a:solidFill>
-            <a:srgbClr val="132A4C"/>
-          </a:solidFill>
-          <a:ln/>
-        </p:spPr>
-      </p:sp>
-      <p:sp>
-        <p:nvSpPr>
-          <p:cNvPr id="15" name="Text 12"/>
-          <p:cNvSpPr/>
-          <p:nvPr/>
-        </p:nvSpPr>
-        <p:spPr>
-          <a:xfrm>
-            <a:off x="914400" y="4709160"/>
-            <a:ext cx="10332720" cy="1371600"/>
+          <p:cNvPr id="14" name="Text 11"/>
+          <p:cNvSpPr/>
+          <p:nvPr/>
+        </p:nvSpPr>
+        <p:spPr>
+          <a:xfrm>
+            <a:off x="640080" y="6446520"/>
+            <a:ext cx="8229600" cy="365760"/>
           </a:xfrm>
           <a:prstGeom prst="rect">
             <a:avLst/>
@@ -2597,36 +2575,33 @@
           <a:lstStyle/>
           <a:p>
             <a:pPr indent="0" marL="0">
-              <a:lnSpc>
-                <a:spcPct val="125000"/>
-              </a:lnSpc>
-              <a:buNone/>
-            </a:pPr>
-            <a:r>
-              <a:rPr lang="en-US" sz="2100" i="1" dirty="0">
-                <a:solidFill>
-                  <a:srgbClr val="CADCE8"/>
+              <a:buNone/>
+            </a:pPr>
+            <a:r>
+              <a:rPr lang="en-US" sz="2000" spc="100" kern="0" dirty="0">
+                <a:solidFill>
+                  <a:srgbClr val="5B6B84"/>
                 </a:solidFill>
                 <a:latin typeface="Calibri" pitchFamily="34" charset="0"/>
                 <a:ea typeface="Calibri" pitchFamily="34" charset="-122"/>
                 <a:cs typeface="Calibri" pitchFamily="34" charset="-120"/>
               </a:rPr>
-              <a:t>A push that reports a merge conflict isn't an error — Git found two edits close together and won't guess which wins. Mark the file resolved with git add, then git commit to finish.</a:t>
-            </a:r>
-            <a:endParaRPr lang="en-US" sz="2100" dirty="0"/>
-          </a:p>
-        </p:txBody>
-      </p:sp>
-      <p:sp>
-        <p:nvSpPr>
-          <p:cNvPr id="16" name="Text 13"/>
-          <p:cNvSpPr/>
-          <p:nvPr/>
-        </p:nvSpPr>
-        <p:spPr>
-          <a:xfrm>
-            <a:off x="640080" y="6446520"/>
-            <a:ext cx="8229600" cy="365760"/>
+              <a:t>LEARN JAVA + ROBOT PROGRAMMING · SETUP</a:t>
+            </a:r>
+            <a:endParaRPr lang="en-US" sz="2000" dirty="0"/>
+          </a:p>
+        </p:txBody>
+      </p:sp>
+      <p:sp>
+        <p:nvSpPr>
+          <p:cNvPr id="15" name="Text 12"/>
+          <p:cNvSpPr/>
+          <p:nvPr/>
+        </p:nvSpPr>
+        <p:spPr>
+          <a:xfrm>
+            <a:off x="11002975" y="6446520"/>
+            <a:ext cx="548640" cy="365760"/>
           </a:xfrm>
           <a:prstGeom prst="rect">
             <a:avLst/>
@@ -2638,57 +2613,18 @@
           <a:bodyPr wrap="square" lIns="0" tIns="0" rIns="0" bIns="0" rtlCol="0" anchor="ctr"/>
           <a:lstStyle/>
           <a:p>
-            <a:pPr indent="0" marL="0">
-              <a:buNone/>
-            </a:pPr>
-            <a:r>
-              <a:rPr lang="en-US" sz="2000" spc="100" kern="0" dirty="0">
-                <a:solidFill>
-                  <a:srgbClr val="7A93B8"/>
+            <a:pPr algn="r" indent="0" marL="0">
+              <a:buNone/>
+            </a:pPr>
+            <a:r>
+              <a:rPr lang="en-US" sz="2000" dirty="0">
+                <a:solidFill>
+                  <a:srgbClr val="5B6B84"/>
                 </a:solidFill>
                 <a:latin typeface="Calibri" pitchFamily="34" charset="0"/>
                 <a:ea typeface="Calibri" pitchFamily="34" charset="-122"/>
                 <a:cs typeface="Calibri" pitchFamily="34" charset="-120"/>
               </a:rPr>
-              <a:t>LEARN JAVA + ROBOT PROGRAMMING · SETUP</a:t>
-            </a:r>
-            <a:endParaRPr lang="en-US" sz="2000" dirty="0"/>
-          </a:p>
-        </p:txBody>
-      </p:sp>
-      <p:sp>
-        <p:nvSpPr>
-          <p:cNvPr id="17" name="Text 14"/>
-          <p:cNvSpPr/>
-          <p:nvPr/>
-        </p:nvSpPr>
-        <p:spPr>
-          <a:xfrm>
-            <a:off x="11002975" y="6446520"/>
-            <a:ext cx="548640" cy="365760"/>
-          </a:xfrm>
-          <a:prstGeom prst="rect">
-            <a:avLst/>
-          </a:prstGeom>
-          <a:noFill/>
-          <a:ln/>
-        </p:spPr>
-        <p:txBody>
-          <a:bodyPr wrap="square" lIns="0" tIns="0" rIns="0" bIns="0" rtlCol="0" anchor="ctr"/>
-          <a:lstStyle/>
-          <a:p>
-            <a:pPr algn="r" indent="0" marL="0">
-              <a:buNone/>
-            </a:pPr>
-            <a:r>
-              <a:rPr lang="en-US" sz="2000" dirty="0">
-                <a:solidFill>
-                  <a:srgbClr val="7A93B8"/>
-                </a:solidFill>
-                <a:latin typeface="Calibri" pitchFamily="34" charset="0"/>
-                <a:ea typeface="Calibri" pitchFamily="34" charset="-122"/>
-                <a:cs typeface="Calibri" pitchFamily="34" charset="-120"/>
-              </a:rPr>
               <a:t>10</a:t>
             </a:r>
             <a:endParaRPr lang="en-US" sz="2000" dirty="0"/>
@@ -2697,7 +2633,7 @@
       </p:sp>
       <p:pic>
         <p:nvPicPr>
-          <p:cNvPr id="18" name="Image 1" descr="/home/user/BasicRobotLessons/docs/presentations/v3/template/assets/logo/team5010-logo-onnavy.png">    </p:cNvPr>
+          <p:cNvPr id="16" name="Image 1" descr="/home/user/BasicRobotLessons/docs/presentations/v3/template/assets/logo/team5010-logo-onwhite.png">    </p:cNvPr>
           <p:cNvPicPr>
             <a:picLocks noChangeAspect="1"/>
           </p:cNvPicPr>
@@ -2773,7 +2709,7 @@
       </p:sp>
       <p:pic>
         <p:nvPicPr>
-          <p:cNvPr id="3" name="Image 0" descr="/home/user/BasicRobotLessons/docs/presentations/v3/template/assets/icons/clipboardcheck_white.png">    </p:cNvPr>
+          <p:cNvPr id="3" name="Image 0" descr="/home/user/BasicRobotLessons/docs/presentations/v3/template/assets/icons/syncalt_white.png">    </p:cNvPr>
           <p:cNvPicPr>
             <a:picLocks noChangeAspect="1"/>
           </p:cNvPicPr>
@@ -2828,7 +2764,7 @@
                 <a:ea typeface="Calibri" pitchFamily="34" charset="-122"/>
                 <a:cs typeface="Calibri" pitchFamily="34" charset="-120"/>
               </a:rPr>
-              <a:t>BEFORE YOU MOVE ON</a:t>
+              <a:t>SECTION 8 · THE EVERYDAY LOOP</a:t>
             </a:r>
             <a:endParaRPr lang="en-US" sz="2000" dirty="0"/>
           </a:p>
@@ -2867,7 +2803,7 @@
                 <a:ea typeface="Cambria" pitchFamily="34" charset="-122"/>
                 <a:cs typeface="Cambria" pitchFamily="34" charset="-120"/>
               </a:rPr>
-              <a:t>Try it</a:t>
+              <a:t>The one cycle you'll run constantly</a:t>
             </a:r>
             <a:endParaRPr lang="en-US" sz="3000" dirty="0"/>
           </a:p>
@@ -2881,12 +2817,232 @@
         </p:nvSpPr>
         <p:spPr>
           <a:xfrm>
-            <a:off x="640080" y="1463040"/>
-            <a:ext cx="5303520" cy="2286000"/>
+            <a:off x="640080" y="1600200"/>
+            <a:ext cx="6126480" cy="2834640"/>
           </a:xfrm>
           <a:prstGeom prst="roundRect">
             <a:avLst>
-              <a:gd name="adj" fmla="val 4800"/>
+              <a:gd name="adj" fmla="val 3871"/>
+            </a:avLst>
+          </a:prstGeom>
+          <a:solidFill>
+            <a:srgbClr val="0B1F3A"/>
+          </a:solidFill>
+          <a:ln/>
+          <a:effectLst>
+            <a:outerShdw sx="100000" sy="100000" kx="0" ky="0" algn="bl" rotWithShape="0" blurRad="101600" dist="38100" dir="5400000">
+              <a:srgbClr val="0B1F3A">
+                <a:alpha val="35000"/>
+              </a:srgbClr>
+            </a:outerShdw>
+          </a:effectLst>
+        </p:spPr>
+      </p:sp>
+      <p:sp>
+        <p:nvSpPr>
+          <p:cNvPr id="7" name="Shape 4"/>
+          <p:cNvSpPr/>
+          <p:nvPr/>
+        </p:nvSpPr>
+        <p:spPr>
+          <a:xfrm>
+            <a:off x="6455664" y="1746504"/>
+            <a:ext cx="128016" cy="128016"/>
+          </a:xfrm>
+          <a:prstGeom prst="ellipse">
+            <a:avLst/>
+          </a:prstGeom>
+          <a:solidFill>
+            <a:srgbClr val="FF6B6B"/>
+          </a:solidFill>
+          <a:ln/>
+        </p:spPr>
+      </p:sp>
+      <p:sp>
+        <p:nvSpPr>
+          <p:cNvPr id="8" name="Shape 5"/>
+          <p:cNvSpPr/>
+          <p:nvPr/>
+        </p:nvSpPr>
+        <p:spPr>
+          <a:xfrm>
+            <a:off x="6455664" y="1947672"/>
+            <a:ext cx="128016" cy="128016"/>
+          </a:xfrm>
+          <a:prstGeom prst="ellipse">
+            <a:avLst/>
+          </a:prstGeom>
+          <a:solidFill>
+            <a:srgbClr val="FFD166"/>
+          </a:solidFill>
+          <a:ln/>
+        </p:spPr>
+      </p:sp>
+      <p:sp>
+        <p:nvSpPr>
+          <p:cNvPr id="9" name="Shape 6"/>
+          <p:cNvSpPr/>
+          <p:nvPr/>
+        </p:nvSpPr>
+        <p:spPr>
+          <a:xfrm>
+            <a:off x="6455664" y="2148840"/>
+            <a:ext cx="128016" cy="128016"/>
+          </a:xfrm>
+          <a:prstGeom prst="ellipse">
+            <a:avLst/>
+          </a:prstGeom>
+          <a:solidFill>
+            <a:srgbClr val="2EC4B6"/>
+          </a:solidFill>
+          <a:ln/>
+        </p:spPr>
+      </p:sp>
+      <p:sp>
+        <p:nvSpPr>
+          <p:cNvPr id="10" name="Text 7"/>
+          <p:cNvSpPr/>
+          <p:nvPr/>
+        </p:nvSpPr>
+        <p:spPr>
+          <a:xfrm>
+            <a:off x="914400" y="1801368"/>
+            <a:ext cx="5440680" cy="2468880"/>
+          </a:xfrm>
+          <a:prstGeom prst="rect">
+            <a:avLst/>
+          </a:prstGeom>
+          <a:noFill/>
+          <a:ln/>
+        </p:spPr>
+        <p:txBody>
+          <a:bodyPr wrap="square" lIns="0" tIns="0" rIns="0" bIns="0" rtlCol="0" anchor="t"/>
+          <a:lstStyle/>
+          <a:p>
+            <a:pPr indent="0" marL="0">
+              <a:lnSpc>
+                <a:spcPct val="120000"/>
+              </a:lnSpc>
+              <a:buNone/>
+            </a:pPr>
+            <a:r>
+              <a:rPr lang="en-US" sz="1800" dirty="0">
+                <a:solidFill>
+                  <a:srgbClr val="7FA8C9"/>
+                </a:solidFill>
+                <a:latin typeface="Courier New" pitchFamily="34" charset="0"/>
+                <a:ea typeface="Courier New" pitchFamily="34" charset="-122"/>
+                <a:cs typeface="Courier New" pitchFamily="34" charset="-120"/>
+              </a:rPr>
+              <a:t>git status</a:t>
+            </a:r>
+            <a:endParaRPr lang="en-US" sz="1800" dirty="0"/>
+          </a:p>
+          <a:p>
+            <a:pPr indent="0" marL="0">
+              <a:lnSpc>
+                <a:spcPct val="120000"/>
+              </a:lnSpc>
+              <a:buNone/>
+            </a:pPr>
+            <a:r>
+              <a:rPr lang="en-US" sz="1800" dirty="0">
+                <a:solidFill>
+                  <a:srgbClr val="D7E3F4"/>
+                </a:solidFill>
+                <a:latin typeface="Courier New" pitchFamily="34" charset="0"/>
+                <a:ea typeface="Courier New" pitchFamily="34" charset="-122"/>
+                <a:cs typeface="Courier New" pitchFamily="34" charset="-120"/>
+              </a:rPr>
+              <a:t>git add .</a:t>
+            </a:r>
+            <a:endParaRPr lang="en-US" sz="1800" dirty="0"/>
+          </a:p>
+          <a:p>
+            <a:pPr indent="0" marL="0">
+              <a:lnSpc>
+                <a:spcPct val="120000"/>
+              </a:lnSpc>
+              <a:buNone/>
+            </a:pPr>
+            <a:r>
+              <a:rPr lang="en-US" sz="1800" dirty="0">
+                <a:solidFill>
+                  <a:srgbClr val="D7E3F4"/>
+                </a:solidFill>
+                <a:latin typeface="Courier New" pitchFamily="34" charset="0"/>
+                <a:ea typeface="Courier New" pitchFamily="34" charset="-122"/>
+                <a:cs typeface="Courier New" pitchFamily="34" charset="-120"/>
+              </a:rPr>
+              <a:t>git commit -m "Finish Lesson 3"</a:t>
+            </a:r>
+            <a:endParaRPr lang="en-US" sz="1800" dirty="0"/>
+          </a:p>
+          <a:p>
+            <a:pPr indent="0" marL="0">
+              <a:lnSpc>
+                <a:spcPct val="120000"/>
+              </a:lnSpc>
+              <a:buNone/>
+            </a:pPr>
+            <a:r>
+              <a:rPr lang="en-US" sz="1800" dirty="0">
+                <a:solidFill>
+                  <a:srgbClr val="9EF01A"/>
+                </a:solidFill>
+                <a:latin typeface="Courier New" pitchFamily="34" charset="0"/>
+                <a:ea typeface="Courier New" pitchFamily="34" charset="-122"/>
+                <a:cs typeface="Courier New" pitchFamily="34" charset="-120"/>
+              </a:rPr>
+              <a:t>git push</a:t>
+            </a:r>
+            <a:endParaRPr lang="en-US" sz="1800" dirty="0"/>
+          </a:p>
+          <a:p>
+            <a:pPr indent="0" marL="0">
+              <a:lnSpc>
+                <a:spcPct val="120000"/>
+              </a:lnSpc>
+              <a:buNone/>
+            </a:pPr>
+            <a:endParaRPr lang="en-US" sz="1800" dirty="0"/>
+          </a:p>
+          <a:p>
+            <a:pPr indent="0" marL="0">
+              <a:lnSpc>
+                <a:spcPct val="120000"/>
+              </a:lnSpc>
+              <a:buNone/>
+            </a:pPr>
+            <a:r>
+              <a:rPr lang="en-US" sz="1800" dirty="0">
+                <a:solidFill>
+                  <a:srgbClr val="9EF01A"/>
+                </a:solidFill>
+                <a:latin typeface="Courier New" pitchFamily="34" charset="0"/>
+                <a:ea typeface="Courier New" pitchFamily="34" charset="-122"/>
+                <a:cs typeface="Courier New" pitchFamily="34" charset="-120"/>
+              </a:rPr>
+              <a:t>git pull</a:t>
+            </a:r>
+            <a:endParaRPr lang="en-US" sz="1800" dirty="0"/>
+          </a:p>
+        </p:txBody>
+      </p:sp>
+      <p:sp>
+        <p:nvSpPr>
+          <p:cNvPr id="11" name="Shape 8"/>
+          <p:cNvSpPr/>
+          <p:nvPr/>
+        </p:nvSpPr>
+        <p:spPr>
+          <a:xfrm>
+            <a:off x="6949440" y="1600200"/>
+            <a:ext cx="4572000" cy="2834640"/>
+          </a:xfrm>
+          <a:prstGeom prst="roundRect">
+            <a:avLst>
+              <a:gd name="adj" fmla="val 3871"/>
             </a:avLst>
           </a:prstGeom>
           <a:solidFill>
@@ -2897,58 +3053,41 @@
       </p:sp>
       <p:sp>
         <p:nvSpPr>
-          <p:cNvPr id="7" name="Shape 4"/>
-          <p:cNvSpPr/>
-          <p:nvPr/>
-        </p:nvSpPr>
-        <p:spPr>
-          <a:xfrm>
-            <a:off x="960120" y="1691640"/>
-            <a:ext cx="457200" cy="457200"/>
-          </a:xfrm>
-          <a:prstGeom prst="ellipse">
-            <a:avLst/>
-          </a:prstGeom>
-          <a:solidFill>
-            <a:srgbClr val="1B9AAA"/>
-          </a:solidFill>
-          <a:ln/>
-        </p:spPr>
-      </p:sp>
-      <p:sp>
-        <p:nvSpPr>
-          <p:cNvPr id="8" name="Text 5"/>
-          <p:cNvSpPr/>
-          <p:nvPr/>
-        </p:nvSpPr>
-        <p:spPr>
-          <a:xfrm>
-            <a:off x="960120" y="1691640"/>
-            <a:ext cx="457200" cy="457200"/>
-          </a:xfrm>
-          <a:prstGeom prst="rect">
-            <a:avLst/>
-          </a:prstGeom>
-          <a:noFill/>
-          <a:ln/>
-        </p:spPr>
-        <p:txBody>
-          <a:bodyPr wrap="square" lIns="0" tIns="0" rIns="0" bIns="0" rtlCol="0" anchor="ctr"/>
-          <a:lstStyle/>
-          <a:p>
-            <a:pPr algn="ctr" indent="0" marL="0">
+          <p:cNvPr id="12" name="Text 9"/>
+          <p:cNvSpPr/>
+          <p:nvPr/>
+        </p:nvSpPr>
+        <p:spPr>
+          <a:xfrm>
+            <a:off x="7223760" y="1828800"/>
+            <a:ext cx="4023360" cy="914400"/>
+          </a:xfrm>
+          <a:prstGeom prst="rect">
+            <a:avLst/>
+          </a:prstGeom>
+          <a:noFill/>
+          <a:ln/>
+        </p:spPr>
+        <p:txBody>
+          <a:bodyPr wrap="square" lIns="0" tIns="0" rIns="0" bIns="0" rtlCol="0" anchor="t"/>
+          <a:lstStyle/>
+          <a:p>
+            <a:pPr indent="0" marL="0">
+              <a:lnSpc>
+                <a:spcPct val="115000"/>
+              </a:lnSpc>
               <a:buNone/>
             </a:pPr>
             <a:r>
               <a:rPr lang="en-US" sz="2200" b="1" dirty="0">
                 <a:solidFill>
-                  <a:srgbClr val="FFFFFF"/>
+                  <a:srgbClr val="FF5010"/>
                 </a:solidFill>
                 <a:latin typeface="Cambria" pitchFamily="34" charset="0"/>
                 <a:ea typeface="Cambria" pitchFamily="34" charset="-122"/>
                 <a:cs typeface="Cambria" pitchFamily="34" charset="-120"/>
               </a:rPr>
-              <a:t>1</a:t>
+              <a:t>PULL → EDIT → ADD → COMMIT → PUSH</a:t>
             </a:r>
             <a:endParaRPr lang="en-US" sz="2200" dirty="0"/>
           </a:p>
@@ -2956,56 +3095,14 @@
       </p:sp>
       <p:sp>
         <p:nvSpPr>
-          <p:cNvPr id="9" name="Text 6"/>
-          <p:cNvSpPr/>
-          <p:nvPr/>
-        </p:nvSpPr>
-        <p:spPr>
-          <a:xfrm>
-            <a:off x="1600200" y="1691640"/>
-            <a:ext cx="4023360" cy="457200"/>
-          </a:xfrm>
-          <a:prstGeom prst="rect">
-            <a:avLst/>
-          </a:prstGeom>
-          <a:noFill/>
-          <a:ln/>
-        </p:spPr>
-        <p:txBody>
-          <a:bodyPr wrap="square" lIns="0" tIns="0" rIns="0" bIns="0" rtlCol="0" anchor="ctr"/>
-          <a:lstStyle/>
-          <a:p>
-            <a:pPr indent="0" marL="0">
-              <a:lnSpc>
-                <a:spcPct val="110000"/>
-              </a:lnSpc>
-              <a:buNone/>
-            </a:pPr>
-            <a:r>
-              <a:rPr lang="en-US" sz="2000" b="1" dirty="0">
-                <a:solidFill>
-                  <a:srgbClr val="FFFFFF"/>
-                </a:solidFill>
-                <a:latin typeface="Cambria" pitchFamily="34" charset="0"/>
-                <a:ea typeface="Cambria" pitchFamily="34" charset="-122"/>
-                <a:cs typeface="Cambria" pitchFamily="34" charset="-120"/>
-              </a:rPr>
-              <a:t>Prove the round trip</a:t>
-            </a:r>
-            <a:endParaRPr lang="en-US" sz="2000" dirty="0"/>
-          </a:p>
-        </p:txBody>
-      </p:sp>
-      <p:sp>
-        <p:nvSpPr>
-          <p:cNvPr id="10" name="Text 7"/>
-          <p:cNvSpPr/>
-          <p:nvPr/>
-        </p:nvSpPr>
-        <p:spPr>
-          <a:xfrm>
-            <a:off x="960120" y="2286000"/>
-            <a:ext cx="4663440" cy="1188720"/>
+          <p:cNvPr id="13" name="Text 10"/>
+          <p:cNvSpPr/>
+          <p:nvPr/>
+        </p:nvSpPr>
+        <p:spPr>
+          <a:xfrm>
+            <a:off x="7223760" y="2834640"/>
+            <a:ext cx="4023360" cy="1508760"/>
           </a:xfrm>
           <a:prstGeom prst="rect">
             <a:avLst/>
@@ -3032,7 +3129,7 @@
                 <a:ea typeface="Calibri" pitchFamily="34" charset="-122"/>
                 <a:cs typeface="Calibri" pitchFamily="34" charset="-120"/>
               </a:rPr>
-              <a:t>Add a line to README.md, then add → commit → push. Confirm the change shows up on github.com.</a:t>
+              <a:t>Do it once a day, or every time something works that didn't before. Write commit messages that say what changed and why.</a:t>
             </a:r>
             <a:endParaRPr lang="en-US" sz="2000" dirty="0"/>
           </a:p>
@@ -3040,18 +3137,18 @@
       </p:sp>
       <p:sp>
         <p:nvSpPr>
-          <p:cNvPr id="11" name="Shape 8"/>
-          <p:cNvSpPr/>
-          <p:nvPr/>
-        </p:nvSpPr>
-        <p:spPr>
-          <a:xfrm>
-            <a:off x="6217920" y="1463040"/>
-            <a:ext cx="5303520" cy="2286000"/>
+          <p:cNvPr id="14" name="Shape 11"/>
+          <p:cNvSpPr/>
+          <p:nvPr/>
+        </p:nvSpPr>
+        <p:spPr>
+          <a:xfrm>
+            <a:off x="640080" y="4709160"/>
+            <a:ext cx="10881360" cy="1371600"/>
           </a:xfrm>
           <a:prstGeom prst="roundRect">
             <a:avLst>
-              <a:gd name="adj" fmla="val 4800"/>
+              <a:gd name="adj" fmla="val 8000"/>
             </a:avLst>
           </a:prstGeom>
           <a:solidFill>
@@ -3062,34 +3159,14 @@
       </p:sp>
       <p:sp>
         <p:nvSpPr>
-          <p:cNvPr id="12" name="Shape 9"/>
-          <p:cNvSpPr/>
-          <p:nvPr/>
-        </p:nvSpPr>
-        <p:spPr>
-          <a:xfrm>
-            <a:off x="6537960" y="1691640"/>
-            <a:ext cx="457200" cy="457200"/>
-          </a:xfrm>
-          <a:prstGeom prst="ellipse">
-            <a:avLst/>
-          </a:prstGeom>
-          <a:solidFill>
-            <a:srgbClr val="1B9AAA"/>
-          </a:solidFill>
-          <a:ln/>
-        </p:spPr>
-      </p:sp>
-      <p:sp>
-        <p:nvSpPr>
-          <p:cNvPr id="13" name="Text 10"/>
-          <p:cNvSpPr/>
-          <p:nvPr/>
-        </p:nvSpPr>
-        <p:spPr>
-          <a:xfrm>
-            <a:off x="6537960" y="1691640"/>
-            <a:ext cx="457200" cy="457200"/>
+          <p:cNvPr id="15" name="Text 12"/>
+          <p:cNvSpPr/>
+          <p:nvPr/>
+        </p:nvSpPr>
+        <p:spPr>
+          <a:xfrm>
+            <a:off x="914400" y="4709160"/>
+            <a:ext cx="10332720" cy="1371600"/>
           </a:xfrm>
           <a:prstGeom prst="rect">
             <a:avLst/>
@@ -3099,87 +3176,6 @@
         </p:spPr>
         <p:txBody>
           <a:bodyPr wrap="square" lIns="0" tIns="0" rIns="0" bIns="0" rtlCol="0" anchor="ctr"/>
-          <a:lstStyle/>
-          <a:p>
-            <a:pPr algn="ctr" indent="0" marL="0">
-              <a:buNone/>
-            </a:pPr>
-            <a:r>
-              <a:rPr lang="en-US" sz="2200" b="1" dirty="0">
-                <a:solidFill>
-                  <a:srgbClr val="FFFFFF"/>
-                </a:solidFill>
-                <a:latin typeface="Cambria" pitchFamily="34" charset="0"/>
-                <a:ea typeface="Cambria" pitchFamily="34" charset="-122"/>
-                <a:cs typeface="Cambria" pitchFamily="34" charset="-120"/>
-              </a:rPr>
-              <a:t>2</a:t>
-            </a:r>
-            <a:endParaRPr lang="en-US" sz="2200" dirty="0"/>
-          </a:p>
-        </p:txBody>
-      </p:sp>
-      <p:sp>
-        <p:nvSpPr>
-          <p:cNvPr id="14" name="Text 11"/>
-          <p:cNvSpPr/>
-          <p:nvPr/>
-        </p:nvSpPr>
-        <p:spPr>
-          <a:xfrm>
-            <a:off x="7178040" y="1691640"/>
-            <a:ext cx="4023360" cy="457200"/>
-          </a:xfrm>
-          <a:prstGeom prst="rect">
-            <a:avLst/>
-          </a:prstGeom>
-          <a:noFill/>
-          <a:ln/>
-        </p:spPr>
-        <p:txBody>
-          <a:bodyPr wrap="square" lIns="0" tIns="0" rIns="0" bIns="0" rtlCol="0" anchor="ctr"/>
-          <a:lstStyle/>
-          <a:p>
-            <a:pPr indent="0" marL="0">
-              <a:lnSpc>
-                <a:spcPct val="110000"/>
-              </a:lnSpc>
-              <a:buNone/>
-            </a:pPr>
-            <a:r>
-              <a:rPr lang="en-US" sz="2000" b="1" dirty="0">
-                <a:solidFill>
-                  <a:srgbClr val="FFFFFF"/>
-                </a:solidFill>
-                <a:latin typeface="Cambria" pitchFamily="34" charset="0"/>
-                <a:ea typeface="Cambria" pitchFamily="34" charset="-122"/>
-                <a:cs typeface="Cambria" pitchFamily="34" charset="-120"/>
-              </a:rPr>
-              <a:t>Simulate a dead laptop</a:t>
-            </a:r>
-            <a:endParaRPr lang="en-US" sz="2000" dirty="0"/>
-          </a:p>
-        </p:txBody>
-      </p:sp>
-      <p:sp>
-        <p:nvSpPr>
-          <p:cNvPr id="15" name="Text 12"/>
-          <p:cNvSpPr/>
-          <p:nvPr/>
-        </p:nvSpPr>
-        <p:spPr>
-          <a:xfrm>
-            <a:off x="6537960" y="2286000"/>
-            <a:ext cx="4663440" cy="1188720"/>
-          </a:xfrm>
-          <a:prstGeom prst="rect">
-            <a:avLst/>
-          </a:prstGeom>
-          <a:noFill/>
-          <a:ln/>
-        </p:spPr>
-        <p:txBody>
-          <a:bodyPr wrap="square" lIns="0" tIns="0" rIns="0" bIns="0" rtlCol="0" anchor="t"/>
           <a:lstStyle/>
           <a:p>
             <a:pPr indent="0" marL="0">
@@ -3189,7 +3185,7 @@
               <a:buNone/>
             </a:pPr>
             <a:r>
-              <a:rPr lang="en-US" sz="2000" dirty="0">
+              <a:rPr lang="en-US" sz="2100" i="1" dirty="0">
                 <a:solidFill>
                   <a:srgbClr val="CADCE8"/>
                 </a:solidFill>
@@ -3197,64 +3193,22 @@
                 <a:ea typeface="Calibri" pitchFamily="34" charset="-122"/>
                 <a:cs typeface="Calibri" pitchFamily="34" charset="-120"/>
               </a:rPr>
-              <a:t>Clone your own repo into a fresh folder and build it. If it builds, GitHub really is a full backup.</a:t>
-            </a:r>
-            <a:endParaRPr lang="en-US" sz="2000" dirty="0"/>
-          </a:p>
-        </p:txBody>
-      </p:sp>
-      <p:sp>
-        <p:nvSpPr>
-          <p:cNvPr id="16" name="Shape 13"/>
-          <p:cNvSpPr/>
-          <p:nvPr/>
-        </p:nvSpPr>
-        <p:spPr>
-          <a:xfrm>
-            <a:off x="640080" y="4023360"/>
-            <a:ext cx="5303520" cy="2286000"/>
-          </a:xfrm>
-          <a:prstGeom prst="roundRect">
-            <a:avLst>
-              <a:gd name="adj" fmla="val 4800"/>
-            </a:avLst>
-          </a:prstGeom>
-          <a:solidFill>
-            <a:srgbClr val="132A4C"/>
-          </a:solidFill>
-          <a:ln/>
-        </p:spPr>
-      </p:sp>
-      <p:sp>
-        <p:nvSpPr>
-          <p:cNvPr id="17" name="Shape 14"/>
-          <p:cNvSpPr/>
-          <p:nvPr/>
-        </p:nvSpPr>
-        <p:spPr>
-          <a:xfrm>
-            <a:off x="960120" y="4251960"/>
-            <a:ext cx="457200" cy="457200"/>
-          </a:xfrm>
-          <a:prstGeom prst="ellipse">
-            <a:avLst/>
-          </a:prstGeom>
-          <a:solidFill>
-            <a:srgbClr val="1B9AAA"/>
-          </a:solidFill>
-          <a:ln/>
-        </p:spPr>
-      </p:sp>
-      <p:sp>
-        <p:nvSpPr>
-          <p:cNvPr id="18" name="Text 15"/>
-          <p:cNvSpPr/>
-          <p:nvPr/>
-        </p:nvSpPr>
-        <p:spPr>
-          <a:xfrm>
-            <a:off x="960120" y="4251960"/>
-            <a:ext cx="457200" cy="457200"/>
+              <a:t>A push that reports a merge conflict isn't an error — Git found two edits close together and won't guess which wins. Mark the file resolved with git add, then git commit to finish.</a:t>
+            </a:r>
+            <a:endParaRPr lang="en-US" sz="2100" dirty="0"/>
+          </a:p>
+        </p:txBody>
+      </p:sp>
+      <p:sp>
+        <p:nvSpPr>
+          <p:cNvPr id="16" name="Text 13"/>
+          <p:cNvSpPr/>
+          <p:nvPr/>
+        </p:nvSpPr>
+        <p:spPr>
+          <a:xfrm>
+            <a:off x="640080" y="6446520"/>
+            <a:ext cx="8229600" cy="365760"/>
           </a:xfrm>
           <a:prstGeom prst="rect">
             <a:avLst/>
@@ -3266,103 +3220,19 @@
           <a:bodyPr wrap="square" lIns="0" tIns="0" rIns="0" bIns="0" rtlCol="0" anchor="ctr"/>
           <a:lstStyle/>
           <a:p>
-            <a:pPr algn="ctr" indent="0" marL="0">
-              <a:buNone/>
-            </a:pPr>
-            <a:r>
-              <a:rPr lang="en-US" sz="2200" b="1" dirty="0">
-                <a:solidFill>
-                  <a:srgbClr val="FFFFFF"/>
-                </a:solidFill>
-                <a:latin typeface="Cambria" pitchFamily="34" charset="0"/>
-                <a:ea typeface="Cambria" pitchFamily="34" charset="-122"/>
-                <a:cs typeface="Cambria" pitchFamily="34" charset="-120"/>
-              </a:rPr>
-              <a:t>3</a:t>
-            </a:r>
-            <a:endParaRPr lang="en-US" sz="2200" dirty="0"/>
-          </a:p>
-        </p:txBody>
-      </p:sp>
-      <p:sp>
-        <p:nvSpPr>
-          <p:cNvPr id="19" name="Text 16"/>
-          <p:cNvSpPr/>
-          <p:nvPr/>
-        </p:nvSpPr>
-        <p:spPr>
-          <a:xfrm>
-            <a:off x="1600200" y="4251960"/>
-            <a:ext cx="4023360" cy="457200"/>
-          </a:xfrm>
-          <a:prstGeom prst="rect">
-            <a:avLst/>
-          </a:prstGeom>
-          <a:noFill/>
-          <a:ln/>
-        </p:spPr>
-        <p:txBody>
-          <a:bodyPr wrap="square" lIns="0" tIns="0" rIns="0" bIns="0" rtlCol="0" anchor="ctr"/>
-          <a:lstStyle/>
-          <a:p>
-            <a:pPr indent="0" marL="0">
-              <a:lnSpc>
-                <a:spcPct val="110000"/>
-              </a:lnSpc>
-              <a:buNone/>
-            </a:pPr>
-            <a:r>
-              <a:rPr lang="en-US" sz="2000" b="1" dirty="0">
-                <a:solidFill>
-                  <a:srgbClr val="FFFFFF"/>
-                </a:solidFill>
-                <a:latin typeface="Cambria" pitchFamily="34" charset="0"/>
-                <a:ea typeface="Cambria" pitchFamily="34" charset="-122"/>
-                <a:cs typeface="Cambria" pitchFamily="34" charset="-120"/>
-              </a:rPr>
-              <a:t>.gitignore sanity check</a:t>
-            </a:r>
-            <a:endParaRPr lang="en-US" sz="2000" dirty="0"/>
-          </a:p>
-        </p:txBody>
-      </p:sp>
-      <p:sp>
-        <p:nvSpPr>
-          <p:cNvPr id="20" name="Text 17"/>
-          <p:cNvSpPr/>
-          <p:nvPr/>
-        </p:nvSpPr>
-        <p:spPr>
-          <a:xfrm>
-            <a:off x="960120" y="4846320"/>
-            <a:ext cx="4663440" cy="1188720"/>
-          </a:xfrm>
-          <a:prstGeom prst="rect">
-            <a:avLst/>
-          </a:prstGeom>
-          <a:noFill/>
-          <a:ln/>
-        </p:spPr>
-        <p:txBody>
-          <a:bodyPr wrap="square" lIns="0" tIns="0" rIns="0" bIns="0" rtlCol="0" anchor="t"/>
-          <a:lstStyle/>
-          <a:p>
-            <a:pPr indent="0" marL="0">
-              <a:lnSpc>
-                <a:spcPct val="125000"/>
-              </a:lnSpc>
-              <a:buNone/>
-            </a:pPr>
-            <a:r>
-              <a:rPr lang="en-US" sz="2000" dirty="0">
-                <a:solidFill>
-                  <a:srgbClr val="CADCE8"/>
+            <a:pPr indent="0" marL="0">
+              <a:buNone/>
+            </a:pPr>
+            <a:r>
+              <a:rPr lang="en-US" sz="2000" spc="100" kern="0" dirty="0">
+                <a:solidFill>
+                  <a:srgbClr val="7A93B8"/>
                 </a:solidFill>
                 <a:latin typeface="Calibri" pitchFamily="34" charset="0"/>
                 <a:ea typeface="Calibri" pitchFamily="34" charset="-122"/>
                 <a:cs typeface="Calibri" pitchFamily="34" charset="-120"/>
               </a:rPr>
-              <a:t>Run a build, then git status. build/ and .gradle/ shouldn't show up as untracked.</a:t>
+              <a:t>LEARN JAVA + ROBOT PROGRAMMING · SETUP</a:t>
             </a:r>
             <a:endParaRPr lang="en-US" sz="2000" dirty="0"/>
           </a:p>
@@ -3370,56 +3240,14 @@
       </p:sp>
       <p:sp>
         <p:nvSpPr>
-          <p:cNvPr id="21" name="Shape 18"/>
-          <p:cNvSpPr/>
-          <p:nvPr/>
-        </p:nvSpPr>
-        <p:spPr>
-          <a:xfrm>
-            <a:off x="6217920" y="4023360"/>
-            <a:ext cx="5303520" cy="2286000"/>
-          </a:xfrm>
-          <a:prstGeom prst="roundRect">
-            <a:avLst>
-              <a:gd name="adj" fmla="val 4800"/>
-            </a:avLst>
-          </a:prstGeom>
-          <a:solidFill>
-            <a:srgbClr val="132A4C"/>
-          </a:solidFill>
-          <a:ln/>
-        </p:spPr>
-      </p:sp>
-      <p:sp>
-        <p:nvSpPr>
-          <p:cNvPr id="22" name="Shape 19"/>
-          <p:cNvSpPr/>
-          <p:nvPr/>
-        </p:nvSpPr>
-        <p:spPr>
-          <a:xfrm>
-            <a:off x="6537960" y="4251960"/>
-            <a:ext cx="457200" cy="457200"/>
-          </a:xfrm>
-          <a:prstGeom prst="ellipse">
-            <a:avLst/>
-          </a:prstGeom>
-          <a:solidFill>
-            <a:srgbClr val="1B9AAA"/>
-          </a:solidFill>
-          <a:ln/>
-        </p:spPr>
-      </p:sp>
-      <p:sp>
-        <p:nvSpPr>
-          <p:cNvPr id="23" name="Text 20"/>
-          <p:cNvSpPr/>
-          <p:nvPr/>
-        </p:nvSpPr>
-        <p:spPr>
-          <a:xfrm>
-            <a:off x="6537960" y="4251960"/>
-            <a:ext cx="457200" cy="457200"/>
+          <p:cNvPr id="17" name="Text 14"/>
+          <p:cNvSpPr/>
+          <p:nvPr/>
+        </p:nvSpPr>
+        <p:spPr>
+          <a:xfrm>
+            <a:off x="11002975" y="6446520"/>
+            <a:ext cx="548640" cy="365760"/>
           </a:xfrm>
           <a:prstGeom prst="rect">
             <a:avLst/>
@@ -3431,180 +3259,18 @@
           <a:bodyPr wrap="square" lIns="0" tIns="0" rIns="0" bIns="0" rtlCol="0" anchor="ctr"/>
           <a:lstStyle/>
           <a:p>
-            <a:pPr algn="ctr" indent="0" marL="0">
-              <a:buNone/>
-            </a:pPr>
-            <a:r>
-              <a:rPr lang="en-US" sz="2200" b="1" dirty="0">
-                <a:solidFill>
-                  <a:srgbClr val="FFFFFF"/>
-                </a:solidFill>
-                <a:latin typeface="Cambria" pitchFamily="34" charset="0"/>
-                <a:ea typeface="Cambria" pitchFamily="34" charset="-122"/>
-                <a:cs typeface="Cambria" pitchFamily="34" charset="-120"/>
-              </a:rPr>
-              <a:t>4</a:t>
-            </a:r>
-            <a:endParaRPr lang="en-US" sz="2200" dirty="0"/>
-          </a:p>
-        </p:txBody>
-      </p:sp>
-      <p:sp>
-        <p:nvSpPr>
-          <p:cNvPr id="24" name="Text 21"/>
-          <p:cNvSpPr/>
-          <p:nvPr/>
-        </p:nvSpPr>
-        <p:spPr>
-          <a:xfrm>
-            <a:off x="7178040" y="4251960"/>
-            <a:ext cx="4023360" cy="457200"/>
-          </a:xfrm>
-          <a:prstGeom prst="rect">
-            <a:avLst/>
-          </a:prstGeom>
-          <a:noFill/>
-          <a:ln/>
-        </p:spPr>
-        <p:txBody>
-          <a:bodyPr wrap="square" lIns="0" tIns="0" rIns="0" bIns="0" rtlCol="0" anchor="ctr"/>
-          <a:lstStyle/>
-          <a:p>
-            <a:pPr indent="0" marL="0">
-              <a:lnSpc>
-                <a:spcPct val="110000"/>
-              </a:lnSpc>
-              <a:buNone/>
-            </a:pPr>
-            <a:r>
-              <a:rPr lang="en-US" sz="2000" b="1" dirty="0">
-                <a:solidFill>
-                  <a:srgbClr val="FFFFFF"/>
-                </a:solidFill>
-                <a:latin typeface="Cambria" pitchFamily="34" charset="0"/>
-                <a:ea typeface="Cambria" pitchFamily="34" charset="-122"/>
-                <a:cs typeface="Cambria" pitchFamily="34" charset="-120"/>
-              </a:rPr>
-              <a:t>Regenerate and compare</a:t>
-            </a:r>
-            <a:endParaRPr lang="en-US" sz="2000" dirty="0"/>
-          </a:p>
-        </p:txBody>
-      </p:sp>
-      <p:sp>
-        <p:nvSpPr>
-          <p:cNvPr id="25" name="Text 22"/>
-          <p:cNvSpPr/>
-          <p:nvPr/>
-        </p:nvSpPr>
-        <p:spPr>
-          <a:xfrm>
-            <a:off x="6537960" y="4846320"/>
-            <a:ext cx="4663440" cy="1188720"/>
-          </a:xfrm>
-          <a:prstGeom prst="rect">
-            <a:avLst/>
-          </a:prstGeom>
-          <a:noFill/>
-          <a:ln/>
-        </p:spPr>
-        <p:txBody>
-          <a:bodyPr wrap="square" lIns="0" tIns="0" rIns="0" bIns="0" rtlCol="0" anchor="t"/>
-          <a:lstStyle/>
-          <a:p>
-            <a:pPr indent="0" marL="0">
-              <a:lnSpc>
-                <a:spcPct val="125000"/>
-              </a:lnSpc>
+            <a:pPr algn="r" indent="0" marL="0">
               <a:buNone/>
             </a:pPr>
             <a:r>
               <a:rPr lang="en-US" sz="2000" dirty="0">
                 <a:solidFill>
-                  <a:srgbClr val="CADCE8"/>
+                  <a:srgbClr val="7A93B8"/>
                 </a:solidFill>
                 <a:latin typeface="Calibri" pitchFamily="34" charset="0"/>
                 <a:ea typeface="Calibri" pitchFamily="34" charset="-122"/>
                 <a:cs typeface="Calibri" pitchFamily="34" charset="-120"/>
               </a:rPr>
-              <a:t>Run the setup command again into a new folder. It should match your real project exactly.</a:t>
-            </a:r>
-            <a:endParaRPr lang="en-US" sz="2000" dirty="0"/>
-          </a:p>
-        </p:txBody>
-      </p:sp>
-      <p:sp>
-        <p:nvSpPr>
-          <p:cNvPr id="26" name="Text 23"/>
-          <p:cNvSpPr/>
-          <p:nvPr/>
-        </p:nvSpPr>
-        <p:spPr>
-          <a:xfrm>
-            <a:off x="640080" y="6446520"/>
-            <a:ext cx="8229600" cy="365760"/>
-          </a:xfrm>
-          <a:prstGeom prst="rect">
-            <a:avLst/>
-          </a:prstGeom>
-          <a:noFill/>
-          <a:ln/>
-        </p:spPr>
-        <p:txBody>
-          <a:bodyPr wrap="square" lIns="0" tIns="0" rIns="0" bIns="0" rtlCol="0" anchor="ctr"/>
-          <a:lstStyle/>
-          <a:p>
-            <a:pPr indent="0" marL="0">
-              <a:buNone/>
-            </a:pPr>
-            <a:r>
-              <a:rPr lang="en-US" sz="2000" spc="100" kern="0" dirty="0">
-                <a:solidFill>
-                  <a:srgbClr val="7A93B8"/>
-                </a:solidFill>
-                <a:latin typeface="Calibri" pitchFamily="34" charset="0"/>
-                <a:ea typeface="Calibri" pitchFamily="34" charset="-122"/>
-                <a:cs typeface="Calibri" pitchFamily="34" charset="-120"/>
-              </a:rPr>
-              <a:t>LEARN JAVA + ROBOT PROGRAMMING · SETUP</a:t>
-            </a:r>
-            <a:endParaRPr lang="en-US" sz="2000" dirty="0"/>
-          </a:p>
-        </p:txBody>
-      </p:sp>
-      <p:sp>
-        <p:nvSpPr>
-          <p:cNvPr id="27" name="Text 24"/>
-          <p:cNvSpPr/>
-          <p:nvPr/>
-        </p:nvSpPr>
-        <p:spPr>
-          <a:xfrm>
-            <a:off x="11002975" y="6446520"/>
-            <a:ext cx="548640" cy="365760"/>
-          </a:xfrm>
-          <a:prstGeom prst="rect">
-            <a:avLst/>
-          </a:prstGeom>
-          <a:noFill/>
-          <a:ln/>
-        </p:spPr>
-        <p:txBody>
-          <a:bodyPr wrap="square" lIns="0" tIns="0" rIns="0" bIns="0" rtlCol="0" anchor="ctr"/>
-          <a:lstStyle/>
-          <a:p>
-            <a:pPr algn="r" indent="0" marL="0">
-              <a:buNone/>
-            </a:pPr>
-            <a:r>
-              <a:rPr lang="en-US" sz="2000" dirty="0">
-                <a:solidFill>
-                  <a:srgbClr val="7A93B8"/>
-                </a:solidFill>
-                <a:latin typeface="Calibri" pitchFamily="34" charset="0"/>
-                <a:ea typeface="Calibri" pitchFamily="34" charset="-122"/>
-                <a:cs typeface="Calibri" pitchFamily="34" charset="-120"/>
-              </a:rPr>
               <a:t>11</a:t>
             </a:r>
             <a:endParaRPr lang="en-US" sz="2000" dirty="0"/>
@@ -3613,7 +3279,7 @@
       </p:sp>
       <p:pic>
         <p:nvPicPr>
-          <p:cNvPr id="28" name="Image 1" descr="/home/user/BasicRobotLessons/docs/presentations/v3/template/assets/logo/team5010-logo-onnavy.png">    </p:cNvPr>
+          <p:cNvPr id="18" name="Image 1" descr="/home/user/BasicRobotLessons/docs/presentations/v3/template/assets/logo/team5010-logo-onnavy.png">    </p:cNvPr>
           <p:cNvPicPr>
             <a:picLocks noChangeAspect="1"/>
           </p:cNvPicPr>
@@ -3646,6 +3312,922 @@
 <file path=ppt/slides/slide12.xml><?xml version="1.0" encoding="utf-8"?>
 <p:sld xmlns:a="http://schemas.openxmlformats.org/drawingml/2006/main" xmlns:r="http://schemas.openxmlformats.org/officeDocument/2006/relationships" xmlns:p="http://schemas.openxmlformats.org/presentationml/2006/main">
   <p:cSld name="Slide 12">
+    <p:bg>
+      <p:bgPr>
+        <a:solidFill>
+          <a:srgbClr val="0B1F3A"/>
+        </a:solidFill>
+      </p:bgPr>
+    </p:bg>
+    <p:spTree>
+      <p:nvGrpSpPr>
+        <p:cNvPr id="1" name=""/>
+        <p:cNvGrpSpPr/>
+        <p:nvPr/>
+      </p:nvGrpSpPr>
+      <p:grpSpPr>
+        <a:xfrm>
+          <a:off x="0" y="0"/>
+          <a:ext cx="0" cy="0"/>
+          <a:chOff x="0" y="0"/>
+          <a:chExt cx="0" cy="0"/>
+        </a:xfrm>
+      </p:grpSpPr>
+      <p:sp>
+        <p:nvSpPr>
+          <p:cNvPr id="2" name="Shape 0"/>
+          <p:cNvSpPr/>
+          <p:nvPr/>
+        </p:nvSpPr>
+        <p:spPr>
+          <a:xfrm>
+            <a:off x="640080" y="457200"/>
+            <a:ext cx="566928" cy="566928"/>
+          </a:xfrm>
+          <a:prstGeom prst="ellipse">
+            <a:avLst/>
+          </a:prstGeom>
+          <a:solidFill>
+            <a:srgbClr val="FF5010"/>
+          </a:solidFill>
+          <a:ln/>
+        </p:spPr>
+      </p:sp>
+      <p:pic>
+        <p:nvPicPr>
+          <p:cNvPr id="3" name="Image 0" descr="/home/user/BasicRobotLessons/docs/presentations/v3/template/assets/icons/clipboardcheck_white.png">    </p:cNvPr>
+          <p:cNvPicPr>
+            <a:picLocks noChangeAspect="1"/>
+          </p:cNvPicPr>
+          <p:nvPr/>
+        </p:nvPicPr>
+        <p:blipFill>
+          <a:blip r:embed="rId1"/>
+          <a:stretch>
+            <a:fillRect/>
+          </a:stretch>
+        </p:blipFill>
+        <p:spPr>
+          <a:xfrm>
+            <a:off x="768096" y="585216"/>
+            <a:ext cx="310896" cy="310896"/>
+          </a:xfrm>
+          <a:prstGeom prst="rect">
+            <a:avLst/>
+          </a:prstGeom>
+        </p:spPr>
+      </p:pic>
+      <p:sp>
+        <p:nvSpPr>
+          <p:cNvPr id="4" name="Text 1"/>
+          <p:cNvSpPr/>
+          <p:nvPr/>
+        </p:nvSpPr>
+        <p:spPr>
+          <a:xfrm>
+            <a:off x="1389888" y="402336"/>
+            <a:ext cx="9144000" cy="365760"/>
+          </a:xfrm>
+          <a:prstGeom prst="rect">
+            <a:avLst/>
+          </a:prstGeom>
+          <a:noFill/>
+          <a:ln/>
+        </p:spPr>
+        <p:txBody>
+          <a:bodyPr wrap="square" lIns="0" tIns="0" rIns="0" bIns="0" rtlCol="0" anchor="ctr"/>
+          <a:lstStyle/>
+          <a:p>
+            <a:pPr indent="0" marL="0">
+              <a:buNone/>
+            </a:pPr>
+            <a:r>
+              <a:rPr lang="en-US" sz="2000" b="1" spc="100" kern="0" dirty="0">
+                <a:solidFill>
+                  <a:srgbClr val="1B9AAA"/>
+                </a:solidFill>
+                <a:latin typeface="Calibri" pitchFamily="34" charset="0"/>
+                <a:ea typeface="Calibri" pitchFamily="34" charset="-122"/>
+                <a:cs typeface="Calibri" pitchFamily="34" charset="-120"/>
+              </a:rPr>
+              <a:t>BEFORE YOU MOVE ON</a:t>
+            </a:r>
+            <a:endParaRPr lang="en-US" sz="2000" dirty="0"/>
+          </a:p>
+        </p:txBody>
+      </p:sp>
+      <p:sp>
+        <p:nvSpPr>
+          <p:cNvPr id="5" name="Text 2"/>
+          <p:cNvSpPr/>
+          <p:nvPr/>
+        </p:nvSpPr>
+        <p:spPr>
+          <a:xfrm>
+            <a:off x="1371600" y="749808"/>
+            <a:ext cx="9418320" cy="594360"/>
+          </a:xfrm>
+          <a:prstGeom prst="rect">
+            <a:avLst/>
+          </a:prstGeom>
+          <a:noFill/>
+          <a:ln/>
+        </p:spPr>
+        <p:txBody>
+          <a:bodyPr wrap="square" lIns="0" tIns="0" rIns="0" bIns="0" rtlCol="0" anchor="ctr"/>
+          <a:lstStyle/>
+          <a:p>
+            <a:pPr indent="0" marL="0">
+              <a:buNone/>
+            </a:pPr>
+            <a:r>
+              <a:rPr lang="en-US" sz="3000" b="1" dirty="0">
+                <a:solidFill>
+                  <a:srgbClr val="FFFFFF"/>
+                </a:solidFill>
+                <a:latin typeface="Cambria" pitchFamily="34" charset="0"/>
+                <a:ea typeface="Cambria" pitchFamily="34" charset="-122"/>
+                <a:cs typeface="Cambria" pitchFamily="34" charset="-120"/>
+              </a:rPr>
+              <a:t>Try it</a:t>
+            </a:r>
+            <a:endParaRPr lang="en-US" sz="3000" dirty="0"/>
+          </a:p>
+        </p:txBody>
+      </p:sp>
+      <p:sp>
+        <p:nvSpPr>
+          <p:cNvPr id="6" name="Shape 3"/>
+          <p:cNvSpPr/>
+          <p:nvPr/>
+        </p:nvSpPr>
+        <p:spPr>
+          <a:xfrm>
+            <a:off x="640080" y="1463040"/>
+            <a:ext cx="5303520" cy="2286000"/>
+          </a:xfrm>
+          <a:prstGeom prst="roundRect">
+            <a:avLst>
+              <a:gd name="adj" fmla="val 4800"/>
+            </a:avLst>
+          </a:prstGeom>
+          <a:solidFill>
+            <a:srgbClr val="132A4C"/>
+          </a:solidFill>
+          <a:ln/>
+        </p:spPr>
+      </p:sp>
+      <p:sp>
+        <p:nvSpPr>
+          <p:cNvPr id="7" name="Shape 4"/>
+          <p:cNvSpPr/>
+          <p:nvPr/>
+        </p:nvSpPr>
+        <p:spPr>
+          <a:xfrm>
+            <a:off x="960120" y="1691640"/>
+            <a:ext cx="457200" cy="457200"/>
+          </a:xfrm>
+          <a:prstGeom prst="ellipse">
+            <a:avLst/>
+          </a:prstGeom>
+          <a:solidFill>
+            <a:srgbClr val="1B9AAA"/>
+          </a:solidFill>
+          <a:ln/>
+        </p:spPr>
+      </p:sp>
+      <p:sp>
+        <p:nvSpPr>
+          <p:cNvPr id="8" name="Text 5"/>
+          <p:cNvSpPr/>
+          <p:nvPr/>
+        </p:nvSpPr>
+        <p:spPr>
+          <a:xfrm>
+            <a:off x="960120" y="1691640"/>
+            <a:ext cx="457200" cy="457200"/>
+          </a:xfrm>
+          <a:prstGeom prst="rect">
+            <a:avLst/>
+          </a:prstGeom>
+          <a:noFill/>
+          <a:ln/>
+        </p:spPr>
+        <p:txBody>
+          <a:bodyPr wrap="square" lIns="0" tIns="0" rIns="0" bIns="0" rtlCol="0" anchor="ctr"/>
+          <a:lstStyle/>
+          <a:p>
+            <a:pPr algn="ctr" indent="0" marL="0">
+              <a:buNone/>
+            </a:pPr>
+            <a:r>
+              <a:rPr lang="en-US" sz="2200" b="1" dirty="0">
+                <a:solidFill>
+                  <a:srgbClr val="FFFFFF"/>
+                </a:solidFill>
+                <a:latin typeface="Cambria" pitchFamily="34" charset="0"/>
+                <a:ea typeface="Cambria" pitchFamily="34" charset="-122"/>
+                <a:cs typeface="Cambria" pitchFamily="34" charset="-120"/>
+              </a:rPr>
+              <a:t>1</a:t>
+            </a:r>
+            <a:endParaRPr lang="en-US" sz="2200" dirty="0"/>
+          </a:p>
+        </p:txBody>
+      </p:sp>
+      <p:sp>
+        <p:nvSpPr>
+          <p:cNvPr id="9" name="Text 6"/>
+          <p:cNvSpPr/>
+          <p:nvPr/>
+        </p:nvSpPr>
+        <p:spPr>
+          <a:xfrm>
+            <a:off x="1600200" y="1691640"/>
+            <a:ext cx="4023360" cy="457200"/>
+          </a:xfrm>
+          <a:prstGeom prst="rect">
+            <a:avLst/>
+          </a:prstGeom>
+          <a:noFill/>
+          <a:ln/>
+        </p:spPr>
+        <p:txBody>
+          <a:bodyPr wrap="square" lIns="0" tIns="0" rIns="0" bIns="0" rtlCol="0" anchor="ctr"/>
+          <a:lstStyle/>
+          <a:p>
+            <a:pPr indent="0" marL="0">
+              <a:lnSpc>
+                <a:spcPct val="110000"/>
+              </a:lnSpc>
+              <a:buNone/>
+            </a:pPr>
+            <a:r>
+              <a:rPr lang="en-US" sz="2000" b="1" dirty="0">
+                <a:solidFill>
+                  <a:srgbClr val="FFFFFF"/>
+                </a:solidFill>
+                <a:latin typeface="Cambria" pitchFamily="34" charset="0"/>
+                <a:ea typeface="Cambria" pitchFamily="34" charset="-122"/>
+                <a:cs typeface="Cambria" pitchFamily="34" charset="-120"/>
+              </a:rPr>
+              <a:t>Prove the round trip</a:t>
+            </a:r>
+            <a:endParaRPr lang="en-US" sz="2000" dirty="0"/>
+          </a:p>
+        </p:txBody>
+      </p:sp>
+      <p:sp>
+        <p:nvSpPr>
+          <p:cNvPr id="10" name="Text 7"/>
+          <p:cNvSpPr/>
+          <p:nvPr/>
+        </p:nvSpPr>
+        <p:spPr>
+          <a:xfrm>
+            <a:off x="960120" y="2286000"/>
+            <a:ext cx="4663440" cy="1188720"/>
+          </a:xfrm>
+          <a:prstGeom prst="rect">
+            <a:avLst/>
+          </a:prstGeom>
+          <a:noFill/>
+          <a:ln/>
+        </p:spPr>
+        <p:txBody>
+          <a:bodyPr wrap="square" lIns="0" tIns="0" rIns="0" bIns="0" rtlCol="0" anchor="t"/>
+          <a:lstStyle/>
+          <a:p>
+            <a:pPr indent="0" marL="0">
+              <a:lnSpc>
+                <a:spcPct val="125000"/>
+              </a:lnSpc>
+              <a:buNone/>
+            </a:pPr>
+            <a:r>
+              <a:rPr lang="en-US" sz="2000" dirty="0">
+                <a:solidFill>
+                  <a:srgbClr val="CADCE8"/>
+                </a:solidFill>
+                <a:latin typeface="Calibri" pitchFamily="34" charset="0"/>
+                <a:ea typeface="Calibri" pitchFamily="34" charset="-122"/>
+                <a:cs typeface="Calibri" pitchFamily="34" charset="-120"/>
+              </a:rPr>
+              <a:t>Add a line to README.md, then add → commit → push. Confirm the change shows up on github.com.</a:t>
+            </a:r>
+            <a:endParaRPr lang="en-US" sz="2000" dirty="0"/>
+          </a:p>
+        </p:txBody>
+      </p:sp>
+      <p:sp>
+        <p:nvSpPr>
+          <p:cNvPr id="11" name="Shape 8"/>
+          <p:cNvSpPr/>
+          <p:nvPr/>
+        </p:nvSpPr>
+        <p:spPr>
+          <a:xfrm>
+            <a:off x="6217920" y="1463040"/>
+            <a:ext cx="5303520" cy="2286000"/>
+          </a:xfrm>
+          <a:prstGeom prst="roundRect">
+            <a:avLst>
+              <a:gd name="adj" fmla="val 4800"/>
+            </a:avLst>
+          </a:prstGeom>
+          <a:solidFill>
+            <a:srgbClr val="132A4C"/>
+          </a:solidFill>
+          <a:ln/>
+        </p:spPr>
+      </p:sp>
+      <p:sp>
+        <p:nvSpPr>
+          <p:cNvPr id="12" name="Shape 9"/>
+          <p:cNvSpPr/>
+          <p:nvPr/>
+        </p:nvSpPr>
+        <p:spPr>
+          <a:xfrm>
+            <a:off x="6537960" y="1691640"/>
+            <a:ext cx="457200" cy="457200"/>
+          </a:xfrm>
+          <a:prstGeom prst="ellipse">
+            <a:avLst/>
+          </a:prstGeom>
+          <a:solidFill>
+            <a:srgbClr val="1B9AAA"/>
+          </a:solidFill>
+          <a:ln/>
+        </p:spPr>
+      </p:sp>
+      <p:sp>
+        <p:nvSpPr>
+          <p:cNvPr id="13" name="Text 10"/>
+          <p:cNvSpPr/>
+          <p:nvPr/>
+        </p:nvSpPr>
+        <p:spPr>
+          <a:xfrm>
+            <a:off x="6537960" y="1691640"/>
+            <a:ext cx="457200" cy="457200"/>
+          </a:xfrm>
+          <a:prstGeom prst="rect">
+            <a:avLst/>
+          </a:prstGeom>
+          <a:noFill/>
+          <a:ln/>
+        </p:spPr>
+        <p:txBody>
+          <a:bodyPr wrap="square" lIns="0" tIns="0" rIns="0" bIns="0" rtlCol="0" anchor="ctr"/>
+          <a:lstStyle/>
+          <a:p>
+            <a:pPr algn="ctr" indent="0" marL="0">
+              <a:buNone/>
+            </a:pPr>
+            <a:r>
+              <a:rPr lang="en-US" sz="2200" b="1" dirty="0">
+                <a:solidFill>
+                  <a:srgbClr val="FFFFFF"/>
+                </a:solidFill>
+                <a:latin typeface="Cambria" pitchFamily="34" charset="0"/>
+                <a:ea typeface="Cambria" pitchFamily="34" charset="-122"/>
+                <a:cs typeface="Cambria" pitchFamily="34" charset="-120"/>
+              </a:rPr>
+              <a:t>2</a:t>
+            </a:r>
+            <a:endParaRPr lang="en-US" sz="2200" dirty="0"/>
+          </a:p>
+        </p:txBody>
+      </p:sp>
+      <p:sp>
+        <p:nvSpPr>
+          <p:cNvPr id="14" name="Text 11"/>
+          <p:cNvSpPr/>
+          <p:nvPr/>
+        </p:nvSpPr>
+        <p:spPr>
+          <a:xfrm>
+            <a:off x="7178040" y="1691640"/>
+            <a:ext cx="4023360" cy="457200"/>
+          </a:xfrm>
+          <a:prstGeom prst="rect">
+            <a:avLst/>
+          </a:prstGeom>
+          <a:noFill/>
+          <a:ln/>
+        </p:spPr>
+        <p:txBody>
+          <a:bodyPr wrap="square" lIns="0" tIns="0" rIns="0" bIns="0" rtlCol="0" anchor="ctr"/>
+          <a:lstStyle/>
+          <a:p>
+            <a:pPr indent="0" marL="0">
+              <a:lnSpc>
+                <a:spcPct val="110000"/>
+              </a:lnSpc>
+              <a:buNone/>
+            </a:pPr>
+            <a:r>
+              <a:rPr lang="en-US" sz="2000" b="1" dirty="0">
+                <a:solidFill>
+                  <a:srgbClr val="FFFFFF"/>
+                </a:solidFill>
+                <a:latin typeface="Cambria" pitchFamily="34" charset="0"/>
+                <a:ea typeface="Cambria" pitchFamily="34" charset="-122"/>
+                <a:cs typeface="Cambria" pitchFamily="34" charset="-120"/>
+              </a:rPr>
+              <a:t>Simulate a dead laptop</a:t>
+            </a:r>
+            <a:endParaRPr lang="en-US" sz="2000" dirty="0"/>
+          </a:p>
+        </p:txBody>
+      </p:sp>
+      <p:sp>
+        <p:nvSpPr>
+          <p:cNvPr id="15" name="Text 12"/>
+          <p:cNvSpPr/>
+          <p:nvPr/>
+        </p:nvSpPr>
+        <p:spPr>
+          <a:xfrm>
+            <a:off x="6537960" y="2286000"/>
+            <a:ext cx="4663440" cy="1188720"/>
+          </a:xfrm>
+          <a:prstGeom prst="rect">
+            <a:avLst/>
+          </a:prstGeom>
+          <a:noFill/>
+          <a:ln/>
+        </p:spPr>
+        <p:txBody>
+          <a:bodyPr wrap="square" lIns="0" tIns="0" rIns="0" bIns="0" rtlCol="0" anchor="t"/>
+          <a:lstStyle/>
+          <a:p>
+            <a:pPr indent="0" marL="0">
+              <a:lnSpc>
+                <a:spcPct val="125000"/>
+              </a:lnSpc>
+              <a:buNone/>
+            </a:pPr>
+            <a:r>
+              <a:rPr lang="en-US" sz="2000" dirty="0">
+                <a:solidFill>
+                  <a:srgbClr val="CADCE8"/>
+                </a:solidFill>
+                <a:latin typeface="Calibri" pitchFamily="34" charset="0"/>
+                <a:ea typeface="Calibri" pitchFamily="34" charset="-122"/>
+                <a:cs typeface="Calibri" pitchFamily="34" charset="-120"/>
+              </a:rPr>
+              <a:t>Clone your own repo into a fresh folder and build it. If it builds, GitHub really is a full backup.</a:t>
+            </a:r>
+            <a:endParaRPr lang="en-US" sz="2000" dirty="0"/>
+          </a:p>
+        </p:txBody>
+      </p:sp>
+      <p:sp>
+        <p:nvSpPr>
+          <p:cNvPr id="16" name="Shape 13"/>
+          <p:cNvSpPr/>
+          <p:nvPr/>
+        </p:nvSpPr>
+        <p:spPr>
+          <a:xfrm>
+            <a:off x="640080" y="4023360"/>
+            <a:ext cx="5303520" cy="2286000"/>
+          </a:xfrm>
+          <a:prstGeom prst="roundRect">
+            <a:avLst>
+              <a:gd name="adj" fmla="val 4800"/>
+            </a:avLst>
+          </a:prstGeom>
+          <a:solidFill>
+            <a:srgbClr val="132A4C"/>
+          </a:solidFill>
+          <a:ln/>
+        </p:spPr>
+      </p:sp>
+      <p:sp>
+        <p:nvSpPr>
+          <p:cNvPr id="17" name="Shape 14"/>
+          <p:cNvSpPr/>
+          <p:nvPr/>
+        </p:nvSpPr>
+        <p:spPr>
+          <a:xfrm>
+            <a:off x="960120" y="4251960"/>
+            <a:ext cx="457200" cy="457200"/>
+          </a:xfrm>
+          <a:prstGeom prst="ellipse">
+            <a:avLst/>
+          </a:prstGeom>
+          <a:solidFill>
+            <a:srgbClr val="1B9AAA"/>
+          </a:solidFill>
+          <a:ln/>
+        </p:spPr>
+      </p:sp>
+      <p:sp>
+        <p:nvSpPr>
+          <p:cNvPr id="18" name="Text 15"/>
+          <p:cNvSpPr/>
+          <p:nvPr/>
+        </p:nvSpPr>
+        <p:spPr>
+          <a:xfrm>
+            <a:off x="960120" y="4251960"/>
+            <a:ext cx="457200" cy="457200"/>
+          </a:xfrm>
+          <a:prstGeom prst="rect">
+            <a:avLst/>
+          </a:prstGeom>
+          <a:noFill/>
+          <a:ln/>
+        </p:spPr>
+        <p:txBody>
+          <a:bodyPr wrap="square" lIns="0" tIns="0" rIns="0" bIns="0" rtlCol="0" anchor="ctr"/>
+          <a:lstStyle/>
+          <a:p>
+            <a:pPr algn="ctr" indent="0" marL="0">
+              <a:buNone/>
+            </a:pPr>
+            <a:r>
+              <a:rPr lang="en-US" sz="2200" b="1" dirty="0">
+                <a:solidFill>
+                  <a:srgbClr val="FFFFFF"/>
+                </a:solidFill>
+                <a:latin typeface="Cambria" pitchFamily="34" charset="0"/>
+                <a:ea typeface="Cambria" pitchFamily="34" charset="-122"/>
+                <a:cs typeface="Cambria" pitchFamily="34" charset="-120"/>
+              </a:rPr>
+              <a:t>3</a:t>
+            </a:r>
+            <a:endParaRPr lang="en-US" sz="2200" dirty="0"/>
+          </a:p>
+        </p:txBody>
+      </p:sp>
+      <p:sp>
+        <p:nvSpPr>
+          <p:cNvPr id="19" name="Text 16"/>
+          <p:cNvSpPr/>
+          <p:nvPr/>
+        </p:nvSpPr>
+        <p:spPr>
+          <a:xfrm>
+            <a:off x="1600200" y="4251960"/>
+            <a:ext cx="4023360" cy="457200"/>
+          </a:xfrm>
+          <a:prstGeom prst="rect">
+            <a:avLst/>
+          </a:prstGeom>
+          <a:noFill/>
+          <a:ln/>
+        </p:spPr>
+        <p:txBody>
+          <a:bodyPr wrap="square" lIns="0" tIns="0" rIns="0" bIns="0" rtlCol="0" anchor="ctr"/>
+          <a:lstStyle/>
+          <a:p>
+            <a:pPr indent="0" marL="0">
+              <a:lnSpc>
+                <a:spcPct val="110000"/>
+              </a:lnSpc>
+              <a:buNone/>
+            </a:pPr>
+            <a:r>
+              <a:rPr lang="en-US" sz="2000" b="1" dirty="0">
+                <a:solidFill>
+                  <a:srgbClr val="FFFFFF"/>
+                </a:solidFill>
+                <a:latin typeface="Cambria" pitchFamily="34" charset="0"/>
+                <a:ea typeface="Cambria" pitchFamily="34" charset="-122"/>
+                <a:cs typeface="Cambria" pitchFamily="34" charset="-120"/>
+              </a:rPr>
+              <a:t>.gitignore sanity check</a:t>
+            </a:r>
+            <a:endParaRPr lang="en-US" sz="2000" dirty="0"/>
+          </a:p>
+        </p:txBody>
+      </p:sp>
+      <p:sp>
+        <p:nvSpPr>
+          <p:cNvPr id="20" name="Text 17"/>
+          <p:cNvSpPr/>
+          <p:nvPr/>
+        </p:nvSpPr>
+        <p:spPr>
+          <a:xfrm>
+            <a:off x="960120" y="4846320"/>
+            <a:ext cx="4663440" cy="1188720"/>
+          </a:xfrm>
+          <a:prstGeom prst="rect">
+            <a:avLst/>
+          </a:prstGeom>
+          <a:noFill/>
+          <a:ln/>
+        </p:spPr>
+        <p:txBody>
+          <a:bodyPr wrap="square" lIns="0" tIns="0" rIns="0" bIns="0" rtlCol="0" anchor="t"/>
+          <a:lstStyle/>
+          <a:p>
+            <a:pPr indent="0" marL="0">
+              <a:lnSpc>
+                <a:spcPct val="125000"/>
+              </a:lnSpc>
+              <a:buNone/>
+            </a:pPr>
+            <a:r>
+              <a:rPr lang="en-US" sz="2000" dirty="0">
+                <a:solidFill>
+                  <a:srgbClr val="CADCE8"/>
+                </a:solidFill>
+                <a:latin typeface="Calibri" pitchFamily="34" charset="0"/>
+                <a:ea typeface="Calibri" pitchFamily="34" charset="-122"/>
+                <a:cs typeface="Calibri" pitchFamily="34" charset="-120"/>
+              </a:rPr>
+              <a:t>Run a build, then git status. build/ and .gradle/ shouldn't show up as untracked.</a:t>
+            </a:r>
+            <a:endParaRPr lang="en-US" sz="2000" dirty="0"/>
+          </a:p>
+        </p:txBody>
+      </p:sp>
+      <p:sp>
+        <p:nvSpPr>
+          <p:cNvPr id="21" name="Shape 18"/>
+          <p:cNvSpPr/>
+          <p:nvPr/>
+        </p:nvSpPr>
+        <p:spPr>
+          <a:xfrm>
+            <a:off x="6217920" y="4023360"/>
+            <a:ext cx="5303520" cy="2286000"/>
+          </a:xfrm>
+          <a:prstGeom prst="roundRect">
+            <a:avLst>
+              <a:gd name="adj" fmla="val 4800"/>
+            </a:avLst>
+          </a:prstGeom>
+          <a:solidFill>
+            <a:srgbClr val="132A4C"/>
+          </a:solidFill>
+          <a:ln/>
+        </p:spPr>
+      </p:sp>
+      <p:sp>
+        <p:nvSpPr>
+          <p:cNvPr id="22" name="Shape 19"/>
+          <p:cNvSpPr/>
+          <p:nvPr/>
+        </p:nvSpPr>
+        <p:spPr>
+          <a:xfrm>
+            <a:off x="6537960" y="4251960"/>
+            <a:ext cx="457200" cy="457200"/>
+          </a:xfrm>
+          <a:prstGeom prst="ellipse">
+            <a:avLst/>
+          </a:prstGeom>
+          <a:solidFill>
+            <a:srgbClr val="1B9AAA"/>
+          </a:solidFill>
+          <a:ln/>
+        </p:spPr>
+      </p:sp>
+      <p:sp>
+        <p:nvSpPr>
+          <p:cNvPr id="23" name="Text 20"/>
+          <p:cNvSpPr/>
+          <p:nvPr/>
+        </p:nvSpPr>
+        <p:spPr>
+          <a:xfrm>
+            <a:off x="6537960" y="4251960"/>
+            <a:ext cx="457200" cy="457200"/>
+          </a:xfrm>
+          <a:prstGeom prst="rect">
+            <a:avLst/>
+          </a:prstGeom>
+          <a:noFill/>
+          <a:ln/>
+        </p:spPr>
+        <p:txBody>
+          <a:bodyPr wrap="square" lIns="0" tIns="0" rIns="0" bIns="0" rtlCol="0" anchor="ctr"/>
+          <a:lstStyle/>
+          <a:p>
+            <a:pPr algn="ctr" indent="0" marL="0">
+              <a:buNone/>
+            </a:pPr>
+            <a:r>
+              <a:rPr lang="en-US" sz="2200" b="1" dirty="0">
+                <a:solidFill>
+                  <a:srgbClr val="FFFFFF"/>
+                </a:solidFill>
+                <a:latin typeface="Cambria" pitchFamily="34" charset="0"/>
+                <a:ea typeface="Cambria" pitchFamily="34" charset="-122"/>
+                <a:cs typeface="Cambria" pitchFamily="34" charset="-120"/>
+              </a:rPr>
+              <a:t>4</a:t>
+            </a:r>
+            <a:endParaRPr lang="en-US" sz="2200" dirty="0"/>
+          </a:p>
+        </p:txBody>
+      </p:sp>
+      <p:sp>
+        <p:nvSpPr>
+          <p:cNvPr id="24" name="Text 21"/>
+          <p:cNvSpPr/>
+          <p:nvPr/>
+        </p:nvSpPr>
+        <p:spPr>
+          <a:xfrm>
+            <a:off x="7178040" y="4251960"/>
+            <a:ext cx="4023360" cy="457200"/>
+          </a:xfrm>
+          <a:prstGeom prst="rect">
+            <a:avLst/>
+          </a:prstGeom>
+          <a:noFill/>
+          <a:ln/>
+        </p:spPr>
+        <p:txBody>
+          <a:bodyPr wrap="square" lIns="0" tIns="0" rIns="0" bIns="0" rtlCol="0" anchor="ctr"/>
+          <a:lstStyle/>
+          <a:p>
+            <a:pPr indent="0" marL="0">
+              <a:lnSpc>
+                <a:spcPct val="110000"/>
+              </a:lnSpc>
+              <a:buNone/>
+            </a:pPr>
+            <a:r>
+              <a:rPr lang="en-US" sz="2000" b="1" dirty="0">
+                <a:solidFill>
+                  <a:srgbClr val="FFFFFF"/>
+                </a:solidFill>
+                <a:latin typeface="Cambria" pitchFamily="34" charset="0"/>
+                <a:ea typeface="Cambria" pitchFamily="34" charset="-122"/>
+                <a:cs typeface="Cambria" pitchFamily="34" charset="-120"/>
+              </a:rPr>
+              <a:t>Regenerate and compare</a:t>
+            </a:r>
+            <a:endParaRPr lang="en-US" sz="2000" dirty="0"/>
+          </a:p>
+        </p:txBody>
+      </p:sp>
+      <p:sp>
+        <p:nvSpPr>
+          <p:cNvPr id="25" name="Text 22"/>
+          <p:cNvSpPr/>
+          <p:nvPr/>
+        </p:nvSpPr>
+        <p:spPr>
+          <a:xfrm>
+            <a:off x="6537960" y="4846320"/>
+            <a:ext cx="4663440" cy="1188720"/>
+          </a:xfrm>
+          <a:prstGeom prst="rect">
+            <a:avLst/>
+          </a:prstGeom>
+          <a:noFill/>
+          <a:ln/>
+        </p:spPr>
+        <p:txBody>
+          <a:bodyPr wrap="square" lIns="0" tIns="0" rIns="0" bIns="0" rtlCol="0" anchor="t"/>
+          <a:lstStyle/>
+          <a:p>
+            <a:pPr indent="0" marL="0">
+              <a:lnSpc>
+                <a:spcPct val="125000"/>
+              </a:lnSpc>
+              <a:buNone/>
+            </a:pPr>
+            <a:r>
+              <a:rPr lang="en-US" sz="2000" dirty="0">
+                <a:solidFill>
+                  <a:srgbClr val="CADCE8"/>
+                </a:solidFill>
+                <a:latin typeface="Calibri" pitchFamily="34" charset="0"/>
+                <a:ea typeface="Calibri" pitchFamily="34" charset="-122"/>
+                <a:cs typeface="Calibri" pitchFamily="34" charset="-120"/>
+              </a:rPr>
+              <a:t>Run the setup command again into a new folder. It should match your real project exactly.</a:t>
+            </a:r>
+            <a:endParaRPr lang="en-US" sz="2000" dirty="0"/>
+          </a:p>
+        </p:txBody>
+      </p:sp>
+      <p:sp>
+        <p:nvSpPr>
+          <p:cNvPr id="26" name="Text 23"/>
+          <p:cNvSpPr/>
+          <p:nvPr/>
+        </p:nvSpPr>
+        <p:spPr>
+          <a:xfrm>
+            <a:off x="640080" y="6446520"/>
+            <a:ext cx="8229600" cy="365760"/>
+          </a:xfrm>
+          <a:prstGeom prst="rect">
+            <a:avLst/>
+          </a:prstGeom>
+          <a:noFill/>
+          <a:ln/>
+        </p:spPr>
+        <p:txBody>
+          <a:bodyPr wrap="square" lIns="0" tIns="0" rIns="0" bIns="0" rtlCol="0" anchor="ctr"/>
+          <a:lstStyle/>
+          <a:p>
+            <a:pPr indent="0" marL="0">
+              <a:buNone/>
+            </a:pPr>
+            <a:r>
+              <a:rPr lang="en-US" sz="2000" spc="100" kern="0" dirty="0">
+                <a:solidFill>
+                  <a:srgbClr val="7A93B8"/>
+                </a:solidFill>
+                <a:latin typeface="Calibri" pitchFamily="34" charset="0"/>
+                <a:ea typeface="Calibri" pitchFamily="34" charset="-122"/>
+                <a:cs typeface="Calibri" pitchFamily="34" charset="-120"/>
+              </a:rPr>
+              <a:t>LEARN JAVA + ROBOT PROGRAMMING · SETUP</a:t>
+            </a:r>
+            <a:endParaRPr lang="en-US" sz="2000" dirty="0"/>
+          </a:p>
+        </p:txBody>
+      </p:sp>
+      <p:sp>
+        <p:nvSpPr>
+          <p:cNvPr id="27" name="Text 24"/>
+          <p:cNvSpPr/>
+          <p:nvPr/>
+        </p:nvSpPr>
+        <p:spPr>
+          <a:xfrm>
+            <a:off x="11002975" y="6446520"/>
+            <a:ext cx="548640" cy="365760"/>
+          </a:xfrm>
+          <a:prstGeom prst="rect">
+            <a:avLst/>
+          </a:prstGeom>
+          <a:noFill/>
+          <a:ln/>
+        </p:spPr>
+        <p:txBody>
+          <a:bodyPr wrap="square" lIns="0" tIns="0" rIns="0" bIns="0" rtlCol="0" anchor="ctr"/>
+          <a:lstStyle/>
+          <a:p>
+            <a:pPr algn="r" indent="0" marL="0">
+              <a:buNone/>
+            </a:pPr>
+            <a:r>
+              <a:rPr lang="en-US" sz="2000" dirty="0">
+                <a:solidFill>
+                  <a:srgbClr val="7A93B8"/>
+                </a:solidFill>
+                <a:latin typeface="Calibri" pitchFamily="34" charset="0"/>
+                <a:ea typeface="Calibri" pitchFamily="34" charset="-122"/>
+                <a:cs typeface="Calibri" pitchFamily="34" charset="-120"/>
+              </a:rPr>
+              <a:t>12</a:t>
+            </a:r>
+            <a:endParaRPr lang="en-US" sz="2000" dirty="0"/>
+          </a:p>
+        </p:txBody>
+      </p:sp>
+      <p:pic>
+        <p:nvPicPr>
+          <p:cNvPr id="28" name="Image 1" descr="/home/user/BasicRobotLessons/docs/presentations/v3/template/assets/logo/team5010-logo-onnavy.png">    </p:cNvPr>
+          <p:cNvPicPr>
+            <a:picLocks noChangeAspect="1"/>
+          </p:cNvPicPr>
+          <p:nvPr/>
+        </p:nvPicPr>
+        <p:blipFill>
+          <a:blip r:embed="rId2"/>
+          <a:stretch>
+            <a:fillRect/>
+          </a:stretch>
+        </p:blipFill>
+        <p:spPr>
+          <a:xfrm>
+            <a:off x="10957255" y="164592"/>
+            <a:ext cx="777240" cy="605859"/>
+          </a:xfrm>
+          <a:prstGeom prst="rect">
+            <a:avLst/>
+          </a:prstGeom>
+        </p:spPr>
+      </p:pic>
+    </p:spTree>
+  </p:cSld>
+  <p:clrMapOvr>
+    <a:masterClrMapping/>
+  </p:clrMapOvr>
+</p:sld>
+</file>
+
+<file path=ppt/slides/slide13.xml><?xml version="1.0" encoding="utf-8"?>
+<p:sld xmlns:a="http://schemas.openxmlformats.org/drawingml/2006/main" xmlns:r="http://schemas.openxmlformats.org/officeDocument/2006/relationships" xmlns:p="http://schemas.openxmlformats.org/presentationml/2006/main">
+  <p:cSld name="Slide 13">
     <p:bg>
       <p:bgPr>
         <a:solidFill>
@@ -4222,7 +4804,7 @@
                 <a:ea typeface="Calibri" pitchFamily="34" charset="-122"/>
                 <a:cs typeface="Calibri" pitchFamily="34" charset="-120"/>
               </a:rPr>
-              <a:t>12</a:t>
+              <a:t>13</a:t>
             </a:r>
             <a:endParaRPr lang="en-US" sz="2000" dirty="0"/>
           </a:p>
@@ -4980,7 +5562,7 @@
       </p:sp>
       <p:pic>
         <p:nvPicPr>
-          <p:cNvPr id="3" name="Image 0" descr="/home/user/BasicRobotLessons/docs/presentations/v3/template/assets/icons/download_white.png">    </p:cNvPr>
+          <p:cNvPr id="3" name="Image 0" descr="/home/user/BasicRobotLessons/docs/presentations/v3/template/assets/icons/code_white.png">    </p:cNvPr>
           <p:cNvPicPr>
             <a:picLocks noChangeAspect="1"/>
           </p:cNvPicPr>
@@ -5035,7 +5617,7 @@
                 <a:ea typeface="Calibri" pitchFamily="34" charset="-122"/>
                 <a:cs typeface="Calibri" pitchFamily="34" charset="-120"/>
               </a:rPr>
-              <a:t>SECTION 1 · INSTALL GIT</a:t>
+              <a:t>SECTION 1 · INSTALL WPILIB'S TOOLS</a:t>
             </a:r>
             <a:endParaRPr lang="en-US" sz="2000" dirty="0"/>
           </a:p>
@@ -5074,7 +5656,7 @@
                 <a:ea typeface="Cambria" pitchFamily="34" charset="-122"/>
                 <a:cs typeface="Cambria" pitchFamily="34" charset="-120"/>
               </a:rPr>
-              <a:t>Get Git, and tell it who you are</a:t>
+              <a:t>One installer sets up VS Code and everything else</a:t>
             </a:r>
             <a:endParaRPr lang="en-US" sz="3000" dirty="0"/>
           </a:p>
@@ -5088,354 +5670,67 @@
         </p:nvSpPr>
         <p:spPr>
           <a:xfrm>
-            <a:off x="640080" y="1600200"/>
-            <a:ext cx="10881360" cy="1051560"/>
-          </a:xfrm>
-          <a:prstGeom prst="roundRect">
-            <a:avLst>
-              <a:gd name="adj" fmla="val 10435"/>
-            </a:avLst>
+            <a:off x="640080" y="1618488"/>
+            <a:ext cx="502920" cy="502920"/>
+          </a:xfrm>
+          <a:prstGeom prst="ellipse">
+            <a:avLst/>
           </a:prstGeom>
           <a:solidFill>
-            <a:srgbClr val="0B1F3A"/>
+            <a:srgbClr val="1B9AAA"/>
           </a:solidFill>
           <a:ln/>
-          <a:effectLst>
-            <a:outerShdw sx="100000" sy="100000" kx="0" ky="0" algn="bl" rotWithShape="0" blurRad="101600" dist="38100" dir="5400000">
-              <a:srgbClr val="0B1F3A">
-                <a:alpha val="35000"/>
-              </a:srgbClr>
-            </a:outerShdw>
-          </a:effectLst>
-        </p:spPr>
-      </p:sp>
-      <p:sp>
-        <p:nvSpPr>
-          <p:cNvPr id="7" name="Shape 4"/>
-          <p:cNvSpPr/>
-          <p:nvPr/>
-        </p:nvSpPr>
-        <p:spPr>
-          <a:xfrm>
-            <a:off x="11210544" y="1746504"/>
-            <a:ext cx="128016" cy="128016"/>
-          </a:xfrm>
-          <a:prstGeom prst="ellipse">
-            <a:avLst/>
-          </a:prstGeom>
-          <a:solidFill>
-            <a:srgbClr val="FF6B6B"/>
-          </a:solidFill>
-          <a:ln/>
-        </p:spPr>
-      </p:sp>
-      <p:sp>
-        <p:nvSpPr>
-          <p:cNvPr id="8" name="Shape 5"/>
-          <p:cNvSpPr/>
-          <p:nvPr/>
-        </p:nvSpPr>
-        <p:spPr>
-          <a:xfrm>
-            <a:off x="11210544" y="1947672"/>
-            <a:ext cx="128016" cy="128016"/>
-          </a:xfrm>
-          <a:prstGeom prst="ellipse">
-            <a:avLst/>
-          </a:prstGeom>
-          <a:solidFill>
-            <a:srgbClr val="FFD166"/>
-          </a:solidFill>
-          <a:ln/>
-        </p:spPr>
-      </p:sp>
-      <p:sp>
-        <p:nvSpPr>
-          <p:cNvPr id="9" name="Shape 6"/>
-          <p:cNvSpPr/>
-          <p:nvPr/>
-        </p:nvSpPr>
-        <p:spPr>
-          <a:xfrm>
-            <a:off x="11210544" y="2148840"/>
-            <a:ext cx="128016" cy="128016"/>
-          </a:xfrm>
-          <a:prstGeom prst="ellipse">
-            <a:avLst/>
-          </a:prstGeom>
-          <a:solidFill>
-            <a:srgbClr val="2EC4B6"/>
-          </a:solidFill>
-          <a:ln/>
-        </p:spPr>
-      </p:sp>
-      <p:sp>
-        <p:nvSpPr>
-          <p:cNvPr id="10" name="Text 7"/>
-          <p:cNvSpPr/>
-          <p:nvPr/>
-        </p:nvSpPr>
-        <p:spPr>
-          <a:xfrm>
-            <a:off x="914400" y="1801368"/>
-            <a:ext cx="10195560" cy="685800"/>
-          </a:xfrm>
-          <a:prstGeom prst="rect">
-            <a:avLst/>
-          </a:prstGeom>
-          <a:noFill/>
-          <a:ln/>
-        </p:spPr>
-        <p:txBody>
-          <a:bodyPr wrap="square" lIns="0" tIns="0" rIns="0" bIns="0" rtlCol="0" anchor="t"/>
-          <a:lstStyle/>
-          <a:p>
-            <a:pPr indent="0" marL="0">
-              <a:lnSpc>
-                <a:spcPct val="120000"/>
-              </a:lnSpc>
-              <a:buNone/>
-            </a:pPr>
-            <a:r>
-              <a:rPr lang="en-US" sz="2000" dirty="0">
-                <a:solidFill>
-                  <a:srgbClr val="7FD1D9"/>
-                </a:solidFill>
-                <a:latin typeface="Courier New" pitchFamily="34" charset="0"/>
-                <a:ea typeface="Courier New" pitchFamily="34" charset="-122"/>
-                <a:cs typeface="Courier New" pitchFamily="34" charset="-120"/>
-              </a:rPr>
-              <a:t>winget install --id Git.Git</a:t>
-            </a:r>
-            <a:endParaRPr lang="en-US" sz="2000" dirty="0"/>
-          </a:p>
-        </p:txBody>
-      </p:sp>
-      <p:sp>
-        <p:nvSpPr>
-          <p:cNvPr id="11" name="Shape 8"/>
-          <p:cNvSpPr/>
-          <p:nvPr/>
-        </p:nvSpPr>
-        <p:spPr>
-          <a:xfrm>
-            <a:off x="640080" y="2926080"/>
-            <a:ext cx="10881360" cy="1600200"/>
-          </a:xfrm>
-          <a:prstGeom prst="roundRect">
-            <a:avLst>
-              <a:gd name="adj" fmla="val 6857"/>
-            </a:avLst>
-          </a:prstGeom>
-          <a:solidFill>
-            <a:srgbClr val="0B1F3A"/>
-          </a:solidFill>
-          <a:ln/>
-          <a:effectLst>
-            <a:outerShdw sx="100000" sy="100000" kx="0" ky="0" algn="bl" rotWithShape="0" blurRad="101600" dist="38100" dir="5400000">
-              <a:srgbClr val="0B1F3A">
-                <a:alpha val="35000"/>
-              </a:srgbClr>
-            </a:outerShdw>
-          </a:effectLst>
-        </p:spPr>
-      </p:sp>
-      <p:sp>
-        <p:nvSpPr>
-          <p:cNvPr id="12" name="Shape 9"/>
-          <p:cNvSpPr/>
-          <p:nvPr/>
-        </p:nvSpPr>
-        <p:spPr>
-          <a:xfrm>
-            <a:off x="11210544" y="3072384"/>
-            <a:ext cx="128016" cy="128016"/>
-          </a:xfrm>
-          <a:prstGeom prst="ellipse">
-            <a:avLst/>
-          </a:prstGeom>
-          <a:solidFill>
-            <a:srgbClr val="FF6B6B"/>
-          </a:solidFill>
-          <a:ln/>
-        </p:spPr>
-      </p:sp>
-      <p:sp>
-        <p:nvSpPr>
-          <p:cNvPr id="13" name="Shape 10"/>
-          <p:cNvSpPr/>
-          <p:nvPr/>
-        </p:nvSpPr>
-        <p:spPr>
-          <a:xfrm>
-            <a:off x="11210544" y="3273552"/>
-            <a:ext cx="128016" cy="128016"/>
-          </a:xfrm>
-          <a:prstGeom prst="ellipse">
-            <a:avLst/>
-          </a:prstGeom>
-          <a:solidFill>
-            <a:srgbClr val="FFD166"/>
-          </a:solidFill>
-          <a:ln/>
-        </p:spPr>
-      </p:sp>
-      <p:sp>
-        <p:nvSpPr>
-          <p:cNvPr id="14" name="Shape 11"/>
-          <p:cNvSpPr/>
-          <p:nvPr/>
-        </p:nvSpPr>
-        <p:spPr>
-          <a:xfrm>
-            <a:off x="11210544" y="3474720"/>
-            <a:ext cx="128016" cy="128016"/>
-          </a:xfrm>
-          <a:prstGeom prst="ellipse">
-            <a:avLst/>
-          </a:prstGeom>
-          <a:solidFill>
-            <a:srgbClr val="2EC4B6"/>
-          </a:solidFill>
-          <a:ln/>
-        </p:spPr>
-      </p:sp>
-      <p:sp>
-        <p:nvSpPr>
-          <p:cNvPr id="15" name="Text 12"/>
-          <p:cNvSpPr/>
-          <p:nvPr/>
-        </p:nvSpPr>
-        <p:spPr>
-          <a:xfrm>
-            <a:off x="914400" y="3127248"/>
-            <a:ext cx="10195560" cy="1234440"/>
-          </a:xfrm>
-          <a:prstGeom prst="rect">
-            <a:avLst/>
-          </a:prstGeom>
-          <a:noFill/>
-          <a:ln/>
-        </p:spPr>
-        <p:txBody>
-          <a:bodyPr wrap="square" lIns="0" tIns="0" rIns="0" bIns="0" rtlCol="0" anchor="t"/>
-          <a:lstStyle/>
-          <a:p>
-            <a:pPr indent="0" marL="0">
-              <a:lnSpc>
-                <a:spcPct val="120000"/>
-              </a:lnSpc>
-              <a:buNone/>
-            </a:pPr>
-            <a:r>
-              <a:rPr lang="en-US" sz="2000" dirty="0">
-                <a:solidFill>
-                  <a:srgbClr val="D7E3F4"/>
-                </a:solidFill>
-                <a:latin typeface="Courier New" pitchFamily="34" charset="0"/>
-                <a:ea typeface="Courier New" pitchFamily="34" charset="-122"/>
-                <a:cs typeface="Courier New" pitchFamily="34" charset="-120"/>
-              </a:rPr>
-              <a:t>git config --global user.name  "Your Name"</a:t>
-            </a:r>
-            <a:endParaRPr lang="en-US" sz="2000" dirty="0"/>
-          </a:p>
-          <a:p>
-            <a:pPr indent="0" marL="0">
-              <a:lnSpc>
-                <a:spcPct val="120000"/>
-              </a:lnSpc>
-              <a:buNone/>
-            </a:pPr>
-            <a:r>
-              <a:rPr lang="en-US" sz="2000" dirty="0">
-                <a:solidFill>
-                  <a:srgbClr val="D7E3F4"/>
-                </a:solidFill>
-                <a:latin typeface="Courier New" pitchFamily="34" charset="0"/>
-                <a:ea typeface="Courier New" pitchFamily="34" charset="-122"/>
-                <a:cs typeface="Courier New" pitchFamily="34" charset="-120"/>
-              </a:rPr>
-              <a:t>git config --global user.email "you@example.com"</a:t>
-            </a:r>
-            <a:endParaRPr lang="en-US" sz="2000" dirty="0"/>
-          </a:p>
-        </p:txBody>
-      </p:sp>
-      <p:sp>
-        <p:nvSpPr>
-          <p:cNvPr id="16" name="Shape 13"/>
-          <p:cNvSpPr/>
-          <p:nvPr/>
-        </p:nvSpPr>
-        <p:spPr>
-          <a:xfrm>
-            <a:off x="640080" y="4754880"/>
-            <a:ext cx="10881360" cy="1097280"/>
-          </a:xfrm>
-          <a:prstGeom prst="roundRect">
-            <a:avLst>
-              <a:gd name="adj" fmla="val 8333"/>
-            </a:avLst>
-          </a:prstGeom>
-          <a:solidFill>
-            <a:srgbClr val="F3F6FA"/>
-          </a:solidFill>
-          <a:ln/>
-        </p:spPr>
-      </p:sp>
-      <p:sp>
-        <p:nvSpPr>
-          <p:cNvPr id="17" name="Text 14"/>
-          <p:cNvSpPr/>
-          <p:nvPr/>
-        </p:nvSpPr>
-        <p:spPr>
-          <a:xfrm>
-            <a:off x="868680" y="4983480"/>
-            <a:ext cx="10424160" cy="895350"/>
-          </a:xfrm>
-          <a:prstGeom prst="rect">
-            <a:avLst/>
-          </a:prstGeom>
-          <a:noFill/>
-          <a:ln/>
-        </p:spPr>
-        <p:txBody>
-          <a:bodyPr wrap="square" lIns="0" tIns="0" rIns="0" bIns="0" rtlCol="0" anchor="t"/>
-          <a:lstStyle/>
-          <a:p>
-            <a:pPr indent="0" marL="0">
-              <a:lnSpc>
-                <a:spcPct val="120000"/>
-              </a:lnSpc>
-              <a:buNone/>
-            </a:pPr>
-            <a:r>
-              <a:rPr lang="en-US" sz="2100" b="1" dirty="0">
-                <a:solidFill>
-                  <a:srgbClr val="13294B"/>
+        </p:spPr>
+      </p:sp>
+      <p:sp>
+        <p:nvSpPr>
+          <p:cNvPr id="7" name="Text 4"/>
+          <p:cNvSpPr/>
+          <p:nvPr/>
+        </p:nvSpPr>
+        <p:spPr>
+          <a:xfrm>
+            <a:off x="640080" y="1618488"/>
+            <a:ext cx="502920" cy="502920"/>
+          </a:xfrm>
+          <a:prstGeom prst="rect">
+            <a:avLst/>
+          </a:prstGeom>
+          <a:noFill/>
+          <a:ln/>
+        </p:spPr>
+        <p:txBody>
+          <a:bodyPr wrap="square" lIns="0" tIns="0" rIns="0" bIns="0" rtlCol="0" anchor="ctr"/>
+          <a:lstStyle/>
+          <a:p>
+            <a:pPr algn="ctr" indent="0" marL="0">
+              <a:buNone/>
+            </a:pPr>
+            <a:r>
+              <a:rPr lang="en-US" sz="2200" b="1" dirty="0">
+                <a:solidFill>
+                  <a:srgbClr val="FFFFFF"/>
                 </a:solidFill>
                 <a:latin typeface="Cambria" pitchFamily="34" charset="0"/>
                 <a:ea typeface="Cambria" pitchFamily="34" charset="-122"/>
                 <a:cs typeface="Cambria" pitchFamily="34" charset="-120"/>
               </a:rPr>
-              <a:t>Use the same email you'll sign up for GitHub with — that's how GitHub matches a commit to your account.</a:t>
-            </a:r>
-            <a:endParaRPr lang="en-US" sz="2100" dirty="0"/>
-          </a:p>
-        </p:txBody>
-      </p:sp>
-      <p:sp>
-        <p:nvSpPr>
-          <p:cNvPr id="18" name="Text 15"/>
-          <p:cNvSpPr/>
-          <p:nvPr/>
-        </p:nvSpPr>
-        <p:spPr>
-          <a:xfrm>
-            <a:off x="640080" y="6446520"/>
-            <a:ext cx="8229600" cy="365760"/>
+              <a:t>1</a:t>
+            </a:r>
+            <a:endParaRPr lang="en-US" sz="2200" dirty="0"/>
+          </a:p>
+        </p:txBody>
+      </p:sp>
+      <p:sp>
+        <p:nvSpPr>
+          <p:cNvPr id="8" name="Text 5"/>
+          <p:cNvSpPr/>
+          <p:nvPr/>
+        </p:nvSpPr>
+        <p:spPr>
+          <a:xfrm>
+            <a:off x="1371600" y="1545336"/>
+            <a:ext cx="9875520" cy="384048"/>
           </a:xfrm>
           <a:prstGeom prst="rect">
             <a:avLst/>
@@ -5451,7 +5746,49 @@
               <a:buNone/>
             </a:pPr>
             <a:r>
-              <a:rPr lang="en-US" sz="2000" spc="100" kern="0" dirty="0">
+              <a:rPr lang="en-US" sz="2000" b="1" dirty="0">
+                <a:solidFill>
+                  <a:srgbClr val="13294B"/>
+                </a:solidFill>
+                <a:latin typeface="Cambria" pitchFamily="34" charset="0"/>
+                <a:ea typeface="Cambria" pitchFamily="34" charset="-122"/>
+                <a:cs typeface="Cambria" pitchFamily="34" charset="-120"/>
+              </a:rPr>
+              <a:t>Get the installer for this season</a:t>
+            </a:r>
+            <a:endParaRPr lang="en-US" sz="2000" dirty="0"/>
+          </a:p>
+        </p:txBody>
+      </p:sp>
+      <p:sp>
+        <p:nvSpPr>
+          <p:cNvPr id="9" name="Text 6"/>
+          <p:cNvSpPr/>
+          <p:nvPr/>
+        </p:nvSpPr>
+        <p:spPr>
+          <a:xfrm>
+            <a:off x="1371600" y="1929384"/>
+            <a:ext cx="9875520" cy="502920"/>
+          </a:xfrm>
+          <a:prstGeom prst="rect">
+            <a:avLst/>
+          </a:prstGeom>
+          <a:noFill/>
+          <a:ln/>
+        </p:spPr>
+        <p:txBody>
+          <a:bodyPr wrap="square" lIns="0" tIns="0" rIns="0" bIns="0" rtlCol="0" anchor="ctr"/>
+          <a:lstStyle/>
+          <a:p>
+            <a:pPr indent="0" marL="0">
+              <a:lnSpc>
+                <a:spcPct val="110000"/>
+              </a:lnSpc>
+              <a:buNone/>
+            </a:pPr>
+            <a:r>
+              <a:rPr lang="en-US" sz="2000" dirty="0">
                 <a:solidFill>
                   <a:srgbClr val="5B6B84"/>
                 </a:solidFill>
@@ -5459,7 +5796,7 @@
                 <a:ea typeface="Calibri" pitchFamily="34" charset="-122"/>
                 <a:cs typeface="Calibri" pitchFamily="34" charset="-120"/>
               </a:rPr>
-              <a:t>LEARN JAVA + ROBOT PROGRAMMING · SETUP</a:t>
+              <a:t>wpilibsuite/allwpilib releases → v2027.0.0-alpha-6 for your OS.</a:t>
             </a:r>
             <a:endParaRPr lang="en-US" sz="2000" dirty="0"/>
           </a:p>
@@ -5467,14 +5804,34 @@
       </p:sp>
       <p:sp>
         <p:nvSpPr>
-          <p:cNvPr id="19" name="Text 16"/>
-          <p:cNvSpPr/>
-          <p:nvPr/>
-        </p:nvSpPr>
-        <p:spPr>
-          <a:xfrm>
-            <a:off x="11002975" y="6446520"/>
-            <a:ext cx="548640" cy="365760"/>
+          <p:cNvPr id="10" name="Shape 7"/>
+          <p:cNvSpPr/>
+          <p:nvPr/>
+        </p:nvSpPr>
+        <p:spPr>
+          <a:xfrm>
+            <a:off x="640080" y="2532888"/>
+            <a:ext cx="502920" cy="502920"/>
+          </a:xfrm>
+          <a:prstGeom prst="ellipse">
+            <a:avLst/>
+          </a:prstGeom>
+          <a:solidFill>
+            <a:srgbClr val="1B9AAA"/>
+          </a:solidFill>
+          <a:ln/>
+        </p:spPr>
+      </p:sp>
+      <p:sp>
+        <p:nvSpPr>
+          <p:cNvPr id="11" name="Text 8"/>
+          <p:cNvSpPr/>
+          <p:nvPr/>
+        </p:nvSpPr>
+        <p:spPr>
+          <a:xfrm>
+            <a:off x="640080" y="2532888"/>
+            <a:ext cx="502920" cy="502920"/>
           </a:xfrm>
           <a:prstGeom prst="rect">
             <a:avLst/>
@@ -5486,7 +5843,88 @@
           <a:bodyPr wrap="square" lIns="0" tIns="0" rIns="0" bIns="0" rtlCol="0" anchor="ctr"/>
           <a:lstStyle/>
           <a:p>
-            <a:pPr algn="r" indent="0" marL="0">
+            <a:pPr algn="ctr" indent="0" marL="0">
+              <a:buNone/>
+            </a:pPr>
+            <a:r>
+              <a:rPr lang="en-US" sz="2200" b="1" dirty="0">
+                <a:solidFill>
+                  <a:srgbClr val="FFFFFF"/>
+                </a:solidFill>
+                <a:latin typeface="Cambria" pitchFamily="34" charset="0"/>
+                <a:ea typeface="Cambria" pitchFamily="34" charset="-122"/>
+                <a:cs typeface="Cambria" pitchFamily="34" charset="-120"/>
+              </a:rPr>
+              <a:t>2</a:t>
+            </a:r>
+            <a:endParaRPr lang="en-US" sz="2200" dirty="0"/>
+          </a:p>
+        </p:txBody>
+      </p:sp>
+      <p:sp>
+        <p:nvSpPr>
+          <p:cNvPr id="12" name="Text 9"/>
+          <p:cNvSpPr/>
+          <p:nvPr/>
+        </p:nvSpPr>
+        <p:spPr>
+          <a:xfrm>
+            <a:off x="1371600" y="2459736"/>
+            <a:ext cx="9875520" cy="384048"/>
+          </a:xfrm>
+          <a:prstGeom prst="rect">
+            <a:avLst/>
+          </a:prstGeom>
+          <a:noFill/>
+          <a:ln/>
+        </p:spPr>
+        <p:txBody>
+          <a:bodyPr wrap="square" lIns="0" tIns="0" rIns="0" bIns="0" rtlCol="0" anchor="ctr"/>
+          <a:lstStyle/>
+          <a:p>
+            <a:pPr indent="0" marL="0">
+              <a:buNone/>
+            </a:pPr>
+            <a:r>
+              <a:rPr lang="en-US" sz="2000" b="1" dirty="0">
+                <a:solidFill>
+                  <a:srgbClr val="13294B"/>
+                </a:solidFill>
+                <a:latin typeface="Cambria" pitchFamily="34" charset="0"/>
+                <a:ea typeface="Cambria" pitchFamily="34" charset="-122"/>
+                <a:cs typeface="Cambria" pitchFamily="34" charset="-120"/>
+              </a:rPr>
+              <a:t>Run it, and choose "Everything"</a:t>
+            </a:r>
+            <a:endParaRPr lang="en-US" sz="2000" dirty="0"/>
+          </a:p>
+        </p:txBody>
+      </p:sp>
+      <p:sp>
+        <p:nvSpPr>
+          <p:cNvPr id="13" name="Text 10"/>
+          <p:cNvSpPr/>
+          <p:nvPr/>
+        </p:nvSpPr>
+        <p:spPr>
+          <a:xfrm>
+            <a:off x="1371600" y="2843784"/>
+            <a:ext cx="9875520" cy="502920"/>
+          </a:xfrm>
+          <a:prstGeom prst="rect">
+            <a:avLst/>
+          </a:prstGeom>
+          <a:noFill/>
+          <a:ln/>
+        </p:spPr>
+        <p:txBody>
+          <a:bodyPr wrap="square" lIns="0" tIns="0" rIns="0" bIns="0" rtlCol="0" anchor="ctr"/>
+          <a:lstStyle/>
+          <a:p>
+            <a:pPr indent="0" marL="0">
+              <a:lnSpc>
+                <a:spcPct val="110000"/>
+              </a:lnSpc>
               <a:buNone/>
             </a:pPr>
             <a:r>
@@ -5498,6 +5936,504 @@
                 <a:ea typeface="Calibri" pitchFamily="34" charset="-122"/>
                 <a:cs typeface="Calibri" pitchFamily="34" charset="-120"/>
               </a:rPr>
+              <a:t>Not "Tools Only" — this pulls in VS Code, the JDK, and Gradle too.</a:t>
+            </a:r>
+            <a:endParaRPr lang="en-US" sz="2000" dirty="0"/>
+          </a:p>
+        </p:txBody>
+      </p:sp>
+      <p:sp>
+        <p:nvSpPr>
+          <p:cNvPr id="14" name="Shape 11"/>
+          <p:cNvSpPr/>
+          <p:nvPr/>
+        </p:nvSpPr>
+        <p:spPr>
+          <a:xfrm>
+            <a:off x="640080" y="3447288"/>
+            <a:ext cx="502920" cy="502920"/>
+          </a:xfrm>
+          <a:prstGeom prst="ellipse">
+            <a:avLst/>
+          </a:prstGeom>
+          <a:solidFill>
+            <a:srgbClr val="1B9AAA"/>
+          </a:solidFill>
+          <a:ln/>
+        </p:spPr>
+      </p:sp>
+      <p:sp>
+        <p:nvSpPr>
+          <p:cNvPr id="15" name="Text 12"/>
+          <p:cNvSpPr/>
+          <p:nvPr/>
+        </p:nvSpPr>
+        <p:spPr>
+          <a:xfrm>
+            <a:off x="640080" y="3447288"/>
+            <a:ext cx="502920" cy="502920"/>
+          </a:xfrm>
+          <a:prstGeom prst="rect">
+            <a:avLst/>
+          </a:prstGeom>
+          <a:noFill/>
+          <a:ln/>
+        </p:spPr>
+        <p:txBody>
+          <a:bodyPr wrap="square" lIns="0" tIns="0" rIns="0" bIns="0" rtlCol="0" anchor="ctr"/>
+          <a:lstStyle/>
+          <a:p>
+            <a:pPr algn="ctr" indent="0" marL="0">
+              <a:buNone/>
+            </a:pPr>
+            <a:r>
+              <a:rPr lang="en-US" sz="2200" b="1" dirty="0">
+                <a:solidFill>
+                  <a:srgbClr val="FFFFFF"/>
+                </a:solidFill>
+                <a:latin typeface="Cambria" pitchFamily="34" charset="0"/>
+                <a:ea typeface="Cambria" pitchFamily="34" charset="-122"/>
+                <a:cs typeface="Cambria" pitchFamily="34" charset="-120"/>
+              </a:rPr>
+              <a:t>3</a:t>
+            </a:r>
+            <a:endParaRPr lang="en-US" sz="2200" dirty="0"/>
+          </a:p>
+        </p:txBody>
+      </p:sp>
+      <p:sp>
+        <p:nvSpPr>
+          <p:cNvPr id="16" name="Text 13"/>
+          <p:cNvSpPr/>
+          <p:nvPr/>
+        </p:nvSpPr>
+        <p:spPr>
+          <a:xfrm>
+            <a:off x="1371600" y="3374136"/>
+            <a:ext cx="9875520" cy="384048"/>
+          </a:xfrm>
+          <a:prstGeom prst="rect">
+            <a:avLst/>
+          </a:prstGeom>
+          <a:noFill/>
+          <a:ln/>
+        </p:spPr>
+        <p:txBody>
+          <a:bodyPr wrap="square" lIns="0" tIns="0" rIns="0" bIns="0" rtlCol="0" anchor="ctr"/>
+          <a:lstStyle/>
+          <a:p>
+            <a:pPr indent="0" marL="0">
+              <a:buNone/>
+            </a:pPr>
+            <a:r>
+              <a:rPr lang="en-US" sz="2000" b="1" dirty="0">
+                <a:solidFill>
+                  <a:srgbClr val="13294B"/>
+                </a:solidFill>
+                <a:latin typeface="Cambria" pitchFamily="34" charset="0"/>
+                <a:ea typeface="Cambria" pitchFamily="34" charset="-122"/>
+                <a:cs typeface="Cambria" pitchFamily="34" charset="-120"/>
+              </a:rPr>
+              <a:t>Pick "Download for this computer only"</a:t>
+            </a:r>
+            <a:endParaRPr lang="en-US" sz="2000" dirty="0"/>
+          </a:p>
+        </p:txBody>
+      </p:sp>
+      <p:sp>
+        <p:nvSpPr>
+          <p:cNvPr id="17" name="Text 14"/>
+          <p:cNvSpPr/>
+          <p:nvPr/>
+        </p:nvSpPr>
+        <p:spPr>
+          <a:xfrm>
+            <a:off x="1371600" y="3758184"/>
+            <a:ext cx="9875520" cy="502920"/>
+          </a:xfrm>
+          <a:prstGeom prst="rect">
+            <a:avLst/>
+          </a:prstGeom>
+          <a:noFill/>
+          <a:ln/>
+        </p:spPr>
+        <p:txBody>
+          <a:bodyPr wrap="square" lIns="0" tIns="0" rIns="0" bIns="0" rtlCol="0" anchor="ctr"/>
+          <a:lstStyle/>
+          <a:p>
+            <a:pPr indent="0" marL="0">
+              <a:lnSpc>
+                <a:spcPct val="110000"/>
+              </a:lnSpc>
+              <a:buNone/>
+            </a:pPr>
+            <a:r>
+              <a:rPr lang="en-US" sz="2000" dirty="0">
+                <a:solidFill>
+                  <a:srgbClr val="5B6B84"/>
+                </a:solidFill>
+                <a:latin typeface="Calibri" pitchFamily="34" charset="0"/>
+                <a:ea typeface="Calibri" pitchFamily="34" charset="-122"/>
+                <a:cs typeface="Calibri" pitchFamily="34" charset="-120"/>
+              </a:rPr>
+              <a:t>VS Code isn't bundled — licensing — so the installer fetches it.</a:t>
+            </a:r>
+            <a:endParaRPr lang="en-US" sz="2000" dirty="0"/>
+          </a:p>
+        </p:txBody>
+      </p:sp>
+      <p:sp>
+        <p:nvSpPr>
+          <p:cNvPr id="18" name="Shape 15"/>
+          <p:cNvSpPr/>
+          <p:nvPr/>
+        </p:nvSpPr>
+        <p:spPr>
+          <a:xfrm>
+            <a:off x="640080" y="4361688"/>
+            <a:ext cx="502920" cy="502920"/>
+          </a:xfrm>
+          <a:prstGeom prst="ellipse">
+            <a:avLst/>
+          </a:prstGeom>
+          <a:solidFill>
+            <a:srgbClr val="1B9AAA"/>
+          </a:solidFill>
+          <a:ln/>
+        </p:spPr>
+      </p:sp>
+      <p:sp>
+        <p:nvSpPr>
+          <p:cNvPr id="19" name="Text 16"/>
+          <p:cNvSpPr/>
+          <p:nvPr/>
+        </p:nvSpPr>
+        <p:spPr>
+          <a:xfrm>
+            <a:off x="640080" y="4361688"/>
+            <a:ext cx="502920" cy="502920"/>
+          </a:xfrm>
+          <a:prstGeom prst="rect">
+            <a:avLst/>
+          </a:prstGeom>
+          <a:noFill/>
+          <a:ln/>
+        </p:spPr>
+        <p:txBody>
+          <a:bodyPr wrap="square" lIns="0" tIns="0" rIns="0" bIns="0" rtlCol="0" anchor="ctr"/>
+          <a:lstStyle/>
+          <a:p>
+            <a:pPr algn="ctr" indent="0" marL="0">
+              <a:buNone/>
+            </a:pPr>
+            <a:r>
+              <a:rPr lang="en-US" sz="2200" b="1" dirty="0">
+                <a:solidFill>
+                  <a:srgbClr val="FFFFFF"/>
+                </a:solidFill>
+                <a:latin typeface="Cambria" pitchFamily="34" charset="0"/>
+                <a:ea typeface="Cambria" pitchFamily="34" charset="-122"/>
+                <a:cs typeface="Cambria" pitchFamily="34" charset="-120"/>
+              </a:rPr>
+              <a:t>4</a:t>
+            </a:r>
+            <a:endParaRPr lang="en-US" sz="2200" dirty="0"/>
+          </a:p>
+        </p:txBody>
+      </p:sp>
+      <p:sp>
+        <p:nvSpPr>
+          <p:cNvPr id="20" name="Text 17"/>
+          <p:cNvSpPr/>
+          <p:nvPr/>
+        </p:nvSpPr>
+        <p:spPr>
+          <a:xfrm>
+            <a:off x="1371600" y="4288536"/>
+            <a:ext cx="9875520" cy="384048"/>
+          </a:xfrm>
+          <a:prstGeom prst="rect">
+            <a:avLst/>
+          </a:prstGeom>
+          <a:noFill/>
+          <a:ln/>
+        </p:spPr>
+        <p:txBody>
+          <a:bodyPr wrap="square" lIns="0" tIns="0" rIns="0" bIns="0" rtlCol="0" anchor="ctr"/>
+          <a:lstStyle/>
+          <a:p>
+            <a:pPr indent="0" marL="0">
+              <a:buNone/>
+            </a:pPr>
+            <a:r>
+              <a:rPr lang="en-US" sz="2000" b="1" dirty="0">
+                <a:solidFill>
+                  <a:srgbClr val="13294B"/>
+                </a:solidFill>
+                <a:latin typeface="Cambria" pitchFamily="34" charset="0"/>
+                <a:ea typeface="Cambria" pitchFamily="34" charset="-122"/>
+                <a:cs typeface="Cambria" pitchFamily="34" charset="-120"/>
+              </a:rPr>
+              <a:t>Finish, then launch WPILib VS Code</a:t>
+            </a:r>
+            <a:endParaRPr lang="en-US" sz="2000" dirty="0"/>
+          </a:p>
+        </p:txBody>
+      </p:sp>
+      <p:sp>
+        <p:nvSpPr>
+          <p:cNvPr id="21" name="Text 18"/>
+          <p:cNvSpPr/>
+          <p:nvPr/>
+        </p:nvSpPr>
+        <p:spPr>
+          <a:xfrm>
+            <a:off x="1371600" y="4672584"/>
+            <a:ext cx="9875520" cy="502920"/>
+          </a:xfrm>
+          <a:prstGeom prst="rect">
+            <a:avLst/>
+          </a:prstGeom>
+          <a:noFill/>
+          <a:ln/>
+        </p:spPr>
+        <p:txBody>
+          <a:bodyPr wrap="square" lIns="0" tIns="0" rIns="0" bIns="0" rtlCol="0" anchor="ctr"/>
+          <a:lstStyle/>
+          <a:p>
+            <a:pPr indent="0" marL="0">
+              <a:lnSpc>
+                <a:spcPct val="110000"/>
+              </a:lnSpc>
+              <a:buNone/>
+            </a:pPr>
+            <a:r>
+              <a:rPr lang="en-US" sz="2000" dirty="0">
+                <a:solidFill>
+                  <a:srgbClr val="5B6B84"/>
+                </a:solidFill>
+                <a:latin typeface="Calibri" pitchFamily="34" charset="0"/>
+                <a:ea typeface="Calibri" pitchFamily="34" charset="-122"/>
+                <a:cs typeface="Calibri" pitchFamily="34" charset="-120"/>
+              </a:rPr>
+              <a:t>A separate copy for this year, not any VS Code already installed.</a:t>
+            </a:r>
+            <a:endParaRPr lang="en-US" sz="2000" dirty="0"/>
+          </a:p>
+        </p:txBody>
+      </p:sp>
+      <p:sp>
+        <p:nvSpPr>
+          <p:cNvPr id="22" name="Shape 19"/>
+          <p:cNvSpPr/>
+          <p:nvPr/>
+        </p:nvSpPr>
+        <p:spPr>
+          <a:xfrm>
+            <a:off x="640080" y="5276088"/>
+            <a:ext cx="502920" cy="502920"/>
+          </a:xfrm>
+          <a:prstGeom prst="ellipse">
+            <a:avLst/>
+          </a:prstGeom>
+          <a:solidFill>
+            <a:srgbClr val="1B9AAA"/>
+          </a:solidFill>
+          <a:ln/>
+        </p:spPr>
+      </p:sp>
+      <p:sp>
+        <p:nvSpPr>
+          <p:cNvPr id="23" name="Text 20"/>
+          <p:cNvSpPr/>
+          <p:nvPr/>
+        </p:nvSpPr>
+        <p:spPr>
+          <a:xfrm>
+            <a:off x="640080" y="5276088"/>
+            <a:ext cx="502920" cy="502920"/>
+          </a:xfrm>
+          <a:prstGeom prst="rect">
+            <a:avLst/>
+          </a:prstGeom>
+          <a:noFill/>
+          <a:ln/>
+        </p:spPr>
+        <p:txBody>
+          <a:bodyPr wrap="square" lIns="0" tIns="0" rIns="0" bIns="0" rtlCol="0" anchor="ctr"/>
+          <a:lstStyle/>
+          <a:p>
+            <a:pPr algn="ctr" indent="0" marL="0">
+              <a:buNone/>
+            </a:pPr>
+            <a:r>
+              <a:rPr lang="en-US" sz="2200" b="1" dirty="0">
+                <a:solidFill>
+                  <a:srgbClr val="FFFFFF"/>
+                </a:solidFill>
+                <a:latin typeface="Cambria" pitchFamily="34" charset="0"/>
+                <a:ea typeface="Cambria" pitchFamily="34" charset="-122"/>
+                <a:cs typeface="Cambria" pitchFamily="34" charset="-120"/>
+              </a:rPr>
+              <a:t>5</a:t>
+            </a:r>
+            <a:endParaRPr lang="en-US" sz="2200" dirty="0"/>
+          </a:p>
+        </p:txBody>
+      </p:sp>
+      <p:sp>
+        <p:nvSpPr>
+          <p:cNvPr id="24" name="Text 21"/>
+          <p:cNvSpPr/>
+          <p:nvPr/>
+        </p:nvSpPr>
+        <p:spPr>
+          <a:xfrm>
+            <a:off x="1371600" y="5202936"/>
+            <a:ext cx="9875520" cy="384048"/>
+          </a:xfrm>
+          <a:prstGeom prst="rect">
+            <a:avLst/>
+          </a:prstGeom>
+          <a:noFill/>
+          <a:ln/>
+        </p:spPr>
+        <p:txBody>
+          <a:bodyPr wrap="square" lIns="0" tIns="0" rIns="0" bIns="0" rtlCol="0" anchor="ctr"/>
+          <a:lstStyle/>
+          <a:p>
+            <a:pPr indent="0" marL="0">
+              <a:buNone/>
+            </a:pPr>
+            <a:r>
+              <a:rPr lang="en-US" sz="2000" b="1" dirty="0">
+                <a:solidFill>
+                  <a:srgbClr val="13294B"/>
+                </a:solidFill>
+                <a:latin typeface="Cambria" pitchFamily="34" charset="0"/>
+                <a:ea typeface="Cambria" pitchFamily="34" charset="-122"/>
+                <a:cs typeface="Cambria" pitchFamily="34" charset="-120"/>
+              </a:rPr>
+              <a:t>Look for the WPILib icon in the sidebar</a:t>
+            </a:r>
+            <a:endParaRPr lang="en-US" sz="2000" dirty="0"/>
+          </a:p>
+        </p:txBody>
+      </p:sp>
+      <p:sp>
+        <p:nvSpPr>
+          <p:cNvPr id="25" name="Text 22"/>
+          <p:cNvSpPr/>
+          <p:nvPr/>
+        </p:nvSpPr>
+        <p:spPr>
+          <a:xfrm>
+            <a:off x="1371600" y="5586984"/>
+            <a:ext cx="9875520" cy="502920"/>
+          </a:xfrm>
+          <a:prstGeom prst="rect">
+            <a:avLst/>
+          </a:prstGeom>
+          <a:noFill/>
+          <a:ln/>
+        </p:spPr>
+        <p:txBody>
+          <a:bodyPr wrap="square" lIns="0" tIns="0" rIns="0" bIns="0" rtlCol="0" anchor="ctr"/>
+          <a:lstStyle/>
+          <a:p>
+            <a:pPr indent="0" marL="0">
+              <a:lnSpc>
+                <a:spcPct val="110000"/>
+              </a:lnSpc>
+              <a:buNone/>
+            </a:pPr>
+            <a:r>
+              <a:rPr lang="en-US" sz="2000" dirty="0">
+                <a:solidFill>
+                  <a:srgbClr val="5B6B84"/>
+                </a:solidFill>
+                <a:latin typeface="Calibri" pitchFamily="34" charset="0"/>
+                <a:ea typeface="Calibri" pitchFamily="34" charset="-122"/>
+                <a:cs typeface="Calibri" pitchFamily="34" charset="-120"/>
+              </a:rPr>
+              <a:t>That confirms the extension installed — you'll use it all course.</a:t>
+            </a:r>
+            <a:endParaRPr lang="en-US" sz="2000" dirty="0"/>
+          </a:p>
+        </p:txBody>
+      </p:sp>
+      <p:sp>
+        <p:nvSpPr>
+          <p:cNvPr id="26" name="Text 23"/>
+          <p:cNvSpPr/>
+          <p:nvPr/>
+        </p:nvSpPr>
+        <p:spPr>
+          <a:xfrm>
+            <a:off x="640080" y="6446520"/>
+            <a:ext cx="8229600" cy="365760"/>
+          </a:xfrm>
+          <a:prstGeom prst="rect">
+            <a:avLst/>
+          </a:prstGeom>
+          <a:noFill/>
+          <a:ln/>
+        </p:spPr>
+        <p:txBody>
+          <a:bodyPr wrap="square" lIns="0" tIns="0" rIns="0" bIns="0" rtlCol="0" anchor="ctr"/>
+          <a:lstStyle/>
+          <a:p>
+            <a:pPr indent="0" marL="0">
+              <a:buNone/>
+            </a:pPr>
+            <a:r>
+              <a:rPr lang="en-US" sz="2000" spc="100" kern="0" dirty="0">
+                <a:solidFill>
+                  <a:srgbClr val="5B6B84"/>
+                </a:solidFill>
+                <a:latin typeface="Calibri" pitchFamily="34" charset="0"/>
+                <a:ea typeface="Calibri" pitchFamily="34" charset="-122"/>
+                <a:cs typeface="Calibri" pitchFamily="34" charset="-120"/>
+              </a:rPr>
+              <a:t>LEARN JAVA + ROBOT PROGRAMMING · SETUP</a:t>
+            </a:r>
+            <a:endParaRPr lang="en-US" sz="2000" dirty="0"/>
+          </a:p>
+        </p:txBody>
+      </p:sp>
+      <p:sp>
+        <p:nvSpPr>
+          <p:cNvPr id="27" name="Text 24"/>
+          <p:cNvSpPr/>
+          <p:nvPr/>
+        </p:nvSpPr>
+        <p:spPr>
+          <a:xfrm>
+            <a:off x="11002975" y="6446520"/>
+            <a:ext cx="548640" cy="365760"/>
+          </a:xfrm>
+          <a:prstGeom prst="rect">
+            <a:avLst/>
+          </a:prstGeom>
+          <a:noFill/>
+          <a:ln/>
+        </p:spPr>
+        <p:txBody>
+          <a:bodyPr wrap="square" lIns="0" tIns="0" rIns="0" bIns="0" rtlCol="0" anchor="ctr"/>
+          <a:lstStyle/>
+          <a:p>
+            <a:pPr algn="r" indent="0" marL="0">
+              <a:buNone/>
+            </a:pPr>
+            <a:r>
+              <a:rPr lang="en-US" sz="2000" dirty="0">
+                <a:solidFill>
+                  <a:srgbClr val="5B6B84"/>
+                </a:solidFill>
+                <a:latin typeface="Calibri" pitchFamily="34" charset="0"/>
+                <a:ea typeface="Calibri" pitchFamily="34" charset="-122"/>
+                <a:cs typeface="Calibri" pitchFamily="34" charset="-120"/>
+              </a:rPr>
               <a:t>3</a:t>
             </a:r>
             <a:endParaRPr lang="en-US" sz="2000" dirty="0"/>
@@ -5506,7 +6442,7 @@
       </p:sp>
       <p:pic>
         <p:nvPicPr>
-          <p:cNvPr id="20" name="Image 1" descr="/home/user/BasicRobotLessons/docs/presentations/v3/template/assets/logo/team5010-logo-onwhite.png">    </p:cNvPr>
+          <p:cNvPr id="28" name="Image 1" descr="/home/user/BasicRobotLessons/docs/presentations/v3/template/assets/logo/team5010-logo-onwhite.png">    </p:cNvPr>
           <p:cNvPicPr>
             <a:picLocks noChangeAspect="1"/>
           </p:cNvPicPr>
@@ -5582,7 +6518,7 @@
       </p:sp>
       <p:pic>
         <p:nvPicPr>
-          <p:cNvPr id="3" name="Image 0" descr="/home/user/BasicRobotLessons/docs/presentations/v3/template/assets/icons/coffee_white.png">    </p:cNvPr>
+          <p:cNvPr id="3" name="Image 0" descr="/home/user/BasicRobotLessons/docs/presentations/v3/template/assets/icons/download_white.png">    </p:cNvPr>
           <p:cNvPicPr>
             <a:picLocks noChangeAspect="1"/>
           </p:cNvPicPr>
@@ -5637,7 +6573,7 @@
                 <a:ea typeface="Calibri" pitchFamily="34" charset="-122"/>
                 <a:cs typeface="Calibri" pitchFamily="34" charset="-120"/>
               </a:rPr>
-              <a:t>SECTION 2 · GET A JDK</a:t>
+              <a:t>SECTION 2 · INSTALL GIT</a:t>
             </a:r>
             <a:endParaRPr lang="en-US" sz="2000" dirty="0"/>
           </a:p>
@@ -5676,7 +6612,7 @@
                 <a:ea typeface="Cambria" pitchFamily="34" charset="-122"/>
                 <a:cs typeface="Cambria" pitchFamily="34" charset="-120"/>
               </a:rPr>
-              <a:t>This course builds against Java 25</a:t>
+              <a:t>Get Git, and tell it who you are</a:t>
             </a:r>
             <a:endParaRPr lang="en-US" sz="3000" dirty="0"/>
           </a:p>
@@ -5691,11 +6627,11 @@
         <p:spPr>
           <a:xfrm>
             <a:off x="640080" y="1600200"/>
-            <a:ext cx="5212080" cy="1234440"/>
+            <a:ext cx="10881360" cy="1051560"/>
           </a:xfrm>
           <a:prstGeom prst="roundRect">
             <a:avLst>
-              <a:gd name="adj" fmla="val 8889"/>
+              <a:gd name="adj" fmla="val 10435"/>
             </a:avLst>
           </a:prstGeom>
           <a:solidFill>
@@ -5719,7 +6655,7 @@
         </p:nvSpPr>
         <p:spPr>
           <a:xfrm>
-            <a:off x="5541264" y="1746504"/>
+            <a:off x="11210544" y="1746504"/>
             <a:ext cx="128016" cy="128016"/>
           </a:xfrm>
           <a:prstGeom prst="ellipse">
@@ -5739,7 +6675,7 @@
         </p:nvSpPr>
         <p:spPr>
           <a:xfrm>
-            <a:off x="5541264" y="1947672"/>
+            <a:off x="11210544" y="1947672"/>
             <a:ext cx="128016" cy="128016"/>
           </a:xfrm>
           <a:prstGeom prst="ellipse">
@@ -5759,7 +6695,7 @@
         </p:nvSpPr>
         <p:spPr>
           <a:xfrm>
-            <a:off x="5541264" y="2148840"/>
+            <a:off x="11210544" y="2148840"/>
             <a:ext cx="128016" cy="128016"/>
           </a:xfrm>
           <a:prstGeom prst="ellipse">
@@ -5780,7 +6716,7 @@
         <p:spPr>
           <a:xfrm>
             <a:off x="914400" y="1801368"/>
-            <a:ext cx="4526280" cy="868680"/>
+            <a:ext cx="10195560" cy="685800"/>
           </a:xfrm>
           <a:prstGeom prst="rect">
             <a:avLst/>
@@ -5807,7 +6743,7 @@
                 <a:ea typeface="Courier New" pitchFamily="34" charset="-122"/>
                 <a:cs typeface="Courier New" pitchFamily="34" charset="-120"/>
               </a:rPr>
-              <a:t>java -version</a:t>
+              <a:t>winget install --id Git.Git</a:t>
             </a:r>
             <a:endParaRPr lang="en-US" sz="2000" dirty="0"/>
           </a:p>
@@ -5815,14 +6751,103 @@
       </p:sp>
       <p:sp>
         <p:nvSpPr>
-          <p:cNvPr id="11" name="Text 8"/>
-          <p:cNvSpPr/>
-          <p:nvPr/>
-        </p:nvSpPr>
-        <p:spPr>
-          <a:xfrm>
-            <a:off x="640080" y="3017520"/>
-            <a:ext cx="5212080" cy="822960"/>
+          <p:cNvPr id="11" name="Shape 8"/>
+          <p:cNvSpPr/>
+          <p:nvPr/>
+        </p:nvSpPr>
+        <p:spPr>
+          <a:xfrm>
+            <a:off x="640080" y="2926080"/>
+            <a:ext cx="10881360" cy="1600200"/>
+          </a:xfrm>
+          <a:prstGeom prst="roundRect">
+            <a:avLst>
+              <a:gd name="adj" fmla="val 6857"/>
+            </a:avLst>
+          </a:prstGeom>
+          <a:solidFill>
+            <a:srgbClr val="0B1F3A"/>
+          </a:solidFill>
+          <a:ln/>
+          <a:effectLst>
+            <a:outerShdw sx="100000" sy="100000" kx="0" ky="0" algn="bl" rotWithShape="0" blurRad="101600" dist="38100" dir="5400000">
+              <a:srgbClr val="0B1F3A">
+                <a:alpha val="35000"/>
+              </a:srgbClr>
+            </a:outerShdw>
+          </a:effectLst>
+        </p:spPr>
+      </p:sp>
+      <p:sp>
+        <p:nvSpPr>
+          <p:cNvPr id="12" name="Shape 9"/>
+          <p:cNvSpPr/>
+          <p:nvPr/>
+        </p:nvSpPr>
+        <p:spPr>
+          <a:xfrm>
+            <a:off x="11210544" y="3072384"/>
+            <a:ext cx="128016" cy="128016"/>
+          </a:xfrm>
+          <a:prstGeom prst="ellipse">
+            <a:avLst/>
+          </a:prstGeom>
+          <a:solidFill>
+            <a:srgbClr val="FF6B6B"/>
+          </a:solidFill>
+          <a:ln/>
+        </p:spPr>
+      </p:sp>
+      <p:sp>
+        <p:nvSpPr>
+          <p:cNvPr id="13" name="Shape 10"/>
+          <p:cNvSpPr/>
+          <p:nvPr/>
+        </p:nvSpPr>
+        <p:spPr>
+          <a:xfrm>
+            <a:off x="11210544" y="3273552"/>
+            <a:ext cx="128016" cy="128016"/>
+          </a:xfrm>
+          <a:prstGeom prst="ellipse">
+            <a:avLst/>
+          </a:prstGeom>
+          <a:solidFill>
+            <a:srgbClr val="FFD166"/>
+          </a:solidFill>
+          <a:ln/>
+        </p:spPr>
+      </p:sp>
+      <p:sp>
+        <p:nvSpPr>
+          <p:cNvPr id="14" name="Shape 11"/>
+          <p:cNvSpPr/>
+          <p:nvPr/>
+        </p:nvSpPr>
+        <p:spPr>
+          <a:xfrm>
+            <a:off x="11210544" y="3474720"/>
+            <a:ext cx="128016" cy="128016"/>
+          </a:xfrm>
+          <a:prstGeom prst="ellipse">
+            <a:avLst/>
+          </a:prstGeom>
+          <a:solidFill>
+            <a:srgbClr val="2EC4B6"/>
+          </a:solidFill>
+          <a:ln/>
+        </p:spPr>
+      </p:sp>
+      <p:sp>
+        <p:nvSpPr>
+          <p:cNvPr id="15" name="Text 12"/>
+          <p:cNvSpPr/>
+          <p:nvPr/>
+        </p:nvSpPr>
+        <p:spPr>
+          <a:xfrm>
+            <a:off x="914400" y="3127248"/>
+            <a:ext cx="10195560" cy="1234440"/>
           </a:xfrm>
           <a:prstGeom prst="rect">
             <a:avLst/>
@@ -5836,12 +6861,135 @@
           <a:p>
             <a:pPr indent="0" marL="0">
               <a:lnSpc>
-                <a:spcPct val="125000"/>
+                <a:spcPct val="120000"/>
               </a:lnSpc>
               <a:buNone/>
             </a:pPr>
             <a:r>
-              <a:rPr lang="en-US" sz="2000" i="1" dirty="0">
+              <a:rPr lang="en-US" sz="2000" dirty="0">
+                <a:solidFill>
+                  <a:srgbClr val="D7E3F4"/>
+                </a:solidFill>
+                <a:latin typeface="Courier New" pitchFamily="34" charset="0"/>
+                <a:ea typeface="Courier New" pitchFamily="34" charset="-122"/>
+                <a:cs typeface="Courier New" pitchFamily="34" charset="-120"/>
+              </a:rPr>
+              <a:t>git config --global user.name  "Your Name"</a:t>
+            </a:r>
+            <a:endParaRPr lang="en-US" sz="2000" dirty="0"/>
+          </a:p>
+          <a:p>
+            <a:pPr indent="0" marL="0">
+              <a:lnSpc>
+                <a:spcPct val="120000"/>
+              </a:lnSpc>
+              <a:buNone/>
+            </a:pPr>
+            <a:r>
+              <a:rPr lang="en-US" sz="2000" dirty="0">
+                <a:solidFill>
+                  <a:srgbClr val="D7E3F4"/>
+                </a:solidFill>
+                <a:latin typeface="Courier New" pitchFamily="34" charset="0"/>
+                <a:ea typeface="Courier New" pitchFamily="34" charset="-122"/>
+                <a:cs typeface="Courier New" pitchFamily="34" charset="-120"/>
+              </a:rPr>
+              <a:t>git config --global user.email "you@example.com"</a:t>
+            </a:r>
+            <a:endParaRPr lang="en-US" sz="2000" dirty="0"/>
+          </a:p>
+        </p:txBody>
+      </p:sp>
+      <p:sp>
+        <p:nvSpPr>
+          <p:cNvPr id="16" name="Shape 13"/>
+          <p:cNvSpPr/>
+          <p:nvPr/>
+        </p:nvSpPr>
+        <p:spPr>
+          <a:xfrm>
+            <a:off x="640080" y="4754880"/>
+            <a:ext cx="10881360" cy="1097280"/>
+          </a:xfrm>
+          <a:prstGeom prst="roundRect">
+            <a:avLst>
+              <a:gd name="adj" fmla="val 8333"/>
+            </a:avLst>
+          </a:prstGeom>
+          <a:solidFill>
+            <a:srgbClr val="F3F6FA"/>
+          </a:solidFill>
+          <a:ln/>
+        </p:spPr>
+      </p:sp>
+      <p:sp>
+        <p:nvSpPr>
+          <p:cNvPr id="17" name="Text 14"/>
+          <p:cNvSpPr/>
+          <p:nvPr/>
+        </p:nvSpPr>
+        <p:spPr>
+          <a:xfrm>
+            <a:off x="868680" y="4983480"/>
+            <a:ext cx="10424160" cy="895350"/>
+          </a:xfrm>
+          <a:prstGeom prst="rect">
+            <a:avLst/>
+          </a:prstGeom>
+          <a:noFill/>
+          <a:ln/>
+        </p:spPr>
+        <p:txBody>
+          <a:bodyPr wrap="square" lIns="0" tIns="0" rIns="0" bIns="0" rtlCol="0" anchor="t"/>
+          <a:lstStyle/>
+          <a:p>
+            <a:pPr indent="0" marL="0">
+              <a:lnSpc>
+                <a:spcPct val="120000"/>
+              </a:lnSpc>
+              <a:buNone/>
+            </a:pPr>
+            <a:r>
+              <a:rPr lang="en-US" sz="2100" b="1" dirty="0">
+                <a:solidFill>
+                  <a:srgbClr val="13294B"/>
+                </a:solidFill>
+                <a:latin typeface="Cambria" pitchFamily="34" charset="0"/>
+                <a:ea typeface="Cambria" pitchFamily="34" charset="-122"/>
+                <a:cs typeface="Cambria" pitchFamily="34" charset="-120"/>
+              </a:rPr>
+              <a:t>Use the same email you'll sign up for GitHub with — that's how GitHub matches a commit to your account.</a:t>
+            </a:r>
+            <a:endParaRPr lang="en-US" sz="2100" dirty="0"/>
+          </a:p>
+        </p:txBody>
+      </p:sp>
+      <p:sp>
+        <p:nvSpPr>
+          <p:cNvPr id="18" name="Text 15"/>
+          <p:cNvSpPr/>
+          <p:nvPr/>
+        </p:nvSpPr>
+        <p:spPr>
+          <a:xfrm>
+            <a:off x="640080" y="6446520"/>
+            <a:ext cx="8229600" cy="365760"/>
+          </a:xfrm>
+          <a:prstGeom prst="rect">
+            <a:avLst/>
+          </a:prstGeom>
+          <a:noFill/>
+          <a:ln/>
+        </p:spPr>
+        <p:txBody>
+          <a:bodyPr wrap="square" lIns="0" tIns="0" rIns="0" bIns="0" rtlCol="0" anchor="ctr"/>
+          <a:lstStyle/>
+          <a:p>
+            <a:pPr indent="0" marL="0">
+              <a:buNone/>
+            </a:pPr>
+            <a:r>
+              <a:rPr lang="en-US" sz="2000" spc="100" kern="0" dirty="0">
                 <a:solidFill>
                   <a:srgbClr val="5B6B84"/>
                 </a:solidFill>
@@ -5849,7 +6997,7 @@
                 <a:ea typeface="Calibri" pitchFamily="34" charset="-122"/>
                 <a:cs typeface="Calibri" pitchFamily="34" charset="-120"/>
               </a:rPr>
-              <a:t>Look for 25 somewhere in what it prints.</a:t>
+              <a:t>LEARN JAVA + ROBOT PROGRAMMING · SETUP</a:t>
             </a:r>
             <a:endParaRPr lang="en-US" sz="2000" dirty="0"/>
           </a:p>
@@ -5857,36 +7005,14 @@
       </p:sp>
       <p:sp>
         <p:nvSpPr>
-          <p:cNvPr id="12" name="Shape 9"/>
-          <p:cNvSpPr/>
-          <p:nvPr/>
-        </p:nvSpPr>
-        <p:spPr>
-          <a:xfrm>
-            <a:off x="6172200" y="1600200"/>
-            <a:ext cx="5349240" cy="4251960"/>
-          </a:xfrm>
-          <a:prstGeom prst="roundRect">
-            <a:avLst>
-              <a:gd name="adj" fmla="val 2151"/>
-            </a:avLst>
-          </a:prstGeom>
-          <a:solidFill>
-            <a:srgbClr val="F3F6FA"/>
-          </a:solidFill>
-          <a:ln/>
-        </p:spPr>
-      </p:sp>
-      <p:sp>
-        <p:nvSpPr>
-          <p:cNvPr id="13" name="Text 10"/>
-          <p:cNvSpPr/>
-          <p:nvPr/>
-        </p:nvSpPr>
-        <p:spPr>
-          <a:xfrm>
-            <a:off x="6446520" y="1874520"/>
-            <a:ext cx="4800600" cy="365760"/>
+          <p:cNvPr id="19" name="Text 16"/>
+          <p:cNvSpPr/>
+          <p:nvPr/>
+        </p:nvSpPr>
+        <p:spPr>
+          <a:xfrm>
+            <a:off x="11002975" y="6446520"/>
+            <a:ext cx="548640" cy="365760"/>
           </a:xfrm>
           <a:prstGeom prst="rect">
             <a:avLst/>
@@ -5898,180 +7024,18 @@
           <a:bodyPr wrap="square" lIns="0" tIns="0" rIns="0" bIns="0" rtlCol="0" anchor="ctr"/>
           <a:lstStyle/>
           <a:p>
-            <a:pPr indent="0" marL="0">
-              <a:buNone/>
-            </a:pPr>
-            <a:r>
-              <a:rPr lang="en-US" sz="2000" b="1" spc="50" kern="0" dirty="0">
-                <a:solidFill>
-                  <a:srgbClr val="FF5010"/>
+            <a:pPr algn="r" indent="0" marL="0">
+              <a:buNone/>
+            </a:pPr>
+            <a:r>
+              <a:rPr lang="en-US" sz="2000" dirty="0">
+                <a:solidFill>
+                  <a:srgbClr val="5B6B84"/>
                 </a:solidFill>
                 <a:latin typeface="Calibri" pitchFamily="34" charset="0"/>
                 <a:ea typeface="Calibri" pitchFamily="34" charset="-122"/>
                 <a:cs typeface="Calibri" pitchFamily="34" charset="-120"/>
               </a:rPr>
-              <a:t>POINTING GRADLE AT IT</a:t>
-            </a:r>
-            <a:endParaRPr lang="en-US" sz="2000" dirty="0"/>
-          </a:p>
-        </p:txBody>
-      </p:sp>
-      <p:sp>
-        <p:nvSpPr>
-          <p:cNvPr id="14" name="Text 11"/>
-          <p:cNvSpPr/>
-          <p:nvPr/>
-        </p:nvSpPr>
-        <p:spPr>
-          <a:xfrm>
-            <a:off x="6446520" y="2331720"/>
-            <a:ext cx="4800600" cy="927100"/>
-          </a:xfrm>
-          <a:prstGeom prst="rect">
-            <a:avLst/>
-          </a:prstGeom>
-          <a:noFill/>
-          <a:ln/>
-        </p:spPr>
-        <p:txBody>
-          <a:bodyPr wrap="square" lIns="0" tIns="0" rIns="0" bIns="0" rtlCol="0" anchor="t"/>
-          <a:lstStyle/>
-          <a:p>
-            <a:pPr indent="0" marL="0">
-              <a:lnSpc>
-                <a:spcPct val="120000"/>
-              </a:lnSpc>
-              <a:buNone/>
-            </a:pPr>
-            <a:r>
-              <a:rPr lang="en-US" sz="2200" b="1" dirty="0">
-                <a:solidFill>
-                  <a:srgbClr val="13294B"/>
-                </a:solidFill>
-                <a:latin typeface="Cambria" pitchFamily="34" charset="0"/>
-                <a:ea typeface="Cambria" pitchFamily="34" charset="-122"/>
-                <a:cs typeface="Cambria" pitchFamily="34" charset="-120"/>
-              </a:rPr>
-              <a:t>Install a JDK 25, then point Gradle at it.</a:t>
-            </a:r>
-            <a:endParaRPr lang="en-US" sz="2200" dirty="0"/>
-          </a:p>
-        </p:txBody>
-      </p:sp>
-      <p:sp>
-        <p:nvSpPr>
-          <p:cNvPr id="15" name="Text 12"/>
-          <p:cNvSpPr/>
-          <p:nvPr/>
-        </p:nvSpPr>
-        <p:spPr>
-          <a:xfrm>
-            <a:off x="6446520" y="3258820"/>
-            <a:ext cx="4800600" cy="2319020"/>
-          </a:xfrm>
-          <a:prstGeom prst="rect">
-            <a:avLst/>
-          </a:prstGeom>
-          <a:noFill/>
-          <a:ln/>
-        </p:spPr>
-        <p:txBody>
-          <a:bodyPr wrap="square" lIns="0" tIns="0" rIns="0" bIns="0" rtlCol="0" anchor="t"/>
-          <a:lstStyle/>
-          <a:p>
-            <a:pPr indent="0" marL="0">
-              <a:lnSpc>
-                <a:spcPct val="125000"/>
-              </a:lnSpc>
-              <a:buNone/>
-            </a:pPr>
-            <a:r>
-              <a:rPr lang="en-US" sz="2000" dirty="0">
-                <a:solidFill>
-                  <a:srgbClr val="13294B"/>
-                </a:solidFill>
-                <a:latin typeface="Calibri" pitchFamily="34" charset="0"/>
-                <a:ea typeface="Calibri" pitchFamily="34" charset="-122"/>
-                <a:cs typeface="Calibri" pitchFamily="34" charset="-120"/>
-              </a:rPr>
-              <a:t>Set JAVA_HOME to your JDK 25 install — or set ORG_GRADLE_JAVA_HOME instead, which points Gradle there without touching JAVA_HOME everywhere else. Gradle fails loudly if this is wrong, so it's worth checking now.</a:t>
-            </a:r>
-            <a:endParaRPr lang="en-US" sz="2000" dirty="0"/>
-          </a:p>
-        </p:txBody>
-      </p:sp>
-      <p:sp>
-        <p:nvSpPr>
-          <p:cNvPr id="16" name="Text 13"/>
-          <p:cNvSpPr/>
-          <p:nvPr/>
-        </p:nvSpPr>
-        <p:spPr>
-          <a:xfrm>
-            <a:off x="640080" y="6446520"/>
-            <a:ext cx="8229600" cy="365760"/>
-          </a:xfrm>
-          <a:prstGeom prst="rect">
-            <a:avLst/>
-          </a:prstGeom>
-          <a:noFill/>
-          <a:ln/>
-        </p:spPr>
-        <p:txBody>
-          <a:bodyPr wrap="square" lIns="0" tIns="0" rIns="0" bIns="0" rtlCol="0" anchor="ctr"/>
-          <a:lstStyle/>
-          <a:p>
-            <a:pPr indent="0" marL="0">
-              <a:buNone/>
-            </a:pPr>
-            <a:r>
-              <a:rPr lang="en-US" sz="2000" spc="100" kern="0" dirty="0">
-                <a:solidFill>
-                  <a:srgbClr val="5B6B84"/>
-                </a:solidFill>
-                <a:latin typeface="Calibri" pitchFamily="34" charset="0"/>
-                <a:ea typeface="Calibri" pitchFamily="34" charset="-122"/>
-                <a:cs typeface="Calibri" pitchFamily="34" charset="-120"/>
-              </a:rPr>
-              <a:t>LEARN JAVA + ROBOT PROGRAMMING · SETUP</a:t>
-            </a:r>
-            <a:endParaRPr lang="en-US" sz="2000" dirty="0"/>
-          </a:p>
-        </p:txBody>
-      </p:sp>
-      <p:sp>
-        <p:nvSpPr>
-          <p:cNvPr id="17" name="Text 14"/>
-          <p:cNvSpPr/>
-          <p:nvPr/>
-        </p:nvSpPr>
-        <p:spPr>
-          <a:xfrm>
-            <a:off x="11002975" y="6446520"/>
-            <a:ext cx="548640" cy="365760"/>
-          </a:xfrm>
-          <a:prstGeom prst="rect">
-            <a:avLst/>
-          </a:prstGeom>
-          <a:noFill/>
-          <a:ln/>
-        </p:spPr>
-        <p:txBody>
-          <a:bodyPr wrap="square" lIns="0" tIns="0" rIns="0" bIns="0" rtlCol="0" anchor="ctr"/>
-          <a:lstStyle/>
-          <a:p>
-            <a:pPr algn="r" indent="0" marL="0">
-              <a:buNone/>
-            </a:pPr>
-            <a:r>
-              <a:rPr lang="en-US" sz="2000" dirty="0">
-                <a:solidFill>
-                  <a:srgbClr val="5B6B84"/>
-                </a:solidFill>
-                <a:latin typeface="Calibri" pitchFamily="34" charset="0"/>
-                <a:ea typeface="Calibri" pitchFamily="34" charset="-122"/>
-                <a:cs typeface="Calibri" pitchFamily="34" charset="-120"/>
-              </a:rPr>
               <a:t>4</a:t>
             </a:r>
             <a:endParaRPr lang="en-US" sz="2000" dirty="0"/>
@@ -6080,7 +7044,7 @@
       </p:sp>
       <p:pic>
         <p:nvPicPr>
-          <p:cNvPr id="18" name="Image 1" descr="/home/user/BasicRobotLessons/docs/presentations/v3/template/assets/logo/team5010-logo-onwhite.png">    </p:cNvPr>
+          <p:cNvPr id="20" name="Image 1" descr="/home/user/BasicRobotLessons/docs/presentations/v3/template/assets/logo/team5010-logo-onwhite.png">    </p:cNvPr>
           <p:cNvPicPr>
             <a:picLocks noChangeAspect="1"/>
           </p:cNvPicPr>
@@ -6156,7 +7120,7 @@
       </p:sp>
       <p:pic>
         <p:nvPicPr>
-          <p:cNvPr id="3" name="Image 0" descr="/home/user/BasicRobotLessons/docs/presentations/v3/template/assets/icons/folderopen_white.png">    </p:cNvPr>
+          <p:cNvPr id="3" name="Image 0" descr="/home/user/BasicRobotLessons/docs/presentations/v3/template/assets/icons/coffee_white.png">    </p:cNvPr>
           <p:cNvPicPr>
             <a:picLocks noChangeAspect="1"/>
           </p:cNvPicPr>
@@ -6211,7 +7175,7 @@
                 <a:ea typeface="Calibri" pitchFamily="34" charset="-122"/>
                 <a:cs typeface="Calibri" pitchFamily="34" charset="-120"/>
               </a:rPr>
-              <a:t>SECTION 3 · YOUR STARTING PROJECT</a:t>
+              <a:t>SECTION 3 · GET A JDK</a:t>
             </a:r>
             <a:endParaRPr lang="en-US" sz="2000" dirty="0"/>
           </a:p>
@@ -6250,7 +7214,7 @@
                 <a:ea typeface="Cambria" pitchFamily="34" charset="-122"/>
                 <a:cs typeface="Cambria" pitchFamily="34" charset="-120"/>
               </a:rPr>
-              <a:t>Pull your project from the course repo</a:t>
+              <a:t>This course builds against Java 25</a:t>
             </a:r>
             <a:endParaRPr lang="en-US" sz="3000" dirty="0"/>
           </a:p>
@@ -6264,12 +7228,12 @@
         </p:nvSpPr>
         <p:spPr>
           <a:xfrm>
-            <a:off x="640080" y="1554480"/>
-            <a:ext cx="10881360" cy="1965960"/>
+            <a:off x="640080" y="1600200"/>
+            <a:ext cx="5212080" cy="1234440"/>
           </a:xfrm>
           <a:prstGeom prst="roundRect">
             <a:avLst>
-              <a:gd name="adj" fmla="val 5581"/>
+              <a:gd name="adj" fmla="val 8889"/>
             </a:avLst>
           </a:prstGeom>
           <a:solidFill>
@@ -6293,7 +7257,7 @@
         </p:nvSpPr>
         <p:spPr>
           <a:xfrm>
-            <a:off x="11210544" y="1700784"/>
+            <a:off x="5541264" y="1746504"/>
             <a:ext cx="128016" cy="128016"/>
           </a:xfrm>
           <a:prstGeom prst="ellipse">
@@ -6313,7 +7277,7 @@
         </p:nvSpPr>
         <p:spPr>
           <a:xfrm>
-            <a:off x="11210544" y="1901952"/>
+            <a:off x="5541264" y="1947672"/>
             <a:ext cx="128016" cy="128016"/>
           </a:xfrm>
           <a:prstGeom prst="ellipse">
@@ -6333,7 +7297,7 @@
         </p:nvSpPr>
         <p:spPr>
           <a:xfrm>
-            <a:off x="11210544" y="2103120"/>
+            <a:off x="5541264" y="2148840"/>
             <a:ext cx="128016" cy="128016"/>
           </a:xfrm>
           <a:prstGeom prst="ellipse">
@@ -6353,8 +7317,8 @@
         </p:nvSpPr>
         <p:spPr>
           <a:xfrm>
-            <a:off x="914400" y="1755648"/>
-            <a:ext cx="10195560" cy="1600200"/>
+            <a:off x="914400" y="1801368"/>
+            <a:ext cx="4526280" cy="868680"/>
           </a:xfrm>
           <a:prstGeom prst="rect">
             <a:avLst/>
@@ -6373,18 +7337,143 @@
               <a:buNone/>
             </a:pPr>
             <a:r>
-              <a:rPr lang="en-US" sz="1800" dirty="0">
-                <a:solidFill>
-                  <a:srgbClr val="D7E3F4"/>
+              <a:rPr lang="en-US" sz="2000" dirty="0">
+                <a:solidFill>
+                  <a:srgbClr val="7FD1D9"/>
                 </a:solidFill>
                 <a:latin typeface="Courier New" pitchFamily="34" charset="0"/>
                 <a:ea typeface="Courier New" pitchFamily="34" charset="-122"/>
                 <a:cs typeface="Courier New" pitchFamily="34" charset="-120"/>
               </a:rPr>
-              <a:t>git clone https://github.com/FRC5010/BasicRobotLessons.git</a:t>
-            </a:r>
-            <a:endParaRPr lang="en-US" sz="1800" dirty="0"/>
-          </a:p>
+              <a:t>java -version</a:t>
+            </a:r>
+            <a:endParaRPr lang="en-US" sz="2000" dirty="0"/>
+          </a:p>
+        </p:txBody>
+      </p:sp>
+      <p:sp>
+        <p:nvSpPr>
+          <p:cNvPr id="11" name="Text 8"/>
+          <p:cNvSpPr/>
+          <p:nvPr/>
+        </p:nvSpPr>
+        <p:spPr>
+          <a:xfrm>
+            <a:off x="640080" y="3017520"/>
+            <a:ext cx="5212080" cy="822960"/>
+          </a:xfrm>
+          <a:prstGeom prst="rect">
+            <a:avLst/>
+          </a:prstGeom>
+          <a:noFill/>
+          <a:ln/>
+        </p:spPr>
+        <p:txBody>
+          <a:bodyPr wrap="square" lIns="0" tIns="0" rIns="0" bIns="0" rtlCol="0" anchor="t"/>
+          <a:lstStyle/>
+          <a:p>
+            <a:pPr indent="0" marL="0">
+              <a:lnSpc>
+                <a:spcPct val="125000"/>
+              </a:lnSpc>
+              <a:buNone/>
+            </a:pPr>
+            <a:r>
+              <a:rPr lang="en-US" sz="2000" i="1" dirty="0">
+                <a:solidFill>
+                  <a:srgbClr val="5B6B84"/>
+                </a:solidFill>
+                <a:latin typeface="Calibri" pitchFamily="34" charset="0"/>
+                <a:ea typeface="Calibri" pitchFamily="34" charset="-122"/>
+                <a:cs typeface="Calibri" pitchFamily="34" charset="-120"/>
+              </a:rPr>
+              <a:t>Look for 25 somewhere in what it prints.</a:t>
+            </a:r>
+            <a:endParaRPr lang="en-US" sz="2000" dirty="0"/>
+          </a:p>
+        </p:txBody>
+      </p:sp>
+      <p:sp>
+        <p:nvSpPr>
+          <p:cNvPr id="12" name="Shape 9"/>
+          <p:cNvSpPr/>
+          <p:nvPr/>
+        </p:nvSpPr>
+        <p:spPr>
+          <a:xfrm>
+            <a:off x="6172200" y="1600200"/>
+            <a:ext cx="5349240" cy="4251960"/>
+          </a:xfrm>
+          <a:prstGeom prst="roundRect">
+            <a:avLst>
+              <a:gd name="adj" fmla="val 2151"/>
+            </a:avLst>
+          </a:prstGeom>
+          <a:solidFill>
+            <a:srgbClr val="F3F6FA"/>
+          </a:solidFill>
+          <a:ln/>
+        </p:spPr>
+      </p:sp>
+      <p:sp>
+        <p:nvSpPr>
+          <p:cNvPr id="13" name="Text 10"/>
+          <p:cNvSpPr/>
+          <p:nvPr/>
+        </p:nvSpPr>
+        <p:spPr>
+          <a:xfrm>
+            <a:off x="6446520" y="1874520"/>
+            <a:ext cx="4800600" cy="365760"/>
+          </a:xfrm>
+          <a:prstGeom prst="rect">
+            <a:avLst/>
+          </a:prstGeom>
+          <a:noFill/>
+          <a:ln/>
+        </p:spPr>
+        <p:txBody>
+          <a:bodyPr wrap="square" lIns="0" tIns="0" rIns="0" bIns="0" rtlCol="0" anchor="ctr"/>
+          <a:lstStyle/>
+          <a:p>
+            <a:pPr indent="0" marL="0">
+              <a:buNone/>
+            </a:pPr>
+            <a:r>
+              <a:rPr lang="en-US" sz="2000" b="1" spc="50" kern="0" dirty="0">
+                <a:solidFill>
+                  <a:srgbClr val="FF5010"/>
+                </a:solidFill>
+                <a:latin typeface="Calibri" pitchFamily="34" charset="0"/>
+                <a:ea typeface="Calibri" pitchFamily="34" charset="-122"/>
+                <a:cs typeface="Calibri" pitchFamily="34" charset="-120"/>
+              </a:rPr>
+              <a:t>POINTING GRADLE AT IT</a:t>
+            </a:r>
+            <a:endParaRPr lang="en-US" sz="2000" dirty="0"/>
+          </a:p>
+        </p:txBody>
+      </p:sp>
+      <p:sp>
+        <p:nvSpPr>
+          <p:cNvPr id="14" name="Text 11"/>
+          <p:cNvSpPr/>
+          <p:nvPr/>
+        </p:nvSpPr>
+        <p:spPr>
+          <a:xfrm>
+            <a:off x="6446520" y="2331720"/>
+            <a:ext cx="4800600" cy="927100"/>
+          </a:xfrm>
+          <a:prstGeom prst="rect">
+            <a:avLst/>
+          </a:prstGeom>
+          <a:noFill/>
+          <a:ln/>
+        </p:spPr>
+        <p:txBody>
+          <a:bodyPr wrap="square" lIns="0" tIns="0" rIns="0" bIns="0" rtlCol="0" anchor="t"/>
+          <a:lstStyle/>
           <a:p>
             <a:pPr indent="0" marL="0">
               <a:lnSpc>
@@ -6393,72 +7482,30 @@
               <a:buNone/>
             </a:pPr>
             <a:r>
-              <a:rPr lang="en-US" sz="1800" dirty="0">
-                <a:solidFill>
-                  <a:srgbClr val="D7E3F4"/>
-                </a:solidFill>
-                <a:latin typeface="Courier New" pitchFamily="34" charset="0"/>
-                <a:ea typeface="Courier New" pitchFamily="34" charset="-122"/>
-                <a:cs typeface="Courier New" pitchFamily="34" charset="-120"/>
-              </a:rPr>
-              <a:t>cd BasicRobotLessons</a:t>
-            </a:r>
-            <a:endParaRPr lang="en-US" sz="1800" dirty="0"/>
-          </a:p>
-          <a:p>
-            <a:pPr indent="0" marL="0">
-              <a:lnSpc>
-                <a:spcPct val="120000"/>
-              </a:lnSpc>
-              <a:buNone/>
-            </a:pPr>
-            <a:r>
-              <a:rPr lang="en-US" sz="1800" dirty="0">
-                <a:solidFill>
-                  <a:srgbClr val="9EF01A"/>
-                </a:solidFill>
-                <a:latin typeface="Courier New" pitchFamily="34" charset="0"/>
-                <a:ea typeface="Courier New" pitchFamily="34" charset="-122"/>
-                <a:cs typeface="Courier New" pitchFamily="34" charset="-120"/>
-              </a:rPr>
-              <a:t>./tools/verify-lessons-v3.sh -1 --sandbox ~/dev/MyOpModeRobot</a:t>
-            </a:r>
-            <a:endParaRPr lang="en-US" sz="1800" dirty="0"/>
-          </a:p>
-        </p:txBody>
-      </p:sp>
-      <p:sp>
-        <p:nvSpPr>
-          <p:cNvPr id="11" name="Shape 8"/>
-          <p:cNvSpPr/>
-          <p:nvPr/>
-        </p:nvSpPr>
-        <p:spPr>
-          <a:xfrm>
-            <a:off x="640080" y="3749040"/>
-            <a:ext cx="5349240" cy="2103120"/>
-          </a:xfrm>
-          <a:prstGeom prst="roundRect">
-            <a:avLst>
-              <a:gd name="adj" fmla="val 4348"/>
-            </a:avLst>
-          </a:prstGeom>
-          <a:solidFill>
-            <a:srgbClr val="F3F6FA"/>
-          </a:solidFill>
-          <a:ln/>
-        </p:spPr>
-      </p:sp>
-      <p:sp>
-        <p:nvSpPr>
-          <p:cNvPr id="12" name="Text 9"/>
-          <p:cNvSpPr/>
-          <p:nvPr/>
-        </p:nvSpPr>
-        <p:spPr>
-          <a:xfrm>
-            <a:off x="914400" y="3977640"/>
-            <a:ext cx="4892040" cy="1737360"/>
+              <a:rPr lang="en-US" sz="2200" b="1" dirty="0">
+                <a:solidFill>
+                  <a:srgbClr val="13294B"/>
+                </a:solidFill>
+                <a:latin typeface="Cambria" pitchFamily="34" charset="0"/>
+                <a:ea typeface="Cambria" pitchFamily="34" charset="-122"/>
+                <a:cs typeface="Cambria" pitchFamily="34" charset="-120"/>
+              </a:rPr>
+              <a:t>Install a JDK 25, then point Gradle at it.</a:t>
+            </a:r>
+            <a:endParaRPr lang="en-US" sz="2200" dirty="0"/>
+          </a:p>
+        </p:txBody>
+      </p:sp>
+      <p:sp>
+        <p:nvSpPr>
+          <p:cNvPr id="15" name="Text 12"/>
+          <p:cNvSpPr/>
+          <p:nvPr/>
+        </p:nvSpPr>
+        <p:spPr>
+          <a:xfrm>
+            <a:off x="6446520" y="3258820"/>
+            <a:ext cx="4800600" cy="2319020"/>
           </a:xfrm>
           <a:prstGeom prst="rect">
             <a:avLst/>
@@ -6485,113 +7532,7 @@
                 <a:ea typeface="Calibri" pitchFamily="34" charset="-122"/>
                 <a:cs typeface="Calibri" pitchFamily="34" charset="-120"/>
               </a:rPr>
-              <a:t>--sandbox names where your project lands. -1 means "just the starting template, no lessons applied yet."</a:t>
-            </a:r>
-            <a:endParaRPr lang="en-US" sz="2000" dirty="0"/>
-          </a:p>
-        </p:txBody>
-      </p:sp>
-      <p:sp>
-        <p:nvSpPr>
-          <p:cNvPr id="13" name="Shape 10"/>
-          <p:cNvSpPr/>
-          <p:nvPr/>
-        </p:nvSpPr>
-        <p:spPr>
-          <a:xfrm>
-            <a:off x="6172200" y="3749040"/>
-            <a:ext cx="5349240" cy="2286000"/>
-          </a:xfrm>
-          <a:prstGeom prst="roundRect">
-            <a:avLst>
-              <a:gd name="adj" fmla="val 4000"/>
-            </a:avLst>
-          </a:prstGeom>
-          <a:solidFill>
-            <a:srgbClr val="FF5010"/>
-          </a:solidFill>
-          <a:ln/>
-        </p:spPr>
-      </p:sp>
-      <p:sp>
-        <p:nvSpPr>
-          <p:cNvPr id="14" name="Text 11"/>
-          <p:cNvSpPr/>
-          <p:nvPr/>
-        </p:nvSpPr>
-        <p:spPr>
-          <a:xfrm>
-            <a:off x="6446520" y="3931920"/>
-            <a:ext cx="4800600" cy="731520"/>
-          </a:xfrm>
-          <a:prstGeom prst="rect">
-            <a:avLst/>
-          </a:prstGeom>
-          <a:noFill/>
-          <a:ln/>
-        </p:spPr>
-        <p:txBody>
-          <a:bodyPr wrap="square" lIns="0" tIns="0" rIns="0" bIns="0" rtlCol="0" anchor="t"/>
-          <a:lstStyle/>
-          <a:p>
-            <a:pPr indent="0" marL="0">
-              <a:lnSpc>
-                <a:spcPct val="115000"/>
-              </a:lnSpc>
-              <a:buNone/>
-            </a:pPr>
-            <a:r>
-              <a:rPr lang="en-US" sz="2000" b="1" spc="30" kern="0" dirty="0">
-                <a:solidFill>
-                  <a:srgbClr val="FFFFFF"/>
-                </a:solidFill>
-                <a:latin typeface="Calibri" pitchFamily="34" charset="0"/>
-                <a:ea typeface="Calibri" pitchFamily="34" charset="-122"/>
-                <a:cs typeface="Calibri" pitchFamily="34" charset="-120"/>
-              </a:rPr>
-              <a:t>RUN THIS ONE IN GIT BASH, NOT POWERSHELL</a:t>
-            </a:r>
-            <a:endParaRPr lang="en-US" sz="2000" dirty="0"/>
-          </a:p>
-        </p:txBody>
-      </p:sp>
-      <p:sp>
-        <p:nvSpPr>
-          <p:cNvPr id="15" name="Text 12"/>
-          <p:cNvSpPr/>
-          <p:nvPr/>
-        </p:nvSpPr>
-        <p:spPr>
-          <a:xfrm>
-            <a:off x="6446520" y="4709160"/>
-            <a:ext cx="4800600" cy="1234440"/>
-          </a:xfrm>
-          <a:prstGeom prst="rect">
-            <a:avLst/>
-          </a:prstGeom>
-          <a:noFill/>
-          <a:ln/>
-        </p:spPr>
-        <p:txBody>
-          <a:bodyPr wrap="square" lIns="0" tIns="0" rIns="0" bIns="0" rtlCol="0" anchor="t"/>
-          <a:lstStyle/>
-          <a:p>
-            <a:pPr indent="0" marL="0">
-              <a:lnSpc>
-                <a:spcPct val="120000"/>
-              </a:lnSpc>
-              <a:buNone/>
-            </a:pPr>
-            <a:r>
-              <a:rPr lang="en-US" sz="2000" dirty="0">
-                <a:solidFill>
-                  <a:srgbClr val="FFFFFF"/>
-                </a:solidFill>
-                <a:latin typeface="Calibri" pitchFamily="34" charset="0"/>
-                <a:ea typeface="Calibri" pitchFamily="34" charset="-122"/>
-                <a:cs typeface="Calibri" pitchFamily="34" charset="-120"/>
-              </a:rPr>
-              <a:t>The script needs bash, curl, and python3. Git Bash — installed alongside Git — is in your Start menu.</a:t>
+              <a:t>Set JAVA_HOME to your JDK 25 install — or set ORG_GRADLE_JAVA_HOME instead, which points Gradle there without touching JAVA_HOME everywhere else. Gradle fails loudly if this is wrong, so it's worth checking now.</a:t>
             </a:r>
             <a:endParaRPr lang="en-US" sz="2000" dirty="0"/>
           </a:p>
@@ -6753,7 +7694,7 @@
       </p:sp>
       <p:pic>
         <p:nvPicPr>
-          <p:cNvPr id="3" name="Image 0" descr="/home/user/BasicRobotLessons/docs/presentations/v3/template/assets/icons/sitemap_white.png">    </p:cNvPr>
+          <p:cNvPr id="3" name="Image 0" descr="/home/user/BasicRobotLessons/docs/presentations/v3/template/assets/icons/folderopen_white.png">    </p:cNvPr>
           <p:cNvPicPr>
             <a:picLocks noChangeAspect="1"/>
           </p:cNvPicPr>
@@ -6808,7 +7749,7 @@
                 <a:ea typeface="Calibri" pitchFamily="34" charset="-122"/>
                 <a:cs typeface="Calibri" pitchFamily="34" charset="-120"/>
               </a:rPr>
-              <a:t>SECTION 3 · TWO FOLDERS NOW EXIST</a:t>
+              <a:t>SECTION 4 · YOUR STARTING PROJECT</a:t>
             </a:r>
             <a:endParaRPr lang="en-US" sz="2000" dirty="0"/>
           </a:p>
@@ -6847,7 +7788,7 @@
                 <a:ea typeface="Cambria" pitchFamily="34" charset="-122"/>
                 <a:cs typeface="Cambria" pitchFamily="34" charset="-120"/>
               </a:rPr>
-              <a:t>Don't confuse them</a:t>
+              <a:t>Pull your project from the course repo</a:t>
             </a:r>
             <a:endParaRPr lang="en-US" sz="3000" dirty="0"/>
           </a:p>
@@ -6861,12 +7802,183 @@
         </p:nvSpPr>
         <p:spPr>
           <a:xfrm>
-            <a:off x="640080" y="1600200"/>
-            <a:ext cx="5349240" cy="4251960"/>
+            <a:off x="640080" y="1554480"/>
+            <a:ext cx="10881360" cy="1965960"/>
           </a:xfrm>
           <a:prstGeom prst="roundRect">
             <a:avLst>
-              <a:gd name="adj" fmla="val 2151"/>
+              <a:gd name="adj" fmla="val 5581"/>
+            </a:avLst>
+          </a:prstGeom>
+          <a:solidFill>
+            <a:srgbClr val="0B1F3A"/>
+          </a:solidFill>
+          <a:ln/>
+          <a:effectLst>
+            <a:outerShdw sx="100000" sy="100000" kx="0" ky="0" algn="bl" rotWithShape="0" blurRad="101600" dist="38100" dir="5400000">
+              <a:srgbClr val="0B1F3A">
+                <a:alpha val="35000"/>
+              </a:srgbClr>
+            </a:outerShdw>
+          </a:effectLst>
+        </p:spPr>
+      </p:sp>
+      <p:sp>
+        <p:nvSpPr>
+          <p:cNvPr id="7" name="Shape 4"/>
+          <p:cNvSpPr/>
+          <p:nvPr/>
+        </p:nvSpPr>
+        <p:spPr>
+          <a:xfrm>
+            <a:off x="11210544" y="1700784"/>
+            <a:ext cx="128016" cy="128016"/>
+          </a:xfrm>
+          <a:prstGeom prst="ellipse">
+            <a:avLst/>
+          </a:prstGeom>
+          <a:solidFill>
+            <a:srgbClr val="FF6B6B"/>
+          </a:solidFill>
+          <a:ln/>
+        </p:spPr>
+      </p:sp>
+      <p:sp>
+        <p:nvSpPr>
+          <p:cNvPr id="8" name="Shape 5"/>
+          <p:cNvSpPr/>
+          <p:nvPr/>
+        </p:nvSpPr>
+        <p:spPr>
+          <a:xfrm>
+            <a:off x="11210544" y="1901952"/>
+            <a:ext cx="128016" cy="128016"/>
+          </a:xfrm>
+          <a:prstGeom prst="ellipse">
+            <a:avLst/>
+          </a:prstGeom>
+          <a:solidFill>
+            <a:srgbClr val="FFD166"/>
+          </a:solidFill>
+          <a:ln/>
+        </p:spPr>
+      </p:sp>
+      <p:sp>
+        <p:nvSpPr>
+          <p:cNvPr id="9" name="Shape 6"/>
+          <p:cNvSpPr/>
+          <p:nvPr/>
+        </p:nvSpPr>
+        <p:spPr>
+          <a:xfrm>
+            <a:off x="11210544" y="2103120"/>
+            <a:ext cx="128016" cy="128016"/>
+          </a:xfrm>
+          <a:prstGeom prst="ellipse">
+            <a:avLst/>
+          </a:prstGeom>
+          <a:solidFill>
+            <a:srgbClr val="2EC4B6"/>
+          </a:solidFill>
+          <a:ln/>
+        </p:spPr>
+      </p:sp>
+      <p:sp>
+        <p:nvSpPr>
+          <p:cNvPr id="10" name="Text 7"/>
+          <p:cNvSpPr/>
+          <p:nvPr/>
+        </p:nvSpPr>
+        <p:spPr>
+          <a:xfrm>
+            <a:off x="914400" y="1755648"/>
+            <a:ext cx="10195560" cy="1600200"/>
+          </a:xfrm>
+          <a:prstGeom prst="rect">
+            <a:avLst/>
+          </a:prstGeom>
+          <a:noFill/>
+          <a:ln/>
+        </p:spPr>
+        <p:txBody>
+          <a:bodyPr wrap="square" lIns="0" tIns="0" rIns="0" bIns="0" rtlCol="0" anchor="t"/>
+          <a:lstStyle/>
+          <a:p>
+            <a:pPr indent="0" marL="0">
+              <a:lnSpc>
+                <a:spcPct val="120000"/>
+              </a:lnSpc>
+              <a:buNone/>
+            </a:pPr>
+            <a:r>
+              <a:rPr lang="en-US" sz="1800" dirty="0">
+                <a:solidFill>
+                  <a:srgbClr val="D7E3F4"/>
+                </a:solidFill>
+                <a:latin typeface="Courier New" pitchFamily="34" charset="0"/>
+                <a:ea typeface="Courier New" pitchFamily="34" charset="-122"/>
+                <a:cs typeface="Courier New" pitchFamily="34" charset="-120"/>
+              </a:rPr>
+              <a:t>git clone https://github.com/FRC5010/BasicRobotLessons.git</a:t>
+            </a:r>
+            <a:endParaRPr lang="en-US" sz="1800" dirty="0"/>
+          </a:p>
+          <a:p>
+            <a:pPr indent="0" marL="0">
+              <a:lnSpc>
+                <a:spcPct val="120000"/>
+              </a:lnSpc>
+              <a:buNone/>
+            </a:pPr>
+            <a:r>
+              <a:rPr lang="en-US" sz="1800" dirty="0">
+                <a:solidFill>
+                  <a:srgbClr val="D7E3F4"/>
+                </a:solidFill>
+                <a:latin typeface="Courier New" pitchFamily="34" charset="0"/>
+                <a:ea typeface="Courier New" pitchFamily="34" charset="-122"/>
+                <a:cs typeface="Courier New" pitchFamily="34" charset="-120"/>
+              </a:rPr>
+              <a:t>cd BasicRobotLessons</a:t>
+            </a:r>
+            <a:endParaRPr lang="en-US" sz="1800" dirty="0"/>
+          </a:p>
+          <a:p>
+            <a:pPr indent="0" marL="0">
+              <a:lnSpc>
+                <a:spcPct val="120000"/>
+              </a:lnSpc>
+              <a:buNone/>
+            </a:pPr>
+            <a:r>
+              <a:rPr lang="en-US" sz="1800" dirty="0">
+                <a:solidFill>
+                  <a:srgbClr val="9EF01A"/>
+                </a:solidFill>
+                <a:latin typeface="Courier New" pitchFamily="34" charset="0"/>
+                <a:ea typeface="Courier New" pitchFamily="34" charset="-122"/>
+                <a:cs typeface="Courier New" pitchFamily="34" charset="-120"/>
+              </a:rPr>
+              <a:t>./tools/verify-lessons-v3.sh -1 --sandbox ~/dev/MyOpModeRobot</a:t>
+            </a:r>
+            <a:endParaRPr lang="en-US" sz="1800" dirty="0"/>
+          </a:p>
+        </p:txBody>
+      </p:sp>
+      <p:sp>
+        <p:nvSpPr>
+          <p:cNvPr id="11" name="Shape 8"/>
+          <p:cNvSpPr/>
+          <p:nvPr/>
+        </p:nvSpPr>
+        <p:spPr>
+          <a:xfrm>
+            <a:off x="640080" y="3749040"/>
+            <a:ext cx="5349240" cy="2103120"/>
+          </a:xfrm>
+          <a:prstGeom prst="roundRect">
+            <a:avLst>
+              <a:gd name="adj" fmla="val 4348"/>
             </a:avLst>
           </a:prstGeom>
           <a:solidFill>
@@ -6877,38 +7989,41 @@
       </p:sp>
       <p:sp>
         <p:nvSpPr>
-          <p:cNvPr id="7" name="Text 4"/>
-          <p:cNvSpPr/>
-          <p:nvPr/>
-        </p:nvSpPr>
-        <p:spPr>
-          <a:xfrm>
-            <a:off x="914400" y="1874520"/>
-            <a:ext cx="4800600" cy="365760"/>
-          </a:xfrm>
-          <a:prstGeom prst="rect">
-            <a:avLst/>
-          </a:prstGeom>
-          <a:noFill/>
-          <a:ln/>
-        </p:spPr>
-        <p:txBody>
-          <a:bodyPr wrap="square" lIns="0" tIns="0" rIns="0" bIns="0" rtlCol="0" anchor="ctr"/>
-          <a:lstStyle/>
-          <a:p>
-            <a:pPr indent="0" marL="0">
-              <a:buNone/>
-            </a:pPr>
-            <a:r>
-              <a:rPr lang="en-US" sz="2000" b="1" spc="50" kern="0" dirty="0">
-                <a:solidFill>
-                  <a:srgbClr val="FF5010"/>
+          <p:cNvPr id="12" name="Text 9"/>
+          <p:cNvSpPr/>
+          <p:nvPr/>
+        </p:nvSpPr>
+        <p:spPr>
+          <a:xfrm>
+            <a:off x="914400" y="3977640"/>
+            <a:ext cx="4892040" cy="1737360"/>
+          </a:xfrm>
+          <a:prstGeom prst="rect">
+            <a:avLst/>
+          </a:prstGeom>
+          <a:noFill/>
+          <a:ln/>
+        </p:spPr>
+        <p:txBody>
+          <a:bodyPr wrap="square" lIns="0" tIns="0" rIns="0" bIns="0" rtlCol="0" anchor="t"/>
+          <a:lstStyle/>
+          <a:p>
+            <a:pPr indent="0" marL="0">
+              <a:lnSpc>
+                <a:spcPct val="125000"/>
+              </a:lnSpc>
+              <a:buNone/>
+            </a:pPr>
+            <a:r>
+              <a:rPr lang="en-US" sz="2000" dirty="0">
+                <a:solidFill>
+                  <a:srgbClr val="13294B"/>
                 </a:solidFill>
                 <a:latin typeface="Calibri" pitchFamily="34" charset="0"/>
                 <a:ea typeface="Calibri" pitchFamily="34" charset="-122"/>
                 <a:cs typeface="Calibri" pitchFamily="34" charset="-120"/>
               </a:rPr>
-              <a:t>BASICROBOTLESSONS</a:t>
+              <a:t>--sandbox names where your project lands. -1 means "just the starting template, no lessons applied yet."</a:t>
             </a:r>
             <a:endParaRPr lang="en-US" sz="2000" dirty="0"/>
           </a:p>
@@ -6916,14 +8031,78 @@
       </p:sp>
       <p:sp>
         <p:nvSpPr>
-          <p:cNvPr id="8" name="Text 5"/>
-          <p:cNvSpPr/>
-          <p:nvPr/>
-        </p:nvSpPr>
-        <p:spPr>
-          <a:xfrm>
-            <a:off x="914400" y="2331720"/>
-            <a:ext cx="4800600" cy="577850"/>
+          <p:cNvPr id="13" name="Shape 10"/>
+          <p:cNvSpPr/>
+          <p:nvPr/>
+        </p:nvSpPr>
+        <p:spPr>
+          <a:xfrm>
+            <a:off x="6172200" y="3749040"/>
+            <a:ext cx="5349240" cy="2286000"/>
+          </a:xfrm>
+          <a:prstGeom prst="roundRect">
+            <a:avLst>
+              <a:gd name="adj" fmla="val 4000"/>
+            </a:avLst>
+          </a:prstGeom>
+          <a:solidFill>
+            <a:srgbClr val="FF5010"/>
+          </a:solidFill>
+          <a:ln/>
+        </p:spPr>
+      </p:sp>
+      <p:sp>
+        <p:nvSpPr>
+          <p:cNvPr id="14" name="Text 11"/>
+          <p:cNvSpPr/>
+          <p:nvPr/>
+        </p:nvSpPr>
+        <p:spPr>
+          <a:xfrm>
+            <a:off x="6446520" y="3931920"/>
+            <a:ext cx="4800600" cy="731520"/>
+          </a:xfrm>
+          <a:prstGeom prst="rect">
+            <a:avLst/>
+          </a:prstGeom>
+          <a:noFill/>
+          <a:ln/>
+        </p:spPr>
+        <p:txBody>
+          <a:bodyPr wrap="square" lIns="0" tIns="0" rIns="0" bIns="0" rtlCol="0" anchor="t"/>
+          <a:lstStyle/>
+          <a:p>
+            <a:pPr indent="0" marL="0">
+              <a:lnSpc>
+                <a:spcPct val="115000"/>
+              </a:lnSpc>
+              <a:buNone/>
+            </a:pPr>
+            <a:r>
+              <a:rPr lang="en-US" sz="2000" b="1" spc="30" kern="0" dirty="0">
+                <a:solidFill>
+                  <a:srgbClr val="FFFFFF"/>
+                </a:solidFill>
+                <a:latin typeface="Calibri" pitchFamily="34" charset="0"/>
+                <a:ea typeface="Calibri" pitchFamily="34" charset="-122"/>
+                <a:cs typeface="Calibri" pitchFamily="34" charset="-120"/>
+              </a:rPr>
+              <a:t>RUN THIS ONE IN GIT BASH, NOT POWERSHELL</a:t>
+            </a:r>
+            <a:endParaRPr lang="en-US" sz="2000" dirty="0"/>
+          </a:p>
+        </p:txBody>
+      </p:sp>
+      <p:sp>
+        <p:nvSpPr>
+          <p:cNvPr id="15" name="Text 12"/>
+          <p:cNvSpPr/>
+          <p:nvPr/>
+        </p:nvSpPr>
+        <p:spPr>
+          <a:xfrm>
+            <a:off x="6446520" y="4709160"/>
+            <a:ext cx="4800600" cy="1234440"/>
           </a:xfrm>
           <a:prstGeom prst="rect">
             <a:avLst/>
@@ -6942,57 +8121,15 @@
               <a:buNone/>
             </a:pPr>
             <a:r>
-              <a:rPr lang="en-US" sz="2200" b="1" dirty="0">
-                <a:solidFill>
-                  <a:srgbClr val="13294B"/>
-                </a:solidFill>
-                <a:latin typeface="Cambria" pitchFamily="34" charset="0"/>
-                <a:ea typeface="Cambria" pitchFamily="34" charset="-122"/>
-                <a:cs typeface="Cambria" pitchFamily="34" charset="-120"/>
-              </a:rPr>
-              <a:t>The course repo you cloned.</a:t>
-            </a:r>
-            <a:endParaRPr lang="en-US" sz="2200" dirty="0"/>
-          </a:p>
-        </p:txBody>
-      </p:sp>
-      <p:sp>
-        <p:nvSpPr>
-          <p:cNvPr id="9" name="Text 6"/>
-          <p:cNvSpPr/>
-          <p:nvPr/>
-        </p:nvSpPr>
-        <p:spPr>
-          <a:xfrm>
-            <a:off x="914400" y="2909570"/>
-            <a:ext cx="4800600" cy="2668270"/>
-          </a:xfrm>
-          <a:prstGeom prst="rect">
-            <a:avLst/>
-          </a:prstGeom>
-          <a:noFill/>
-          <a:ln/>
-        </p:spPr>
-        <p:txBody>
-          <a:bodyPr wrap="square" lIns="0" tIns="0" rIns="0" bIns="0" rtlCol="0" anchor="t"/>
-          <a:lstStyle/>
-          <a:p>
-            <a:pPr indent="0" marL="0">
-              <a:lnSpc>
-                <a:spcPct val="125000"/>
-              </a:lnSpc>
-              <a:buNone/>
-            </a:pPr>
-            <a:r>
               <a:rPr lang="en-US" sz="2000" dirty="0">
                 <a:solidFill>
-                  <a:srgbClr val="13294B"/>
+                  <a:srgbClr val="FFFFFF"/>
                 </a:solidFill>
                 <a:latin typeface="Calibri" pitchFamily="34" charset="0"/>
                 <a:ea typeface="Calibri" pitchFamily="34" charset="-122"/>
                 <a:cs typeface="Calibri" pitchFamily="34" charset="-120"/>
               </a:rPr>
-              <a:t>Its own history, not yours. Come back to it when a lesson is unclear — but you never commit your own work into it.</a:t>
+              <a:t>The script needs bash, curl, and python3. Git Bash — installed alongside Git — is in your Start menu.</a:t>
             </a:r>
             <a:endParaRPr lang="en-US" sz="2000" dirty="0"/>
           </a:p>
@@ -7000,36 +8137,14 @@
       </p:sp>
       <p:sp>
         <p:nvSpPr>
-          <p:cNvPr id="10" name="Shape 7"/>
-          <p:cNvSpPr/>
-          <p:nvPr/>
-        </p:nvSpPr>
-        <p:spPr>
-          <a:xfrm>
-            <a:off x="6172200" y="1600200"/>
-            <a:ext cx="5349240" cy="4251960"/>
-          </a:xfrm>
-          <a:prstGeom prst="roundRect">
-            <a:avLst>
-              <a:gd name="adj" fmla="val 2151"/>
-            </a:avLst>
-          </a:prstGeom>
-          <a:solidFill>
-            <a:srgbClr val="0B1F3A"/>
-          </a:solidFill>
-          <a:ln/>
-        </p:spPr>
-      </p:sp>
-      <p:sp>
-        <p:nvSpPr>
-          <p:cNvPr id="11" name="Text 8"/>
-          <p:cNvSpPr/>
-          <p:nvPr/>
-        </p:nvSpPr>
-        <p:spPr>
-          <a:xfrm>
-            <a:off x="6446520" y="1874520"/>
-            <a:ext cx="4800600" cy="365760"/>
+          <p:cNvPr id="16" name="Text 13"/>
+          <p:cNvSpPr/>
+          <p:nvPr/>
+        </p:nvSpPr>
+        <p:spPr>
+          <a:xfrm>
+            <a:off x="640080" y="6446520"/>
+            <a:ext cx="8229600" cy="365760"/>
           </a:xfrm>
           <a:prstGeom prst="rect">
             <a:avLst/>
@@ -7045,15 +8160,15 @@
               <a:buNone/>
             </a:pPr>
             <a:r>
-              <a:rPr lang="en-US" sz="2000" b="1" spc="50" kern="0" dirty="0">
-                <a:solidFill>
-                  <a:srgbClr val="1B9AAA"/>
+              <a:rPr lang="en-US" sz="2000" spc="100" kern="0" dirty="0">
+                <a:solidFill>
+                  <a:srgbClr val="5B6B84"/>
                 </a:solidFill>
                 <a:latin typeface="Calibri" pitchFamily="34" charset="0"/>
                 <a:ea typeface="Calibri" pitchFamily="34" charset="-122"/>
                 <a:cs typeface="Calibri" pitchFamily="34" charset="-120"/>
               </a:rPr>
-              <a:t>~/DEV/MYOPMODEROBOT</a:t>
+              <a:t>LEARN JAVA + ROBOT PROGRAMMING · SETUP</a:t>
             </a:r>
             <a:endParaRPr lang="en-US" sz="2000" dirty="0"/>
           </a:p>
@@ -7061,160 +8176,37 @@
       </p:sp>
       <p:sp>
         <p:nvSpPr>
-          <p:cNvPr id="12" name="Text 9"/>
-          <p:cNvSpPr/>
-          <p:nvPr/>
-        </p:nvSpPr>
-        <p:spPr>
-          <a:xfrm>
-            <a:off x="6446520" y="2331720"/>
-            <a:ext cx="4800600" cy="577850"/>
-          </a:xfrm>
-          <a:prstGeom prst="rect">
-            <a:avLst/>
-          </a:prstGeom>
-          <a:noFill/>
-          <a:ln/>
-        </p:spPr>
-        <p:txBody>
-          <a:bodyPr wrap="square" lIns="0" tIns="0" rIns="0" bIns="0" rtlCol="0" anchor="t"/>
-          <a:lstStyle/>
-          <a:p>
-            <a:pPr indent="0" marL="0">
-              <a:lnSpc>
-                <a:spcPct val="120000"/>
-              </a:lnSpc>
-              <a:buNone/>
-            </a:pPr>
-            <a:r>
-              <a:rPr lang="en-US" sz="2200" b="1" dirty="0">
-                <a:solidFill>
-                  <a:srgbClr val="FFFFFF"/>
-                </a:solidFill>
-                <a:latin typeface="Cambria" pitchFamily="34" charset="0"/>
-                <a:ea typeface="Cambria" pitchFamily="34" charset="-122"/>
-                <a:cs typeface="Cambria" pitchFamily="34" charset="-120"/>
-              </a:rPr>
-              <a:t>Your project.</a:t>
-            </a:r>
-            <a:endParaRPr lang="en-US" sz="2200" dirty="0"/>
-          </a:p>
-        </p:txBody>
-      </p:sp>
-      <p:sp>
-        <p:nvSpPr>
-          <p:cNvPr id="13" name="Text 10"/>
-          <p:cNvSpPr/>
-          <p:nvPr/>
-        </p:nvSpPr>
-        <p:spPr>
-          <a:xfrm>
-            <a:off x="6446520" y="2909570"/>
-            <a:ext cx="4800600" cy="2668270"/>
-          </a:xfrm>
-          <a:prstGeom prst="rect">
-            <a:avLst/>
-          </a:prstGeom>
-          <a:noFill/>
-          <a:ln/>
-        </p:spPr>
-        <p:txBody>
-          <a:bodyPr wrap="square" lIns="0" tIns="0" rIns="0" bIns="0" rtlCol="0" anchor="t"/>
-          <a:lstStyle/>
-          <a:p>
-            <a:pPr indent="0" marL="0">
-              <a:lnSpc>
-                <a:spcPct val="125000"/>
-              </a:lnSpc>
+          <p:cNvPr id="17" name="Text 14"/>
+          <p:cNvSpPr/>
+          <p:nvPr/>
+        </p:nvSpPr>
+        <p:spPr>
+          <a:xfrm>
+            <a:off x="11002975" y="6446520"/>
+            <a:ext cx="548640" cy="365760"/>
+          </a:xfrm>
+          <a:prstGeom prst="rect">
+            <a:avLst/>
+          </a:prstGeom>
+          <a:noFill/>
+          <a:ln/>
+        </p:spPr>
+        <p:txBody>
+          <a:bodyPr wrap="square" lIns="0" tIns="0" rIns="0" bIns="0" rtlCol="0" anchor="ctr"/>
+          <a:lstStyle/>
+          <a:p>
+            <a:pPr algn="r" indent="0" marL="0">
               <a:buNone/>
             </a:pPr>
             <a:r>
               <a:rPr lang="en-US" sz="2000" dirty="0">
                 <a:solidFill>
-                  <a:srgbClr val="CADCE8"/>
+                  <a:srgbClr val="5B6B84"/>
                 </a:solidFill>
                 <a:latin typeface="Calibri" pitchFamily="34" charset="0"/>
                 <a:ea typeface="Calibri" pitchFamily="34" charset="-122"/>
                 <a:cs typeface="Calibri" pitchFamily="34" charset="-120"/>
               </a:rPr>
-              <a:t>A clean, ordinary, git-less folder — .git, build, and .gradle were stripped on the way out. This is what every lesson from here on is talking about.</a:t>
-            </a:r>
-            <a:endParaRPr lang="en-US" sz="2000" dirty="0"/>
-          </a:p>
-        </p:txBody>
-      </p:sp>
-      <p:sp>
-        <p:nvSpPr>
-          <p:cNvPr id="14" name="Text 11"/>
-          <p:cNvSpPr/>
-          <p:nvPr/>
-        </p:nvSpPr>
-        <p:spPr>
-          <a:xfrm>
-            <a:off x="640080" y="6446520"/>
-            <a:ext cx="8229600" cy="365760"/>
-          </a:xfrm>
-          <a:prstGeom prst="rect">
-            <a:avLst/>
-          </a:prstGeom>
-          <a:noFill/>
-          <a:ln/>
-        </p:spPr>
-        <p:txBody>
-          <a:bodyPr wrap="square" lIns="0" tIns="0" rIns="0" bIns="0" rtlCol="0" anchor="ctr"/>
-          <a:lstStyle/>
-          <a:p>
-            <a:pPr indent="0" marL="0">
-              <a:buNone/>
-            </a:pPr>
-            <a:r>
-              <a:rPr lang="en-US" sz="2000" spc="100" kern="0" dirty="0">
-                <a:solidFill>
-                  <a:srgbClr val="5B6B84"/>
-                </a:solidFill>
-                <a:latin typeface="Calibri" pitchFamily="34" charset="0"/>
-                <a:ea typeface="Calibri" pitchFamily="34" charset="-122"/>
-                <a:cs typeface="Calibri" pitchFamily="34" charset="-120"/>
-              </a:rPr>
-              <a:t>LEARN JAVA + ROBOT PROGRAMMING · SETUP</a:t>
-            </a:r>
-            <a:endParaRPr lang="en-US" sz="2000" dirty="0"/>
-          </a:p>
-        </p:txBody>
-      </p:sp>
-      <p:sp>
-        <p:nvSpPr>
-          <p:cNvPr id="15" name="Text 12"/>
-          <p:cNvSpPr/>
-          <p:nvPr/>
-        </p:nvSpPr>
-        <p:spPr>
-          <a:xfrm>
-            <a:off x="11002975" y="6446520"/>
-            <a:ext cx="548640" cy="365760"/>
-          </a:xfrm>
-          <a:prstGeom prst="rect">
-            <a:avLst/>
-          </a:prstGeom>
-          <a:noFill/>
-          <a:ln/>
-        </p:spPr>
-        <p:txBody>
-          <a:bodyPr wrap="square" lIns="0" tIns="0" rIns="0" bIns="0" rtlCol="0" anchor="ctr"/>
-          <a:lstStyle/>
-          <a:p>
-            <a:pPr algn="r" indent="0" marL="0">
-              <a:buNone/>
-            </a:pPr>
-            <a:r>
-              <a:rPr lang="en-US" sz="2000" dirty="0">
-                <a:solidFill>
-                  <a:srgbClr val="5B6B84"/>
-                </a:solidFill>
-                <a:latin typeface="Calibri" pitchFamily="34" charset="0"/>
-                <a:ea typeface="Calibri" pitchFamily="34" charset="-122"/>
-                <a:cs typeface="Calibri" pitchFamily="34" charset="-120"/>
-              </a:rPr>
               <a:t>6</a:t>
             </a:r>
             <a:endParaRPr lang="en-US" sz="2000" dirty="0"/>
@@ -7223,7 +8215,7 @@
       </p:sp>
       <p:pic>
         <p:nvPicPr>
-          <p:cNvPr id="16" name="Image 1" descr="/home/user/BasicRobotLessons/docs/presentations/v3/template/assets/logo/team5010-logo-onwhite.png">    </p:cNvPr>
+          <p:cNvPr id="18" name="Image 1" descr="/home/user/BasicRobotLessons/docs/presentations/v3/template/assets/logo/team5010-logo-onwhite.png">    </p:cNvPr>
           <p:cNvPicPr>
             <a:picLocks noChangeAspect="1"/>
           </p:cNvPicPr>
@@ -7299,7 +8291,7 @@
       </p:sp>
       <p:pic>
         <p:nvPicPr>
-          <p:cNvPr id="3" name="Image 0" descr="/home/user/BasicRobotLessons/docs/presentations/v3/template/assets/icons/checkcircle_white.png">    </p:cNvPr>
+          <p:cNvPr id="3" name="Image 0" descr="/home/user/BasicRobotLessons/docs/presentations/v3/template/assets/icons/sitemap_white.png">    </p:cNvPr>
           <p:cNvPicPr>
             <a:picLocks noChangeAspect="1"/>
           </p:cNvPicPr>
@@ -7354,7 +8346,7 @@
                 <a:ea typeface="Calibri" pitchFamily="34" charset="-122"/>
                 <a:cs typeface="Calibri" pitchFamily="34" charset="-120"/>
               </a:rPr>
-              <a:t>SECTION 4 · MAKE IT YOUR OWN REPO</a:t>
+              <a:t>SECTION 4 · TWO FOLDERS NOW EXIST</a:t>
             </a:r>
             <a:endParaRPr lang="en-US" sz="2000" dirty="0"/>
           </a:p>
@@ -7393,7 +8385,7 @@
                 <a:ea typeface="Cambria" pitchFamily="34" charset="-122"/>
                 <a:cs typeface="Cambria" pitchFamily="34" charset="-120"/>
               </a:rPr>
-              <a:t>Build it, then start tracking it</a:t>
+              <a:t>Don't confuse them</a:t>
             </a:r>
             <a:endParaRPr lang="en-US" sz="3000" dirty="0"/>
           </a:p>
@@ -7407,369 +8399,7 @@
         </p:nvSpPr>
         <p:spPr>
           <a:xfrm>
-            <a:off x="640080" y="1554480"/>
-            <a:ext cx="5212080" cy="1874520"/>
-          </a:xfrm>
-          <a:prstGeom prst="roundRect">
-            <a:avLst>
-              <a:gd name="adj" fmla="val 5854"/>
-            </a:avLst>
-          </a:prstGeom>
-          <a:solidFill>
-            <a:srgbClr val="0B1F3A"/>
-          </a:solidFill>
-          <a:ln/>
-          <a:effectLst>
-            <a:outerShdw sx="100000" sy="100000" kx="0" ky="0" algn="bl" rotWithShape="0" blurRad="101600" dist="38100" dir="5400000">
-              <a:srgbClr val="0B1F3A">
-                <a:alpha val="35000"/>
-              </a:srgbClr>
-            </a:outerShdw>
-          </a:effectLst>
-        </p:spPr>
-      </p:sp>
-      <p:sp>
-        <p:nvSpPr>
-          <p:cNvPr id="7" name="Shape 4"/>
-          <p:cNvSpPr/>
-          <p:nvPr/>
-        </p:nvSpPr>
-        <p:spPr>
-          <a:xfrm>
-            <a:off x="5541264" y="1700784"/>
-            <a:ext cx="128016" cy="128016"/>
-          </a:xfrm>
-          <a:prstGeom prst="ellipse">
-            <a:avLst/>
-          </a:prstGeom>
-          <a:solidFill>
-            <a:srgbClr val="FF6B6B"/>
-          </a:solidFill>
-          <a:ln/>
-        </p:spPr>
-      </p:sp>
-      <p:sp>
-        <p:nvSpPr>
-          <p:cNvPr id="8" name="Shape 5"/>
-          <p:cNvSpPr/>
-          <p:nvPr/>
-        </p:nvSpPr>
-        <p:spPr>
-          <a:xfrm>
-            <a:off x="5541264" y="1901952"/>
-            <a:ext cx="128016" cy="128016"/>
-          </a:xfrm>
-          <a:prstGeom prst="ellipse">
-            <a:avLst/>
-          </a:prstGeom>
-          <a:solidFill>
-            <a:srgbClr val="FFD166"/>
-          </a:solidFill>
-          <a:ln/>
-        </p:spPr>
-      </p:sp>
-      <p:sp>
-        <p:nvSpPr>
-          <p:cNvPr id="9" name="Shape 6"/>
-          <p:cNvSpPr/>
-          <p:nvPr/>
-        </p:nvSpPr>
-        <p:spPr>
-          <a:xfrm>
-            <a:off x="5541264" y="2103120"/>
-            <a:ext cx="128016" cy="128016"/>
-          </a:xfrm>
-          <a:prstGeom prst="ellipse">
-            <a:avLst/>
-          </a:prstGeom>
-          <a:solidFill>
-            <a:srgbClr val="2EC4B6"/>
-          </a:solidFill>
-          <a:ln/>
-        </p:spPr>
-      </p:sp>
-      <p:sp>
-        <p:nvSpPr>
-          <p:cNvPr id="10" name="Text 7"/>
-          <p:cNvSpPr/>
-          <p:nvPr/>
-        </p:nvSpPr>
-        <p:spPr>
-          <a:xfrm>
-            <a:off x="914400" y="1755648"/>
-            <a:ext cx="4526280" cy="1508760"/>
-          </a:xfrm>
-          <a:prstGeom prst="rect">
-            <a:avLst/>
-          </a:prstGeom>
-          <a:noFill/>
-          <a:ln/>
-        </p:spPr>
-        <p:txBody>
-          <a:bodyPr wrap="square" lIns="0" tIns="0" rIns="0" bIns="0" rtlCol="0" anchor="t"/>
-          <a:lstStyle/>
-          <a:p>
-            <a:pPr indent="0" marL="0">
-              <a:lnSpc>
-                <a:spcPct val="120000"/>
-              </a:lnSpc>
-              <a:buNone/>
-            </a:pPr>
-            <a:r>
-              <a:rPr lang="en-US" sz="1700" dirty="0">
-                <a:solidFill>
-                  <a:srgbClr val="D7E3F4"/>
-                </a:solidFill>
-                <a:latin typeface="Courier New" pitchFamily="34" charset="0"/>
-                <a:ea typeface="Courier New" pitchFamily="34" charset="-122"/>
-                <a:cs typeface="Courier New" pitchFamily="34" charset="-120"/>
-              </a:rPr>
-              <a:t>cd ~/dev/MyOpModeRobot</a:t>
-            </a:r>
-            <a:endParaRPr lang="en-US" sz="1700" dirty="0"/>
-          </a:p>
-          <a:p>
-            <a:pPr indent="0" marL="0">
-              <a:lnSpc>
-                <a:spcPct val="120000"/>
-              </a:lnSpc>
-              <a:buNone/>
-            </a:pPr>
-            <a:r>
-              <a:rPr lang="en-US" sz="1700" dirty="0">
-                <a:solidFill>
-                  <a:srgbClr val="9EF01A"/>
-                </a:solidFill>
-                <a:latin typeface="Courier New" pitchFamily="34" charset="0"/>
-                <a:ea typeface="Courier New" pitchFamily="34" charset="-122"/>
-                <a:cs typeface="Courier New" pitchFamily="34" charset="-120"/>
-              </a:rPr>
-              <a:t>./gradlew build</a:t>
-            </a:r>
-            <a:endParaRPr lang="en-US" sz="1700" dirty="0"/>
-          </a:p>
-          <a:p>
-            <a:pPr indent="0" marL="0">
-              <a:lnSpc>
-                <a:spcPct val="120000"/>
-              </a:lnSpc>
-              <a:buNone/>
-            </a:pPr>
-            <a:r>
-              <a:rPr lang="en-US" sz="1700" dirty="0">
-                <a:solidFill>
-                  <a:srgbClr val="9EF01A"/>
-                </a:solidFill>
-                <a:latin typeface="Courier New" pitchFamily="34" charset="0"/>
-                <a:ea typeface="Courier New" pitchFamily="34" charset="-122"/>
-                <a:cs typeface="Courier New" pitchFamily="34" charset="-120"/>
-              </a:rPr>
-              <a:t>./gradlew simulateJava</a:t>
-            </a:r>
-            <a:endParaRPr lang="en-US" sz="1700" dirty="0"/>
-          </a:p>
-        </p:txBody>
-      </p:sp>
-      <p:sp>
-        <p:nvSpPr>
-          <p:cNvPr id="11" name="Shape 8"/>
-          <p:cNvSpPr/>
-          <p:nvPr/>
-        </p:nvSpPr>
-        <p:spPr>
-          <a:xfrm>
-            <a:off x="640080" y="3611880"/>
-            <a:ext cx="5212080" cy="2240280"/>
-          </a:xfrm>
-          <a:prstGeom prst="roundRect">
-            <a:avLst>
-              <a:gd name="adj" fmla="val 4898"/>
-            </a:avLst>
-          </a:prstGeom>
-          <a:solidFill>
-            <a:srgbClr val="0B1F3A"/>
-          </a:solidFill>
-          <a:ln/>
-          <a:effectLst>
-            <a:outerShdw sx="100000" sy="100000" kx="0" ky="0" algn="bl" rotWithShape="0" blurRad="101600" dist="38100" dir="5400000">
-              <a:srgbClr val="0B1F3A">
-                <a:alpha val="35000"/>
-              </a:srgbClr>
-            </a:outerShdw>
-          </a:effectLst>
-        </p:spPr>
-      </p:sp>
-      <p:sp>
-        <p:nvSpPr>
-          <p:cNvPr id="12" name="Shape 9"/>
-          <p:cNvSpPr/>
-          <p:nvPr/>
-        </p:nvSpPr>
-        <p:spPr>
-          <a:xfrm>
-            <a:off x="5541264" y="3758184"/>
-            <a:ext cx="128016" cy="128016"/>
-          </a:xfrm>
-          <a:prstGeom prst="ellipse">
-            <a:avLst/>
-          </a:prstGeom>
-          <a:solidFill>
-            <a:srgbClr val="FF6B6B"/>
-          </a:solidFill>
-          <a:ln/>
-        </p:spPr>
-      </p:sp>
-      <p:sp>
-        <p:nvSpPr>
-          <p:cNvPr id="13" name="Shape 10"/>
-          <p:cNvSpPr/>
-          <p:nvPr/>
-        </p:nvSpPr>
-        <p:spPr>
-          <a:xfrm>
-            <a:off x="5541264" y="3959352"/>
-            <a:ext cx="128016" cy="128016"/>
-          </a:xfrm>
-          <a:prstGeom prst="ellipse">
-            <a:avLst/>
-          </a:prstGeom>
-          <a:solidFill>
-            <a:srgbClr val="FFD166"/>
-          </a:solidFill>
-          <a:ln/>
-        </p:spPr>
-      </p:sp>
-      <p:sp>
-        <p:nvSpPr>
-          <p:cNvPr id="14" name="Shape 11"/>
-          <p:cNvSpPr/>
-          <p:nvPr/>
-        </p:nvSpPr>
-        <p:spPr>
-          <a:xfrm>
-            <a:off x="5541264" y="4160520"/>
-            <a:ext cx="128016" cy="128016"/>
-          </a:xfrm>
-          <a:prstGeom prst="ellipse">
-            <a:avLst/>
-          </a:prstGeom>
-          <a:solidFill>
-            <a:srgbClr val="2EC4B6"/>
-          </a:solidFill>
-          <a:ln/>
-        </p:spPr>
-      </p:sp>
-      <p:sp>
-        <p:nvSpPr>
-          <p:cNvPr id="15" name="Text 12"/>
-          <p:cNvSpPr/>
-          <p:nvPr/>
-        </p:nvSpPr>
-        <p:spPr>
-          <a:xfrm>
-            <a:off x="914400" y="3813048"/>
-            <a:ext cx="4526280" cy="1874520"/>
-          </a:xfrm>
-          <a:prstGeom prst="rect">
-            <a:avLst/>
-          </a:prstGeom>
-          <a:noFill/>
-          <a:ln/>
-        </p:spPr>
-        <p:txBody>
-          <a:bodyPr wrap="square" lIns="0" tIns="0" rIns="0" bIns="0" rtlCol="0" anchor="t"/>
-          <a:lstStyle/>
-          <a:p>
-            <a:pPr indent="0" marL="0">
-              <a:lnSpc>
-                <a:spcPct val="120000"/>
-              </a:lnSpc>
-              <a:buNone/>
-            </a:pPr>
-            <a:r>
-              <a:rPr lang="en-US" sz="1700" dirty="0">
-                <a:solidFill>
-                  <a:srgbClr val="D7E3F4"/>
-                </a:solidFill>
-                <a:latin typeface="Courier New" pitchFamily="34" charset="0"/>
-                <a:ea typeface="Courier New" pitchFamily="34" charset="-122"/>
-                <a:cs typeface="Courier New" pitchFamily="34" charset="-120"/>
-              </a:rPr>
-              <a:t>git init</a:t>
-            </a:r>
-            <a:endParaRPr lang="en-US" sz="1700" dirty="0"/>
-          </a:p>
-          <a:p>
-            <a:pPr indent="0" marL="0">
-              <a:lnSpc>
-                <a:spcPct val="120000"/>
-              </a:lnSpc>
-              <a:buNone/>
-            </a:pPr>
-            <a:r>
-              <a:rPr lang="en-US" sz="1700" dirty="0">
-                <a:solidFill>
-                  <a:srgbClr val="D7E3F4"/>
-                </a:solidFill>
-                <a:latin typeface="Courier New" pitchFamily="34" charset="0"/>
-                <a:ea typeface="Courier New" pitchFamily="34" charset="-122"/>
-                <a:cs typeface="Courier New" pitchFamily="34" charset="-120"/>
-              </a:rPr>
-              <a:t>git branch -M main</a:t>
-            </a:r>
-            <a:endParaRPr lang="en-US" sz="1700" dirty="0"/>
-          </a:p>
-          <a:p>
-            <a:pPr indent="0" marL="0">
-              <a:lnSpc>
-                <a:spcPct val="120000"/>
-              </a:lnSpc>
-              <a:buNone/>
-            </a:pPr>
-            <a:r>
-              <a:rPr lang="en-US" sz="1700" dirty="0">
-                <a:solidFill>
-                  <a:srgbClr val="D7E3F4"/>
-                </a:solidFill>
-                <a:latin typeface="Courier New" pitchFamily="34" charset="0"/>
-                <a:ea typeface="Courier New" pitchFamily="34" charset="-122"/>
-                <a:cs typeface="Courier New" pitchFamily="34" charset="-120"/>
-              </a:rPr>
-              <a:t>git add .</a:t>
-            </a:r>
-            <a:endParaRPr lang="en-US" sz="1700" dirty="0"/>
-          </a:p>
-          <a:p>
-            <a:pPr indent="0" marL="0">
-              <a:lnSpc>
-                <a:spcPct val="120000"/>
-              </a:lnSpc>
-              <a:buNone/>
-            </a:pPr>
-            <a:r>
-              <a:rPr lang="en-US" sz="1700" dirty="0">
-                <a:solidFill>
-                  <a:srgbClr val="9EF01A"/>
-                </a:solidFill>
-                <a:latin typeface="Courier New" pitchFamily="34" charset="0"/>
-                <a:ea typeface="Courier New" pitchFamily="34" charset="-122"/>
-                <a:cs typeface="Courier New" pitchFamily="34" charset="-120"/>
-              </a:rPr>
-              <a:t>git commit -m "Initial commit"</a:t>
-            </a:r>
-            <a:endParaRPr lang="en-US" sz="1700" dirty="0"/>
-          </a:p>
-        </p:txBody>
-      </p:sp>
-      <p:sp>
-        <p:nvSpPr>
-          <p:cNvPr id="16" name="Shape 13"/>
-          <p:cNvSpPr/>
-          <p:nvPr/>
-        </p:nvSpPr>
-        <p:spPr>
-          <a:xfrm>
-            <a:off x="6172200" y="1600200"/>
+            <a:off x="640080" y="1600200"/>
             <a:ext cx="5349240" cy="4251960"/>
           </a:xfrm>
           <a:prstGeom prst="roundRect">
@@ -7785,14 +8415,53 @@
       </p:sp>
       <p:sp>
         <p:nvSpPr>
-          <p:cNvPr id="17" name="Text 14"/>
-          <p:cNvSpPr/>
-          <p:nvPr/>
-        </p:nvSpPr>
-        <p:spPr>
-          <a:xfrm>
-            <a:off x="6446520" y="1874520"/>
-            <a:ext cx="4800600" cy="1228725"/>
+          <p:cNvPr id="7" name="Text 4"/>
+          <p:cNvSpPr/>
+          <p:nvPr/>
+        </p:nvSpPr>
+        <p:spPr>
+          <a:xfrm>
+            <a:off x="914400" y="1874520"/>
+            <a:ext cx="4800600" cy="365760"/>
+          </a:xfrm>
+          <a:prstGeom prst="rect">
+            <a:avLst/>
+          </a:prstGeom>
+          <a:noFill/>
+          <a:ln/>
+        </p:spPr>
+        <p:txBody>
+          <a:bodyPr wrap="square" lIns="0" tIns="0" rIns="0" bIns="0" rtlCol="0" anchor="ctr"/>
+          <a:lstStyle/>
+          <a:p>
+            <a:pPr indent="0" marL="0">
+              <a:buNone/>
+            </a:pPr>
+            <a:r>
+              <a:rPr lang="en-US" sz="2000" b="1" spc="50" kern="0" dirty="0">
+                <a:solidFill>
+                  <a:srgbClr val="FF5010"/>
+                </a:solidFill>
+                <a:latin typeface="Calibri" pitchFamily="34" charset="0"/>
+                <a:ea typeface="Calibri" pitchFamily="34" charset="-122"/>
+                <a:cs typeface="Calibri" pitchFamily="34" charset="-120"/>
+              </a:rPr>
+              <a:t>BASICROBOTLESSONS</a:t>
+            </a:r>
+            <a:endParaRPr lang="en-US" sz="2000" dirty="0"/>
+          </a:p>
+        </p:txBody>
+      </p:sp>
+      <p:sp>
+        <p:nvSpPr>
+          <p:cNvPr id="8" name="Text 5"/>
+          <p:cNvSpPr/>
+          <p:nvPr/>
+        </p:nvSpPr>
+        <p:spPr>
+          <a:xfrm>
+            <a:off x="914400" y="2331720"/>
+            <a:ext cx="4800600" cy="577850"/>
           </a:xfrm>
           <a:prstGeom prst="rect">
             <a:avLst/>
@@ -7811,7 +8480,7 @@
               <a:buNone/>
             </a:pPr>
             <a:r>
-              <a:rPr lang="en-US" sz="2100" b="1" dirty="0">
+              <a:rPr lang="en-US" sz="2200" b="1" dirty="0">
                 <a:solidFill>
                   <a:srgbClr val="13294B"/>
                 </a:solidFill>
@@ -7819,22 +8488,22 @@
                 <a:ea typeface="Cambria" pitchFamily="34" charset="-122"/>
                 <a:cs typeface="Cambria" pitchFamily="34" charset="-120"/>
               </a:rPr>
-              <a:t>The template already ships a .gitignore that excludes build/ and .gradle/ — trust it.</a:t>
-            </a:r>
-            <a:endParaRPr lang="en-US" sz="2100" dirty="0"/>
-          </a:p>
-        </p:txBody>
-      </p:sp>
-      <p:sp>
-        <p:nvSpPr>
-          <p:cNvPr id="18" name="Text 15"/>
-          <p:cNvSpPr/>
-          <p:nvPr/>
-        </p:nvSpPr>
-        <p:spPr>
-          <a:xfrm>
-            <a:off x="6446520" y="3103245"/>
-            <a:ext cx="4800600" cy="2474595"/>
+              <a:t>The course repo you cloned.</a:t>
+            </a:r>
+            <a:endParaRPr lang="en-US" sz="2200" dirty="0"/>
+          </a:p>
+        </p:txBody>
+      </p:sp>
+      <p:sp>
+        <p:nvSpPr>
+          <p:cNvPr id="9" name="Text 6"/>
+          <p:cNvSpPr/>
+          <p:nvPr/>
+        </p:nvSpPr>
+        <p:spPr>
+          <a:xfrm>
+            <a:off x="914400" y="2909570"/>
+            <a:ext cx="4800600" cy="2668270"/>
           </a:xfrm>
           <a:prstGeom prst="rect">
             <a:avLst/>
@@ -7861,7 +8530,7 @@
                 <a:ea typeface="Calibri" pitchFamily="34" charset="-122"/>
                 <a:cs typeface="Calibri" pitchFamily="34" charset="-120"/>
               </a:rPr>
-              <a:t>Confirm with git status that every untracked file belongs in the repo. That first commit is your recovery point — if your laptop died right now, you could rebuild from it, as long as it lives on GitHub too.</a:t>
+              <a:t>Its own history, not yours. Come back to it when a lesson is unclear — but you never commit your own work into it.</a:t>
             </a:r>
             <a:endParaRPr lang="en-US" sz="2000" dirty="0"/>
           </a:p>
@@ -7869,14 +8538,36 @@
       </p:sp>
       <p:sp>
         <p:nvSpPr>
-          <p:cNvPr id="19" name="Text 16"/>
-          <p:cNvSpPr/>
-          <p:nvPr/>
-        </p:nvSpPr>
-        <p:spPr>
-          <a:xfrm>
-            <a:off x="640080" y="6446520"/>
-            <a:ext cx="8229600" cy="365760"/>
+          <p:cNvPr id="10" name="Shape 7"/>
+          <p:cNvSpPr/>
+          <p:nvPr/>
+        </p:nvSpPr>
+        <p:spPr>
+          <a:xfrm>
+            <a:off x="6172200" y="1600200"/>
+            <a:ext cx="5349240" cy="4251960"/>
+          </a:xfrm>
+          <a:prstGeom prst="roundRect">
+            <a:avLst>
+              <a:gd name="adj" fmla="val 2151"/>
+            </a:avLst>
+          </a:prstGeom>
+          <a:solidFill>
+            <a:srgbClr val="0B1F3A"/>
+          </a:solidFill>
+          <a:ln/>
+        </p:spPr>
+      </p:sp>
+      <p:sp>
+        <p:nvSpPr>
+          <p:cNvPr id="11" name="Text 8"/>
+          <p:cNvSpPr/>
+          <p:nvPr/>
+        </p:nvSpPr>
+        <p:spPr>
+          <a:xfrm>
+            <a:off x="6446520" y="1874520"/>
+            <a:ext cx="4800600" cy="365760"/>
           </a:xfrm>
           <a:prstGeom prst="rect">
             <a:avLst/>
@@ -7892,15 +8583,15 @@
               <a:buNone/>
             </a:pPr>
             <a:r>
-              <a:rPr lang="en-US" sz="2000" spc="100" kern="0" dirty="0">
-                <a:solidFill>
-                  <a:srgbClr val="5B6B84"/>
+              <a:rPr lang="en-US" sz="2000" b="1" spc="50" kern="0" dirty="0">
+                <a:solidFill>
+                  <a:srgbClr val="1B9AAA"/>
                 </a:solidFill>
                 <a:latin typeface="Calibri" pitchFamily="34" charset="0"/>
                 <a:ea typeface="Calibri" pitchFamily="34" charset="-122"/>
                 <a:cs typeface="Calibri" pitchFamily="34" charset="-120"/>
               </a:rPr>
-              <a:t>LEARN JAVA + ROBOT PROGRAMMING · SETUP</a:t>
+              <a:t>~/DEV/MYOPMODEROBOT</a:t>
             </a:r>
             <a:endParaRPr lang="en-US" sz="2000" dirty="0"/>
           </a:p>
@@ -7908,37 +8599,160 @@
       </p:sp>
       <p:sp>
         <p:nvSpPr>
-          <p:cNvPr id="20" name="Text 17"/>
-          <p:cNvSpPr/>
-          <p:nvPr/>
-        </p:nvSpPr>
-        <p:spPr>
-          <a:xfrm>
-            <a:off x="11002975" y="6446520"/>
-            <a:ext cx="548640" cy="365760"/>
-          </a:xfrm>
-          <a:prstGeom prst="rect">
-            <a:avLst/>
-          </a:prstGeom>
-          <a:noFill/>
-          <a:ln/>
-        </p:spPr>
-        <p:txBody>
-          <a:bodyPr wrap="square" lIns="0" tIns="0" rIns="0" bIns="0" rtlCol="0" anchor="ctr"/>
-          <a:lstStyle/>
-          <a:p>
-            <a:pPr algn="r" indent="0" marL="0">
+          <p:cNvPr id="12" name="Text 9"/>
+          <p:cNvSpPr/>
+          <p:nvPr/>
+        </p:nvSpPr>
+        <p:spPr>
+          <a:xfrm>
+            <a:off x="6446520" y="2331720"/>
+            <a:ext cx="4800600" cy="577850"/>
+          </a:xfrm>
+          <a:prstGeom prst="rect">
+            <a:avLst/>
+          </a:prstGeom>
+          <a:noFill/>
+          <a:ln/>
+        </p:spPr>
+        <p:txBody>
+          <a:bodyPr wrap="square" lIns="0" tIns="0" rIns="0" bIns="0" rtlCol="0" anchor="t"/>
+          <a:lstStyle/>
+          <a:p>
+            <a:pPr indent="0" marL="0">
+              <a:lnSpc>
+                <a:spcPct val="120000"/>
+              </a:lnSpc>
+              <a:buNone/>
+            </a:pPr>
+            <a:r>
+              <a:rPr lang="en-US" sz="2200" b="1" dirty="0">
+                <a:solidFill>
+                  <a:srgbClr val="FFFFFF"/>
+                </a:solidFill>
+                <a:latin typeface="Cambria" pitchFamily="34" charset="0"/>
+                <a:ea typeface="Cambria" pitchFamily="34" charset="-122"/>
+                <a:cs typeface="Cambria" pitchFamily="34" charset="-120"/>
+              </a:rPr>
+              <a:t>Your project.</a:t>
+            </a:r>
+            <a:endParaRPr lang="en-US" sz="2200" dirty="0"/>
+          </a:p>
+        </p:txBody>
+      </p:sp>
+      <p:sp>
+        <p:nvSpPr>
+          <p:cNvPr id="13" name="Text 10"/>
+          <p:cNvSpPr/>
+          <p:nvPr/>
+        </p:nvSpPr>
+        <p:spPr>
+          <a:xfrm>
+            <a:off x="6446520" y="2909570"/>
+            <a:ext cx="4800600" cy="2668270"/>
+          </a:xfrm>
+          <a:prstGeom prst="rect">
+            <a:avLst/>
+          </a:prstGeom>
+          <a:noFill/>
+          <a:ln/>
+        </p:spPr>
+        <p:txBody>
+          <a:bodyPr wrap="square" lIns="0" tIns="0" rIns="0" bIns="0" rtlCol="0" anchor="t"/>
+          <a:lstStyle/>
+          <a:p>
+            <a:pPr indent="0" marL="0">
+              <a:lnSpc>
+                <a:spcPct val="125000"/>
+              </a:lnSpc>
               <a:buNone/>
             </a:pPr>
             <a:r>
               <a:rPr lang="en-US" sz="2000" dirty="0">
                 <a:solidFill>
-                  <a:srgbClr val="5B6B84"/>
+                  <a:srgbClr val="CADCE8"/>
                 </a:solidFill>
                 <a:latin typeface="Calibri" pitchFamily="34" charset="0"/>
                 <a:ea typeface="Calibri" pitchFamily="34" charset="-122"/>
                 <a:cs typeface="Calibri" pitchFamily="34" charset="-120"/>
               </a:rPr>
+              <a:t>A clean, ordinary, git-less folder — .git, build, and .gradle were stripped on the way out. This is what every lesson from here on is talking about.</a:t>
+            </a:r>
+            <a:endParaRPr lang="en-US" sz="2000" dirty="0"/>
+          </a:p>
+        </p:txBody>
+      </p:sp>
+      <p:sp>
+        <p:nvSpPr>
+          <p:cNvPr id="14" name="Text 11"/>
+          <p:cNvSpPr/>
+          <p:nvPr/>
+        </p:nvSpPr>
+        <p:spPr>
+          <a:xfrm>
+            <a:off x="640080" y="6446520"/>
+            <a:ext cx="8229600" cy="365760"/>
+          </a:xfrm>
+          <a:prstGeom prst="rect">
+            <a:avLst/>
+          </a:prstGeom>
+          <a:noFill/>
+          <a:ln/>
+        </p:spPr>
+        <p:txBody>
+          <a:bodyPr wrap="square" lIns="0" tIns="0" rIns="0" bIns="0" rtlCol="0" anchor="ctr"/>
+          <a:lstStyle/>
+          <a:p>
+            <a:pPr indent="0" marL="0">
+              <a:buNone/>
+            </a:pPr>
+            <a:r>
+              <a:rPr lang="en-US" sz="2000" spc="100" kern="0" dirty="0">
+                <a:solidFill>
+                  <a:srgbClr val="5B6B84"/>
+                </a:solidFill>
+                <a:latin typeface="Calibri" pitchFamily="34" charset="0"/>
+                <a:ea typeface="Calibri" pitchFamily="34" charset="-122"/>
+                <a:cs typeface="Calibri" pitchFamily="34" charset="-120"/>
+              </a:rPr>
+              <a:t>LEARN JAVA + ROBOT PROGRAMMING · SETUP</a:t>
+            </a:r>
+            <a:endParaRPr lang="en-US" sz="2000" dirty="0"/>
+          </a:p>
+        </p:txBody>
+      </p:sp>
+      <p:sp>
+        <p:nvSpPr>
+          <p:cNvPr id="15" name="Text 12"/>
+          <p:cNvSpPr/>
+          <p:nvPr/>
+        </p:nvSpPr>
+        <p:spPr>
+          <a:xfrm>
+            <a:off x="11002975" y="6446520"/>
+            <a:ext cx="548640" cy="365760"/>
+          </a:xfrm>
+          <a:prstGeom prst="rect">
+            <a:avLst/>
+          </a:prstGeom>
+          <a:noFill/>
+          <a:ln/>
+        </p:spPr>
+        <p:txBody>
+          <a:bodyPr wrap="square" lIns="0" tIns="0" rIns="0" bIns="0" rtlCol="0" anchor="ctr"/>
+          <a:lstStyle/>
+          <a:p>
+            <a:pPr algn="r" indent="0" marL="0">
+              <a:buNone/>
+            </a:pPr>
+            <a:r>
+              <a:rPr lang="en-US" sz="2000" dirty="0">
+                <a:solidFill>
+                  <a:srgbClr val="5B6B84"/>
+                </a:solidFill>
+                <a:latin typeface="Calibri" pitchFamily="34" charset="0"/>
+                <a:ea typeface="Calibri" pitchFamily="34" charset="-122"/>
+                <a:cs typeface="Calibri" pitchFamily="34" charset="-120"/>
+              </a:rPr>
               <a:t>7</a:t>
             </a:r>
             <a:endParaRPr lang="en-US" sz="2000" dirty="0"/>
@@ -7947,7 +8761,7 @@
       </p:sp>
       <p:pic>
         <p:nvPicPr>
-          <p:cNvPr id="21" name="Image 1" descr="/home/user/BasicRobotLessons/docs/presentations/v3/template/assets/logo/team5010-logo-onwhite.png">    </p:cNvPr>
+          <p:cNvPr id="16" name="Image 1" descr="/home/user/BasicRobotLessons/docs/presentations/v3/template/assets/logo/team5010-logo-onwhite.png">    </p:cNvPr>
           <p:cNvPicPr>
             <a:picLocks noChangeAspect="1"/>
           </p:cNvPicPr>
@@ -8023,7 +8837,7 @@
       </p:sp>
       <p:pic>
         <p:nvPicPr>
-          <p:cNvPr id="3" name="Image 0" descr="/home/user/BasicRobotLessons/docs/presentations/v3/template/assets/icons/key_white.png">    </p:cNvPr>
+          <p:cNvPr id="3" name="Image 0" descr="/home/user/BasicRobotLessons/docs/presentations/v3/template/assets/icons/checkcircle_white.png">    </p:cNvPr>
           <p:cNvPicPr>
             <a:picLocks noChangeAspect="1"/>
           </p:cNvPicPr>
@@ -8078,7 +8892,7 @@
                 <a:ea typeface="Calibri" pitchFamily="34" charset="-122"/>
                 <a:cs typeface="Calibri" pitchFamily="34" charset="-120"/>
               </a:rPr>
-              <a:t>SECTION 5 · GITHUB</a:t>
+              <a:t>SECTION 5 · MAKE IT YOUR OWN REPO</a:t>
             </a:r>
             <a:endParaRPr lang="en-US" sz="2000" dirty="0"/>
           </a:p>
@@ -8117,7 +8931,7 @@
                 <a:ea typeface="Cambria" pitchFamily="34" charset="-122"/>
                 <a:cs typeface="Cambria" pitchFamily="34" charset="-120"/>
               </a:rPr>
-              <a:t>An account, and a login that never nags you</a:t>
+              <a:t>Build it, then start tracking it</a:t>
             </a:r>
             <a:endParaRPr lang="en-US" sz="3000" dirty="0"/>
           </a:p>
@@ -8131,12 +8945,12 @@
         </p:nvSpPr>
         <p:spPr>
           <a:xfrm>
-            <a:off x="640080" y="1600200"/>
-            <a:ext cx="5212080" cy="1234440"/>
+            <a:off x="640080" y="1554480"/>
+            <a:ext cx="5212080" cy="1874520"/>
           </a:xfrm>
           <a:prstGeom prst="roundRect">
             <a:avLst>
-              <a:gd name="adj" fmla="val 8889"/>
+              <a:gd name="adj" fmla="val 5854"/>
             </a:avLst>
           </a:prstGeom>
           <a:solidFill>
@@ -8160,7 +8974,7 @@
         </p:nvSpPr>
         <p:spPr>
           <a:xfrm>
-            <a:off x="5541264" y="1746504"/>
+            <a:off x="5541264" y="1700784"/>
             <a:ext cx="128016" cy="128016"/>
           </a:xfrm>
           <a:prstGeom prst="ellipse">
@@ -8180,7 +8994,7 @@
         </p:nvSpPr>
         <p:spPr>
           <a:xfrm>
-            <a:off x="5541264" y="1947672"/>
+            <a:off x="5541264" y="1901952"/>
             <a:ext cx="128016" cy="128016"/>
           </a:xfrm>
           <a:prstGeom prst="ellipse">
@@ -8200,7 +9014,7 @@
         </p:nvSpPr>
         <p:spPr>
           <a:xfrm>
-            <a:off x="5541264" y="2148840"/>
+            <a:off x="5541264" y="2103120"/>
             <a:ext cx="128016" cy="128016"/>
           </a:xfrm>
           <a:prstGeom prst="ellipse">
@@ -8220,8 +9034,8 @@
         </p:nvSpPr>
         <p:spPr>
           <a:xfrm>
-            <a:off x="914400" y="1801368"/>
-            <a:ext cx="4526280" cy="868680"/>
+            <a:off x="914400" y="1755648"/>
+            <a:ext cx="4526280" cy="1508760"/>
           </a:xfrm>
           <a:prstGeom prst="rect">
             <a:avLst/>
@@ -8240,30 +9054,159 @@
               <a:buNone/>
             </a:pPr>
             <a:r>
-              <a:rPr lang="en-US" sz="1800" dirty="0">
-                <a:solidFill>
-                  <a:srgbClr val="7FD1D9"/>
+              <a:rPr lang="en-US" sz="1700" dirty="0">
+                <a:solidFill>
+                  <a:srgbClr val="D7E3F4"/>
                 </a:solidFill>
                 <a:latin typeface="Courier New" pitchFamily="34" charset="0"/>
                 <a:ea typeface="Courier New" pitchFamily="34" charset="-122"/>
                 <a:cs typeface="Courier New" pitchFamily="34" charset="-120"/>
               </a:rPr>
-              <a:t>winget install --id GitHub.cli</a:t>
-            </a:r>
-            <a:endParaRPr lang="en-US" sz="1800" dirty="0"/>
-          </a:p>
-        </p:txBody>
-      </p:sp>
-      <p:sp>
-        <p:nvSpPr>
-          <p:cNvPr id="11" name="Text 8"/>
-          <p:cNvSpPr/>
-          <p:nvPr/>
-        </p:nvSpPr>
-        <p:spPr>
-          <a:xfrm>
-            <a:off x="640080" y="3017520"/>
-            <a:ext cx="5212080" cy="822960"/>
+              <a:t>cd ~/dev/MyOpModeRobot</a:t>
+            </a:r>
+            <a:endParaRPr lang="en-US" sz="1700" dirty="0"/>
+          </a:p>
+          <a:p>
+            <a:pPr indent="0" marL="0">
+              <a:lnSpc>
+                <a:spcPct val="120000"/>
+              </a:lnSpc>
+              <a:buNone/>
+            </a:pPr>
+            <a:r>
+              <a:rPr lang="en-US" sz="1700" dirty="0">
+                <a:solidFill>
+                  <a:srgbClr val="9EF01A"/>
+                </a:solidFill>
+                <a:latin typeface="Courier New" pitchFamily="34" charset="0"/>
+                <a:ea typeface="Courier New" pitchFamily="34" charset="-122"/>
+                <a:cs typeface="Courier New" pitchFamily="34" charset="-120"/>
+              </a:rPr>
+              <a:t>./gradlew build</a:t>
+            </a:r>
+            <a:endParaRPr lang="en-US" sz="1700" dirty="0"/>
+          </a:p>
+          <a:p>
+            <a:pPr indent="0" marL="0">
+              <a:lnSpc>
+                <a:spcPct val="120000"/>
+              </a:lnSpc>
+              <a:buNone/>
+            </a:pPr>
+            <a:r>
+              <a:rPr lang="en-US" sz="1700" dirty="0">
+                <a:solidFill>
+                  <a:srgbClr val="9EF01A"/>
+                </a:solidFill>
+                <a:latin typeface="Courier New" pitchFamily="34" charset="0"/>
+                <a:ea typeface="Courier New" pitchFamily="34" charset="-122"/>
+                <a:cs typeface="Courier New" pitchFamily="34" charset="-120"/>
+              </a:rPr>
+              <a:t>./gradlew simulateJava</a:t>
+            </a:r>
+            <a:endParaRPr lang="en-US" sz="1700" dirty="0"/>
+          </a:p>
+        </p:txBody>
+      </p:sp>
+      <p:sp>
+        <p:nvSpPr>
+          <p:cNvPr id="11" name="Shape 8"/>
+          <p:cNvSpPr/>
+          <p:nvPr/>
+        </p:nvSpPr>
+        <p:spPr>
+          <a:xfrm>
+            <a:off x="640080" y="3611880"/>
+            <a:ext cx="5212080" cy="2240280"/>
+          </a:xfrm>
+          <a:prstGeom prst="roundRect">
+            <a:avLst>
+              <a:gd name="adj" fmla="val 4898"/>
+            </a:avLst>
+          </a:prstGeom>
+          <a:solidFill>
+            <a:srgbClr val="0B1F3A"/>
+          </a:solidFill>
+          <a:ln/>
+          <a:effectLst>
+            <a:outerShdw sx="100000" sy="100000" kx="0" ky="0" algn="bl" rotWithShape="0" blurRad="101600" dist="38100" dir="5400000">
+              <a:srgbClr val="0B1F3A">
+                <a:alpha val="35000"/>
+              </a:srgbClr>
+            </a:outerShdw>
+          </a:effectLst>
+        </p:spPr>
+      </p:sp>
+      <p:sp>
+        <p:nvSpPr>
+          <p:cNvPr id="12" name="Shape 9"/>
+          <p:cNvSpPr/>
+          <p:nvPr/>
+        </p:nvSpPr>
+        <p:spPr>
+          <a:xfrm>
+            <a:off x="5541264" y="3758184"/>
+            <a:ext cx="128016" cy="128016"/>
+          </a:xfrm>
+          <a:prstGeom prst="ellipse">
+            <a:avLst/>
+          </a:prstGeom>
+          <a:solidFill>
+            <a:srgbClr val="FF6B6B"/>
+          </a:solidFill>
+          <a:ln/>
+        </p:spPr>
+      </p:sp>
+      <p:sp>
+        <p:nvSpPr>
+          <p:cNvPr id="13" name="Shape 10"/>
+          <p:cNvSpPr/>
+          <p:nvPr/>
+        </p:nvSpPr>
+        <p:spPr>
+          <a:xfrm>
+            <a:off x="5541264" y="3959352"/>
+            <a:ext cx="128016" cy="128016"/>
+          </a:xfrm>
+          <a:prstGeom prst="ellipse">
+            <a:avLst/>
+          </a:prstGeom>
+          <a:solidFill>
+            <a:srgbClr val="FFD166"/>
+          </a:solidFill>
+          <a:ln/>
+        </p:spPr>
+      </p:sp>
+      <p:sp>
+        <p:nvSpPr>
+          <p:cNvPr id="14" name="Shape 11"/>
+          <p:cNvSpPr/>
+          <p:nvPr/>
+        </p:nvSpPr>
+        <p:spPr>
+          <a:xfrm>
+            <a:off x="5541264" y="4160520"/>
+            <a:ext cx="128016" cy="128016"/>
+          </a:xfrm>
+          <a:prstGeom prst="ellipse">
+            <a:avLst/>
+          </a:prstGeom>
+          <a:solidFill>
+            <a:srgbClr val="2EC4B6"/>
+          </a:solidFill>
+          <a:ln/>
+        </p:spPr>
+      </p:sp>
+      <p:sp>
+        <p:nvSpPr>
+          <p:cNvPr id="15" name="Text 12"/>
+          <p:cNvSpPr/>
+          <p:nvPr/>
+        </p:nvSpPr>
+        <p:spPr>
+          <a:xfrm>
+            <a:off x="914400" y="3813048"/>
+            <a:ext cx="4526280" cy="1874520"/>
           </a:xfrm>
           <a:prstGeom prst="rect">
             <a:avLst/>
@@ -8277,28 +9220,88 @@
           <a:p>
             <a:pPr indent="0" marL="0">
               <a:lnSpc>
-                <a:spcPct val="125000"/>
+                <a:spcPct val="120000"/>
               </a:lnSpc>
               <a:buNone/>
             </a:pPr>
             <a:r>
-              <a:rPr lang="en-US" sz="2000" i="1" dirty="0">
-                <a:solidFill>
-                  <a:srgbClr val="5B6B84"/>
-                </a:solidFill>
-                <a:latin typeface="Calibri" pitchFamily="34" charset="0"/>
-                <a:ea typeface="Calibri" pitchFamily="34" charset="-122"/>
-                <a:cs typeface="Calibri" pitchFamily="34" charset="-120"/>
-              </a:rPr>
-              <a:t>Sign up at github.com with the same email as before.</a:t>
-            </a:r>
-            <a:endParaRPr lang="en-US" sz="2000" dirty="0"/>
-          </a:p>
-        </p:txBody>
-      </p:sp>
-      <p:sp>
-        <p:nvSpPr>
-          <p:cNvPr id="12" name="Shape 9"/>
+              <a:rPr lang="en-US" sz="1700" dirty="0">
+                <a:solidFill>
+                  <a:srgbClr val="D7E3F4"/>
+                </a:solidFill>
+                <a:latin typeface="Courier New" pitchFamily="34" charset="0"/>
+                <a:ea typeface="Courier New" pitchFamily="34" charset="-122"/>
+                <a:cs typeface="Courier New" pitchFamily="34" charset="-120"/>
+              </a:rPr>
+              <a:t>git init</a:t>
+            </a:r>
+            <a:endParaRPr lang="en-US" sz="1700" dirty="0"/>
+          </a:p>
+          <a:p>
+            <a:pPr indent="0" marL="0">
+              <a:lnSpc>
+                <a:spcPct val="120000"/>
+              </a:lnSpc>
+              <a:buNone/>
+            </a:pPr>
+            <a:r>
+              <a:rPr lang="en-US" sz="1700" dirty="0">
+                <a:solidFill>
+                  <a:srgbClr val="D7E3F4"/>
+                </a:solidFill>
+                <a:latin typeface="Courier New" pitchFamily="34" charset="0"/>
+                <a:ea typeface="Courier New" pitchFamily="34" charset="-122"/>
+                <a:cs typeface="Courier New" pitchFamily="34" charset="-120"/>
+              </a:rPr>
+              <a:t>git branch -M main</a:t>
+            </a:r>
+            <a:endParaRPr lang="en-US" sz="1700" dirty="0"/>
+          </a:p>
+          <a:p>
+            <a:pPr indent="0" marL="0">
+              <a:lnSpc>
+                <a:spcPct val="120000"/>
+              </a:lnSpc>
+              <a:buNone/>
+            </a:pPr>
+            <a:r>
+              <a:rPr lang="en-US" sz="1700" dirty="0">
+                <a:solidFill>
+                  <a:srgbClr val="D7E3F4"/>
+                </a:solidFill>
+                <a:latin typeface="Courier New" pitchFamily="34" charset="0"/>
+                <a:ea typeface="Courier New" pitchFamily="34" charset="-122"/>
+                <a:cs typeface="Courier New" pitchFamily="34" charset="-120"/>
+              </a:rPr>
+              <a:t>git add .</a:t>
+            </a:r>
+            <a:endParaRPr lang="en-US" sz="1700" dirty="0"/>
+          </a:p>
+          <a:p>
+            <a:pPr indent="0" marL="0">
+              <a:lnSpc>
+                <a:spcPct val="120000"/>
+              </a:lnSpc>
+              <a:buNone/>
+            </a:pPr>
+            <a:r>
+              <a:rPr lang="en-US" sz="1700" dirty="0">
+                <a:solidFill>
+                  <a:srgbClr val="9EF01A"/>
+                </a:solidFill>
+                <a:latin typeface="Courier New" pitchFamily="34" charset="0"/>
+                <a:ea typeface="Courier New" pitchFamily="34" charset="-122"/>
+                <a:cs typeface="Courier New" pitchFamily="34" charset="-120"/>
+              </a:rPr>
+              <a:t>git commit -m "Initial commit"</a:t>
+            </a:r>
+            <a:endParaRPr lang="en-US" sz="1700" dirty="0"/>
+          </a:p>
+        </p:txBody>
+      </p:sp>
+      <p:sp>
+        <p:nvSpPr>
+          <p:cNvPr id="16" name="Shape 13"/>
           <p:cNvSpPr/>
           <p:nvPr/>
         </p:nvSpPr>
@@ -8313,45 +9316,90 @@
             </a:avLst>
           </a:prstGeom>
           <a:solidFill>
-            <a:srgbClr val="0B1F3A"/>
+            <a:srgbClr val="F3F6FA"/>
           </a:solidFill>
           <a:ln/>
         </p:spPr>
       </p:sp>
       <p:sp>
         <p:nvSpPr>
-          <p:cNvPr id="13" name="Text 10"/>
+          <p:cNvPr id="17" name="Text 14"/>
           <p:cNvSpPr/>
           <p:nvPr/>
         </p:nvSpPr>
         <p:spPr>
           <a:xfrm>
             <a:off x="6446520" y="1874520"/>
-            <a:ext cx="4800600" cy="365760"/>
-          </a:xfrm>
-          <a:prstGeom prst="rect">
-            <a:avLst/>
-          </a:prstGeom>
-          <a:noFill/>
-          <a:ln/>
-        </p:spPr>
-        <p:txBody>
-          <a:bodyPr wrap="square" lIns="0" tIns="0" rIns="0" bIns="0" rtlCol="0" anchor="ctr"/>
-          <a:lstStyle/>
-          <a:p>
-            <a:pPr indent="0" marL="0">
-              <a:buNone/>
-            </a:pPr>
-            <a:r>
-              <a:rPr lang="en-US" sz="2000" b="1" spc="50" kern="0" dirty="0">
-                <a:solidFill>
-                  <a:srgbClr val="1B9AAA"/>
+            <a:ext cx="4800600" cy="1228725"/>
+          </a:xfrm>
+          <a:prstGeom prst="rect">
+            <a:avLst/>
+          </a:prstGeom>
+          <a:noFill/>
+          <a:ln/>
+        </p:spPr>
+        <p:txBody>
+          <a:bodyPr wrap="square" lIns="0" tIns="0" rIns="0" bIns="0" rtlCol="0" anchor="t"/>
+          <a:lstStyle/>
+          <a:p>
+            <a:pPr indent="0" marL="0">
+              <a:lnSpc>
+                <a:spcPct val="120000"/>
+              </a:lnSpc>
+              <a:buNone/>
+            </a:pPr>
+            <a:r>
+              <a:rPr lang="en-US" sz="2100" b="1" dirty="0">
+                <a:solidFill>
+                  <a:srgbClr val="13294B"/>
+                </a:solidFill>
+                <a:latin typeface="Cambria" pitchFamily="34" charset="0"/>
+                <a:ea typeface="Cambria" pitchFamily="34" charset="-122"/>
+                <a:cs typeface="Cambria" pitchFamily="34" charset="-120"/>
+              </a:rPr>
+              <a:t>The template already ships a .gitignore that excludes build/ and .gradle/ — trust it.</a:t>
+            </a:r>
+            <a:endParaRPr lang="en-US" sz="2100" dirty="0"/>
+          </a:p>
+        </p:txBody>
+      </p:sp>
+      <p:sp>
+        <p:nvSpPr>
+          <p:cNvPr id="18" name="Text 15"/>
+          <p:cNvSpPr/>
+          <p:nvPr/>
+        </p:nvSpPr>
+        <p:spPr>
+          <a:xfrm>
+            <a:off x="6446520" y="3103245"/>
+            <a:ext cx="4800600" cy="2474595"/>
+          </a:xfrm>
+          <a:prstGeom prst="rect">
+            <a:avLst/>
+          </a:prstGeom>
+          <a:noFill/>
+          <a:ln/>
+        </p:spPr>
+        <p:txBody>
+          <a:bodyPr wrap="square" lIns="0" tIns="0" rIns="0" bIns="0" rtlCol="0" anchor="t"/>
+          <a:lstStyle/>
+          <a:p>
+            <a:pPr indent="0" marL="0">
+              <a:lnSpc>
+                <a:spcPct val="125000"/>
+              </a:lnSpc>
+              <a:buNone/>
+            </a:pPr>
+            <a:r>
+              <a:rPr lang="en-US" sz="2000" dirty="0">
+                <a:solidFill>
+                  <a:srgbClr val="13294B"/>
                 </a:solidFill>
                 <a:latin typeface="Calibri" pitchFamily="34" charset="0"/>
                 <a:ea typeface="Calibri" pitchFamily="34" charset="-122"/>
                 <a:cs typeface="Calibri" pitchFamily="34" charset="-120"/>
               </a:rPr>
-              <a:t>GH AUTH LOGIN</a:t>
+              <a:t>Confirm with git status that every untracked file belongs in the repo. That first commit is your recovery point — if your laptop died right now, you could rebuild from it, as long as it lives on GitHub too.</a:t>
             </a:r>
             <a:endParaRPr lang="en-US" sz="2000" dirty="0"/>
           </a:p>
@@ -8359,83 +9407,38 @@
       </p:sp>
       <p:sp>
         <p:nvSpPr>
-          <p:cNvPr id="14" name="Text 11"/>
-          <p:cNvSpPr/>
-          <p:nvPr/>
-        </p:nvSpPr>
-        <p:spPr>
-          <a:xfrm>
-            <a:off x="6446520" y="2331720"/>
-            <a:ext cx="4800600" cy="1228725"/>
-          </a:xfrm>
-          <a:prstGeom prst="rect">
-            <a:avLst/>
-          </a:prstGeom>
-          <a:noFill/>
-          <a:ln/>
-        </p:spPr>
-        <p:txBody>
-          <a:bodyPr wrap="square" lIns="0" tIns="0" rIns="0" bIns="0" rtlCol="0" anchor="t"/>
-          <a:lstStyle/>
-          <a:p>
-            <a:pPr indent="0" marL="0">
-              <a:lnSpc>
-                <a:spcPct val="120000"/>
-              </a:lnSpc>
-              <a:buNone/>
-            </a:pPr>
-            <a:r>
-              <a:rPr lang="en-US" sz="2100" b="1" dirty="0">
-                <a:solidFill>
-                  <a:srgbClr val="FFFFFF"/>
-                </a:solidFill>
-                <a:latin typeface="Cambria" pitchFamily="34" charset="0"/>
-                <a:ea typeface="Cambria" pitchFamily="34" charset="-122"/>
-                <a:cs typeface="Cambria" pitchFamily="34" charset="-120"/>
-              </a:rPr>
-              <a:t>GitHub.com → HTTPS → authenticate Git with your GitHub credentials → log in with a web browser.</a:t>
-            </a:r>
-            <a:endParaRPr lang="en-US" sz="2100" dirty="0"/>
-          </a:p>
-        </p:txBody>
-      </p:sp>
-      <p:sp>
-        <p:nvSpPr>
-          <p:cNvPr id="15" name="Text 12"/>
-          <p:cNvSpPr/>
-          <p:nvPr/>
-        </p:nvSpPr>
-        <p:spPr>
-          <a:xfrm>
-            <a:off x="6446520" y="3560445"/>
-            <a:ext cx="4800600" cy="2017395"/>
-          </a:xfrm>
-          <a:prstGeom prst="rect">
-            <a:avLst/>
-          </a:prstGeom>
-          <a:noFill/>
-          <a:ln/>
-        </p:spPr>
-        <p:txBody>
-          <a:bodyPr wrap="square" lIns="0" tIns="0" rIns="0" bIns="0" rtlCol="0" anchor="t"/>
-          <a:lstStyle/>
-          <a:p>
-            <a:pPr indent="0" marL="0">
-              <a:lnSpc>
-                <a:spcPct val="125000"/>
-              </a:lnSpc>
-              <a:buNone/>
-            </a:pPr>
-            <a:r>
-              <a:rPr lang="en-US" sz="2000" dirty="0">
-                <a:solidFill>
-                  <a:srgbClr val="CADCE8"/>
+          <p:cNvPr id="19" name="Text 16"/>
+          <p:cNvSpPr/>
+          <p:nvPr/>
+        </p:nvSpPr>
+        <p:spPr>
+          <a:xfrm>
+            <a:off x="640080" y="6446520"/>
+            <a:ext cx="8229600" cy="365760"/>
+          </a:xfrm>
+          <a:prstGeom prst="rect">
+            <a:avLst/>
+          </a:prstGeom>
+          <a:noFill/>
+          <a:ln/>
+        </p:spPr>
+        <p:txBody>
+          <a:bodyPr wrap="square" lIns="0" tIns="0" rIns="0" bIns="0" rtlCol="0" anchor="ctr"/>
+          <a:lstStyle/>
+          <a:p>
+            <a:pPr indent="0" marL="0">
+              <a:buNone/>
+            </a:pPr>
+            <a:r>
+              <a:rPr lang="en-US" sz="2000" spc="100" kern="0" dirty="0">
+                <a:solidFill>
+                  <a:srgbClr val="5B6B84"/>
                 </a:solidFill>
                 <a:latin typeface="Calibri" pitchFamily="34" charset="0"/>
                 <a:ea typeface="Calibri" pitchFamily="34" charset="-122"/>
                 <a:cs typeface="Calibri" pitchFamily="34" charset="-120"/>
               </a:rPr>
-              <a:t>It gives you a one-time code, opens your browser, you paste the code — done. From now on, git push and git pull just work, no password prompt, ever.</a:t>
+              <a:t>LEARN JAVA + ROBOT PROGRAMMING · SETUP</a:t>
             </a:r>
             <a:endParaRPr lang="en-US" sz="2000" dirty="0"/>
           </a:p>
@@ -8443,14 +9446,14 @@
       </p:sp>
       <p:sp>
         <p:nvSpPr>
-          <p:cNvPr id="16" name="Text 13"/>
-          <p:cNvSpPr/>
-          <p:nvPr/>
-        </p:nvSpPr>
-        <p:spPr>
-          <a:xfrm>
-            <a:off x="640080" y="6446520"/>
-            <a:ext cx="8229600" cy="365760"/>
+          <p:cNvPr id="20" name="Text 17"/>
+          <p:cNvSpPr/>
+          <p:nvPr/>
+        </p:nvSpPr>
+        <p:spPr>
+          <a:xfrm>
+            <a:off x="11002975" y="6446520"/>
+            <a:ext cx="548640" cy="365760"/>
           </a:xfrm>
           <a:prstGeom prst="rect">
             <a:avLst/>
@@ -8462,11 +9465,11 @@
           <a:bodyPr wrap="square" lIns="0" tIns="0" rIns="0" bIns="0" rtlCol="0" anchor="ctr"/>
           <a:lstStyle/>
           <a:p>
-            <a:pPr indent="0" marL="0">
-              <a:buNone/>
-            </a:pPr>
-            <a:r>
-              <a:rPr lang="en-US" sz="2000" spc="100" kern="0" dirty="0">
+            <a:pPr algn="r" indent="0" marL="0">
+              <a:buNone/>
+            </a:pPr>
+            <a:r>
+              <a:rPr lang="en-US" sz="2000" dirty="0">
                 <a:solidFill>
                   <a:srgbClr val="5B6B84"/>
                 </a:solidFill>
@@ -8474,45 +9477,6 @@
                 <a:ea typeface="Calibri" pitchFamily="34" charset="-122"/>
                 <a:cs typeface="Calibri" pitchFamily="34" charset="-120"/>
               </a:rPr>
-              <a:t>LEARN JAVA + ROBOT PROGRAMMING · SETUP</a:t>
-            </a:r>
-            <a:endParaRPr lang="en-US" sz="2000" dirty="0"/>
-          </a:p>
-        </p:txBody>
-      </p:sp>
-      <p:sp>
-        <p:nvSpPr>
-          <p:cNvPr id="17" name="Text 14"/>
-          <p:cNvSpPr/>
-          <p:nvPr/>
-        </p:nvSpPr>
-        <p:spPr>
-          <a:xfrm>
-            <a:off x="11002975" y="6446520"/>
-            <a:ext cx="548640" cy="365760"/>
-          </a:xfrm>
-          <a:prstGeom prst="rect">
-            <a:avLst/>
-          </a:prstGeom>
-          <a:noFill/>
-          <a:ln/>
-        </p:spPr>
-        <p:txBody>
-          <a:bodyPr wrap="square" lIns="0" tIns="0" rIns="0" bIns="0" rtlCol="0" anchor="ctr"/>
-          <a:lstStyle/>
-          <a:p>
-            <a:pPr algn="r" indent="0" marL="0">
-              <a:buNone/>
-            </a:pPr>
-            <a:r>
-              <a:rPr lang="en-US" sz="2000" dirty="0">
-                <a:solidFill>
-                  <a:srgbClr val="5B6B84"/>
-                </a:solidFill>
-                <a:latin typeface="Calibri" pitchFamily="34" charset="0"/>
-                <a:ea typeface="Calibri" pitchFamily="34" charset="-122"/>
-                <a:cs typeface="Calibri" pitchFamily="34" charset="-120"/>
-              </a:rPr>
               <a:t>8</a:t>
             </a:r>
             <a:endParaRPr lang="en-US" sz="2000" dirty="0"/>
@@ -8521,7 +9485,7 @@
       </p:sp>
       <p:pic>
         <p:nvPicPr>
-          <p:cNvPr id="18" name="Image 1" descr="/home/user/BasicRobotLessons/docs/presentations/v3/template/assets/logo/team5010-logo-onwhite.png">    </p:cNvPr>
+          <p:cNvPr id="21" name="Image 1" descr="/home/user/BasicRobotLessons/docs/presentations/v3/template/assets/logo/team5010-logo-onwhite.png">    </p:cNvPr>
           <p:cNvPicPr>
             <a:picLocks noChangeAspect="1"/>
           </p:cNvPicPr>
@@ -8597,7 +9561,7 @@
       </p:sp>
       <p:pic>
         <p:nvPicPr>
-          <p:cNvPr id="3" name="Image 0" descr="/home/user/BasicRobotLessons/docs/presentations/v3/template/assets/icons/clouduploadalt_white.png">    </p:cNvPr>
+          <p:cNvPr id="3" name="Image 0" descr="/home/user/BasicRobotLessons/docs/presentations/v3/template/assets/icons/key_white.png">    </p:cNvPr>
           <p:cNvPicPr>
             <a:picLocks noChangeAspect="1"/>
           </p:cNvPicPr>
@@ -8652,7 +9616,7 @@
                 <a:ea typeface="Calibri" pitchFamily="34" charset="-122"/>
                 <a:cs typeface="Calibri" pitchFamily="34" charset="-120"/>
               </a:rPr>
-              <a:t>SECTION 6 · PUSH IT</a:t>
+              <a:t>SECTION 6 · GITHUB</a:t>
             </a:r>
             <a:endParaRPr lang="en-US" sz="2000" dirty="0"/>
           </a:p>
@@ -8691,7 +9655,7 @@
                 <a:ea typeface="Cambria" pitchFamily="34" charset="-122"/>
                 <a:cs typeface="Cambria" pitchFamily="34" charset="-120"/>
               </a:rPr>
-              <a:t>One command makes the remote and sends your code</a:t>
+              <a:t>An account, and a login that never nags you</a:t>
             </a:r>
             <a:endParaRPr lang="en-US" sz="3000" dirty="0"/>
           </a:p>
@@ -8706,7 +9670,7 @@
         <p:spPr>
           <a:xfrm>
             <a:off x="640080" y="1600200"/>
-            <a:ext cx="10881360" cy="1234440"/>
+            <a:ext cx="5212080" cy="1234440"/>
           </a:xfrm>
           <a:prstGeom prst="roundRect">
             <a:avLst>
@@ -8734,7 +9698,7 @@
         </p:nvSpPr>
         <p:spPr>
           <a:xfrm>
-            <a:off x="11210544" y="1746504"/>
+            <a:off x="5541264" y="1746504"/>
             <a:ext cx="128016" cy="128016"/>
           </a:xfrm>
           <a:prstGeom prst="ellipse">
@@ -8754,7 +9718,7 @@
         </p:nvSpPr>
         <p:spPr>
           <a:xfrm>
-            <a:off x="11210544" y="1947672"/>
+            <a:off x="5541264" y="1947672"/>
             <a:ext cx="128016" cy="128016"/>
           </a:xfrm>
           <a:prstGeom prst="ellipse">
@@ -8774,7 +9738,7 @@
         </p:nvSpPr>
         <p:spPr>
           <a:xfrm>
-            <a:off x="11210544" y="2148840"/>
+            <a:off x="5541264" y="2148840"/>
             <a:ext cx="128016" cy="128016"/>
           </a:xfrm>
           <a:prstGeom prst="ellipse">
@@ -8795,7 +9759,7 @@
         <p:spPr>
           <a:xfrm>
             <a:off x="914400" y="1801368"/>
-            <a:ext cx="10195560" cy="868680"/>
+            <a:ext cx="4526280" cy="868680"/>
           </a:xfrm>
           <a:prstGeom prst="rect">
             <a:avLst/>
@@ -8814,52 +9778,133 @@
               <a:buNone/>
             </a:pPr>
             <a:r>
-              <a:rPr lang="en-US" sz="1600" dirty="0">
-                <a:solidFill>
-                  <a:srgbClr val="9EF01A"/>
+              <a:rPr lang="en-US" sz="1800" dirty="0">
+                <a:solidFill>
+                  <a:srgbClr val="7FD1D9"/>
                 </a:solidFill>
                 <a:latin typeface="Courier New" pitchFamily="34" charset="0"/>
                 <a:ea typeface="Courier New" pitchFamily="34" charset="-122"/>
                 <a:cs typeface="Courier New" pitchFamily="34" charset="-120"/>
               </a:rPr>
-              <a:t>gh repo create MyOpModeRobot --private --source=. --remote=origin --push</a:t>
-            </a:r>
-            <a:endParaRPr lang="en-US" sz="1600" dirty="0"/>
-          </a:p>
-        </p:txBody>
-      </p:sp>
-      <p:sp>
-        <p:nvSpPr>
-          <p:cNvPr id="11" name="Shape 8"/>
-          <p:cNvSpPr/>
-          <p:nvPr/>
-        </p:nvSpPr>
-        <p:spPr>
-          <a:xfrm>
-            <a:off x="640080" y="3063240"/>
-            <a:ext cx="10881360" cy="2788920"/>
+              <a:t>winget install --id GitHub.cli</a:t>
+            </a:r>
+            <a:endParaRPr lang="en-US" sz="1800" dirty="0"/>
+          </a:p>
+        </p:txBody>
+      </p:sp>
+      <p:sp>
+        <p:nvSpPr>
+          <p:cNvPr id="11" name="Text 8"/>
+          <p:cNvSpPr/>
+          <p:nvPr/>
+        </p:nvSpPr>
+        <p:spPr>
+          <a:xfrm>
+            <a:off x="640080" y="3017520"/>
+            <a:ext cx="5212080" cy="822960"/>
+          </a:xfrm>
+          <a:prstGeom prst="rect">
+            <a:avLst/>
+          </a:prstGeom>
+          <a:noFill/>
+          <a:ln/>
+        </p:spPr>
+        <p:txBody>
+          <a:bodyPr wrap="square" lIns="0" tIns="0" rIns="0" bIns="0" rtlCol="0" anchor="t"/>
+          <a:lstStyle/>
+          <a:p>
+            <a:pPr indent="0" marL="0">
+              <a:lnSpc>
+                <a:spcPct val="125000"/>
+              </a:lnSpc>
+              <a:buNone/>
+            </a:pPr>
+            <a:r>
+              <a:rPr lang="en-US" sz="2000" i="1" dirty="0">
+                <a:solidFill>
+                  <a:srgbClr val="5B6B84"/>
+                </a:solidFill>
+                <a:latin typeface="Calibri" pitchFamily="34" charset="0"/>
+                <a:ea typeface="Calibri" pitchFamily="34" charset="-122"/>
+                <a:cs typeface="Calibri" pitchFamily="34" charset="-120"/>
+              </a:rPr>
+              <a:t>Sign up at github.com with the same email as before.</a:t>
+            </a:r>
+            <a:endParaRPr lang="en-US" sz="2000" dirty="0"/>
+          </a:p>
+        </p:txBody>
+      </p:sp>
+      <p:sp>
+        <p:nvSpPr>
+          <p:cNvPr id="12" name="Shape 9"/>
+          <p:cNvSpPr/>
+          <p:nvPr/>
+        </p:nvSpPr>
+        <p:spPr>
+          <a:xfrm>
+            <a:off x="6172200" y="1600200"/>
+            <a:ext cx="5349240" cy="4251960"/>
           </a:xfrm>
           <a:prstGeom prst="roundRect">
             <a:avLst>
-              <a:gd name="adj" fmla="val 3279"/>
+              <a:gd name="adj" fmla="val 2151"/>
             </a:avLst>
           </a:prstGeom>
           <a:solidFill>
-            <a:srgbClr val="F3F6FA"/>
+            <a:srgbClr val="0B1F3A"/>
           </a:solidFill>
           <a:ln/>
         </p:spPr>
       </p:sp>
       <p:sp>
         <p:nvSpPr>
-          <p:cNvPr id="12" name="Text 9"/>
-          <p:cNvSpPr/>
-          <p:nvPr/>
-        </p:nvSpPr>
-        <p:spPr>
-          <a:xfrm>
-            <a:off x="914400" y="3337560"/>
-            <a:ext cx="10332720" cy="927100"/>
+          <p:cNvPr id="13" name="Text 10"/>
+          <p:cNvSpPr/>
+          <p:nvPr/>
+        </p:nvSpPr>
+        <p:spPr>
+          <a:xfrm>
+            <a:off x="6446520" y="1874520"/>
+            <a:ext cx="4800600" cy="365760"/>
+          </a:xfrm>
+          <a:prstGeom prst="rect">
+            <a:avLst/>
+          </a:prstGeom>
+          <a:noFill/>
+          <a:ln/>
+        </p:spPr>
+        <p:txBody>
+          <a:bodyPr wrap="square" lIns="0" tIns="0" rIns="0" bIns="0" rtlCol="0" anchor="ctr"/>
+          <a:lstStyle/>
+          <a:p>
+            <a:pPr indent="0" marL="0">
+              <a:buNone/>
+            </a:pPr>
+            <a:r>
+              <a:rPr lang="en-US" sz="2000" b="1" spc="50" kern="0" dirty="0">
+                <a:solidFill>
+                  <a:srgbClr val="1B9AAA"/>
+                </a:solidFill>
+                <a:latin typeface="Calibri" pitchFamily="34" charset="0"/>
+                <a:ea typeface="Calibri" pitchFamily="34" charset="-122"/>
+                <a:cs typeface="Calibri" pitchFamily="34" charset="-120"/>
+              </a:rPr>
+              <a:t>GH AUTH LOGIN</a:t>
+            </a:r>
+            <a:endParaRPr lang="en-US" sz="2000" dirty="0"/>
+          </a:p>
+        </p:txBody>
+      </p:sp>
+      <p:sp>
+        <p:nvSpPr>
+          <p:cNvPr id="14" name="Text 11"/>
+          <p:cNvSpPr/>
+          <p:nvPr/>
+        </p:nvSpPr>
+        <p:spPr>
+          <a:xfrm>
+            <a:off x="6446520" y="2331720"/>
+            <a:ext cx="4800600" cy="1228725"/>
           </a:xfrm>
           <a:prstGeom prst="rect">
             <a:avLst/>
@@ -8878,30 +9923,30 @@
               <a:buNone/>
             </a:pPr>
             <a:r>
-              <a:rPr lang="en-US" sz="2200" b="1" dirty="0">
-                <a:solidFill>
-                  <a:srgbClr val="13294B"/>
+              <a:rPr lang="en-US" sz="2100" b="1" dirty="0">
+                <a:solidFill>
+                  <a:srgbClr val="FFFFFF"/>
                 </a:solidFill>
                 <a:latin typeface="Cambria" pitchFamily="34" charset="0"/>
                 <a:ea typeface="Cambria" pitchFamily="34" charset="-122"/>
                 <a:cs typeface="Cambria" pitchFamily="34" charset="-120"/>
               </a:rPr>
-              <a:t>That one line creates a private GitHub repo, wires it up as origin, and pushes your first commit.</a:t>
-            </a:r>
-            <a:endParaRPr lang="en-US" sz="2200" dirty="0"/>
-          </a:p>
-        </p:txBody>
-      </p:sp>
-      <p:sp>
-        <p:nvSpPr>
-          <p:cNvPr id="13" name="Text 10"/>
-          <p:cNvSpPr/>
-          <p:nvPr/>
-        </p:nvSpPr>
-        <p:spPr>
-          <a:xfrm>
-            <a:off x="914400" y="4264660"/>
-            <a:ext cx="10332720" cy="1313180"/>
+              <a:t>GitHub.com → HTTPS → authenticate Git with your GitHub credentials → log in with a web browser.</a:t>
+            </a:r>
+            <a:endParaRPr lang="en-US" sz="2100" dirty="0"/>
+          </a:p>
+        </p:txBody>
+      </p:sp>
+      <p:sp>
+        <p:nvSpPr>
+          <p:cNvPr id="15" name="Text 12"/>
+          <p:cNvSpPr/>
+          <p:nvPr/>
+        </p:nvSpPr>
+        <p:spPr>
+          <a:xfrm>
+            <a:off x="6446520" y="3560445"/>
+            <a:ext cx="4800600" cy="2017395"/>
           </a:xfrm>
           <a:prstGeom prst="rect">
             <a:avLst/>
@@ -8922,13 +9967,13 @@
             <a:r>
               <a:rPr lang="en-US" sz="2000" dirty="0">
                 <a:solidFill>
-                  <a:srgbClr val="13294B"/>
+                  <a:srgbClr val="CADCE8"/>
                 </a:solidFill>
                 <a:latin typeface="Calibri" pitchFamily="34" charset="0"/>
                 <a:ea typeface="Calibri" pitchFamily="34" charset="-122"/>
                 <a:cs typeface="Calibri" pitchFamily="34" charset="-120"/>
               </a:rPr>
-              <a:t>Check it landed right: gh repo view --web opens the repo in your browser. You should see every file from your project — and nothing from BasicRobotLessons. If the whole course shows up instead, you ran it from the wrong folder.</a:t>
+              <a:t>It gives you a one-time code, opens your browser, you paste the code — done. From now on, git push and git pull just work, no password prompt, ever.</a:t>
             </a:r>
             <a:endParaRPr lang="en-US" sz="2000" dirty="0"/>
           </a:p>
@@ -8936,7 +9981,7 @@
       </p:sp>
       <p:sp>
         <p:nvSpPr>
-          <p:cNvPr id="14" name="Text 11"/>
+          <p:cNvPr id="16" name="Text 13"/>
           <p:cNvSpPr/>
           <p:nvPr/>
         </p:nvSpPr>
@@ -8975,7 +10020,7 @@
       </p:sp>
       <p:sp>
         <p:nvSpPr>
-          <p:cNvPr id="15" name="Text 12"/>
+          <p:cNvPr id="17" name="Text 14"/>
           <p:cNvSpPr/>
           <p:nvPr/>
         </p:nvSpPr>
@@ -9014,7 +10059,7 @@
       </p:sp>
       <p:pic>
         <p:nvPicPr>
-          <p:cNvPr id="16" name="Image 1" descr="/home/user/BasicRobotLessons/docs/presentations/v3/template/assets/logo/team5010-logo-onwhite.png">    </p:cNvPr>
+          <p:cNvPr id="18" name="Image 1" descr="/home/user/BasicRobotLessons/docs/presentations/v3/template/assets/logo/team5010-logo-onwhite.png">    </p:cNvPr>
           <p:cNvPicPr>
             <a:picLocks noChangeAspect="1"/>
           </p:cNvPicPr>

--- a/docs/presentations/v3/aside-setup.pptx
+++ b/docs/presentations/v3/aside-setup.pptx
@@ -7175,7 +7175,7 @@
                 <a:ea typeface="Calibri" pitchFamily="34" charset="-122"/>
                 <a:cs typeface="Calibri" pitchFamily="34" charset="-120"/>
               </a:rPr>
-              <a:t>SECTION 3 · GET A JDK</a:t>
+              <a:t>SECTION 3 · CONFIRM YOUR JDK</a:t>
             </a:r>
             <a:endParaRPr lang="en-US" sz="2000" dirty="0"/>
           </a:p>
@@ -7490,7 +7490,7 @@
                 <a:ea typeface="Cambria" pitchFamily="34" charset="-122"/>
                 <a:cs typeface="Cambria" pitchFamily="34" charset="-120"/>
               </a:rPr>
-              <a:t>Install a JDK 25, then point Gradle at it.</a:t>
+              <a:t>This alpha's installer already gave you one.</a:t>
             </a:r>
             <a:endParaRPr lang="en-US" sz="2200" dirty="0"/>
           </a:p>
@@ -7532,7 +7532,7 @@
                 <a:ea typeface="Calibri" pitchFamily="34" charset="-122"/>
                 <a:cs typeface="Calibri" pitchFamily="34" charset="-120"/>
               </a:rPr>
-              <a:t>Set JAVA_HOME to your JDK 25 install — or set ORG_GRADLE_JAVA_HOME instead, which points Gradle there without touching JAVA_HOME everywhere else. Gradle fails loudly if this is wrong, so it's worth checking now.</a:t>
+              <a:t>Section 1's installer bundles JDK 25 — no need to install your own. A different JDK on PATH (say, Java 17 from the classic track) just means pointing Gradle at this one with JAVA_HOME or ORG_GRADLE_JAVA_HOME.</a:t>
             </a:r>
             <a:endParaRPr lang="en-US" sz="2000" dirty="0"/>
           </a:p>

--- a/docs/presentations/v3/aside-setup.pptx
+++ b/docs/presentations/v3/aside-setup.pptx
@@ -4,6 +4,9 @@
   <p:sldMasterIdLst>
     <p:sldMasterId id="2147483648" r:id="rId1"/>
   </p:sldMasterIdLst>
+  <p:notesMasterIdLst>
+    <p:notesMasterId r:id="rId15"/>
+  </p:notesMasterIdLst>
   <p:sldIdLst>
     <p:sldId id="256" r:id="rId2"/>
     <p:sldId id="257" r:id="rId3"/>
@@ -19,11 +22,8 @@
     <p:sldId id="267" r:id="rId13"/>
     <p:sldId id="268" r:id="rId14"/>
   </p:sldIdLst>
-  <p:notesMasterIdLst>
-    <p:notesMasterId r:id="rId15"/>
-  </p:notesMasterIdLst>
-  <p:sldSz cx="12191695" cy="6858000"/>
-  <p:notesSz cx="6858000" cy="12191695"/>
+  <p:sldSz cx="12192000" cy="6858000"/>
+  <p:notesSz cx="6858000" cy="12192000"/>
   <p:defaultTextStyle>
     <a:lvl1pPr marL="0" algn="l" defTabSz="914400" rtl="0" eaLnBrk="1" latinLnBrk="0" hangingPunct="1">
       <a:defRPr sz="1800" kern="1200">
@@ -116,6 +116,11 @@
       </a:defRPr>
     </a:lvl9pPr>
   </p:defaultTextStyle>
+  <p:extLst>
+    <p:ext uri="{EFAFB233-063F-42B5-8137-9DF3F51BA10A}">
+      <p15:sldGuideLst xmlns:p15="http://schemas.microsoft.com/office/powerpoint/2012/main"/>
+    </p:ext>
+  </p:extLst>
 </p:presentation>
 </file>
 
@@ -141,234 +146,10 @@
           <a:chExt cx="0" cy="0"/>
         </a:xfrm>
       </p:grpSpPr>
-      <p:sp>
-        <p:nvSpPr>
-          <p:cNvPr id="2" name="Header Placeholder 1"/>
-          <p:cNvSpPr>
-            <a:spLocks noGrp="1"/>
-          </p:cNvSpPr>
-          <p:nvPr>
-            <p:ph type="hdr" sz="quarter"/>
-          </p:nvPr>
-        </p:nvSpPr>
-        <p:spPr>
-          <a:xfrm>
-            <a:off x="0" y="0"/>
-            <a:ext cx="2971800" cy="458788"/>
-          </a:xfrm>
-          <a:prstGeom prst="rect">
-            <a:avLst/>
-          </a:prstGeom>
-        </p:spPr>
-        <p:txBody>
-          <a:bodyPr vert="horz" lIns="91440" tIns="45720" rIns="91440" bIns="45720" rtlCol="0"/>
-          <a:lstStyle>
-            <a:lvl1pPr algn="l">
-              <a:defRPr sz="1200"/>
-            </a:lvl1pPr>
-          </a:lstStyle>
-          <a:p>
-            <a:endParaRPr lang="en-US"/>
-          </a:p>
-        </p:txBody>
-      </p:sp>
-      <p:sp>
-        <p:nvSpPr>
-          <p:cNvPr id="3" name="Date Placeholder 2"/>
-          <p:cNvSpPr>
-            <a:spLocks noGrp="1"/>
-          </p:cNvSpPr>
-          <p:nvPr>
-            <p:ph type="dt" idx="1"/>
-          </p:nvPr>
-        </p:nvSpPr>
-        <p:spPr>
-          <a:xfrm>
-            <a:off x="3884613" y="0"/>
-            <a:ext cx="2971800" cy="458788"/>
-          </a:xfrm>
-          <a:prstGeom prst="rect">
-            <a:avLst/>
-          </a:prstGeom>
-        </p:spPr>
-        <p:txBody>
-          <a:bodyPr vert="horz" lIns="91440" tIns="45720" rIns="91440" bIns="45720" rtlCol="0"/>
-          <a:lstStyle>
-            <a:lvl1pPr algn="r">
-              <a:defRPr sz="1200"/>
-            </a:lvl1pPr>
-          </a:lstStyle>
-          <a:p>
-            <a:fld id="{5282F153-3F37-0F45-9E97-73ACFA13230C}" type="datetimeFigureOut">
-              <a:rPr lang="en-US"/>
-              <a:t>7/23/19</a:t>
-            </a:fld>
-            <a:endParaRPr lang="en-US"/>
-          </a:p>
-        </p:txBody>
-      </p:sp>
-      <p:sp>
-        <p:nvSpPr>
-          <p:cNvPr id="4" name="Slide Image Placeholder 3"/>
-          <p:cNvSpPr>
-            <a:spLocks noGrp="1" noRot="1" noChangeAspect="1"/>
-          </p:cNvSpPr>
-          <p:nvPr>
-            <p:ph type="sldImg" idx="2"/>
-          </p:nvPr>
-        </p:nvSpPr>
-        <p:spPr>
-          <a:xfrm>
-            <a:off x="685800" y="1143000"/>
-            <a:ext cx="5486400" cy="3086100"/>
-          </a:xfrm>
-          <a:prstGeom prst="rect">
-            <a:avLst/>
-          </a:prstGeom>
-          <a:noFill/>
-          <a:ln w="12700">
-            <a:solidFill>
-              <a:prstClr val="black"/>
-            </a:solidFill>
-          </a:ln>
-        </p:spPr>
-        <p:txBody>
-          <a:bodyPr vert="horz" lIns="91440" tIns="45720" rIns="91440" bIns="45720" rtlCol="0" anchor="ctr"/>
-          <a:lstStyle/>
-          <a:p>
-            <a:endParaRPr lang="en-US"/>
-          </a:p>
-        </p:txBody>
-      </p:sp>
-      <p:sp>
-        <p:nvSpPr>
-          <p:cNvPr id="5" name="Notes Placeholder 4"/>
-          <p:cNvSpPr>
-            <a:spLocks noGrp="1"/>
-          </p:cNvSpPr>
-          <p:nvPr>
-            <p:ph type="body" sz="quarter" idx="3"/>
-          </p:nvPr>
-        </p:nvSpPr>
-        <p:spPr>
-          <a:xfrm>
-            <a:off x="685800" y="4400550"/>
-            <a:ext cx="5486400" cy="3600450"/>
-          </a:xfrm>
-          <a:prstGeom prst="rect">
-            <a:avLst/>
-          </a:prstGeom>
-        </p:spPr>
-        <p:txBody>
-          <a:bodyPr vert="horz" lIns="91440" tIns="45720" rIns="91440" bIns="45720" rtlCol="0"/>
-          <a:lstStyle/>
-          <a:p>
-            <a:pPr lvl="0"/>
-            <a:r>
-              <a:rPr lang="en-US"/>
-              <a:t>Click to edit Master text styles</a:t>
-            </a:r>
-          </a:p>
-          <a:p>
-            <a:pPr lvl="1"/>
-            <a:r>
-              <a:rPr lang="en-US"/>
-              <a:t>Second level</a:t>
-            </a:r>
-          </a:p>
-          <a:p>
-            <a:pPr lvl="2"/>
-            <a:r>
-              <a:rPr lang="en-US"/>
-              <a:t>Third level</a:t>
-            </a:r>
-          </a:p>
-          <a:p>
-            <a:pPr lvl="3"/>
-            <a:r>
-              <a:rPr lang="en-US"/>
-              <a:t>Fourth level</a:t>
-            </a:r>
-          </a:p>
-          <a:p>
-            <a:pPr lvl="4"/>
-            <a:r>
-              <a:rPr lang="en-US"/>
-              <a:t>Fifth level</a:t>
-            </a:r>
-          </a:p>
-        </p:txBody>
-      </p:sp>
-      <p:sp>
-        <p:nvSpPr>
-          <p:cNvPr id="6" name="Footer Placeholder 5"/>
-          <p:cNvSpPr>
-            <a:spLocks noGrp="1"/>
-          </p:cNvSpPr>
-          <p:nvPr>
-            <p:ph type="ftr" sz="quarter" idx="4"/>
-          </p:nvPr>
-        </p:nvSpPr>
-        <p:spPr>
-          <a:xfrm>
-            <a:off x="0" y="8685213"/>
-            <a:ext cx="2971800" cy="458787"/>
-          </a:xfrm>
-          <a:prstGeom prst="rect">
-            <a:avLst/>
-          </a:prstGeom>
-        </p:spPr>
-        <p:txBody>
-          <a:bodyPr vert="horz" lIns="91440" tIns="45720" rIns="91440" bIns="45720" rtlCol="0" anchor="b"/>
-          <a:lstStyle>
-            <a:lvl1pPr algn="l">
-              <a:defRPr sz="1200"/>
-            </a:lvl1pPr>
-          </a:lstStyle>
-          <a:p>
-            <a:endParaRPr lang="en-US"/>
-          </a:p>
-        </p:txBody>
-      </p:sp>
-      <p:sp>
-        <p:nvSpPr>
-          <p:cNvPr id="7" name="Slide Number Placeholder 6"/>
-          <p:cNvSpPr>
-            <a:spLocks noGrp="1"/>
-          </p:cNvSpPr>
-          <p:nvPr>
-            <p:ph type="sldNum" sz="quarter" idx="5"/>
-          </p:nvPr>
-        </p:nvSpPr>
-        <p:spPr>
-          <a:xfrm>
-            <a:off x="3884613" y="8685213"/>
-            <a:ext cx="2971800" cy="458787"/>
-          </a:xfrm>
-          <a:prstGeom prst="rect">
-            <a:avLst/>
-          </a:prstGeom>
-        </p:spPr>
-        <p:txBody>
-          <a:bodyPr vert="horz" lIns="91440" tIns="45720" rIns="91440" bIns="45720" rtlCol="0" anchor="b"/>
-          <a:lstStyle>
-            <a:lvl1pPr algn="r">
-              <a:defRPr sz="1200"/>
-            </a:lvl1pPr>
-          </a:lstStyle>
-          <a:p>
-            <a:fld id="{CE5E9CC1-C706-0F49-92D6-E571CC5EEA8F}" type="slidenum">
-              <a:rPr lang="en-US"/>
-              <a:t>‹#›</a:t>
-            </a:fld>
-            <a:endParaRPr lang="en-US"/>
-          </a:p>
-        </p:txBody>
-      </p:sp>
     </p:spTree>
     <p:extLst>
       <p:ext uri="{BB962C8B-B14F-4D97-AF65-F5344CB8AC3E}">
-        <p14:creationId xmlns:p14="http://schemas.microsoft.com/office/powerpoint/2010/main" val="1024086991"/>
+        <p14:creationId xmlns:p14="http://schemas.microsoft.com/office/powerpoint/2010/main" val="3082764684"/>
       </p:ext>
     </p:extLst>
   </p:cSld>
@@ -512,10 +293,6 @@
           <a:bodyPr/>
           <a:lstStyle/>
           <a:p>
-            <a:r>
-              <a:rPr lang="en-US" dirty="0"/>
-              <a:t/>
-            </a:r>
             <a:endParaRPr lang="en-US" dirty="0"/>
           </a:p>
         </p:txBody>
@@ -600,10 +377,6 @@
           <a:bodyPr/>
           <a:lstStyle/>
           <a:p>
-            <a:r>
-              <a:rPr lang="en-US" dirty="0"/>
-              <a:t/>
-            </a:r>
             <a:endParaRPr lang="en-US" dirty="0"/>
           </a:p>
         </p:txBody>
@@ -688,10 +461,6 @@
           <a:bodyPr/>
           <a:lstStyle/>
           <a:p>
-            <a:r>
-              <a:rPr lang="en-US" dirty="0"/>
-              <a:t/>
-            </a:r>
             <a:endParaRPr lang="en-US" dirty="0"/>
           </a:p>
         </p:txBody>
@@ -776,10 +545,6 @@
           <a:bodyPr/>
           <a:lstStyle/>
           <a:p>
-            <a:r>
-              <a:rPr lang="en-US" dirty="0"/>
-              <a:t/>
-            </a:r>
             <a:endParaRPr lang="en-US" dirty="0"/>
           </a:p>
         </p:txBody>
@@ -864,10 +629,6 @@
           <a:bodyPr/>
           <a:lstStyle/>
           <a:p>
-            <a:r>
-              <a:rPr lang="en-US" dirty="0"/>
-              <a:t/>
-            </a:r>
             <a:endParaRPr lang="en-US" dirty="0"/>
           </a:p>
         </p:txBody>
@@ -952,10 +713,6 @@
           <a:bodyPr/>
           <a:lstStyle/>
           <a:p>
-            <a:r>
-              <a:rPr lang="en-US" dirty="0"/>
-              <a:t/>
-            </a:r>
             <a:endParaRPr lang="en-US" dirty="0"/>
           </a:p>
         </p:txBody>
@@ -1040,10 +797,6 @@
           <a:bodyPr/>
           <a:lstStyle/>
           <a:p>
-            <a:r>
-              <a:rPr lang="en-US" dirty="0"/>
-              <a:t/>
-            </a:r>
             <a:endParaRPr lang="en-US" dirty="0"/>
           </a:p>
         </p:txBody>
@@ -1128,10 +881,6 @@
           <a:bodyPr/>
           <a:lstStyle/>
           <a:p>
-            <a:r>
-              <a:rPr lang="en-US" dirty="0"/>
-              <a:t/>
-            </a:r>
             <a:endParaRPr lang="en-US" dirty="0"/>
           </a:p>
         </p:txBody>
@@ -1216,10 +965,6 @@
           <a:bodyPr/>
           <a:lstStyle/>
           <a:p>
-            <a:r>
-              <a:rPr lang="en-US" dirty="0"/>
-              <a:t/>
-            </a:r>
             <a:endParaRPr lang="en-US" dirty="0"/>
           </a:p>
         </p:txBody>
@@ -1304,10 +1049,6 @@
           <a:bodyPr/>
           <a:lstStyle/>
           <a:p>
-            <a:r>
-              <a:rPr lang="en-US" dirty="0"/>
-              <a:t/>
-            </a:r>
             <a:endParaRPr lang="en-US" dirty="0"/>
           </a:p>
         </p:txBody>
@@ -1392,10 +1133,6 @@
           <a:bodyPr/>
           <a:lstStyle/>
           <a:p>
-            <a:r>
-              <a:rPr lang="en-US" dirty="0"/>
-              <a:t/>
-            </a:r>
             <a:endParaRPr lang="en-US" dirty="0"/>
           </a:p>
         </p:txBody>
@@ -1480,10 +1217,6 @@
           <a:bodyPr/>
           <a:lstStyle/>
           <a:p>
-            <a:r>
-              <a:rPr lang="en-US" dirty="0"/>
-              <a:t/>
-            </a:r>
             <a:endParaRPr lang="en-US" dirty="0"/>
           </a:p>
         </p:txBody>
@@ -1568,10 +1301,6 @@
           <a:bodyPr/>
           <a:lstStyle/>
           <a:p>
-            <a:r>
-              <a:rPr lang="en-US" dirty="0"/>
-              <a:t/>
-            </a:r>
             <a:endParaRPr lang="en-US" dirty="0"/>
           </a:p>
         </p:txBody>
@@ -1645,6 +1374,11 @@
 <file path=ppt/slideMasters/slideMaster1.xml><?xml version="1.0" encoding="utf-8"?>
 <p:sldMaster xmlns:a="http://schemas.openxmlformats.org/drawingml/2006/main" xmlns:r="http://schemas.openxmlformats.org/officeDocument/2006/relationships" xmlns:p="http://schemas.openxmlformats.org/presentationml/2006/main">
   <p:cSld>
+    <p:bg>
+      <p:bgRef idx="1001">
+        <a:schemeClr val="bg1"/>
+      </p:bgRef>
+    </p:bg>
     <p:spTree>
       <p:nvGrpSpPr>
         <p:cNvPr id="1" name=""/>
@@ -1927,6 +1661,7 @@
         <a:solidFill>
           <a:srgbClr val="0B1F3A"/>
         </a:solidFill>
+        <a:effectLst/>
       </p:bgPr>
     </p:bg>
     <p:spTree>
@@ -1945,14 +1680,14 @@
       </p:grpSpPr>
       <p:pic>
         <p:nvPicPr>
-          <p:cNvPr id="2" name="Image 0" descr="/home/user/BasicRobotLessons/docs/presentations/v3/template/assets/logo/team5010-logo-onnavy.png">    </p:cNvPr>
+          <p:cNvPr id="2" name="Image 0" descr="/home/user/BasicRobotLessons/docs/presentations/v3/template/assets/logo/team5010-logo-onnavy.png"/>
           <p:cNvPicPr>
             <a:picLocks noChangeAspect="1"/>
           </p:cNvPicPr>
           <p:nvPr/>
         </p:nvPicPr>
         <p:blipFill>
-          <a:blip r:embed="rId1"/>
+          <a:blip r:embed="rId3"/>
           <a:stretch>
             <a:fillRect/>
           </a:stretch>
@@ -1988,11 +1723,11 @@
           <a:bodyPr wrap="square" lIns="0" tIns="0" rIns="0" bIns="0" rtlCol="0" anchor="ctr"/>
           <a:lstStyle/>
           <a:p>
-            <a:pPr indent="0" marL="0">
-              <a:buNone/>
-            </a:pPr>
-            <a:r>
-              <a:rPr lang="en-US" sz="2000" b="1" spc="300" kern="0" dirty="0">
+            <a:pPr marL="0" indent="0">
+              <a:buNone/>
+            </a:pPr>
+            <a:r>
+              <a:rPr lang="en-US" sz="2000" b="1" kern="0" spc="300" dirty="0">
                 <a:solidFill>
                   <a:srgbClr val="1B9AAA"/>
                 </a:solidFill>
@@ -2027,11 +1762,11 @@
           <a:bodyPr wrap="square" lIns="0" tIns="0" rIns="0" bIns="0" rtlCol="0" anchor="ctr"/>
           <a:lstStyle/>
           <a:p>
-            <a:pPr indent="0" marL="0">
-              <a:buNone/>
-            </a:pPr>
-            <a:r>
-              <a:rPr lang="en-US" sz="2200" b="1" spc="200" kern="0" dirty="0">
+            <a:pPr marL="0" indent="0">
+              <a:buNone/>
+            </a:pPr>
+            <a:r>
+              <a:rPr lang="en-US" sz="2200" b="1" kern="0" spc="200" dirty="0">
                 <a:solidFill>
                   <a:srgbClr val="FF5010"/>
                 </a:solidFill>
@@ -2066,7 +1801,7 @@
           <a:bodyPr wrap="square" lIns="0" tIns="0" rIns="0" bIns="0" rtlCol="0" anchor="ctr"/>
           <a:lstStyle/>
           <a:p>
-            <a:pPr indent="0" marL="0">
+            <a:pPr marL="0" indent="0">
               <a:buNone/>
             </a:pPr>
             <a:r>
@@ -2092,7 +1827,7 @@
         </p:nvSpPr>
         <p:spPr>
           <a:xfrm>
-            <a:off x="777240" y="3611880"/>
+            <a:off x="777240" y="3383280"/>
             <a:ext cx="8686800" cy="640080"/>
           </a:xfrm>
           <a:prstGeom prst="rect">
@@ -2105,7 +1840,7 @@
           <a:bodyPr wrap="square" lIns="0" tIns="0" rIns="0" bIns="0" rtlCol="0" anchor="ctr"/>
           <a:lstStyle/>
           <a:p>
-            <a:pPr indent="0" marL="0">
+            <a:pPr marL="0" indent="0">
               <a:buNone/>
             </a:pPr>
             <a:r>
@@ -2144,11 +1879,11 @@
           <a:bodyPr wrap="square" lIns="0" tIns="0" rIns="0" bIns="0" rtlCol="0" anchor="ctr"/>
           <a:lstStyle/>
           <a:p>
-            <a:pPr indent="0" marL="0">
-              <a:buNone/>
-            </a:pPr>
-            <a:r>
-              <a:rPr lang="en-US" sz="2000" spc="100" kern="0" dirty="0">
+            <a:pPr marL="0" indent="0">
+              <a:buNone/>
+            </a:pPr>
+            <a:r>
+              <a:rPr lang="en-US" sz="2000" kern="0" spc="100" dirty="0">
                 <a:solidFill>
                   <a:srgbClr val="89A0BE"/>
                 </a:solidFill>
@@ -2178,6 +1913,7 @@
         <a:solidFill>
           <a:srgbClr val="FFFFFF"/>
         </a:solidFill>
+        <a:effectLst/>
       </p:bgPr>
     </p:bg>
     <p:spTree>
@@ -2213,17 +1949,24 @@
           </a:solidFill>
           <a:ln/>
         </p:spPr>
+        <p:txBody>
+          <a:bodyPr/>
+          <a:lstStyle/>
+          <a:p>
+            <a:endParaRPr lang="en-US"/>
+          </a:p>
+        </p:txBody>
       </p:sp>
       <p:pic>
         <p:nvPicPr>
-          <p:cNvPr id="3" name="Image 0" descr="/home/user/BasicRobotLessons/docs/presentations/v3/template/assets/icons/clouduploadalt_white.png">    </p:cNvPr>
+          <p:cNvPr id="3" name="Image 0" descr="/home/user/BasicRobotLessons/docs/presentations/v3/template/assets/icons/clouduploadalt_white.png"/>
           <p:cNvPicPr>
             <a:picLocks noChangeAspect="1"/>
           </p:cNvPicPr>
           <p:nvPr/>
         </p:nvPicPr>
         <p:blipFill>
-          <a:blip r:embed="rId1"/>
+          <a:blip r:embed="rId3"/>
           <a:stretch>
             <a:fillRect/>
           </a:stretch>
@@ -2259,11 +2002,11 @@
           <a:bodyPr wrap="square" lIns="0" tIns="0" rIns="0" bIns="0" rtlCol="0" anchor="ctr"/>
           <a:lstStyle/>
           <a:p>
-            <a:pPr indent="0" marL="0">
-              <a:buNone/>
-            </a:pPr>
-            <a:r>
-              <a:rPr lang="en-US" sz="2000" b="1" spc="150" kern="0" dirty="0">
+            <a:pPr marL="0" indent="0">
+              <a:buNone/>
+            </a:pPr>
+            <a:r>
+              <a:rPr lang="en-US" sz="2000" b="1" kern="0" spc="150" dirty="0">
                 <a:solidFill>
                   <a:srgbClr val="FF5010"/>
                 </a:solidFill>
@@ -2298,7 +2041,7 @@
           <a:bodyPr wrap="square" lIns="0" tIns="0" rIns="0" bIns="0" rtlCol="0" anchor="ctr"/>
           <a:lstStyle/>
           <a:p>
-            <a:pPr indent="0" marL="0">
+            <a:pPr marL="0" indent="0">
               <a:buNone/>
             </a:pPr>
             <a:r>
@@ -2337,13 +2080,20 @@
           </a:solidFill>
           <a:ln/>
           <a:effectLst>
-            <a:outerShdw sx="100000" sy="100000" kx="0" ky="0" algn="bl" rotWithShape="0" blurRad="101600" dist="38100" dir="5400000">
+            <a:outerShdw blurRad="101600" dist="38100" dir="5400000" algn="bl" rotWithShape="0">
               <a:srgbClr val="0B1F3A">
                 <a:alpha val="35000"/>
               </a:srgbClr>
             </a:outerShdw>
           </a:effectLst>
         </p:spPr>
+        <p:txBody>
+          <a:bodyPr/>
+          <a:lstStyle/>
+          <a:p>
+            <a:endParaRPr lang="en-US"/>
+          </a:p>
+        </p:txBody>
       </p:sp>
       <p:sp>
         <p:nvSpPr>
@@ -2364,6 +2114,13 @@
           </a:solidFill>
           <a:ln/>
         </p:spPr>
+        <p:txBody>
+          <a:bodyPr/>
+          <a:lstStyle/>
+          <a:p>
+            <a:endParaRPr lang="en-US"/>
+          </a:p>
+        </p:txBody>
       </p:sp>
       <p:sp>
         <p:nvSpPr>
@@ -2384,6 +2141,13 @@
           </a:solidFill>
           <a:ln/>
         </p:spPr>
+        <p:txBody>
+          <a:bodyPr/>
+          <a:lstStyle/>
+          <a:p>
+            <a:endParaRPr lang="en-US"/>
+          </a:p>
+        </p:txBody>
       </p:sp>
       <p:sp>
         <p:nvSpPr>
@@ -2404,6 +2168,13 @@
           </a:solidFill>
           <a:ln/>
         </p:spPr>
+        <p:txBody>
+          <a:bodyPr/>
+          <a:lstStyle/>
+          <a:p>
+            <a:endParaRPr lang="en-US"/>
+          </a:p>
+        </p:txBody>
       </p:sp>
       <p:sp>
         <p:nvSpPr>
@@ -2426,7 +2197,7 @@
           <a:bodyPr wrap="square" lIns="0" tIns="0" rIns="0" bIns="0" rtlCol="0" anchor="t"/>
           <a:lstStyle/>
           <a:p>
-            <a:pPr indent="0" marL="0">
+            <a:pPr marL="0" indent="0">
               <a:lnSpc>
                 <a:spcPct val="120000"/>
               </a:lnSpc>
@@ -2468,6 +2239,13 @@
           </a:solidFill>
           <a:ln/>
         </p:spPr>
+        <p:txBody>
+          <a:bodyPr/>
+          <a:lstStyle/>
+          <a:p>
+            <a:endParaRPr lang="en-US"/>
+          </a:p>
+        </p:txBody>
       </p:sp>
       <p:sp>
         <p:nvSpPr>
@@ -2490,7 +2268,7 @@
           <a:bodyPr wrap="square" lIns="0" tIns="0" rIns="0" bIns="0" rtlCol="0" anchor="t"/>
           <a:lstStyle/>
           <a:p>
-            <a:pPr indent="0" marL="0">
+            <a:pPr marL="0" indent="0">
               <a:lnSpc>
                 <a:spcPct val="120000"/>
               </a:lnSpc>
@@ -2532,7 +2310,7 @@
           <a:bodyPr wrap="square" lIns="0" tIns="0" rIns="0" bIns="0" rtlCol="0" anchor="t"/>
           <a:lstStyle/>
           <a:p>
-            <a:pPr indent="0" marL="0">
+            <a:pPr marL="0" indent="0">
               <a:lnSpc>
                 <a:spcPct val="125000"/>
               </a:lnSpc>
@@ -2574,11 +2352,11 @@
           <a:bodyPr wrap="square" lIns="0" tIns="0" rIns="0" bIns="0" rtlCol="0" anchor="ctr"/>
           <a:lstStyle/>
           <a:p>
-            <a:pPr indent="0" marL="0">
-              <a:buNone/>
-            </a:pPr>
-            <a:r>
-              <a:rPr lang="en-US" sz="2000" spc="100" kern="0" dirty="0">
+            <a:pPr marL="0" indent="0">
+              <a:buNone/>
+            </a:pPr>
+            <a:r>
+              <a:rPr lang="en-US" sz="2000" kern="0" spc="100" dirty="0">
                 <a:solidFill>
                   <a:srgbClr val="5B6B84"/>
                 </a:solidFill>
@@ -2613,7 +2391,7 @@
           <a:bodyPr wrap="square" lIns="0" tIns="0" rIns="0" bIns="0" rtlCol="0" anchor="ctr"/>
           <a:lstStyle/>
           <a:p>
-            <a:pPr algn="r" indent="0" marL="0">
+            <a:pPr marL="0" indent="0" algn="r">
               <a:buNone/>
             </a:pPr>
             <a:r>
@@ -2633,14 +2411,14 @@
       </p:sp>
       <p:pic>
         <p:nvPicPr>
-          <p:cNvPr id="16" name="Image 1" descr="/home/user/BasicRobotLessons/docs/presentations/v3/template/assets/logo/team5010-logo-onwhite.png">    </p:cNvPr>
+          <p:cNvPr id="16" name="Image 1" descr="/home/user/BasicRobotLessons/docs/presentations/v3/template/assets/logo/team5010-logo-onwhite.png"/>
           <p:cNvPicPr>
             <a:picLocks noChangeAspect="1"/>
           </p:cNvPicPr>
           <p:nvPr/>
         </p:nvPicPr>
         <p:blipFill>
-          <a:blip r:embed="rId2"/>
+          <a:blip r:embed="rId4"/>
           <a:stretch>
             <a:fillRect/>
           </a:stretch>
@@ -2671,6 +2449,7 @@
         <a:solidFill>
           <a:srgbClr val="0B1F3A"/>
         </a:solidFill>
+        <a:effectLst/>
       </p:bgPr>
     </p:bg>
     <p:spTree>
@@ -2706,17 +2485,24 @@
           </a:solidFill>
           <a:ln/>
         </p:spPr>
+        <p:txBody>
+          <a:bodyPr/>
+          <a:lstStyle/>
+          <a:p>
+            <a:endParaRPr lang="en-US"/>
+          </a:p>
+        </p:txBody>
       </p:sp>
       <p:pic>
         <p:nvPicPr>
-          <p:cNvPr id="3" name="Image 0" descr="/home/user/BasicRobotLessons/docs/presentations/v3/template/assets/icons/syncalt_white.png">    </p:cNvPr>
+          <p:cNvPr id="3" name="Image 0" descr="/home/user/BasicRobotLessons/docs/presentations/v3/template/assets/icons/syncalt_white.png"/>
           <p:cNvPicPr>
             <a:picLocks noChangeAspect="1"/>
           </p:cNvPicPr>
           <p:nvPr/>
         </p:nvPicPr>
         <p:blipFill>
-          <a:blip r:embed="rId1"/>
+          <a:blip r:embed="rId3"/>
           <a:stretch>
             <a:fillRect/>
           </a:stretch>
@@ -2752,11 +2538,11 @@
           <a:bodyPr wrap="square" lIns="0" tIns="0" rIns="0" bIns="0" rtlCol="0" anchor="ctr"/>
           <a:lstStyle/>
           <a:p>
-            <a:pPr indent="0" marL="0">
-              <a:buNone/>
-            </a:pPr>
-            <a:r>
-              <a:rPr lang="en-US" sz="2000" b="1" spc="100" kern="0" dirty="0">
+            <a:pPr marL="0" indent="0">
+              <a:buNone/>
+            </a:pPr>
+            <a:r>
+              <a:rPr lang="en-US" sz="2000" b="1" kern="0" spc="100" dirty="0">
                 <a:solidFill>
                   <a:srgbClr val="1B9AAA"/>
                 </a:solidFill>
@@ -2791,7 +2577,7 @@
           <a:bodyPr wrap="square" lIns="0" tIns="0" rIns="0" bIns="0" rtlCol="0" anchor="ctr"/>
           <a:lstStyle/>
           <a:p>
-            <a:pPr indent="0" marL="0">
+            <a:pPr marL="0" indent="0">
               <a:buNone/>
             </a:pPr>
             <a:r>
@@ -2830,13 +2616,20 @@
           </a:solidFill>
           <a:ln/>
           <a:effectLst>
-            <a:outerShdw sx="100000" sy="100000" kx="0" ky="0" algn="bl" rotWithShape="0" blurRad="101600" dist="38100" dir="5400000">
+            <a:outerShdw blurRad="101600" dist="38100" dir="5400000" algn="bl" rotWithShape="0">
               <a:srgbClr val="0B1F3A">
                 <a:alpha val="35000"/>
               </a:srgbClr>
             </a:outerShdw>
           </a:effectLst>
         </p:spPr>
+        <p:txBody>
+          <a:bodyPr/>
+          <a:lstStyle/>
+          <a:p>
+            <a:endParaRPr lang="en-US"/>
+          </a:p>
+        </p:txBody>
       </p:sp>
       <p:sp>
         <p:nvSpPr>
@@ -2857,6 +2650,13 @@
           </a:solidFill>
           <a:ln/>
         </p:spPr>
+        <p:txBody>
+          <a:bodyPr/>
+          <a:lstStyle/>
+          <a:p>
+            <a:endParaRPr lang="en-US"/>
+          </a:p>
+        </p:txBody>
       </p:sp>
       <p:sp>
         <p:nvSpPr>
@@ -2877,6 +2677,13 @@
           </a:solidFill>
           <a:ln/>
         </p:spPr>
+        <p:txBody>
+          <a:bodyPr/>
+          <a:lstStyle/>
+          <a:p>
+            <a:endParaRPr lang="en-US"/>
+          </a:p>
+        </p:txBody>
       </p:sp>
       <p:sp>
         <p:nvSpPr>
@@ -2897,6 +2704,13 @@
           </a:solidFill>
           <a:ln/>
         </p:spPr>
+        <p:txBody>
+          <a:bodyPr/>
+          <a:lstStyle/>
+          <a:p>
+            <a:endParaRPr lang="en-US"/>
+          </a:p>
+        </p:txBody>
       </p:sp>
       <p:sp>
         <p:nvSpPr>
@@ -2919,7 +2733,7 @@
           <a:bodyPr wrap="square" lIns="0" tIns="0" rIns="0" bIns="0" rtlCol="0" anchor="t"/>
           <a:lstStyle/>
           <a:p>
-            <a:pPr indent="0" marL="0">
+            <a:pPr marL="0" indent="0">
               <a:lnSpc>
                 <a:spcPct val="120000"/>
               </a:lnSpc>
@@ -2939,7 +2753,7 @@
             <a:endParaRPr lang="en-US" sz="1800" dirty="0"/>
           </a:p>
           <a:p>
-            <a:pPr indent="0" marL="0">
+            <a:pPr marL="0" indent="0">
               <a:lnSpc>
                 <a:spcPct val="120000"/>
               </a:lnSpc>
@@ -2959,7 +2773,7 @@
             <a:endParaRPr lang="en-US" sz="1800" dirty="0"/>
           </a:p>
           <a:p>
-            <a:pPr indent="0" marL="0">
+            <a:pPr marL="0" indent="0">
               <a:lnSpc>
                 <a:spcPct val="120000"/>
               </a:lnSpc>
@@ -2979,7 +2793,7 @@
             <a:endParaRPr lang="en-US" sz="1800" dirty="0"/>
           </a:p>
           <a:p>
-            <a:pPr indent="0" marL="0">
+            <a:pPr marL="0" indent="0">
               <a:lnSpc>
                 <a:spcPct val="120000"/>
               </a:lnSpc>
@@ -2999,7 +2813,7 @@
             <a:endParaRPr lang="en-US" sz="1800" dirty="0"/>
           </a:p>
           <a:p>
-            <a:pPr indent="0" marL="0">
+            <a:pPr marL="0" indent="0">
               <a:lnSpc>
                 <a:spcPct val="120000"/>
               </a:lnSpc>
@@ -3008,7 +2822,7 @@
             <a:endParaRPr lang="en-US" sz="1800" dirty="0"/>
           </a:p>
           <a:p>
-            <a:pPr indent="0" marL="0">
+            <a:pPr marL="0" indent="0">
               <a:lnSpc>
                 <a:spcPct val="120000"/>
               </a:lnSpc>
@@ -3050,6 +2864,13 @@
           </a:solidFill>
           <a:ln/>
         </p:spPr>
+        <p:txBody>
+          <a:bodyPr/>
+          <a:lstStyle/>
+          <a:p>
+            <a:endParaRPr lang="en-US"/>
+          </a:p>
+        </p:txBody>
       </p:sp>
       <p:sp>
         <p:nvSpPr>
@@ -3072,7 +2893,7 @@
           <a:bodyPr wrap="square" lIns="0" tIns="0" rIns="0" bIns="0" rtlCol="0" anchor="t"/>
           <a:lstStyle/>
           <a:p>
-            <a:pPr indent="0" marL="0">
+            <a:pPr marL="0" indent="0">
               <a:lnSpc>
                 <a:spcPct val="115000"/>
               </a:lnSpc>
@@ -3114,7 +2935,7 @@
           <a:bodyPr wrap="square" lIns="0" tIns="0" rIns="0" bIns="0" rtlCol="0" anchor="t"/>
           <a:lstStyle/>
           <a:p>
-            <a:pPr indent="0" marL="0">
+            <a:pPr marL="0" indent="0">
               <a:lnSpc>
                 <a:spcPct val="125000"/>
               </a:lnSpc>
@@ -3156,6 +2977,13 @@
           </a:solidFill>
           <a:ln/>
         </p:spPr>
+        <p:txBody>
+          <a:bodyPr/>
+          <a:lstStyle/>
+          <a:p>
+            <a:endParaRPr lang="en-US"/>
+          </a:p>
+        </p:txBody>
       </p:sp>
       <p:sp>
         <p:nvSpPr>
@@ -3178,7 +3006,7 @@
           <a:bodyPr wrap="square" lIns="0" tIns="0" rIns="0" bIns="0" rtlCol="0" anchor="ctr"/>
           <a:lstStyle/>
           <a:p>
-            <a:pPr indent="0" marL="0">
+            <a:pPr marL="0" indent="0">
               <a:lnSpc>
                 <a:spcPct val="125000"/>
               </a:lnSpc>
@@ -3220,11 +3048,11 @@
           <a:bodyPr wrap="square" lIns="0" tIns="0" rIns="0" bIns="0" rtlCol="0" anchor="ctr"/>
           <a:lstStyle/>
           <a:p>
-            <a:pPr indent="0" marL="0">
-              <a:buNone/>
-            </a:pPr>
-            <a:r>
-              <a:rPr lang="en-US" sz="2000" spc="100" kern="0" dirty="0">
+            <a:pPr marL="0" indent="0">
+              <a:buNone/>
+            </a:pPr>
+            <a:r>
+              <a:rPr lang="en-US" sz="2000" kern="0" spc="100" dirty="0">
                 <a:solidFill>
                   <a:srgbClr val="7A93B8"/>
                 </a:solidFill>
@@ -3259,7 +3087,7 @@
           <a:bodyPr wrap="square" lIns="0" tIns="0" rIns="0" bIns="0" rtlCol="0" anchor="ctr"/>
           <a:lstStyle/>
           <a:p>
-            <a:pPr algn="r" indent="0" marL="0">
+            <a:pPr marL="0" indent="0" algn="r">
               <a:buNone/>
             </a:pPr>
             <a:r>
@@ -3279,14 +3107,14 @@
       </p:sp>
       <p:pic>
         <p:nvPicPr>
-          <p:cNvPr id="18" name="Image 1" descr="/home/user/BasicRobotLessons/docs/presentations/v3/template/assets/logo/team5010-logo-onnavy.png">    </p:cNvPr>
+          <p:cNvPr id="18" name="Image 1" descr="/home/user/BasicRobotLessons/docs/presentations/v3/template/assets/logo/team5010-logo-onnavy.png"/>
           <p:cNvPicPr>
             <a:picLocks noChangeAspect="1"/>
           </p:cNvPicPr>
           <p:nvPr/>
         </p:nvPicPr>
         <p:blipFill>
-          <a:blip r:embed="rId2"/>
+          <a:blip r:embed="rId4"/>
           <a:stretch>
             <a:fillRect/>
           </a:stretch>
@@ -3317,6 +3145,7 @@
         <a:solidFill>
           <a:srgbClr val="0B1F3A"/>
         </a:solidFill>
+        <a:effectLst/>
       </p:bgPr>
     </p:bg>
     <p:spTree>
@@ -3352,17 +3181,24 @@
           </a:solidFill>
           <a:ln/>
         </p:spPr>
+        <p:txBody>
+          <a:bodyPr/>
+          <a:lstStyle/>
+          <a:p>
+            <a:endParaRPr lang="en-US"/>
+          </a:p>
+        </p:txBody>
       </p:sp>
       <p:pic>
         <p:nvPicPr>
-          <p:cNvPr id="3" name="Image 0" descr="/home/user/BasicRobotLessons/docs/presentations/v3/template/assets/icons/clipboardcheck_white.png">    </p:cNvPr>
+          <p:cNvPr id="3" name="Image 0" descr="/home/user/BasicRobotLessons/docs/presentations/v3/template/assets/icons/clipboardcheck_white.png"/>
           <p:cNvPicPr>
             <a:picLocks noChangeAspect="1"/>
           </p:cNvPicPr>
           <p:nvPr/>
         </p:nvPicPr>
         <p:blipFill>
-          <a:blip r:embed="rId1"/>
+          <a:blip r:embed="rId3"/>
           <a:stretch>
             <a:fillRect/>
           </a:stretch>
@@ -3398,11 +3234,11 @@
           <a:bodyPr wrap="square" lIns="0" tIns="0" rIns="0" bIns="0" rtlCol="0" anchor="ctr"/>
           <a:lstStyle/>
           <a:p>
-            <a:pPr indent="0" marL="0">
-              <a:buNone/>
-            </a:pPr>
-            <a:r>
-              <a:rPr lang="en-US" sz="2000" b="1" spc="100" kern="0" dirty="0">
+            <a:pPr marL="0" indent="0">
+              <a:buNone/>
+            </a:pPr>
+            <a:r>
+              <a:rPr lang="en-US" sz="2000" b="1" kern="0" spc="100" dirty="0">
                 <a:solidFill>
                   <a:srgbClr val="1B9AAA"/>
                 </a:solidFill>
@@ -3437,7 +3273,7 @@
           <a:bodyPr wrap="square" lIns="0" tIns="0" rIns="0" bIns="0" rtlCol="0" anchor="ctr"/>
           <a:lstStyle/>
           <a:p>
-            <a:pPr indent="0" marL="0">
+            <a:pPr marL="0" indent="0">
               <a:buNone/>
             </a:pPr>
             <a:r>
@@ -3476,6 +3312,13 @@
           </a:solidFill>
           <a:ln/>
         </p:spPr>
+        <p:txBody>
+          <a:bodyPr/>
+          <a:lstStyle/>
+          <a:p>
+            <a:endParaRPr lang="en-US"/>
+          </a:p>
+        </p:txBody>
       </p:sp>
       <p:sp>
         <p:nvSpPr>
@@ -3496,6 +3339,13 @@
           </a:solidFill>
           <a:ln/>
         </p:spPr>
+        <p:txBody>
+          <a:bodyPr/>
+          <a:lstStyle/>
+          <a:p>
+            <a:endParaRPr lang="en-US"/>
+          </a:p>
+        </p:txBody>
       </p:sp>
       <p:sp>
         <p:nvSpPr>
@@ -3518,7 +3368,7 @@
           <a:bodyPr wrap="square" lIns="0" tIns="0" rIns="0" bIns="0" rtlCol="0" anchor="ctr"/>
           <a:lstStyle/>
           <a:p>
-            <a:pPr algn="ctr" indent="0" marL="0">
+            <a:pPr marL="0" indent="0" algn="ctr">
               <a:buNone/>
             </a:pPr>
             <a:r>
@@ -3557,7 +3407,7 @@
           <a:bodyPr wrap="square" lIns="0" tIns="0" rIns="0" bIns="0" rtlCol="0" anchor="ctr"/>
           <a:lstStyle/>
           <a:p>
-            <a:pPr indent="0" marL="0">
+            <a:pPr marL="0" indent="0">
               <a:lnSpc>
                 <a:spcPct val="110000"/>
               </a:lnSpc>
@@ -3599,7 +3449,7 @@
           <a:bodyPr wrap="square" lIns="0" tIns="0" rIns="0" bIns="0" rtlCol="0" anchor="t"/>
           <a:lstStyle/>
           <a:p>
-            <a:pPr indent="0" marL="0">
+            <a:pPr marL="0" indent="0">
               <a:lnSpc>
                 <a:spcPct val="125000"/>
               </a:lnSpc>
@@ -3641,6 +3491,13 @@
           </a:solidFill>
           <a:ln/>
         </p:spPr>
+        <p:txBody>
+          <a:bodyPr/>
+          <a:lstStyle/>
+          <a:p>
+            <a:endParaRPr lang="en-US"/>
+          </a:p>
+        </p:txBody>
       </p:sp>
       <p:sp>
         <p:nvSpPr>
@@ -3661,6 +3518,13 @@
           </a:solidFill>
           <a:ln/>
         </p:spPr>
+        <p:txBody>
+          <a:bodyPr/>
+          <a:lstStyle/>
+          <a:p>
+            <a:endParaRPr lang="en-US"/>
+          </a:p>
+        </p:txBody>
       </p:sp>
       <p:sp>
         <p:nvSpPr>
@@ -3683,7 +3547,7 @@
           <a:bodyPr wrap="square" lIns="0" tIns="0" rIns="0" bIns="0" rtlCol="0" anchor="ctr"/>
           <a:lstStyle/>
           <a:p>
-            <a:pPr algn="ctr" indent="0" marL="0">
+            <a:pPr marL="0" indent="0" algn="ctr">
               <a:buNone/>
             </a:pPr>
             <a:r>
@@ -3722,7 +3586,7 @@
           <a:bodyPr wrap="square" lIns="0" tIns="0" rIns="0" bIns="0" rtlCol="0" anchor="ctr"/>
           <a:lstStyle/>
           <a:p>
-            <a:pPr indent="0" marL="0">
+            <a:pPr marL="0" indent="0">
               <a:lnSpc>
                 <a:spcPct val="110000"/>
               </a:lnSpc>
@@ -3764,7 +3628,7 @@
           <a:bodyPr wrap="square" lIns="0" tIns="0" rIns="0" bIns="0" rtlCol="0" anchor="t"/>
           <a:lstStyle/>
           <a:p>
-            <a:pPr indent="0" marL="0">
+            <a:pPr marL="0" indent="0">
               <a:lnSpc>
                 <a:spcPct val="125000"/>
               </a:lnSpc>
@@ -3806,6 +3670,13 @@
           </a:solidFill>
           <a:ln/>
         </p:spPr>
+        <p:txBody>
+          <a:bodyPr/>
+          <a:lstStyle/>
+          <a:p>
+            <a:endParaRPr lang="en-US"/>
+          </a:p>
+        </p:txBody>
       </p:sp>
       <p:sp>
         <p:nvSpPr>
@@ -3826,6 +3697,13 @@
           </a:solidFill>
           <a:ln/>
         </p:spPr>
+        <p:txBody>
+          <a:bodyPr/>
+          <a:lstStyle/>
+          <a:p>
+            <a:endParaRPr lang="en-US"/>
+          </a:p>
+        </p:txBody>
       </p:sp>
       <p:sp>
         <p:nvSpPr>
@@ -3848,7 +3726,7 @@
           <a:bodyPr wrap="square" lIns="0" tIns="0" rIns="0" bIns="0" rtlCol="0" anchor="ctr"/>
           <a:lstStyle/>
           <a:p>
-            <a:pPr algn="ctr" indent="0" marL="0">
+            <a:pPr marL="0" indent="0" algn="ctr">
               <a:buNone/>
             </a:pPr>
             <a:r>
@@ -3887,7 +3765,7 @@
           <a:bodyPr wrap="square" lIns="0" tIns="0" rIns="0" bIns="0" rtlCol="0" anchor="ctr"/>
           <a:lstStyle/>
           <a:p>
-            <a:pPr indent="0" marL="0">
+            <a:pPr marL="0" indent="0">
               <a:lnSpc>
                 <a:spcPct val="110000"/>
               </a:lnSpc>
@@ -3929,7 +3807,7 @@
           <a:bodyPr wrap="square" lIns="0" tIns="0" rIns="0" bIns="0" rtlCol="0" anchor="t"/>
           <a:lstStyle/>
           <a:p>
-            <a:pPr indent="0" marL="0">
+            <a:pPr marL="0" indent="0">
               <a:lnSpc>
                 <a:spcPct val="125000"/>
               </a:lnSpc>
@@ -3971,6 +3849,13 @@
           </a:solidFill>
           <a:ln/>
         </p:spPr>
+        <p:txBody>
+          <a:bodyPr/>
+          <a:lstStyle/>
+          <a:p>
+            <a:endParaRPr lang="en-US"/>
+          </a:p>
+        </p:txBody>
       </p:sp>
       <p:sp>
         <p:nvSpPr>
@@ -3991,6 +3876,13 @@
           </a:solidFill>
           <a:ln/>
         </p:spPr>
+        <p:txBody>
+          <a:bodyPr/>
+          <a:lstStyle/>
+          <a:p>
+            <a:endParaRPr lang="en-US"/>
+          </a:p>
+        </p:txBody>
       </p:sp>
       <p:sp>
         <p:nvSpPr>
@@ -4013,7 +3905,7 @@
           <a:bodyPr wrap="square" lIns="0" tIns="0" rIns="0" bIns="0" rtlCol="0" anchor="ctr"/>
           <a:lstStyle/>
           <a:p>
-            <a:pPr algn="ctr" indent="0" marL="0">
+            <a:pPr marL="0" indent="0" algn="ctr">
               <a:buNone/>
             </a:pPr>
             <a:r>
@@ -4052,7 +3944,7 @@
           <a:bodyPr wrap="square" lIns="0" tIns="0" rIns="0" bIns="0" rtlCol="0" anchor="ctr"/>
           <a:lstStyle/>
           <a:p>
-            <a:pPr indent="0" marL="0">
+            <a:pPr marL="0" indent="0">
               <a:lnSpc>
                 <a:spcPct val="110000"/>
               </a:lnSpc>
@@ -4094,7 +3986,7 @@
           <a:bodyPr wrap="square" lIns="0" tIns="0" rIns="0" bIns="0" rtlCol="0" anchor="t"/>
           <a:lstStyle/>
           <a:p>
-            <a:pPr indent="0" marL="0">
+            <a:pPr marL="0" indent="0">
               <a:lnSpc>
                 <a:spcPct val="125000"/>
               </a:lnSpc>
@@ -4136,11 +4028,11 @@
           <a:bodyPr wrap="square" lIns="0" tIns="0" rIns="0" bIns="0" rtlCol="0" anchor="ctr"/>
           <a:lstStyle/>
           <a:p>
-            <a:pPr indent="0" marL="0">
-              <a:buNone/>
-            </a:pPr>
-            <a:r>
-              <a:rPr lang="en-US" sz="2000" spc="100" kern="0" dirty="0">
+            <a:pPr marL="0" indent="0">
+              <a:buNone/>
+            </a:pPr>
+            <a:r>
+              <a:rPr lang="en-US" sz="2000" kern="0" spc="100" dirty="0">
                 <a:solidFill>
                   <a:srgbClr val="7A93B8"/>
                 </a:solidFill>
@@ -4175,7 +4067,7 @@
           <a:bodyPr wrap="square" lIns="0" tIns="0" rIns="0" bIns="0" rtlCol="0" anchor="ctr"/>
           <a:lstStyle/>
           <a:p>
-            <a:pPr algn="r" indent="0" marL="0">
+            <a:pPr marL="0" indent="0" algn="r">
               <a:buNone/>
             </a:pPr>
             <a:r>
@@ -4195,14 +4087,14 @@
       </p:sp>
       <p:pic>
         <p:nvPicPr>
-          <p:cNvPr id="28" name="Image 1" descr="/home/user/BasicRobotLessons/docs/presentations/v3/template/assets/logo/team5010-logo-onnavy.png">    </p:cNvPr>
+          <p:cNvPr id="28" name="Image 1" descr="/home/user/BasicRobotLessons/docs/presentations/v3/template/assets/logo/team5010-logo-onnavy.png"/>
           <p:cNvPicPr>
             <a:picLocks noChangeAspect="1"/>
           </p:cNvPicPr>
           <p:nvPr/>
         </p:nvPicPr>
         <p:blipFill>
-          <a:blip r:embed="rId2"/>
+          <a:blip r:embed="rId4"/>
           <a:stretch>
             <a:fillRect/>
           </a:stretch>
@@ -4233,6 +4125,7 @@
         <a:solidFill>
           <a:srgbClr val="FFFFFF"/>
         </a:solidFill>
+        <a:effectLst/>
       </p:bgPr>
     </p:bg>
     <p:spTree>
@@ -4268,17 +4161,24 @@
           </a:solidFill>
           <a:ln/>
         </p:spPr>
+        <p:txBody>
+          <a:bodyPr/>
+          <a:lstStyle/>
+          <a:p>
+            <a:endParaRPr lang="en-US"/>
+          </a:p>
+        </p:txBody>
       </p:sp>
       <p:pic>
         <p:nvPicPr>
-          <p:cNvPr id="3" name="Image 0" descr="/home/user/BasicRobotLessons/docs/presentations/v3/template/assets/icons/graduationcap_white.png">    </p:cNvPr>
+          <p:cNvPr id="3" name="Image 0" descr="/home/user/BasicRobotLessons/docs/presentations/v3/template/assets/icons/graduationcap_white.png"/>
           <p:cNvPicPr>
             <a:picLocks noChangeAspect="1"/>
           </p:cNvPicPr>
           <p:nvPr/>
         </p:nvPicPr>
         <p:blipFill>
-          <a:blip r:embed="rId1"/>
+          <a:blip r:embed="rId3"/>
           <a:stretch>
             <a:fillRect/>
           </a:stretch>
@@ -4314,11 +4214,11 @@
           <a:bodyPr wrap="square" lIns="0" tIns="0" rIns="0" bIns="0" rtlCol="0" anchor="ctr"/>
           <a:lstStyle/>
           <a:p>
-            <a:pPr indent="0" marL="0">
-              <a:buNone/>
-            </a:pPr>
-            <a:r>
-              <a:rPr lang="en-US" sz="2000" b="1" spc="150" kern="0" dirty="0">
+            <a:pPr marL="0" indent="0">
+              <a:buNone/>
+            </a:pPr>
+            <a:r>
+              <a:rPr lang="en-US" sz="2000" b="1" kern="0" spc="150" dirty="0">
                 <a:solidFill>
                   <a:srgbClr val="FF5010"/>
                 </a:solidFill>
@@ -4353,7 +4253,7 @@
           <a:bodyPr wrap="square" lIns="0" tIns="0" rIns="0" bIns="0" rtlCol="0" anchor="ctr"/>
           <a:lstStyle/>
           <a:p>
-            <a:pPr indent="0" marL="0">
+            <a:pPr marL="0" indent="0">
               <a:buNone/>
             </a:pPr>
             <a:r>
@@ -4486,7 +4386,7 @@
           <a:bodyPr wrap="square" lIns="0" tIns="0" rIns="0" bIns="0" rtlCol="0" anchor="t"/>
           <a:lstStyle/>
           <a:p>
-            <a:pPr indent="0" marL="0">
+            <a:pPr marL="0" indent="0">
               <a:lnSpc>
                 <a:spcPct val="125000"/>
               </a:lnSpc>
@@ -4528,6 +4428,13 @@
           </a:solidFill>
           <a:ln/>
         </p:spPr>
+        <p:txBody>
+          <a:bodyPr/>
+          <a:lstStyle/>
+          <a:p>
+            <a:endParaRPr lang="en-US"/>
+          </a:p>
+        </p:txBody>
       </p:sp>
       <p:sp>
         <p:nvSpPr>
@@ -4550,11 +4457,11 @@
           <a:bodyPr wrap="square" lIns="0" tIns="0" rIns="0" bIns="0" rtlCol="0" anchor="ctr"/>
           <a:lstStyle/>
           <a:p>
-            <a:pPr indent="0" marL="0">
-              <a:buNone/>
-            </a:pPr>
-            <a:r>
-              <a:rPr lang="en-US" sz="2000" b="1" spc="120" kern="0" dirty="0">
+            <a:pPr marL="0" indent="0">
+              <a:buNone/>
+            </a:pPr>
+            <a:r>
+              <a:rPr lang="en-US" sz="2000" b="1" kern="0" spc="120" dirty="0">
                 <a:solidFill>
                   <a:srgbClr val="1B9AAA"/>
                 </a:solidFill>
@@ -4589,7 +4496,7 @@
           <a:bodyPr wrap="square" lIns="0" tIns="0" rIns="0" bIns="0" rtlCol="0" anchor="ctr"/>
           <a:lstStyle/>
           <a:p>
-            <a:pPr indent="0" marL="0">
+            <a:pPr marL="0" indent="0">
               <a:buNone/>
             </a:pPr>
             <a:r>
@@ -4628,7 +4535,7 @@
           <a:bodyPr wrap="square" lIns="0" tIns="0" rIns="0" bIns="0" rtlCol="0" anchor="ctr"/>
           <a:lstStyle/>
           <a:p>
-            <a:pPr indent="0" marL="0">
+            <a:pPr marL="0" indent="0">
               <a:buNone/>
             </a:pPr>
             <a:r>
@@ -4667,7 +4574,7 @@
           <a:bodyPr wrap="square" lIns="0" tIns="0" rIns="0" bIns="0" rtlCol="0" anchor="t"/>
           <a:lstStyle/>
           <a:p>
-            <a:pPr indent="0" marL="0">
+            <a:pPr marL="0" indent="0">
               <a:lnSpc>
                 <a:spcPct val="130000"/>
               </a:lnSpc>
@@ -4707,17 +4614,24 @@
           </a:solidFill>
           <a:ln/>
         </p:spPr>
+        <p:txBody>
+          <a:bodyPr/>
+          <a:lstStyle/>
+          <a:p>
+            <a:endParaRPr lang="en-US"/>
+          </a:p>
+        </p:txBody>
       </p:sp>
       <p:pic>
         <p:nvPicPr>
-          <p:cNvPr id="14" name="Image 1" descr="/home/user/BasicRobotLessons/docs/presentations/v3/template/assets/icons/arrowright_white.png">    </p:cNvPr>
+          <p:cNvPr id="14" name="Image 1" descr="/home/user/BasicRobotLessons/docs/presentations/v3/template/assets/icons/arrowright_white.png"/>
           <p:cNvPicPr>
             <a:picLocks noChangeAspect="1"/>
           </p:cNvPicPr>
           <p:nvPr/>
         </p:nvPicPr>
         <p:blipFill>
-          <a:blip r:embed="rId2"/>
+          <a:blip r:embed="rId4"/>
           <a:stretch>
             <a:fillRect/>
           </a:stretch>
@@ -4753,11 +4667,11 @@
           <a:bodyPr wrap="square" lIns="0" tIns="0" rIns="0" bIns="0" rtlCol="0" anchor="ctr"/>
           <a:lstStyle/>
           <a:p>
-            <a:pPr indent="0" marL="0">
-              <a:buNone/>
-            </a:pPr>
-            <a:r>
-              <a:rPr lang="en-US" sz="2000" spc="100" kern="0" dirty="0">
+            <a:pPr marL="0" indent="0">
+              <a:buNone/>
+            </a:pPr>
+            <a:r>
+              <a:rPr lang="en-US" sz="2000" kern="0" spc="100" dirty="0">
                 <a:solidFill>
                   <a:srgbClr val="5B6B84"/>
                 </a:solidFill>
@@ -4792,7 +4706,7 @@
           <a:bodyPr wrap="square" lIns="0" tIns="0" rIns="0" bIns="0" rtlCol="0" anchor="ctr"/>
           <a:lstStyle/>
           <a:p>
-            <a:pPr algn="r" indent="0" marL="0">
+            <a:pPr marL="0" indent="0" algn="r">
               <a:buNone/>
             </a:pPr>
             <a:r>
@@ -4812,14 +4726,14 @@
       </p:sp>
       <p:pic>
         <p:nvPicPr>
-          <p:cNvPr id="17" name="Image 2" descr="/home/user/BasicRobotLessons/docs/presentations/v3/template/assets/logo/team5010-logo-onwhite.png">    </p:cNvPr>
+          <p:cNvPr id="17" name="Image 2" descr="/home/user/BasicRobotLessons/docs/presentations/v3/template/assets/logo/team5010-logo-onwhite.png"/>
           <p:cNvPicPr>
             <a:picLocks noChangeAspect="1"/>
           </p:cNvPicPr>
           <p:nvPr/>
         </p:nvPicPr>
         <p:blipFill>
-          <a:blip r:embed="rId3"/>
+          <a:blip r:embed="rId5"/>
           <a:stretch>
             <a:fillRect/>
           </a:stretch>
@@ -4850,6 +4764,7 @@
         <a:solidFill>
           <a:srgbClr val="FFFFFF"/>
         </a:solidFill>
+        <a:effectLst/>
       </p:bgPr>
     </p:bg>
     <p:spTree>
@@ -4885,17 +4800,24 @@
           </a:solidFill>
           <a:ln/>
         </p:spPr>
+        <p:txBody>
+          <a:bodyPr/>
+          <a:lstStyle/>
+          <a:p>
+            <a:endParaRPr lang="en-US"/>
+          </a:p>
+        </p:txBody>
       </p:sp>
       <p:pic>
         <p:nvPicPr>
-          <p:cNvPr id="3" name="Image 0" descr="/home/user/BasicRobotLessons/docs/presentations/v3/template/assets/icons/bullseye_white.png">    </p:cNvPr>
+          <p:cNvPr id="3" name="Image 0" descr="/home/user/BasicRobotLessons/docs/presentations/v3/template/assets/icons/bullseye_white.png"/>
           <p:cNvPicPr>
             <a:picLocks noChangeAspect="1"/>
           </p:cNvPicPr>
           <p:nvPr/>
         </p:nvPicPr>
         <p:blipFill>
-          <a:blip r:embed="rId1"/>
+          <a:blip r:embed="rId3"/>
           <a:stretch>
             <a:fillRect/>
           </a:stretch>
@@ -4931,11 +4853,11 @@
           <a:bodyPr wrap="square" lIns="0" tIns="0" rIns="0" bIns="0" rtlCol="0" anchor="ctr"/>
           <a:lstStyle/>
           <a:p>
-            <a:pPr indent="0" marL="0">
-              <a:buNone/>
-            </a:pPr>
-            <a:r>
-              <a:rPr lang="en-US" sz="2000" b="1" spc="150" kern="0" dirty="0">
+            <a:pPr marL="0" indent="0">
+              <a:buNone/>
+            </a:pPr>
+            <a:r>
+              <a:rPr lang="en-US" sz="2000" b="1" kern="0" spc="150" dirty="0">
                 <a:solidFill>
                   <a:srgbClr val="FF5010"/>
                 </a:solidFill>
@@ -4970,7 +4892,7 @@
           <a:bodyPr wrap="square" lIns="0" tIns="0" rIns="0" bIns="0" rtlCol="0" anchor="ctr"/>
           <a:lstStyle/>
           <a:p>
-            <a:pPr indent="0" marL="0">
+            <a:pPr marL="0" indent="0">
               <a:buNone/>
             </a:pPr>
             <a:r>
@@ -5009,6 +4931,13 @@
           </a:solidFill>
           <a:ln/>
         </p:spPr>
+        <p:txBody>
+          <a:bodyPr/>
+          <a:lstStyle/>
+          <a:p>
+            <a:endParaRPr lang="en-US"/>
+          </a:p>
+        </p:txBody>
       </p:sp>
       <p:sp>
         <p:nvSpPr>
@@ -5031,7 +4960,7 @@
           <a:bodyPr wrap="square" lIns="0" tIns="0" rIns="0" bIns="0" rtlCol="0" anchor="ctr"/>
           <a:lstStyle/>
           <a:p>
-            <a:pPr indent="0" marL="0">
+            <a:pPr marL="0" indent="0">
               <a:lnSpc>
                 <a:spcPct val="125000"/>
               </a:lnSpc>
@@ -5071,17 +5000,24 @@
           </a:solidFill>
           <a:ln/>
         </p:spPr>
+        <p:txBody>
+          <a:bodyPr/>
+          <a:lstStyle/>
+          <a:p>
+            <a:endParaRPr lang="en-US"/>
+          </a:p>
+        </p:txBody>
       </p:sp>
       <p:pic>
         <p:nvPicPr>
-          <p:cNvPr id="9" name="Image 1" descr="/home/user/BasicRobotLessons/docs/presentations/v3/template/assets/icons/terminal_white.png">    </p:cNvPr>
+          <p:cNvPr id="9" name="Image 1" descr="/home/user/BasicRobotLessons/docs/presentations/v3/template/assets/icons/terminal_white.png"/>
           <p:cNvPicPr>
             <a:picLocks noChangeAspect="1"/>
           </p:cNvPicPr>
           <p:nvPr/>
         </p:nvPicPr>
         <p:blipFill>
-          <a:blip r:embed="rId2"/>
+          <a:blip r:embed="rId4"/>
           <a:stretch>
             <a:fillRect/>
           </a:stretch>
@@ -5117,11 +5053,11 @@
           <a:bodyPr wrap="square" lIns="0" tIns="0" rIns="0" bIns="0" rtlCol="0" anchor="ctr"/>
           <a:lstStyle/>
           <a:p>
-            <a:pPr indent="0" marL="0">
-              <a:buNone/>
-            </a:pPr>
-            <a:r>
-              <a:rPr lang="en-US" sz="2000" b="1" spc="50" kern="0" dirty="0">
+            <a:pPr marL="0" indent="0">
+              <a:buNone/>
+            </a:pPr>
+            <a:r>
+              <a:rPr lang="en-US" sz="2000" b="1" kern="0" spc="50" dirty="0">
                 <a:solidFill>
                   <a:srgbClr val="13294B"/>
                 </a:solidFill>
@@ -5248,17 +5184,24 @@
           </a:solidFill>
           <a:ln/>
         </p:spPr>
+        <p:txBody>
+          <a:bodyPr/>
+          <a:lstStyle/>
+          <a:p>
+            <a:endParaRPr lang="en-US"/>
+          </a:p>
+        </p:txBody>
       </p:sp>
       <p:pic>
         <p:nvPicPr>
-          <p:cNvPr id="13" name="Image 2" descr="/home/user/BasicRobotLessons/docs/presentations/v3/template/assets/icons/github_white.png">    </p:cNvPr>
+          <p:cNvPr id="13" name="Image 2" descr="/home/user/BasicRobotLessons/docs/presentations/v3/template/assets/icons/github_white.png"/>
           <p:cNvPicPr>
             <a:picLocks noChangeAspect="1"/>
           </p:cNvPicPr>
           <p:nvPr/>
         </p:nvPicPr>
         <p:blipFill>
-          <a:blip r:embed="rId3"/>
+          <a:blip r:embed="rId5"/>
           <a:stretch>
             <a:fillRect/>
           </a:stretch>
@@ -5294,11 +5237,11 @@
           <a:bodyPr wrap="square" lIns="0" tIns="0" rIns="0" bIns="0" rtlCol="0" anchor="ctr"/>
           <a:lstStyle/>
           <a:p>
-            <a:pPr indent="0" marL="0">
-              <a:buNone/>
-            </a:pPr>
-            <a:r>
-              <a:rPr lang="en-US" sz="2000" b="1" spc="50" kern="0" dirty="0">
+            <a:pPr marL="0" indent="0">
+              <a:buNone/>
+            </a:pPr>
+            <a:r>
+              <a:rPr lang="en-US" sz="2000" b="1" kern="0" spc="50" dirty="0">
                 <a:solidFill>
                   <a:srgbClr val="13294B"/>
                 </a:solidFill>
@@ -5427,11 +5370,11 @@
           <a:bodyPr wrap="square" lIns="0" tIns="0" rIns="0" bIns="0" rtlCol="0" anchor="ctr"/>
           <a:lstStyle/>
           <a:p>
-            <a:pPr indent="0" marL="0">
-              <a:buNone/>
-            </a:pPr>
-            <a:r>
-              <a:rPr lang="en-US" sz="2000" spc="100" kern="0" dirty="0">
+            <a:pPr marL="0" indent="0">
+              <a:buNone/>
+            </a:pPr>
+            <a:r>
+              <a:rPr lang="en-US" sz="2000" kern="0" spc="100" dirty="0">
                 <a:solidFill>
                   <a:srgbClr val="5B6B84"/>
                 </a:solidFill>
@@ -5466,7 +5409,7 @@
           <a:bodyPr wrap="square" lIns="0" tIns="0" rIns="0" bIns="0" rtlCol="0" anchor="ctr"/>
           <a:lstStyle/>
           <a:p>
-            <a:pPr algn="r" indent="0" marL="0">
+            <a:pPr marL="0" indent="0" algn="r">
               <a:buNone/>
             </a:pPr>
             <a:r>
@@ -5486,14 +5429,14 @@
       </p:sp>
       <p:pic>
         <p:nvPicPr>
-          <p:cNvPr id="18" name="Image 3" descr="/home/user/BasicRobotLessons/docs/presentations/v3/template/assets/logo/team5010-logo-onwhite.png">    </p:cNvPr>
+          <p:cNvPr id="18" name="Image 3" descr="/home/user/BasicRobotLessons/docs/presentations/v3/template/assets/logo/team5010-logo-onwhite.png"/>
           <p:cNvPicPr>
             <a:picLocks noChangeAspect="1"/>
           </p:cNvPicPr>
           <p:nvPr/>
         </p:nvPicPr>
         <p:blipFill>
-          <a:blip r:embed="rId4"/>
+          <a:blip r:embed="rId6"/>
           <a:stretch>
             <a:fillRect/>
           </a:stretch>
@@ -5524,6 +5467,7 @@
         <a:solidFill>
           <a:srgbClr val="FFFFFF"/>
         </a:solidFill>
+        <a:effectLst/>
       </p:bgPr>
     </p:bg>
     <p:spTree>
@@ -5559,17 +5503,24 @@
           </a:solidFill>
           <a:ln/>
         </p:spPr>
+        <p:txBody>
+          <a:bodyPr/>
+          <a:lstStyle/>
+          <a:p>
+            <a:endParaRPr lang="en-US"/>
+          </a:p>
+        </p:txBody>
       </p:sp>
       <p:pic>
         <p:nvPicPr>
-          <p:cNvPr id="3" name="Image 0" descr="/home/user/BasicRobotLessons/docs/presentations/v3/template/assets/icons/code_white.png">    </p:cNvPr>
+          <p:cNvPr id="3" name="Image 0" descr="/home/user/BasicRobotLessons/docs/presentations/v3/template/assets/icons/code_white.png"/>
           <p:cNvPicPr>
             <a:picLocks noChangeAspect="1"/>
           </p:cNvPicPr>
           <p:nvPr/>
         </p:nvPicPr>
         <p:blipFill>
-          <a:blip r:embed="rId1"/>
+          <a:blip r:embed="rId3"/>
           <a:stretch>
             <a:fillRect/>
           </a:stretch>
@@ -5605,11 +5556,11 @@
           <a:bodyPr wrap="square" lIns="0" tIns="0" rIns="0" bIns="0" rtlCol="0" anchor="ctr"/>
           <a:lstStyle/>
           <a:p>
-            <a:pPr indent="0" marL="0">
-              <a:buNone/>
-            </a:pPr>
-            <a:r>
-              <a:rPr lang="en-US" sz="2000" b="1" spc="150" kern="0" dirty="0">
+            <a:pPr marL="0" indent="0">
+              <a:buNone/>
+            </a:pPr>
+            <a:r>
+              <a:rPr lang="en-US" sz="2000" b="1" kern="0" spc="150" dirty="0">
                 <a:solidFill>
                   <a:srgbClr val="FF5010"/>
                 </a:solidFill>
@@ -5644,7 +5595,7 @@
           <a:bodyPr wrap="square" lIns="0" tIns="0" rIns="0" bIns="0" rtlCol="0" anchor="ctr"/>
           <a:lstStyle/>
           <a:p>
-            <a:pPr indent="0" marL="0">
+            <a:pPr marL="0" indent="0">
               <a:buNone/>
             </a:pPr>
             <a:r>
@@ -5681,6 +5632,13 @@
           </a:solidFill>
           <a:ln/>
         </p:spPr>
+        <p:txBody>
+          <a:bodyPr/>
+          <a:lstStyle/>
+          <a:p>
+            <a:endParaRPr lang="en-US"/>
+          </a:p>
+        </p:txBody>
       </p:sp>
       <p:sp>
         <p:nvSpPr>
@@ -5703,7 +5661,7 @@
           <a:bodyPr wrap="square" lIns="0" tIns="0" rIns="0" bIns="0" rtlCol="0" anchor="ctr"/>
           <a:lstStyle/>
           <a:p>
-            <a:pPr algn="ctr" indent="0" marL="0">
+            <a:pPr marL="0" indent="0" algn="ctr">
               <a:buNone/>
             </a:pPr>
             <a:r>
@@ -5742,7 +5700,7 @@
           <a:bodyPr wrap="square" lIns="0" tIns="0" rIns="0" bIns="0" rtlCol="0" anchor="ctr"/>
           <a:lstStyle/>
           <a:p>
-            <a:pPr indent="0" marL="0">
+            <a:pPr marL="0" indent="0">
               <a:buNone/>
             </a:pPr>
             <a:r>
@@ -5781,7 +5739,7 @@
           <a:bodyPr wrap="square" lIns="0" tIns="0" rIns="0" bIns="0" rtlCol="0" anchor="ctr"/>
           <a:lstStyle/>
           <a:p>
-            <a:pPr indent="0" marL="0">
+            <a:pPr marL="0" indent="0">
               <a:lnSpc>
                 <a:spcPct val="110000"/>
               </a:lnSpc>
@@ -5821,6 +5779,13 @@
           </a:solidFill>
           <a:ln/>
         </p:spPr>
+        <p:txBody>
+          <a:bodyPr/>
+          <a:lstStyle/>
+          <a:p>
+            <a:endParaRPr lang="en-US"/>
+          </a:p>
+        </p:txBody>
       </p:sp>
       <p:sp>
         <p:nvSpPr>
@@ -5843,7 +5808,7 @@
           <a:bodyPr wrap="square" lIns="0" tIns="0" rIns="0" bIns="0" rtlCol="0" anchor="ctr"/>
           <a:lstStyle/>
           <a:p>
-            <a:pPr algn="ctr" indent="0" marL="0">
+            <a:pPr marL="0" indent="0" algn="ctr">
               <a:buNone/>
             </a:pPr>
             <a:r>
@@ -5882,7 +5847,7 @@
           <a:bodyPr wrap="square" lIns="0" tIns="0" rIns="0" bIns="0" rtlCol="0" anchor="ctr"/>
           <a:lstStyle/>
           <a:p>
-            <a:pPr indent="0" marL="0">
+            <a:pPr marL="0" indent="0">
               <a:buNone/>
             </a:pPr>
             <a:r>
@@ -5921,7 +5886,7 @@
           <a:bodyPr wrap="square" lIns="0" tIns="0" rIns="0" bIns="0" rtlCol="0" anchor="ctr"/>
           <a:lstStyle/>
           <a:p>
-            <a:pPr indent="0" marL="0">
+            <a:pPr marL="0" indent="0">
               <a:lnSpc>
                 <a:spcPct val="110000"/>
               </a:lnSpc>
@@ -5961,6 +5926,13 @@
           </a:solidFill>
           <a:ln/>
         </p:spPr>
+        <p:txBody>
+          <a:bodyPr/>
+          <a:lstStyle/>
+          <a:p>
+            <a:endParaRPr lang="en-US"/>
+          </a:p>
+        </p:txBody>
       </p:sp>
       <p:sp>
         <p:nvSpPr>
@@ -5983,7 +5955,7 @@
           <a:bodyPr wrap="square" lIns="0" tIns="0" rIns="0" bIns="0" rtlCol="0" anchor="ctr"/>
           <a:lstStyle/>
           <a:p>
-            <a:pPr algn="ctr" indent="0" marL="0">
+            <a:pPr marL="0" indent="0" algn="ctr">
               <a:buNone/>
             </a:pPr>
             <a:r>
@@ -6022,7 +5994,7 @@
           <a:bodyPr wrap="square" lIns="0" tIns="0" rIns="0" bIns="0" rtlCol="0" anchor="ctr"/>
           <a:lstStyle/>
           <a:p>
-            <a:pPr indent="0" marL="0">
+            <a:pPr marL="0" indent="0">
               <a:buNone/>
             </a:pPr>
             <a:r>
@@ -6061,7 +6033,7 @@
           <a:bodyPr wrap="square" lIns="0" tIns="0" rIns="0" bIns="0" rtlCol="0" anchor="ctr"/>
           <a:lstStyle/>
           <a:p>
-            <a:pPr indent="0" marL="0">
+            <a:pPr marL="0" indent="0">
               <a:lnSpc>
                 <a:spcPct val="110000"/>
               </a:lnSpc>
@@ -6101,6 +6073,13 @@
           </a:solidFill>
           <a:ln/>
         </p:spPr>
+        <p:txBody>
+          <a:bodyPr/>
+          <a:lstStyle/>
+          <a:p>
+            <a:endParaRPr lang="en-US"/>
+          </a:p>
+        </p:txBody>
       </p:sp>
       <p:sp>
         <p:nvSpPr>
@@ -6123,7 +6102,7 @@
           <a:bodyPr wrap="square" lIns="0" tIns="0" rIns="0" bIns="0" rtlCol="0" anchor="ctr"/>
           <a:lstStyle/>
           <a:p>
-            <a:pPr algn="ctr" indent="0" marL="0">
+            <a:pPr marL="0" indent="0" algn="ctr">
               <a:buNone/>
             </a:pPr>
             <a:r>
@@ -6162,7 +6141,7 @@
           <a:bodyPr wrap="square" lIns="0" tIns="0" rIns="0" bIns="0" rtlCol="0" anchor="ctr"/>
           <a:lstStyle/>
           <a:p>
-            <a:pPr indent="0" marL="0">
+            <a:pPr marL="0" indent="0">
               <a:buNone/>
             </a:pPr>
             <a:r>
@@ -6201,7 +6180,7 @@
           <a:bodyPr wrap="square" lIns="0" tIns="0" rIns="0" bIns="0" rtlCol="0" anchor="ctr"/>
           <a:lstStyle/>
           <a:p>
-            <a:pPr indent="0" marL="0">
+            <a:pPr marL="0" indent="0">
               <a:lnSpc>
                 <a:spcPct val="110000"/>
               </a:lnSpc>
@@ -6241,6 +6220,13 @@
           </a:solidFill>
           <a:ln/>
         </p:spPr>
+        <p:txBody>
+          <a:bodyPr/>
+          <a:lstStyle/>
+          <a:p>
+            <a:endParaRPr lang="en-US"/>
+          </a:p>
+        </p:txBody>
       </p:sp>
       <p:sp>
         <p:nvSpPr>
@@ -6263,7 +6249,7 @@
           <a:bodyPr wrap="square" lIns="0" tIns="0" rIns="0" bIns="0" rtlCol="0" anchor="ctr"/>
           <a:lstStyle/>
           <a:p>
-            <a:pPr algn="ctr" indent="0" marL="0">
+            <a:pPr marL="0" indent="0" algn="ctr">
               <a:buNone/>
             </a:pPr>
             <a:r>
@@ -6302,7 +6288,7 @@
           <a:bodyPr wrap="square" lIns="0" tIns="0" rIns="0" bIns="0" rtlCol="0" anchor="ctr"/>
           <a:lstStyle/>
           <a:p>
-            <a:pPr indent="0" marL="0">
+            <a:pPr marL="0" indent="0">
               <a:buNone/>
             </a:pPr>
             <a:r>
@@ -6341,7 +6327,7 @@
           <a:bodyPr wrap="square" lIns="0" tIns="0" rIns="0" bIns="0" rtlCol="0" anchor="ctr"/>
           <a:lstStyle/>
           <a:p>
-            <a:pPr indent="0" marL="0">
+            <a:pPr marL="0" indent="0">
               <a:lnSpc>
                 <a:spcPct val="110000"/>
               </a:lnSpc>
@@ -6383,11 +6369,11 @@
           <a:bodyPr wrap="square" lIns="0" tIns="0" rIns="0" bIns="0" rtlCol="0" anchor="ctr"/>
           <a:lstStyle/>
           <a:p>
-            <a:pPr indent="0" marL="0">
-              <a:buNone/>
-            </a:pPr>
-            <a:r>
-              <a:rPr lang="en-US" sz="2000" spc="100" kern="0" dirty="0">
+            <a:pPr marL="0" indent="0">
+              <a:buNone/>
+            </a:pPr>
+            <a:r>
+              <a:rPr lang="en-US" sz="2000" kern="0" spc="100" dirty="0">
                 <a:solidFill>
                   <a:srgbClr val="5B6B84"/>
                 </a:solidFill>
@@ -6422,7 +6408,7 @@
           <a:bodyPr wrap="square" lIns="0" tIns="0" rIns="0" bIns="0" rtlCol="0" anchor="ctr"/>
           <a:lstStyle/>
           <a:p>
-            <a:pPr algn="r" indent="0" marL="0">
+            <a:pPr marL="0" indent="0" algn="r">
               <a:buNone/>
             </a:pPr>
             <a:r>
@@ -6442,14 +6428,14 @@
       </p:sp>
       <p:pic>
         <p:nvPicPr>
-          <p:cNvPr id="28" name="Image 1" descr="/home/user/BasicRobotLessons/docs/presentations/v3/template/assets/logo/team5010-logo-onwhite.png">    </p:cNvPr>
+          <p:cNvPr id="28" name="Image 1" descr="/home/user/BasicRobotLessons/docs/presentations/v3/template/assets/logo/team5010-logo-onwhite.png"/>
           <p:cNvPicPr>
             <a:picLocks noChangeAspect="1"/>
           </p:cNvPicPr>
           <p:nvPr/>
         </p:nvPicPr>
         <p:blipFill>
-          <a:blip r:embed="rId2"/>
+          <a:blip r:embed="rId4"/>
           <a:stretch>
             <a:fillRect/>
           </a:stretch>
@@ -6480,6 +6466,7 @@
         <a:solidFill>
           <a:srgbClr val="FFFFFF"/>
         </a:solidFill>
+        <a:effectLst/>
       </p:bgPr>
     </p:bg>
     <p:spTree>
@@ -6515,17 +6502,24 @@
           </a:solidFill>
           <a:ln/>
         </p:spPr>
+        <p:txBody>
+          <a:bodyPr/>
+          <a:lstStyle/>
+          <a:p>
+            <a:endParaRPr lang="en-US"/>
+          </a:p>
+        </p:txBody>
       </p:sp>
       <p:pic>
         <p:nvPicPr>
-          <p:cNvPr id="3" name="Image 0" descr="/home/user/BasicRobotLessons/docs/presentations/v3/template/assets/icons/download_white.png">    </p:cNvPr>
+          <p:cNvPr id="3" name="Image 0" descr="/home/user/BasicRobotLessons/docs/presentations/v3/template/assets/icons/download_white.png"/>
           <p:cNvPicPr>
             <a:picLocks noChangeAspect="1"/>
           </p:cNvPicPr>
           <p:nvPr/>
         </p:nvPicPr>
         <p:blipFill>
-          <a:blip r:embed="rId1"/>
+          <a:blip r:embed="rId3"/>
           <a:stretch>
             <a:fillRect/>
           </a:stretch>
@@ -6561,11 +6555,11 @@
           <a:bodyPr wrap="square" lIns="0" tIns="0" rIns="0" bIns="0" rtlCol="0" anchor="ctr"/>
           <a:lstStyle/>
           <a:p>
-            <a:pPr indent="0" marL="0">
-              <a:buNone/>
-            </a:pPr>
-            <a:r>
-              <a:rPr lang="en-US" sz="2000" b="1" spc="150" kern="0" dirty="0">
+            <a:pPr marL="0" indent="0">
+              <a:buNone/>
+            </a:pPr>
+            <a:r>
+              <a:rPr lang="en-US" sz="2000" b="1" kern="0" spc="150" dirty="0">
                 <a:solidFill>
                   <a:srgbClr val="FF5010"/>
                 </a:solidFill>
@@ -6600,7 +6594,7 @@
           <a:bodyPr wrap="square" lIns="0" tIns="0" rIns="0" bIns="0" rtlCol="0" anchor="ctr"/>
           <a:lstStyle/>
           <a:p>
-            <a:pPr indent="0" marL="0">
+            <a:pPr marL="0" indent="0">
               <a:buNone/>
             </a:pPr>
             <a:r>
@@ -6639,13 +6633,20 @@
           </a:solidFill>
           <a:ln/>
           <a:effectLst>
-            <a:outerShdw sx="100000" sy="100000" kx="0" ky="0" algn="bl" rotWithShape="0" blurRad="101600" dist="38100" dir="5400000">
+            <a:outerShdw blurRad="101600" dist="38100" dir="5400000" algn="bl" rotWithShape="0">
               <a:srgbClr val="0B1F3A">
                 <a:alpha val="35000"/>
               </a:srgbClr>
             </a:outerShdw>
           </a:effectLst>
         </p:spPr>
+        <p:txBody>
+          <a:bodyPr/>
+          <a:lstStyle/>
+          <a:p>
+            <a:endParaRPr lang="en-US"/>
+          </a:p>
+        </p:txBody>
       </p:sp>
       <p:sp>
         <p:nvSpPr>
@@ -6666,6 +6667,13 @@
           </a:solidFill>
           <a:ln/>
         </p:spPr>
+        <p:txBody>
+          <a:bodyPr/>
+          <a:lstStyle/>
+          <a:p>
+            <a:endParaRPr lang="en-US"/>
+          </a:p>
+        </p:txBody>
       </p:sp>
       <p:sp>
         <p:nvSpPr>
@@ -6686,6 +6694,13 @@
           </a:solidFill>
           <a:ln/>
         </p:spPr>
+        <p:txBody>
+          <a:bodyPr/>
+          <a:lstStyle/>
+          <a:p>
+            <a:endParaRPr lang="en-US"/>
+          </a:p>
+        </p:txBody>
       </p:sp>
       <p:sp>
         <p:nvSpPr>
@@ -6706,6 +6721,13 @@
           </a:solidFill>
           <a:ln/>
         </p:spPr>
+        <p:txBody>
+          <a:bodyPr/>
+          <a:lstStyle/>
+          <a:p>
+            <a:endParaRPr lang="en-US"/>
+          </a:p>
+        </p:txBody>
       </p:sp>
       <p:sp>
         <p:nvSpPr>
@@ -6728,7 +6750,7 @@
           <a:bodyPr wrap="square" lIns="0" tIns="0" rIns="0" bIns="0" rtlCol="0" anchor="t"/>
           <a:lstStyle/>
           <a:p>
-            <a:pPr indent="0" marL="0">
+            <a:pPr marL="0" indent="0">
               <a:lnSpc>
                 <a:spcPct val="120000"/>
               </a:lnSpc>
@@ -6770,13 +6792,20 @@
           </a:solidFill>
           <a:ln/>
           <a:effectLst>
-            <a:outerShdw sx="100000" sy="100000" kx="0" ky="0" algn="bl" rotWithShape="0" blurRad="101600" dist="38100" dir="5400000">
+            <a:outerShdw blurRad="101600" dist="38100" dir="5400000" algn="bl" rotWithShape="0">
               <a:srgbClr val="0B1F3A">
                 <a:alpha val="35000"/>
               </a:srgbClr>
             </a:outerShdw>
           </a:effectLst>
         </p:spPr>
+        <p:txBody>
+          <a:bodyPr/>
+          <a:lstStyle/>
+          <a:p>
+            <a:endParaRPr lang="en-US"/>
+          </a:p>
+        </p:txBody>
       </p:sp>
       <p:sp>
         <p:nvSpPr>
@@ -6797,6 +6826,13 @@
           </a:solidFill>
           <a:ln/>
         </p:spPr>
+        <p:txBody>
+          <a:bodyPr/>
+          <a:lstStyle/>
+          <a:p>
+            <a:endParaRPr lang="en-US"/>
+          </a:p>
+        </p:txBody>
       </p:sp>
       <p:sp>
         <p:nvSpPr>
@@ -6817,6 +6853,13 @@
           </a:solidFill>
           <a:ln/>
         </p:spPr>
+        <p:txBody>
+          <a:bodyPr/>
+          <a:lstStyle/>
+          <a:p>
+            <a:endParaRPr lang="en-US"/>
+          </a:p>
+        </p:txBody>
       </p:sp>
       <p:sp>
         <p:nvSpPr>
@@ -6837,6 +6880,13 @@
           </a:solidFill>
           <a:ln/>
         </p:spPr>
+        <p:txBody>
+          <a:bodyPr/>
+          <a:lstStyle/>
+          <a:p>
+            <a:endParaRPr lang="en-US"/>
+          </a:p>
+        </p:txBody>
       </p:sp>
       <p:sp>
         <p:nvSpPr>
@@ -6859,7 +6909,7 @@
           <a:bodyPr wrap="square" lIns="0" tIns="0" rIns="0" bIns="0" rtlCol="0" anchor="t"/>
           <a:lstStyle/>
           <a:p>
-            <a:pPr indent="0" marL="0">
+            <a:pPr marL="0" indent="0">
               <a:lnSpc>
                 <a:spcPct val="120000"/>
               </a:lnSpc>
@@ -6879,7 +6929,7 @@
             <a:endParaRPr lang="en-US" sz="2000" dirty="0"/>
           </a:p>
           <a:p>
-            <a:pPr indent="0" marL="0">
+            <a:pPr marL="0" indent="0">
               <a:lnSpc>
                 <a:spcPct val="120000"/>
               </a:lnSpc>
@@ -6921,6 +6971,13 @@
           </a:solidFill>
           <a:ln/>
         </p:spPr>
+        <p:txBody>
+          <a:bodyPr/>
+          <a:lstStyle/>
+          <a:p>
+            <a:endParaRPr lang="en-US"/>
+          </a:p>
+        </p:txBody>
       </p:sp>
       <p:sp>
         <p:nvSpPr>
@@ -6943,7 +7000,7 @@
           <a:bodyPr wrap="square" lIns="0" tIns="0" rIns="0" bIns="0" rtlCol="0" anchor="t"/>
           <a:lstStyle/>
           <a:p>
-            <a:pPr indent="0" marL="0">
+            <a:pPr marL="0" indent="0">
               <a:lnSpc>
                 <a:spcPct val="120000"/>
               </a:lnSpc>
@@ -6985,11 +7042,11 @@
           <a:bodyPr wrap="square" lIns="0" tIns="0" rIns="0" bIns="0" rtlCol="0" anchor="ctr"/>
           <a:lstStyle/>
           <a:p>
-            <a:pPr indent="0" marL="0">
-              <a:buNone/>
-            </a:pPr>
-            <a:r>
-              <a:rPr lang="en-US" sz="2000" spc="100" kern="0" dirty="0">
+            <a:pPr marL="0" indent="0">
+              <a:buNone/>
+            </a:pPr>
+            <a:r>
+              <a:rPr lang="en-US" sz="2000" kern="0" spc="100" dirty="0">
                 <a:solidFill>
                   <a:srgbClr val="5B6B84"/>
                 </a:solidFill>
@@ -7024,7 +7081,7 @@
           <a:bodyPr wrap="square" lIns="0" tIns="0" rIns="0" bIns="0" rtlCol="0" anchor="ctr"/>
           <a:lstStyle/>
           <a:p>
-            <a:pPr algn="r" indent="0" marL="0">
+            <a:pPr marL="0" indent="0" algn="r">
               <a:buNone/>
             </a:pPr>
             <a:r>
@@ -7044,14 +7101,14 @@
       </p:sp>
       <p:pic>
         <p:nvPicPr>
-          <p:cNvPr id="20" name="Image 1" descr="/home/user/BasicRobotLessons/docs/presentations/v3/template/assets/logo/team5010-logo-onwhite.png">    </p:cNvPr>
+          <p:cNvPr id="20" name="Image 1" descr="/home/user/BasicRobotLessons/docs/presentations/v3/template/assets/logo/team5010-logo-onwhite.png"/>
           <p:cNvPicPr>
             <a:picLocks noChangeAspect="1"/>
           </p:cNvPicPr>
           <p:nvPr/>
         </p:nvPicPr>
         <p:blipFill>
-          <a:blip r:embed="rId2"/>
+          <a:blip r:embed="rId4"/>
           <a:stretch>
             <a:fillRect/>
           </a:stretch>
@@ -7082,6 +7139,7 @@
         <a:solidFill>
           <a:srgbClr val="FFFFFF"/>
         </a:solidFill>
+        <a:effectLst/>
       </p:bgPr>
     </p:bg>
     <p:spTree>
@@ -7117,17 +7175,24 @@
           </a:solidFill>
           <a:ln/>
         </p:spPr>
+        <p:txBody>
+          <a:bodyPr/>
+          <a:lstStyle/>
+          <a:p>
+            <a:endParaRPr lang="en-US"/>
+          </a:p>
+        </p:txBody>
       </p:sp>
       <p:pic>
         <p:nvPicPr>
-          <p:cNvPr id="3" name="Image 0" descr="/home/user/BasicRobotLessons/docs/presentations/v3/template/assets/icons/coffee_white.png">    </p:cNvPr>
+          <p:cNvPr id="3" name="Image 0" descr="/home/user/BasicRobotLessons/docs/presentations/v3/template/assets/icons/coffee_white.png"/>
           <p:cNvPicPr>
             <a:picLocks noChangeAspect="1"/>
           </p:cNvPicPr>
           <p:nvPr/>
         </p:nvPicPr>
         <p:blipFill>
-          <a:blip r:embed="rId1"/>
+          <a:blip r:embed="rId3"/>
           <a:stretch>
             <a:fillRect/>
           </a:stretch>
@@ -7163,11 +7228,11 @@
           <a:bodyPr wrap="square" lIns="0" tIns="0" rIns="0" bIns="0" rtlCol="0" anchor="ctr"/>
           <a:lstStyle/>
           <a:p>
-            <a:pPr indent="0" marL="0">
-              <a:buNone/>
-            </a:pPr>
-            <a:r>
-              <a:rPr lang="en-US" sz="2000" b="1" spc="150" kern="0" dirty="0">
+            <a:pPr marL="0" indent="0">
+              <a:buNone/>
+            </a:pPr>
+            <a:r>
+              <a:rPr lang="en-US" sz="2000" b="1" kern="0" spc="150" dirty="0">
                 <a:solidFill>
                   <a:srgbClr val="FF5010"/>
                 </a:solidFill>
@@ -7202,7 +7267,7 @@
           <a:bodyPr wrap="square" lIns="0" tIns="0" rIns="0" bIns="0" rtlCol="0" anchor="ctr"/>
           <a:lstStyle/>
           <a:p>
-            <a:pPr indent="0" marL="0">
+            <a:pPr marL="0" indent="0">
               <a:buNone/>
             </a:pPr>
             <a:r>
@@ -7241,13 +7306,20 @@
           </a:solidFill>
           <a:ln/>
           <a:effectLst>
-            <a:outerShdw sx="100000" sy="100000" kx="0" ky="0" algn="bl" rotWithShape="0" blurRad="101600" dist="38100" dir="5400000">
+            <a:outerShdw blurRad="101600" dist="38100" dir="5400000" algn="bl" rotWithShape="0">
               <a:srgbClr val="0B1F3A">
                 <a:alpha val="35000"/>
               </a:srgbClr>
             </a:outerShdw>
           </a:effectLst>
         </p:spPr>
+        <p:txBody>
+          <a:bodyPr/>
+          <a:lstStyle/>
+          <a:p>
+            <a:endParaRPr lang="en-US"/>
+          </a:p>
+        </p:txBody>
       </p:sp>
       <p:sp>
         <p:nvSpPr>
@@ -7268,6 +7340,13 @@
           </a:solidFill>
           <a:ln/>
         </p:spPr>
+        <p:txBody>
+          <a:bodyPr/>
+          <a:lstStyle/>
+          <a:p>
+            <a:endParaRPr lang="en-US"/>
+          </a:p>
+        </p:txBody>
       </p:sp>
       <p:sp>
         <p:nvSpPr>
@@ -7288,6 +7367,13 @@
           </a:solidFill>
           <a:ln/>
         </p:spPr>
+        <p:txBody>
+          <a:bodyPr/>
+          <a:lstStyle/>
+          <a:p>
+            <a:endParaRPr lang="en-US"/>
+          </a:p>
+        </p:txBody>
       </p:sp>
       <p:sp>
         <p:nvSpPr>
@@ -7308,6 +7394,13 @@
           </a:solidFill>
           <a:ln/>
         </p:spPr>
+        <p:txBody>
+          <a:bodyPr/>
+          <a:lstStyle/>
+          <a:p>
+            <a:endParaRPr lang="en-US"/>
+          </a:p>
+        </p:txBody>
       </p:sp>
       <p:sp>
         <p:nvSpPr>
@@ -7330,7 +7423,7 @@
           <a:bodyPr wrap="square" lIns="0" tIns="0" rIns="0" bIns="0" rtlCol="0" anchor="t"/>
           <a:lstStyle/>
           <a:p>
-            <a:pPr indent="0" marL="0">
+            <a:pPr marL="0" indent="0">
               <a:lnSpc>
                 <a:spcPct val="120000"/>
               </a:lnSpc>
@@ -7372,7 +7465,7 @@
           <a:bodyPr wrap="square" lIns="0" tIns="0" rIns="0" bIns="0" rtlCol="0" anchor="t"/>
           <a:lstStyle/>
           <a:p>
-            <a:pPr indent="0" marL="0">
+            <a:pPr marL="0" indent="0">
               <a:lnSpc>
                 <a:spcPct val="125000"/>
               </a:lnSpc>
@@ -7414,6 +7507,13 @@
           </a:solidFill>
           <a:ln/>
         </p:spPr>
+        <p:txBody>
+          <a:bodyPr/>
+          <a:lstStyle/>
+          <a:p>
+            <a:endParaRPr lang="en-US"/>
+          </a:p>
+        </p:txBody>
       </p:sp>
       <p:sp>
         <p:nvSpPr>
@@ -7436,11 +7536,11 @@
           <a:bodyPr wrap="square" lIns="0" tIns="0" rIns="0" bIns="0" rtlCol="0" anchor="ctr"/>
           <a:lstStyle/>
           <a:p>
-            <a:pPr indent="0" marL="0">
-              <a:buNone/>
-            </a:pPr>
-            <a:r>
-              <a:rPr lang="en-US" sz="2000" b="1" spc="50" kern="0" dirty="0">
+            <a:pPr marL="0" indent="0">
+              <a:buNone/>
+            </a:pPr>
+            <a:r>
+              <a:rPr lang="en-US" sz="2000" b="1" kern="0" spc="50" dirty="0">
                 <a:solidFill>
                   <a:srgbClr val="FF5010"/>
                 </a:solidFill>
@@ -7475,7 +7575,7 @@
           <a:bodyPr wrap="square" lIns="0" tIns="0" rIns="0" bIns="0" rtlCol="0" anchor="t"/>
           <a:lstStyle/>
           <a:p>
-            <a:pPr indent="0" marL="0">
+            <a:pPr marL="0" indent="0">
               <a:lnSpc>
                 <a:spcPct val="120000"/>
               </a:lnSpc>
@@ -7517,7 +7617,7 @@
           <a:bodyPr wrap="square" lIns="0" tIns="0" rIns="0" bIns="0" rtlCol="0" anchor="t"/>
           <a:lstStyle/>
           <a:p>
-            <a:pPr indent="0" marL="0">
+            <a:pPr marL="0" indent="0">
               <a:lnSpc>
                 <a:spcPct val="125000"/>
               </a:lnSpc>
@@ -7559,11 +7659,11 @@
           <a:bodyPr wrap="square" lIns="0" tIns="0" rIns="0" bIns="0" rtlCol="0" anchor="ctr"/>
           <a:lstStyle/>
           <a:p>
-            <a:pPr indent="0" marL="0">
-              <a:buNone/>
-            </a:pPr>
-            <a:r>
-              <a:rPr lang="en-US" sz="2000" spc="100" kern="0" dirty="0">
+            <a:pPr marL="0" indent="0">
+              <a:buNone/>
+            </a:pPr>
+            <a:r>
+              <a:rPr lang="en-US" sz="2000" kern="0" spc="100" dirty="0">
                 <a:solidFill>
                   <a:srgbClr val="5B6B84"/>
                 </a:solidFill>
@@ -7598,7 +7698,7 @@
           <a:bodyPr wrap="square" lIns="0" tIns="0" rIns="0" bIns="0" rtlCol="0" anchor="ctr"/>
           <a:lstStyle/>
           <a:p>
-            <a:pPr algn="r" indent="0" marL="0">
+            <a:pPr marL="0" indent="0" algn="r">
               <a:buNone/>
             </a:pPr>
             <a:r>
@@ -7618,14 +7718,14 @@
       </p:sp>
       <p:pic>
         <p:nvPicPr>
-          <p:cNvPr id="18" name="Image 1" descr="/home/user/BasicRobotLessons/docs/presentations/v3/template/assets/logo/team5010-logo-onwhite.png">    </p:cNvPr>
+          <p:cNvPr id="18" name="Image 1" descr="/home/user/BasicRobotLessons/docs/presentations/v3/template/assets/logo/team5010-logo-onwhite.png"/>
           <p:cNvPicPr>
             <a:picLocks noChangeAspect="1"/>
           </p:cNvPicPr>
           <p:nvPr/>
         </p:nvPicPr>
         <p:blipFill>
-          <a:blip r:embed="rId2"/>
+          <a:blip r:embed="rId4"/>
           <a:stretch>
             <a:fillRect/>
           </a:stretch>
@@ -7656,6 +7756,7 @@
         <a:solidFill>
           <a:srgbClr val="FFFFFF"/>
         </a:solidFill>
+        <a:effectLst/>
       </p:bgPr>
     </p:bg>
     <p:spTree>
@@ -7691,17 +7792,24 @@
           </a:solidFill>
           <a:ln/>
         </p:spPr>
+        <p:txBody>
+          <a:bodyPr/>
+          <a:lstStyle/>
+          <a:p>
+            <a:endParaRPr lang="en-US"/>
+          </a:p>
+        </p:txBody>
       </p:sp>
       <p:pic>
         <p:nvPicPr>
-          <p:cNvPr id="3" name="Image 0" descr="/home/user/BasicRobotLessons/docs/presentations/v3/template/assets/icons/folderopen_white.png">    </p:cNvPr>
+          <p:cNvPr id="3" name="Image 0" descr="/home/user/BasicRobotLessons/docs/presentations/v3/template/assets/icons/folderopen_white.png"/>
           <p:cNvPicPr>
             <a:picLocks noChangeAspect="1"/>
           </p:cNvPicPr>
           <p:nvPr/>
         </p:nvPicPr>
         <p:blipFill>
-          <a:blip r:embed="rId1"/>
+          <a:blip r:embed="rId3"/>
           <a:stretch>
             <a:fillRect/>
           </a:stretch>
@@ -7737,11 +7845,11 @@
           <a:bodyPr wrap="square" lIns="0" tIns="0" rIns="0" bIns="0" rtlCol="0" anchor="ctr"/>
           <a:lstStyle/>
           <a:p>
-            <a:pPr indent="0" marL="0">
-              <a:buNone/>
-            </a:pPr>
-            <a:r>
-              <a:rPr lang="en-US" sz="2000" b="1" spc="150" kern="0" dirty="0">
+            <a:pPr marL="0" indent="0">
+              <a:buNone/>
+            </a:pPr>
+            <a:r>
+              <a:rPr lang="en-US" sz="2000" b="1" kern="0" spc="150" dirty="0">
                 <a:solidFill>
                   <a:srgbClr val="FF5010"/>
                 </a:solidFill>
@@ -7776,7 +7884,7 @@
           <a:bodyPr wrap="square" lIns="0" tIns="0" rIns="0" bIns="0" rtlCol="0" anchor="ctr"/>
           <a:lstStyle/>
           <a:p>
-            <a:pPr indent="0" marL="0">
+            <a:pPr marL="0" indent="0">
               <a:buNone/>
             </a:pPr>
             <a:r>
@@ -7815,13 +7923,20 @@
           </a:solidFill>
           <a:ln/>
           <a:effectLst>
-            <a:outerShdw sx="100000" sy="100000" kx="0" ky="0" algn="bl" rotWithShape="0" blurRad="101600" dist="38100" dir="5400000">
+            <a:outerShdw blurRad="101600" dist="38100" dir="5400000" algn="bl" rotWithShape="0">
               <a:srgbClr val="0B1F3A">
                 <a:alpha val="35000"/>
               </a:srgbClr>
             </a:outerShdw>
           </a:effectLst>
         </p:spPr>
+        <p:txBody>
+          <a:bodyPr/>
+          <a:lstStyle/>
+          <a:p>
+            <a:endParaRPr lang="en-US"/>
+          </a:p>
+        </p:txBody>
       </p:sp>
       <p:sp>
         <p:nvSpPr>
@@ -7842,6 +7957,13 @@
           </a:solidFill>
           <a:ln/>
         </p:spPr>
+        <p:txBody>
+          <a:bodyPr/>
+          <a:lstStyle/>
+          <a:p>
+            <a:endParaRPr lang="en-US"/>
+          </a:p>
+        </p:txBody>
       </p:sp>
       <p:sp>
         <p:nvSpPr>
@@ -7862,6 +7984,13 @@
           </a:solidFill>
           <a:ln/>
         </p:spPr>
+        <p:txBody>
+          <a:bodyPr/>
+          <a:lstStyle/>
+          <a:p>
+            <a:endParaRPr lang="en-US"/>
+          </a:p>
+        </p:txBody>
       </p:sp>
       <p:sp>
         <p:nvSpPr>
@@ -7882,6 +8011,13 @@
           </a:solidFill>
           <a:ln/>
         </p:spPr>
+        <p:txBody>
+          <a:bodyPr/>
+          <a:lstStyle/>
+          <a:p>
+            <a:endParaRPr lang="en-US"/>
+          </a:p>
+        </p:txBody>
       </p:sp>
       <p:sp>
         <p:nvSpPr>
@@ -7904,7 +8040,7 @@
           <a:bodyPr wrap="square" lIns="0" tIns="0" rIns="0" bIns="0" rtlCol="0" anchor="t"/>
           <a:lstStyle/>
           <a:p>
-            <a:pPr indent="0" marL="0">
+            <a:pPr marL="0" indent="0">
               <a:lnSpc>
                 <a:spcPct val="120000"/>
               </a:lnSpc>
@@ -7924,7 +8060,7 @@
             <a:endParaRPr lang="en-US" sz="1800" dirty="0"/>
           </a:p>
           <a:p>
-            <a:pPr indent="0" marL="0">
+            <a:pPr marL="0" indent="0">
               <a:lnSpc>
                 <a:spcPct val="120000"/>
               </a:lnSpc>
@@ -7944,7 +8080,7 @@
             <a:endParaRPr lang="en-US" sz="1800" dirty="0"/>
           </a:p>
           <a:p>
-            <a:pPr indent="0" marL="0">
+            <a:pPr marL="0" indent="0">
               <a:lnSpc>
                 <a:spcPct val="120000"/>
               </a:lnSpc>
@@ -7986,6 +8122,13 @@
           </a:solidFill>
           <a:ln/>
         </p:spPr>
+        <p:txBody>
+          <a:bodyPr/>
+          <a:lstStyle/>
+          <a:p>
+            <a:endParaRPr lang="en-US"/>
+          </a:p>
+        </p:txBody>
       </p:sp>
       <p:sp>
         <p:nvSpPr>
@@ -8008,7 +8151,7 @@
           <a:bodyPr wrap="square" lIns="0" tIns="0" rIns="0" bIns="0" rtlCol="0" anchor="t"/>
           <a:lstStyle/>
           <a:p>
-            <a:pPr indent="0" marL="0">
+            <a:pPr marL="0" indent="0">
               <a:lnSpc>
                 <a:spcPct val="125000"/>
               </a:lnSpc>
@@ -8050,6 +8193,13 @@
           </a:solidFill>
           <a:ln/>
         </p:spPr>
+        <p:txBody>
+          <a:bodyPr/>
+          <a:lstStyle/>
+          <a:p>
+            <a:endParaRPr lang="en-US"/>
+          </a:p>
+        </p:txBody>
       </p:sp>
       <p:sp>
         <p:nvSpPr>
@@ -8072,14 +8222,14 @@
           <a:bodyPr wrap="square" lIns="0" tIns="0" rIns="0" bIns="0" rtlCol="0" anchor="t"/>
           <a:lstStyle/>
           <a:p>
-            <a:pPr indent="0" marL="0">
+            <a:pPr marL="0" indent="0">
               <a:lnSpc>
                 <a:spcPct val="115000"/>
               </a:lnSpc>
               <a:buNone/>
             </a:pPr>
             <a:r>
-              <a:rPr lang="en-US" sz="2000" b="1" spc="30" kern="0" dirty="0">
+              <a:rPr lang="en-US" sz="2000" b="1" kern="0" spc="30" dirty="0">
                 <a:solidFill>
                   <a:srgbClr val="FFFFFF"/>
                 </a:solidFill>
@@ -8114,7 +8264,7 @@
           <a:bodyPr wrap="square" lIns="0" tIns="0" rIns="0" bIns="0" rtlCol="0" anchor="t"/>
           <a:lstStyle/>
           <a:p>
-            <a:pPr indent="0" marL="0">
+            <a:pPr marL="0" indent="0">
               <a:lnSpc>
                 <a:spcPct val="120000"/>
               </a:lnSpc>
@@ -8156,11 +8306,11 @@
           <a:bodyPr wrap="square" lIns="0" tIns="0" rIns="0" bIns="0" rtlCol="0" anchor="ctr"/>
           <a:lstStyle/>
           <a:p>
-            <a:pPr indent="0" marL="0">
-              <a:buNone/>
-            </a:pPr>
-            <a:r>
-              <a:rPr lang="en-US" sz="2000" spc="100" kern="0" dirty="0">
+            <a:pPr marL="0" indent="0">
+              <a:buNone/>
+            </a:pPr>
+            <a:r>
+              <a:rPr lang="en-US" sz="2000" kern="0" spc="100" dirty="0">
                 <a:solidFill>
                   <a:srgbClr val="5B6B84"/>
                 </a:solidFill>
@@ -8195,7 +8345,7 @@
           <a:bodyPr wrap="square" lIns="0" tIns="0" rIns="0" bIns="0" rtlCol="0" anchor="ctr"/>
           <a:lstStyle/>
           <a:p>
-            <a:pPr algn="r" indent="0" marL="0">
+            <a:pPr marL="0" indent="0" algn="r">
               <a:buNone/>
             </a:pPr>
             <a:r>
@@ -8215,14 +8365,14 @@
       </p:sp>
       <p:pic>
         <p:nvPicPr>
-          <p:cNvPr id="18" name="Image 1" descr="/home/user/BasicRobotLessons/docs/presentations/v3/template/assets/logo/team5010-logo-onwhite.png">    </p:cNvPr>
+          <p:cNvPr id="18" name="Image 1" descr="/home/user/BasicRobotLessons/docs/presentations/v3/template/assets/logo/team5010-logo-onwhite.png"/>
           <p:cNvPicPr>
             <a:picLocks noChangeAspect="1"/>
           </p:cNvPicPr>
           <p:nvPr/>
         </p:nvPicPr>
         <p:blipFill>
-          <a:blip r:embed="rId2"/>
+          <a:blip r:embed="rId4"/>
           <a:stretch>
             <a:fillRect/>
           </a:stretch>
@@ -8253,6 +8403,7 @@
         <a:solidFill>
           <a:srgbClr val="FFFFFF"/>
         </a:solidFill>
+        <a:effectLst/>
       </p:bgPr>
     </p:bg>
     <p:spTree>
@@ -8288,17 +8439,24 @@
           </a:solidFill>
           <a:ln/>
         </p:spPr>
+        <p:txBody>
+          <a:bodyPr/>
+          <a:lstStyle/>
+          <a:p>
+            <a:endParaRPr lang="en-US"/>
+          </a:p>
+        </p:txBody>
       </p:sp>
       <p:pic>
         <p:nvPicPr>
-          <p:cNvPr id="3" name="Image 0" descr="/home/user/BasicRobotLessons/docs/presentations/v3/template/assets/icons/sitemap_white.png">    </p:cNvPr>
+          <p:cNvPr id="3" name="Image 0" descr="/home/user/BasicRobotLessons/docs/presentations/v3/template/assets/icons/sitemap_white.png"/>
           <p:cNvPicPr>
             <a:picLocks noChangeAspect="1"/>
           </p:cNvPicPr>
           <p:nvPr/>
         </p:nvPicPr>
         <p:blipFill>
-          <a:blip r:embed="rId1"/>
+          <a:blip r:embed="rId3"/>
           <a:stretch>
             <a:fillRect/>
           </a:stretch>
@@ -8334,11 +8492,11 @@
           <a:bodyPr wrap="square" lIns="0" tIns="0" rIns="0" bIns="0" rtlCol="0" anchor="ctr"/>
           <a:lstStyle/>
           <a:p>
-            <a:pPr indent="0" marL="0">
-              <a:buNone/>
-            </a:pPr>
-            <a:r>
-              <a:rPr lang="en-US" sz="2000" b="1" spc="150" kern="0" dirty="0">
+            <a:pPr marL="0" indent="0">
+              <a:buNone/>
+            </a:pPr>
+            <a:r>
+              <a:rPr lang="en-US" sz="2000" b="1" kern="0" spc="150" dirty="0">
                 <a:solidFill>
                   <a:srgbClr val="FF5010"/>
                 </a:solidFill>
@@ -8373,7 +8531,7 @@
           <a:bodyPr wrap="square" lIns="0" tIns="0" rIns="0" bIns="0" rtlCol="0" anchor="ctr"/>
           <a:lstStyle/>
           <a:p>
-            <a:pPr indent="0" marL="0">
+            <a:pPr marL="0" indent="0">
               <a:buNone/>
             </a:pPr>
             <a:r>
@@ -8412,6 +8570,13 @@
           </a:solidFill>
           <a:ln/>
         </p:spPr>
+        <p:txBody>
+          <a:bodyPr/>
+          <a:lstStyle/>
+          <a:p>
+            <a:endParaRPr lang="en-US"/>
+          </a:p>
+        </p:txBody>
       </p:sp>
       <p:sp>
         <p:nvSpPr>
@@ -8434,11 +8599,11 @@
           <a:bodyPr wrap="square" lIns="0" tIns="0" rIns="0" bIns="0" rtlCol="0" anchor="ctr"/>
           <a:lstStyle/>
           <a:p>
-            <a:pPr indent="0" marL="0">
-              <a:buNone/>
-            </a:pPr>
-            <a:r>
-              <a:rPr lang="en-US" sz="2000" b="1" spc="50" kern="0" dirty="0">
+            <a:pPr marL="0" indent="0">
+              <a:buNone/>
+            </a:pPr>
+            <a:r>
+              <a:rPr lang="en-US" sz="2000" b="1" kern="0" spc="50" dirty="0">
                 <a:solidFill>
                   <a:srgbClr val="FF5010"/>
                 </a:solidFill>
@@ -8473,7 +8638,7 @@
           <a:bodyPr wrap="square" lIns="0" tIns="0" rIns="0" bIns="0" rtlCol="0" anchor="t"/>
           <a:lstStyle/>
           <a:p>
-            <a:pPr indent="0" marL="0">
+            <a:pPr marL="0" indent="0">
               <a:lnSpc>
                 <a:spcPct val="120000"/>
               </a:lnSpc>
@@ -8515,7 +8680,7 @@
           <a:bodyPr wrap="square" lIns="0" tIns="0" rIns="0" bIns="0" rtlCol="0" anchor="t"/>
           <a:lstStyle/>
           <a:p>
-            <a:pPr indent="0" marL="0">
+            <a:pPr marL="0" indent="0">
               <a:lnSpc>
                 <a:spcPct val="125000"/>
               </a:lnSpc>
@@ -8557,6 +8722,13 @@
           </a:solidFill>
           <a:ln/>
         </p:spPr>
+        <p:txBody>
+          <a:bodyPr/>
+          <a:lstStyle/>
+          <a:p>
+            <a:endParaRPr lang="en-US"/>
+          </a:p>
+        </p:txBody>
       </p:sp>
       <p:sp>
         <p:nvSpPr>
@@ -8579,11 +8751,11 @@
           <a:bodyPr wrap="square" lIns="0" tIns="0" rIns="0" bIns="0" rtlCol="0" anchor="ctr"/>
           <a:lstStyle/>
           <a:p>
-            <a:pPr indent="0" marL="0">
-              <a:buNone/>
-            </a:pPr>
-            <a:r>
-              <a:rPr lang="en-US" sz="2000" b="1" spc="50" kern="0" dirty="0">
+            <a:pPr marL="0" indent="0">
+              <a:buNone/>
+            </a:pPr>
+            <a:r>
+              <a:rPr lang="en-US" sz="2000" b="1" kern="0" spc="50" dirty="0">
                 <a:solidFill>
                   <a:srgbClr val="1B9AAA"/>
                 </a:solidFill>
@@ -8618,7 +8790,7 @@
           <a:bodyPr wrap="square" lIns="0" tIns="0" rIns="0" bIns="0" rtlCol="0" anchor="t"/>
           <a:lstStyle/>
           <a:p>
-            <a:pPr indent="0" marL="0">
+            <a:pPr marL="0" indent="0">
               <a:lnSpc>
                 <a:spcPct val="120000"/>
               </a:lnSpc>
@@ -8660,7 +8832,7 @@
           <a:bodyPr wrap="square" lIns="0" tIns="0" rIns="0" bIns="0" rtlCol="0" anchor="t"/>
           <a:lstStyle/>
           <a:p>
-            <a:pPr indent="0" marL="0">
+            <a:pPr marL="0" indent="0">
               <a:lnSpc>
                 <a:spcPct val="125000"/>
               </a:lnSpc>
@@ -8702,11 +8874,11 @@
           <a:bodyPr wrap="square" lIns="0" tIns="0" rIns="0" bIns="0" rtlCol="0" anchor="ctr"/>
           <a:lstStyle/>
           <a:p>
-            <a:pPr indent="0" marL="0">
-              <a:buNone/>
-            </a:pPr>
-            <a:r>
-              <a:rPr lang="en-US" sz="2000" spc="100" kern="0" dirty="0">
+            <a:pPr marL="0" indent="0">
+              <a:buNone/>
+            </a:pPr>
+            <a:r>
+              <a:rPr lang="en-US" sz="2000" kern="0" spc="100" dirty="0">
                 <a:solidFill>
                   <a:srgbClr val="5B6B84"/>
                 </a:solidFill>
@@ -8741,7 +8913,7 @@
           <a:bodyPr wrap="square" lIns="0" tIns="0" rIns="0" bIns="0" rtlCol="0" anchor="ctr"/>
           <a:lstStyle/>
           <a:p>
-            <a:pPr algn="r" indent="0" marL="0">
+            <a:pPr marL="0" indent="0" algn="r">
               <a:buNone/>
             </a:pPr>
             <a:r>
@@ -8761,14 +8933,14 @@
       </p:sp>
       <p:pic>
         <p:nvPicPr>
-          <p:cNvPr id="16" name="Image 1" descr="/home/user/BasicRobotLessons/docs/presentations/v3/template/assets/logo/team5010-logo-onwhite.png">    </p:cNvPr>
+          <p:cNvPr id="16" name="Image 1" descr="/home/user/BasicRobotLessons/docs/presentations/v3/template/assets/logo/team5010-logo-onwhite.png"/>
           <p:cNvPicPr>
             <a:picLocks noChangeAspect="1"/>
           </p:cNvPicPr>
           <p:nvPr/>
         </p:nvPicPr>
         <p:blipFill>
-          <a:blip r:embed="rId2"/>
+          <a:blip r:embed="rId4"/>
           <a:stretch>
             <a:fillRect/>
           </a:stretch>
@@ -8799,6 +8971,7 @@
         <a:solidFill>
           <a:srgbClr val="FFFFFF"/>
         </a:solidFill>
+        <a:effectLst/>
       </p:bgPr>
     </p:bg>
     <p:spTree>
@@ -8834,17 +9007,24 @@
           </a:solidFill>
           <a:ln/>
         </p:spPr>
+        <p:txBody>
+          <a:bodyPr/>
+          <a:lstStyle/>
+          <a:p>
+            <a:endParaRPr lang="en-US"/>
+          </a:p>
+        </p:txBody>
       </p:sp>
       <p:pic>
         <p:nvPicPr>
-          <p:cNvPr id="3" name="Image 0" descr="/home/user/BasicRobotLessons/docs/presentations/v3/template/assets/icons/checkcircle_white.png">    </p:cNvPr>
+          <p:cNvPr id="3" name="Image 0" descr="/home/user/BasicRobotLessons/docs/presentations/v3/template/assets/icons/checkcircle_white.png"/>
           <p:cNvPicPr>
             <a:picLocks noChangeAspect="1"/>
           </p:cNvPicPr>
           <p:nvPr/>
         </p:nvPicPr>
         <p:blipFill>
-          <a:blip r:embed="rId1"/>
+          <a:blip r:embed="rId3"/>
           <a:stretch>
             <a:fillRect/>
           </a:stretch>
@@ -8880,11 +9060,11 @@
           <a:bodyPr wrap="square" lIns="0" tIns="0" rIns="0" bIns="0" rtlCol="0" anchor="ctr"/>
           <a:lstStyle/>
           <a:p>
-            <a:pPr indent="0" marL="0">
-              <a:buNone/>
-            </a:pPr>
-            <a:r>
-              <a:rPr lang="en-US" sz="2000" b="1" spc="150" kern="0" dirty="0">
+            <a:pPr marL="0" indent="0">
+              <a:buNone/>
+            </a:pPr>
+            <a:r>
+              <a:rPr lang="en-US" sz="2000" b="1" kern="0" spc="150" dirty="0">
                 <a:solidFill>
                   <a:srgbClr val="FF5010"/>
                 </a:solidFill>
@@ -8919,7 +9099,7 @@
           <a:bodyPr wrap="square" lIns="0" tIns="0" rIns="0" bIns="0" rtlCol="0" anchor="ctr"/>
           <a:lstStyle/>
           <a:p>
-            <a:pPr indent="0" marL="0">
+            <a:pPr marL="0" indent="0">
               <a:buNone/>
             </a:pPr>
             <a:r>
@@ -8958,13 +9138,20 @@
           </a:solidFill>
           <a:ln/>
           <a:effectLst>
-            <a:outerShdw sx="100000" sy="100000" kx="0" ky="0" algn="bl" rotWithShape="0" blurRad="101600" dist="38100" dir="5400000">
+            <a:outerShdw blurRad="101600" dist="38100" dir="5400000" algn="bl" rotWithShape="0">
               <a:srgbClr val="0B1F3A">
                 <a:alpha val="35000"/>
               </a:srgbClr>
             </a:outerShdw>
           </a:effectLst>
         </p:spPr>
+        <p:txBody>
+          <a:bodyPr/>
+          <a:lstStyle/>
+          <a:p>
+            <a:endParaRPr lang="en-US"/>
+          </a:p>
+        </p:txBody>
       </p:sp>
       <p:sp>
         <p:nvSpPr>
@@ -8985,6 +9172,13 @@
           </a:solidFill>
           <a:ln/>
         </p:spPr>
+        <p:txBody>
+          <a:bodyPr/>
+          <a:lstStyle/>
+          <a:p>
+            <a:endParaRPr lang="en-US"/>
+          </a:p>
+        </p:txBody>
       </p:sp>
       <p:sp>
         <p:nvSpPr>
@@ -9005,6 +9199,13 @@
           </a:solidFill>
           <a:ln/>
         </p:spPr>
+        <p:txBody>
+          <a:bodyPr/>
+          <a:lstStyle/>
+          <a:p>
+            <a:endParaRPr lang="en-US"/>
+          </a:p>
+        </p:txBody>
       </p:sp>
       <p:sp>
         <p:nvSpPr>
@@ -9025,6 +9226,13 @@
           </a:solidFill>
           <a:ln/>
         </p:spPr>
+        <p:txBody>
+          <a:bodyPr/>
+          <a:lstStyle/>
+          <a:p>
+            <a:endParaRPr lang="en-US"/>
+          </a:p>
+        </p:txBody>
       </p:sp>
       <p:sp>
         <p:nvSpPr>
@@ -9047,7 +9255,7 @@
           <a:bodyPr wrap="square" lIns="0" tIns="0" rIns="0" bIns="0" rtlCol="0" anchor="t"/>
           <a:lstStyle/>
           <a:p>
-            <a:pPr indent="0" marL="0">
+            <a:pPr marL="0" indent="0">
               <a:lnSpc>
                 <a:spcPct val="120000"/>
               </a:lnSpc>
@@ -9067,7 +9275,7 @@
             <a:endParaRPr lang="en-US" sz="1700" dirty="0"/>
           </a:p>
           <a:p>
-            <a:pPr indent="0" marL="0">
+            <a:pPr marL="0" indent="0">
               <a:lnSpc>
                 <a:spcPct val="120000"/>
               </a:lnSpc>
@@ -9087,7 +9295,7 @@
             <a:endParaRPr lang="en-US" sz="1700" dirty="0"/>
           </a:p>
           <a:p>
-            <a:pPr indent="0" marL="0">
+            <a:pPr marL="0" indent="0">
               <a:lnSpc>
                 <a:spcPct val="120000"/>
               </a:lnSpc>
@@ -9129,13 +9337,20 @@
           </a:solidFill>
           <a:ln/>
           <a:effectLst>
-            <a:outerShdw sx="100000" sy="100000" kx="0" ky="0" algn="bl" rotWithShape="0" blurRad="101600" dist="38100" dir="5400000">
+            <a:outerShdw blurRad="101600" dist="38100" dir="5400000" algn="bl" rotWithShape="0">
               <a:srgbClr val="0B1F3A">
                 <a:alpha val="35000"/>
               </a:srgbClr>
             </a:outerShdw>
           </a:effectLst>
         </p:spPr>
+        <p:txBody>
+          <a:bodyPr/>
+          <a:lstStyle/>
+          <a:p>
+            <a:endParaRPr lang="en-US"/>
+          </a:p>
+        </p:txBody>
       </p:sp>
       <p:sp>
         <p:nvSpPr>
@@ -9156,6 +9371,13 @@
           </a:solidFill>
           <a:ln/>
         </p:spPr>
+        <p:txBody>
+          <a:bodyPr/>
+          <a:lstStyle/>
+          <a:p>
+            <a:endParaRPr lang="en-US"/>
+          </a:p>
+        </p:txBody>
       </p:sp>
       <p:sp>
         <p:nvSpPr>
@@ -9176,6 +9398,13 @@
           </a:solidFill>
           <a:ln/>
         </p:spPr>
+        <p:txBody>
+          <a:bodyPr/>
+          <a:lstStyle/>
+          <a:p>
+            <a:endParaRPr lang="en-US"/>
+          </a:p>
+        </p:txBody>
       </p:sp>
       <p:sp>
         <p:nvSpPr>
@@ -9196,6 +9425,13 @@
           </a:solidFill>
           <a:ln/>
         </p:spPr>
+        <p:txBody>
+          <a:bodyPr/>
+          <a:lstStyle/>
+          <a:p>
+            <a:endParaRPr lang="en-US"/>
+          </a:p>
+        </p:txBody>
       </p:sp>
       <p:sp>
         <p:nvSpPr>
@@ -9218,7 +9454,7 @@
           <a:bodyPr wrap="square" lIns="0" tIns="0" rIns="0" bIns="0" rtlCol="0" anchor="t"/>
           <a:lstStyle/>
           <a:p>
-            <a:pPr indent="0" marL="0">
+            <a:pPr marL="0" indent="0">
               <a:lnSpc>
                 <a:spcPct val="120000"/>
               </a:lnSpc>
@@ -9238,7 +9474,7 @@
             <a:endParaRPr lang="en-US" sz="1700" dirty="0"/>
           </a:p>
           <a:p>
-            <a:pPr indent="0" marL="0">
+            <a:pPr marL="0" indent="0">
               <a:lnSpc>
                 <a:spcPct val="120000"/>
               </a:lnSpc>
@@ -9258,7 +9494,7 @@
             <a:endParaRPr lang="en-US" sz="1700" dirty="0"/>
           </a:p>
           <a:p>
-            <a:pPr indent="0" marL="0">
+            <a:pPr marL="0" indent="0">
               <a:lnSpc>
                 <a:spcPct val="120000"/>
               </a:lnSpc>
@@ -9278,7 +9514,7 @@
             <a:endParaRPr lang="en-US" sz="1700" dirty="0"/>
           </a:p>
           <a:p>
-            <a:pPr indent="0" marL="0">
+            <a:pPr marL="0" indent="0">
               <a:lnSpc>
                 <a:spcPct val="120000"/>
               </a:lnSpc>
@@ -9320,6 +9556,13 @@
           </a:solidFill>
           <a:ln/>
         </p:spPr>
+        <p:txBody>
+          <a:bodyPr/>
+          <a:lstStyle/>
+          <a:p>
+            <a:endParaRPr lang="en-US"/>
+          </a:p>
+        </p:txBody>
       </p:sp>
       <p:sp>
         <p:nvSpPr>
@@ -9342,7 +9585,7 @@
           <a:bodyPr wrap="square" lIns="0" tIns="0" rIns="0" bIns="0" rtlCol="0" anchor="t"/>
           <a:lstStyle/>
           <a:p>
-            <a:pPr indent="0" marL="0">
+            <a:pPr marL="0" indent="0">
               <a:lnSpc>
                 <a:spcPct val="120000"/>
               </a:lnSpc>
@@ -9384,7 +9627,7 @@
           <a:bodyPr wrap="square" lIns="0" tIns="0" rIns="0" bIns="0" rtlCol="0" anchor="t"/>
           <a:lstStyle/>
           <a:p>
-            <a:pPr indent="0" marL="0">
+            <a:pPr marL="0" indent="0">
               <a:lnSpc>
                 <a:spcPct val="125000"/>
               </a:lnSpc>
@@ -9426,11 +9669,11 @@
           <a:bodyPr wrap="square" lIns="0" tIns="0" rIns="0" bIns="0" rtlCol="0" anchor="ctr"/>
           <a:lstStyle/>
           <a:p>
-            <a:pPr indent="0" marL="0">
-              <a:buNone/>
-            </a:pPr>
-            <a:r>
-              <a:rPr lang="en-US" sz="2000" spc="100" kern="0" dirty="0">
+            <a:pPr marL="0" indent="0">
+              <a:buNone/>
+            </a:pPr>
+            <a:r>
+              <a:rPr lang="en-US" sz="2000" kern="0" spc="100" dirty="0">
                 <a:solidFill>
                   <a:srgbClr val="5B6B84"/>
                 </a:solidFill>
@@ -9465,7 +9708,7 @@
           <a:bodyPr wrap="square" lIns="0" tIns="0" rIns="0" bIns="0" rtlCol="0" anchor="ctr"/>
           <a:lstStyle/>
           <a:p>
-            <a:pPr algn="r" indent="0" marL="0">
+            <a:pPr marL="0" indent="0" algn="r">
               <a:buNone/>
             </a:pPr>
             <a:r>
@@ -9485,14 +9728,14 @@
       </p:sp>
       <p:pic>
         <p:nvPicPr>
-          <p:cNvPr id="21" name="Image 1" descr="/home/user/BasicRobotLessons/docs/presentations/v3/template/assets/logo/team5010-logo-onwhite.png">    </p:cNvPr>
+          <p:cNvPr id="21" name="Image 1" descr="/home/user/BasicRobotLessons/docs/presentations/v3/template/assets/logo/team5010-logo-onwhite.png"/>
           <p:cNvPicPr>
             <a:picLocks noChangeAspect="1"/>
           </p:cNvPicPr>
           <p:nvPr/>
         </p:nvPicPr>
         <p:blipFill>
-          <a:blip r:embed="rId2"/>
+          <a:blip r:embed="rId4"/>
           <a:stretch>
             <a:fillRect/>
           </a:stretch>
@@ -9523,6 +9766,7 @@
         <a:solidFill>
           <a:srgbClr val="FFFFFF"/>
         </a:solidFill>
+        <a:effectLst/>
       </p:bgPr>
     </p:bg>
     <p:spTree>
@@ -9558,17 +9802,24 @@
           </a:solidFill>
           <a:ln/>
         </p:spPr>
+        <p:txBody>
+          <a:bodyPr/>
+          <a:lstStyle/>
+          <a:p>
+            <a:endParaRPr lang="en-US"/>
+          </a:p>
+        </p:txBody>
       </p:sp>
       <p:pic>
         <p:nvPicPr>
-          <p:cNvPr id="3" name="Image 0" descr="/home/user/BasicRobotLessons/docs/presentations/v3/template/assets/icons/key_white.png">    </p:cNvPr>
+          <p:cNvPr id="3" name="Image 0" descr="/home/user/BasicRobotLessons/docs/presentations/v3/template/assets/icons/key_white.png"/>
           <p:cNvPicPr>
             <a:picLocks noChangeAspect="1"/>
           </p:cNvPicPr>
           <p:nvPr/>
         </p:nvPicPr>
         <p:blipFill>
-          <a:blip r:embed="rId1"/>
+          <a:blip r:embed="rId3"/>
           <a:stretch>
             <a:fillRect/>
           </a:stretch>
@@ -9604,11 +9855,11 @@
           <a:bodyPr wrap="square" lIns="0" tIns="0" rIns="0" bIns="0" rtlCol="0" anchor="ctr"/>
           <a:lstStyle/>
           <a:p>
-            <a:pPr indent="0" marL="0">
-              <a:buNone/>
-            </a:pPr>
-            <a:r>
-              <a:rPr lang="en-US" sz="2000" b="1" spc="150" kern="0" dirty="0">
+            <a:pPr marL="0" indent="0">
+              <a:buNone/>
+            </a:pPr>
+            <a:r>
+              <a:rPr lang="en-US" sz="2000" b="1" kern="0" spc="150" dirty="0">
                 <a:solidFill>
                   <a:srgbClr val="FF5010"/>
                 </a:solidFill>
@@ -9643,7 +9894,7 @@
           <a:bodyPr wrap="square" lIns="0" tIns="0" rIns="0" bIns="0" rtlCol="0" anchor="ctr"/>
           <a:lstStyle/>
           <a:p>
-            <a:pPr indent="0" marL="0">
+            <a:pPr marL="0" indent="0">
               <a:buNone/>
             </a:pPr>
             <a:r>
@@ -9682,13 +9933,20 @@
           </a:solidFill>
           <a:ln/>
           <a:effectLst>
-            <a:outerShdw sx="100000" sy="100000" kx="0" ky="0" algn="bl" rotWithShape="0" blurRad="101600" dist="38100" dir="5400000">
+            <a:outerShdw blurRad="101600" dist="38100" dir="5400000" algn="bl" rotWithShape="0">
               <a:srgbClr val="0B1F3A">
                 <a:alpha val="35000"/>
               </a:srgbClr>
             </a:outerShdw>
           </a:effectLst>
         </p:spPr>
+        <p:txBody>
+          <a:bodyPr/>
+          <a:lstStyle/>
+          <a:p>
+            <a:endParaRPr lang="en-US"/>
+          </a:p>
+        </p:txBody>
       </p:sp>
       <p:sp>
         <p:nvSpPr>
@@ -9709,6 +9967,13 @@
           </a:solidFill>
           <a:ln/>
         </p:spPr>
+        <p:txBody>
+          <a:bodyPr/>
+          <a:lstStyle/>
+          <a:p>
+            <a:endParaRPr lang="en-US"/>
+          </a:p>
+        </p:txBody>
       </p:sp>
       <p:sp>
         <p:nvSpPr>
@@ -9729,6 +9994,13 @@
           </a:solidFill>
           <a:ln/>
         </p:spPr>
+        <p:txBody>
+          <a:bodyPr/>
+          <a:lstStyle/>
+          <a:p>
+            <a:endParaRPr lang="en-US"/>
+          </a:p>
+        </p:txBody>
       </p:sp>
       <p:sp>
         <p:nvSpPr>
@@ -9749,6 +10021,13 @@
           </a:solidFill>
           <a:ln/>
         </p:spPr>
+        <p:txBody>
+          <a:bodyPr/>
+          <a:lstStyle/>
+          <a:p>
+            <a:endParaRPr lang="en-US"/>
+          </a:p>
+        </p:txBody>
       </p:sp>
       <p:sp>
         <p:nvSpPr>
@@ -9771,7 +10050,7 @@
           <a:bodyPr wrap="square" lIns="0" tIns="0" rIns="0" bIns="0" rtlCol="0" anchor="t"/>
           <a:lstStyle/>
           <a:p>
-            <a:pPr indent="0" marL="0">
+            <a:pPr marL="0" indent="0">
               <a:lnSpc>
                 <a:spcPct val="120000"/>
               </a:lnSpc>
@@ -9813,7 +10092,7 @@
           <a:bodyPr wrap="square" lIns="0" tIns="0" rIns="0" bIns="0" rtlCol="0" anchor="t"/>
           <a:lstStyle/>
           <a:p>
-            <a:pPr indent="0" marL="0">
+            <a:pPr marL="0" indent="0">
               <a:lnSpc>
                 <a:spcPct val="125000"/>
               </a:lnSpc>
@@ -9855,6 +10134,13 @@
           </a:solidFill>
           <a:ln/>
         </p:spPr>
+        <p:txBody>
+          <a:bodyPr/>
+          <a:lstStyle/>
+          <a:p>
+            <a:endParaRPr lang="en-US"/>
+          </a:p>
+        </p:txBody>
       </p:sp>
       <p:sp>
         <p:nvSpPr>
@@ -9877,11 +10163,11 @@
           <a:bodyPr wrap="square" lIns="0" tIns="0" rIns="0" bIns="0" rtlCol="0" anchor="ctr"/>
           <a:lstStyle/>
           <a:p>
-            <a:pPr indent="0" marL="0">
-              <a:buNone/>
-            </a:pPr>
-            <a:r>
-              <a:rPr lang="en-US" sz="2000" b="1" spc="50" kern="0" dirty="0">
+            <a:pPr marL="0" indent="0">
+              <a:buNone/>
+            </a:pPr>
+            <a:r>
+              <a:rPr lang="en-US" sz="2000" b="1" kern="0" spc="50" dirty="0">
                 <a:solidFill>
                   <a:srgbClr val="1B9AAA"/>
                 </a:solidFill>
@@ -9916,7 +10202,7 @@
           <a:bodyPr wrap="square" lIns="0" tIns="0" rIns="0" bIns="0" rtlCol="0" anchor="t"/>
           <a:lstStyle/>
           <a:p>
-            <a:pPr indent="0" marL="0">
+            <a:pPr marL="0" indent="0">
               <a:lnSpc>
                 <a:spcPct val="120000"/>
               </a:lnSpc>
@@ -9931,7 +10217,29 @@
                 <a:ea typeface="Cambria" pitchFamily="34" charset="-122"/>
                 <a:cs typeface="Cambria" pitchFamily="34" charset="-120"/>
               </a:rPr>
-              <a:t>GitHub.com → HTTPS → authenticate Git with your GitHub credentials → log in with a web browser.</a:t>
+              <a:t>https://github.</a:t>
+            </a:r>
+            <a:r>
+              <a:rPr lang="en-US" sz="2100" b="1">
+                <a:solidFill>
+                  <a:srgbClr val="FFFFFF"/>
+                </a:solidFill>
+                <a:latin typeface="Cambria" pitchFamily="34" charset="0"/>
+                <a:ea typeface="Cambria" pitchFamily="34" charset="-122"/>
+                <a:cs typeface="Cambria" pitchFamily="34" charset="-120"/>
+              </a:rPr>
+              <a:t>com → </a:t>
+            </a:r>
+            <a:r>
+              <a:rPr lang="en-US" sz="2100" b="1" dirty="0">
+                <a:solidFill>
+                  <a:srgbClr val="FFFFFF"/>
+                </a:solidFill>
+                <a:latin typeface="Cambria" pitchFamily="34" charset="0"/>
+                <a:ea typeface="Cambria" pitchFamily="34" charset="-122"/>
+                <a:cs typeface="Cambria" pitchFamily="34" charset="-120"/>
+              </a:rPr>
+              <a:t>authenticate Git with your GitHub credentials → log in with a web browser.</a:t>
             </a:r>
             <a:endParaRPr lang="en-US" sz="2100" dirty="0"/>
           </a:p>
@@ -9958,7 +10266,7 @@
           <a:bodyPr wrap="square" lIns="0" tIns="0" rIns="0" bIns="0" rtlCol="0" anchor="t"/>
           <a:lstStyle/>
           <a:p>
-            <a:pPr indent="0" marL="0">
+            <a:pPr marL="0" indent="0">
               <a:lnSpc>
                 <a:spcPct val="125000"/>
               </a:lnSpc>
@@ -10000,11 +10308,11 @@
           <a:bodyPr wrap="square" lIns="0" tIns="0" rIns="0" bIns="0" rtlCol="0" anchor="ctr"/>
           <a:lstStyle/>
           <a:p>
-            <a:pPr indent="0" marL="0">
-              <a:buNone/>
-            </a:pPr>
-            <a:r>
-              <a:rPr lang="en-US" sz="2000" spc="100" kern="0" dirty="0">
+            <a:pPr marL="0" indent="0">
+              <a:buNone/>
+            </a:pPr>
+            <a:r>
+              <a:rPr lang="en-US" sz="2000" kern="0" spc="100" dirty="0">
                 <a:solidFill>
                   <a:srgbClr val="5B6B84"/>
                 </a:solidFill>
@@ -10039,7 +10347,7 @@
           <a:bodyPr wrap="square" lIns="0" tIns="0" rIns="0" bIns="0" rtlCol="0" anchor="ctr"/>
           <a:lstStyle/>
           <a:p>
-            <a:pPr algn="r" indent="0" marL="0">
+            <a:pPr marL="0" indent="0" algn="r">
               <a:buNone/>
             </a:pPr>
             <a:r>
@@ -10059,14 +10367,14 @@
       </p:sp>
       <p:pic>
         <p:nvPicPr>
-          <p:cNvPr id="18" name="Image 1" descr="/home/user/BasicRobotLessons/docs/presentations/v3/template/assets/logo/team5010-logo-onwhite.png">    </p:cNvPr>
+          <p:cNvPr id="18" name="Image 1" descr="/home/user/BasicRobotLessons/docs/presentations/v3/template/assets/logo/team5010-logo-onwhite.png"/>
           <p:cNvPicPr>
             <a:picLocks noChangeAspect="1"/>
           </p:cNvPicPr>
           <p:nvPr/>
         </p:nvPicPr>
         <p:blipFill>
-          <a:blip r:embed="rId2"/>
+          <a:blip r:embed="rId4"/>
           <a:stretch>
             <a:fillRect/>
           </a:stretch>
@@ -10382,4 +10690,319 @@
     </a:ext>
   </a:extLst>
 </a:theme>
+</file>
+
+<file path=ppt/theme/theme2.xml><?xml version="1.0" encoding="utf-8"?>
+<a:theme xmlns:a="http://schemas.openxmlformats.org/drawingml/2006/main" name="Office Theme">
+  <a:themeElements>
+    <a:clrScheme name="Office">
+      <a:dk1>
+        <a:sysClr val="windowText" lastClr="000000"/>
+      </a:dk1>
+      <a:lt1>
+        <a:sysClr val="window" lastClr="FFFFFF"/>
+      </a:lt1>
+      <a:dk2>
+        <a:srgbClr val="0E2841"/>
+      </a:dk2>
+      <a:lt2>
+        <a:srgbClr val="E8E8E8"/>
+      </a:lt2>
+      <a:accent1>
+        <a:srgbClr val="156082"/>
+      </a:accent1>
+      <a:accent2>
+        <a:srgbClr val="E97132"/>
+      </a:accent2>
+      <a:accent3>
+        <a:srgbClr val="196B24"/>
+      </a:accent3>
+      <a:accent4>
+        <a:srgbClr val="0F9ED5"/>
+      </a:accent4>
+      <a:accent5>
+        <a:srgbClr val="A02B93"/>
+      </a:accent5>
+      <a:accent6>
+        <a:srgbClr val="4EA72E"/>
+      </a:accent6>
+      <a:hlink>
+        <a:srgbClr val="467886"/>
+      </a:hlink>
+      <a:folHlink>
+        <a:srgbClr val="96607D"/>
+      </a:folHlink>
+    </a:clrScheme>
+    <a:fontScheme name="Office">
+      <a:majorFont>
+        <a:latin typeface="Aptos Display" panose="02110004020202020204"/>
+        <a:ea typeface=""/>
+        <a:cs typeface=""/>
+        <a:font script="Jpan" typeface="游ゴシック Light"/>
+        <a:font script="Hang" typeface="맑은 고딕"/>
+        <a:font script="Hans" typeface="等线 Light"/>
+        <a:font script="Hant" typeface="新細明體"/>
+        <a:font script="Arab" typeface="Times New Roman"/>
+        <a:font script="Hebr" typeface="Times New Roman"/>
+        <a:font script="Thai" typeface="Angsana New"/>
+        <a:font script="Ethi" typeface="Nyala"/>
+        <a:font script="Beng" typeface="Vrinda"/>
+        <a:font script="Gujr" typeface="Shruti"/>
+        <a:font script="Khmr" typeface="MoolBoran"/>
+        <a:font script="Knda" typeface="Tunga"/>
+        <a:font script="Guru" typeface="Raavi"/>
+        <a:font script="Cans" typeface="Euphemia"/>
+        <a:font script="Cher" typeface="Plantagenet Cherokee"/>
+        <a:font script="Yiii" typeface="Microsoft Yi Baiti"/>
+        <a:font script="Tibt" typeface="Microsoft Himalaya"/>
+        <a:font script="Thaa" typeface="MV Boli"/>
+        <a:font script="Deva" typeface="Mangal"/>
+        <a:font script="Telu" typeface="Gautami"/>
+        <a:font script="Taml" typeface="Latha"/>
+        <a:font script="Syrc" typeface="Estrangelo Edessa"/>
+        <a:font script="Orya" typeface="Kalinga"/>
+        <a:font script="Mlym" typeface="Kartika"/>
+        <a:font script="Laoo" typeface="DokChampa"/>
+        <a:font script="Sinh" typeface="Iskoola Pota"/>
+        <a:font script="Mong" typeface="Mongolian Baiti"/>
+        <a:font script="Viet" typeface="Times New Roman"/>
+        <a:font script="Uigh" typeface="Microsoft Uighur"/>
+        <a:font script="Geor" typeface="Sylfaen"/>
+        <a:font script="Armn" typeface="Arial"/>
+        <a:font script="Bugi" typeface="Leelawadee UI"/>
+        <a:font script="Bopo" typeface="Microsoft JhengHei"/>
+        <a:font script="Java" typeface="Javanese Text"/>
+        <a:font script="Lisu" typeface="Segoe UI"/>
+        <a:font script="Mymr" typeface="Myanmar Text"/>
+        <a:font script="Nkoo" typeface="Ebrima"/>
+        <a:font script="Olck" typeface="Nirmala UI"/>
+        <a:font script="Osma" typeface="Ebrima"/>
+        <a:font script="Phag" typeface="Phagspa"/>
+        <a:font script="Syrn" typeface="Estrangelo Edessa"/>
+        <a:font script="Syrj" typeface="Estrangelo Edessa"/>
+        <a:font script="Syre" typeface="Estrangelo Edessa"/>
+        <a:font script="Sora" typeface="Nirmala UI"/>
+        <a:font script="Tale" typeface="Microsoft Tai Le"/>
+        <a:font script="Talu" typeface="Microsoft New Tai Lue"/>
+        <a:font script="Tfng" typeface="Ebrima"/>
+      </a:majorFont>
+      <a:minorFont>
+        <a:latin typeface="Aptos" panose="02110004020202020204"/>
+        <a:ea typeface=""/>
+        <a:cs typeface=""/>
+        <a:font script="Jpan" typeface="游ゴシック"/>
+        <a:font script="Hang" typeface="맑은 고딕"/>
+        <a:font script="Hans" typeface="等线"/>
+        <a:font script="Hant" typeface="新細明體"/>
+        <a:font script="Arab" typeface="Arial"/>
+        <a:font script="Hebr" typeface="Arial"/>
+        <a:font script="Thai" typeface="Cordia New"/>
+        <a:font script="Ethi" typeface="Nyala"/>
+        <a:font script="Beng" typeface="Vrinda"/>
+        <a:font script="Gujr" typeface="Shruti"/>
+        <a:font script="Khmr" typeface="DaunPenh"/>
+        <a:font script="Knda" typeface="Tunga"/>
+        <a:font script="Guru" typeface="Raavi"/>
+        <a:font script="Cans" typeface="Euphemia"/>
+        <a:font script="Cher" typeface="Plantagenet Cherokee"/>
+        <a:font script="Yiii" typeface="Microsoft Yi Baiti"/>
+        <a:font script="Tibt" typeface="Microsoft Himalaya"/>
+        <a:font script="Thaa" typeface="MV Boli"/>
+        <a:font script="Deva" typeface="Mangal"/>
+        <a:font script="Telu" typeface="Gautami"/>
+        <a:font script="Taml" typeface="Latha"/>
+        <a:font script="Syrc" typeface="Estrangelo Edessa"/>
+        <a:font script="Orya" typeface="Kalinga"/>
+        <a:font script="Mlym" typeface="Kartika"/>
+        <a:font script="Laoo" typeface="DokChampa"/>
+        <a:font script="Sinh" typeface="Iskoola Pota"/>
+        <a:font script="Mong" typeface="Mongolian Baiti"/>
+        <a:font script="Viet" typeface="Arial"/>
+        <a:font script="Uigh" typeface="Microsoft Uighur"/>
+        <a:font script="Geor" typeface="Sylfaen"/>
+        <a:font script="Armn" typeface="Arial"/>
+        <a:font script="Bugi" typeface="Leelawadee UI"/>
+        <a:font script="Bopo" typeface="Microsoft JhengHei"/>
+        <a:font script="Java" typeface="Javanese Text"/>
+        <a:font script="Lisu" typeface="Segoe UI"/>
+        <a:font script="Mymr" typeface="Myanmar Text"/>
+        <a:font script="Nkoo" typeface="Ebrima"/>
+        <a:font script="Olck" typeface="Nirmala UI"/>
+        <a:font script="Osma" typeface="Ebrima"/>
+        <a:font script="Phag" typeface="Phagspa"/>
+        <a:font script="Syrn" typeface="Estrangelo Edessa"/>
+        <a:font script="Syrj" typeface="Estrangelo Edessa"/>
+        <a:font script="Syre" typeface="Estrangelo Edessa"/>
+        <a:font script="Sora" typeface="Nirmala UI"/>
+        <a:font script="Tale" typeface="Microsoft Tai Le"/>
+        <a:font script="Talu" typeface="Microsoft New Tai Lue"/>
+        <a:font script="Tfng" typeface="Ebrima"/>
+      </a:minorFont>
+    </a:fontScheme>
+    <a:fmtScheme name="Office">
+      <a:fillStyleLst>
+        <a:solidFill>
+          <a:schemeClr val="phClr"/>
+        </a:solidFill>
+        <a:gradFill rotWithShape="1">
+          <a:gsLst>
+            <a:gs pos="0">
+              <a:schemeClr val="phClr">
+                <a:lumMod val="110000"/>
+                <a:satMod val="105000"/>
+                <a:tint val="67000"/>
+              </a:schemeClr>
+            </a:gs>
+            <a:gs pos="50000">
+              <a:schemeClr val="phClr">
+                <a:lumMod val="105000"/>
+                <a:satMod val="103000"/>
+                <a:tint val="73000"/>
+              </a:schemeClr>
+            </a:gs>
+            <a:gs pos="100000">
+              <a:schemeClr val="phClr">
+                <a:lumMod val="105000"/>
+                <a:satMod val="109000"/>
+                <a:tint val="81000"/>
+              </a:schemeClr>
+            </a:gs>
+          </a:gsLst>
+          <a:lin ang="5400000" scaled="0"/>
+        </a:gradFill>
+        <a:gradFill rotWithShape="1">
+          <a:gsLst>
+            <a:gs pos="0">
+              <a:schemeClr val="phClr">
+                <a:satMod val="103000"/>
+                <a:lumMod val="102000"/>
+                <a:tint val="94000"/>
+              </a:schemeClr>
+            </a:gs>
+            <a:gs pos="50000">
+              <a:schemeClr val="phClr">
+                <a:satMod val="110000"/>
+                <a:lumMod val="100000"/>
+                <a:shade val="100000"/>
+              </a:schemeClr>
+            </a:gs>
+            <a:gs pos="100000">
+              <a:schemeClr val="phClr">
+                <a:lumMod val="99000"/>
+                <a:satMod val="120000"/>
+                <a:shade val="78000"/>
+              </a:schemeClr>
+            </a:gs>
+          </a:gsLst>
+          <a:lin ang="5400000" scaled="0"/>
+        </a:gradFill>
+      </a:fillStyleLst>
+      <a:lnStyleLst>
+        <a:ln w="12700" cap="flat" cmpd="sng" algn="ctr">
+          <a:solidFill>
+            <a:schemeClr val="phClr"/>
+          </a:solidFill>
+          <a:prstDash val="solid"/>
+          <a:miter lim="800000"/>
+        </a:ln>
+        <a:ln w="19050" cap="flat" cmpd="sng" algn="ctr">
+          <a:solidFill>
+            <a:schemeClr val="phClr"/>
+          </a:solidFill>
+          <a:prstDash val="solid"/>
+          <a:miter lim="800000"/>
+        </a:ln>
+        <a:ln w="25400" cap="flat" cmpd="sng" algn="ctr">
+          <a:solidFill>
+            <a:schemeClr val="phClr"/>
+          </a:solidFill>
+          <a:prstDash val="solid"/>
+          <a:miter lim="800000"/>
+        </a:ln>
+      </a:lnStyleLst>
+      <a:effectStyleLst>
+        <a:effectStyle>
+          <a:effectLst/>
+        </a:effectStyle>
+        <a:effectStyle>
+          <a:effectLst/>
+        </a:effectStyle>
+        <a:effectStyle>
+          <a:effectLst>
+            <a:outerShdw blurRad="57150" dist="19050" dir="5400000" algn="ctr" rotWithShape="0">
+              <a:srgbClr val="000000">
+                <a:alpha val="63000"/>
+              </a:srgbClr>
+            </a:outerShdw>
+          </a:effectLst>
+        </a:effectStyle>
+      </a:effectStyleLst>
+      <a:bgFillStyleLst>
+        <a:solidFill>
+          <a:schemeClr val="phClr"/>
+        </a:solidFill>
+        <a:solidFill>
+          <a:schemeClr val="phClr">
+            <a:tint val="95000"/>
+            <a:satMod val="170000"/>
+          </a:schemeClr>
+        </a:solidFill>
+        <a:gradFill rotWithShape="1">
+          <a:gsLst>
+            <a:gs pos="0">
+              <a:schemeClr val="phClr">
+                <a:tint val="93000"/>
+                <a:satMod val="150000"/>
+                <a:shade val="98000"/>
+                <a:lumMod val="102000"/>
+              </a:schemeClr>
+            </a:gs>
+            <a:gs pos="50000">
+              <a:schemeClr val="phClr">
+                <a:tint val="98000"/>
+                <a:satMod val="130000"/>
+                <a:shade val="90000"/>
+                <a:lumMod val="103000"/>
+              </a:schemeClr>
+            </a:gs>
+            <a:gs pos="100000">
+              <a:schemeClr val="phClr">
+                <a:shade val="63000"/>
+                <a:satMod val="120000"/>
+              </a:schemeClr>
+            </a:gs>
+          </a:gsLst>
+          <a:lin ang="5400000" scaled="0"/>
+        </a:gradFill>
+      </a:bgFillStyleLst>
+    </a:fmtScheme>
+  </a:themeElements>
+  <a:objectDefaults>
+    <a:lnDef>
+      <a:spPr/>
+      <a:bodyPr/>
+      <a:lstStyle/>
+      <a:style>
+        <a:lnRef idx="2">
+          <a:schemeClr val="accent1"/>
+        </a:lnRef>
+        <a:fillRef idx="0">
+          <a:schemeClr val="accent1"/>
+        </a:fillRef>
+        <a:effectRef idx="1">
+          <a:schemeClr val="accent1"/>
+        </a:effectRef>
+        <a:fontRef idx="minor">
+          <a:schemeClr val="tx1"/>
+        </a:fontRef>
+      </a:style>
+    </a:lnDef>
+  </a:objectDefaults>
+  <a:extraClrSchemeLst/>
+  <a:extLst>
+    <a:ext uri="{05A4C25C-085E-4340-85A3-A5531E510DB2}">
+      <thm15:themeFamily xmlns:thm15="http://schemas.microsoft.com/office/thememl/2012/main" name="Office Theme" id="{2E142A2C-CD16-42D6-873A-C26D2A0506FA}" vid="{1BDDFF52-6CD6-40A5-AB3C-68EB2F1E4D0A}"/>
+    </a:ext>
+  </a:extLst>
+</a:theme>
 </file>